--- a/sunumlar/5-sinif-unite3-aglar-iletisim-DETAYLI.pptx
+++ b/sunumlar/5-sinif-unite3-aglar-iletisim-DETAYLI.pptx
@@ -524,6 +524,73 @@
               <a:t>Video: 'İnternet Nasıl Çalışır?' animasyonlu video ile başlayın</a:t>
             </a:r>
           </a:p>
+          <a:p/>
+          <a:p>
+            <a:r>
+              <a:t>🎨 GÖRSELLEŞTİRME ÖNERİLERİ:</a:t>
+            </a:r>
+          </a:p>
+          <a:p/>
+          <a:p>
+            <a:r>
+              <a:t>📸 Görsel: CPU, RAM ve anakart fotoğrafları</a:t>
+            </a:r>
+          </a:p>
+          <a:p>
+            <a:r>
+              <a:t>🎬 Video: Bilgisayar donanımı tanıtım videosu (1-2 dk)</a:t>
+            </a:r>
+          </a:p>
+          <a:p>
+            <a:r>
+              <a:t>💡 İnfografik: Bilgisayar bileşenleri şeması</a:t>
+            </a:r>
+          </a:p>
+          <a:p>
+            <a:r>
+              <a:t>📸 Görsel: LAN ve WAN ağ topolojileri şeması</a:t>
+            </a:r>
+          </a:p>
+          <a:p>
+            <a:r>
+              <a:t>🎬 Video: İnternet nasıl çalışır? Animasyonlu anlatım</a:t>
+            </a:r>
+          </a:p>
+          <a:p>
+            <a:r>
+              <a:t>💡 İnfografik: Ev ağı kurulumu diyagramı</a:t>
+            </a:r>
+          </a:p>
+          <a:p>
+            <a:r>
+              <a:t>📸 Görsel: IP adresi formatı ve yapısı</a:t>
+            </a:r>
+          </a:p>
+          <a:p>
+            <a:r>
+              <a:t>🎬 Video: DNS nasıl çalışır? Animasyon</a:t>
+            </a:r>
+          </a:p>
+          <a:p>
+            <a:r>
+              <a:t>💡 İnfografik: TCP/IP protokol katmanları</a:t>
+            </a:r>
+          </a:p>
+          <a:p>
+            <a:r>
+              <a:t>📸 Görsel: Yapay zeka uygulama örnekleri (Siri, Alexa, ChatGPT)</a:t>
+            </a:r>
+          </a:p>
+          <a:p>
+            <a:r>
+              <a:t>🎬 Video: Yapay zeka nedir? Çocuklar için anlatım</a:t>
+            </a:r>
+          </a:p>
+          <a:p>
+            <a:r>
+              <a:t>💡 İnfografik: AI kullanım alanları</a:t>
+            </a:r>
+          </a:p>
         </p:txBody>
       </p:sp>
       <p:sp>
@@ -594,6 +661,43 @@
               <a:t>Tartışma: Öğrencilere bir konu verin, güvenilir kaynak bulmalarını isteyin ve neden güvenilir olduğunu açıklasınlar</a:t>
             </a:r>
           </a:p>
+          <a:p/>
+          <a:p>
+            <a:r>
+              <a:t>🎨 GÖRSELLEŞTİRME ÖNERİLERİ:</a:t>
+            </a:r>
+          </a:p>
+          <a:p/>
+          <a:p>
+            <a:r>
+              <a:t>📸 Görsel: LAN ve WAN ağ topolojileri şeması</a:t>
+            </a:r>
+          </a:p>
+          <a:p>
+            <a:r>
+              <a:t>🎬 Video: İnternet nasıl çalışır? Animasyonlu anlatım</a:t>
+            </a:r>
+          </a:p>
+          <a:p>
+            <a:r>
+              <a:t>💡 İnfografik: Ev ağı kurulumu diyagramı</a:t>
+            </a:r>
+          </a:p>
+          <a:p>
+            <a:r>
+              <a:t>📸 Görsel: Yapay zeka uygulama örnekleri (Siri, Alexa, ChatGPT)</a:t>
+            </a:r>
+          </a:p>
+          <a:p>
+            <a:r>
+              <a:t>🎬 Video: Yapay zeka nedir? Çocuklar için anlatım</a:t>
+            </a:r>
+          </a:p>
+          <a:p>
+            <a:r>
+              <a:t>💡 İnfografik: AI kullanım alanları</a:t>
+            </a:r>
+          </a:p>
         </p:txBody>
       </p:sp>
       <p:sp>
@@ -664,6 +768,43 @@
               <a:t>Etkinlik: Öğrencilere e-posta yazma pratiği yaptırın. Öğretmene e-posta göndertebilirsiniz.</a:t>
             </a:r>
           </a:p>
+          <a:p/>
+          <a:p>
+            <a:r>
+              <a:t>🎨 GÖRSELLEŞTİRME ÖNERİLERİ:</a:t>
+            </a:r>
+          </a:p>
+          <a:p/>
+          <a:p>
+            <a:r>
+              <a:t>📸 Görsel: LAN ve WAN ağ topolojileri şeması</a:t>
+            </a:r>
+          </a:p>
+          <a:p>
+            <a:r>
+              <a:t>🎬 Video: İnternet nasıl çalışır? Animasyonlu anlatım</a:t>
+            </a:r>
+          </a:p>
+          <a:p>
+            <a:r>
+              <a:t>💡 İnfografik: Ev ağı kurulumu diyagramı</a:t>
+            </a:r>
+          </a:p>
+          <a:p>
+            <a:r>
+              <a:t>📸 Görsel: Yapay zeka uygulama örnekleri (Siri, Alexa, ChatGPT)</a:t>
+            </a:r>
+          </a:p>
+          <a:p>
+            <a:r>
+              <a:t>🎬 Video: Yapay zeka nedir? Çocuklar için anlatım</a:t>
+            </a:r>
+          </a:p>
+          <a:p>
+            <a:r>
+              <a:t>💡 İnfografik: AI kullanım alanları</a:t>
+            </a:r>
+          </a:p>
         </p:txBody>
       </p:sp>
       <p:sp>
@@ -734,6 +875,28 @@
               <a:t>Tartışma: Hangi iletişim aracını ne zaman kullanırız? Resmi e-posta mı, WhatsApp mı?</a:t>
             </a:r>
           </a:p>
+          <a:p/>
+          <a:p>
+            <a:r>
+              <a:t>🎨 GÖRSELLEŞTİRME ÖNERİLERİ:</a:t>
+            </a:r>
+          </a:p>
+          <a:p/>
+          <a:p>
+            <a:r>
+              <a:t>📸 Görsel: CPU, RAM ve anakart fotoğrafları</a:t>
+            </a:r>
+          </a:p>
+          <a:p>
+            <a:r>
+              <a:t>🎬 Video: Bilgisayar donanımı tanıtım videosu (1-2 dk)</a:t>
+            </a:r>
+          </a:p>
+          <a:p>
+            <a:r>
+              <a:t>💡 İnfografik: Bilgisayar bileşenleri şeması</a:t>
+            </a:r>
+          </a:p>
         </p:txBody>
       </p:sp>
       <p:sp>
@@ -804,6 +967,68 @@
               <a:t>Video: 'İnternet Güvenliği için 10 Altın Kural' - Çocuklar için hazırlanmış güvenlik videosu</a:t>
             </a:r>
           </a:p>
+          <a:p/>
+          <a:p>
+            <a:r>
+              <a:t>🎨 GÖRSELLEŞTİRME ÖNERİLERİ:</a:t>
+            </a:r>
+          </a:p>
+          <a:p/>
+          <a:p>
+            <a:r>
+              <a:t>📸 Görsel: LAN ve WAN ağ topolojileri şeması</a:t>
+            </a:r>
+          </a:p>
+          <a:p>
+            <a:r>
+              <a:t>🎬 Video: İnternet nasıl çalışır? Animasyonlu anlatım</a:t>
+            </a:r>
+          </a:p>
+          <a:p>
+            <a:r>
+              <a:t>💡 İnfografik: Ev ağı kurulumu diyagramı</a:t>
+            </a:r>
+          </a:p>
+          <a:p>
+            <a:r>
+              <a:t>📸 Görsel: Güçlü şifre örnekleri vs zayıf şifre</a:t>
+            </a:r>
+          </a:p>
+          <a:p>
+            <a:r>
+              <a:t>🎬 Video: Şifre güvenliği önemi (1-2 dk)</a:t>
+            </a:r>
+          </a:p>
+          <a:p>
+            <a:r>
+              <a:t>💡 İnfografik: Güçlü şifre oluşturma kuralları</a:t>
+            </a:r>
+          </a:p>
+          <a:p>
+            <a:r>
+              <a:t>📸 Görsel: Koşullu yapılar akış diyagramı</a:t>
+            </a:r>
+          </a:p>
+          <a:p>
+            <a:r>
+              <a:t>🎬 Video: Koşullu ifadeler Scratch'te</a:t>
+            </a:r>
+          </a:p>
+          <a:p>
+            <a:r>
+              <a:t>📸 Görsel: Farklı grafik türleri örnekleri</a:t>
+            </a:r>
+          </a:p>
+          <a:p>
+            <a:r>
+              <a:t>🎬 Video: Veri görselleştirme önemi</a:t>
+            </a:r>
+          </a:p>
+          <a:p>
+            <a:r>
+              <a:t>💡 İnfografik: Grafik türleri ve kullanım alanları</a:t>
+            </a:r>
+          </a:p>
         </p:txBody>
       </p:sp>
       <p:sp>
@@ -874,6 +1099,28 @@
               <a:t>Tartışma: Siber zorbalık gördüğünüzde ne yaparsınız? Rol yapma aktivitesi</a:t>
             </a:r>
           </a:p>
+          <a:p/>
+          <a:p>
+            <a:r>
+              <a:t>🎨 GÖRSELLEŞTİRME ÖNERİLERİ:</a:t>
+            </a:r>
+          </a:p>
+          <a:p/>
+          <a:p>
+            <a:r>
+              <a:t>📸 Görsel: LAN ve WAN ağ topolojileri şeması</a:t>
+            </a:r>
+          </a:p>
+          <a:p>
+            <a:r>
+              <a:t>🎬 Video: İnternet nasıl çalışır? Animasyonlu anlatım</a:t>
+            </a:r>
+          </a:p>
+          <a:p>
+            <a:r>
+              <a:t>💡 İnfografik: Ev ağı kurulumu diyagramı</a:t>
+            </a:r>
+          </a:p>
         </p:txBody>
       </p:sp>
       <p:sp>
@@ -944,6 +1191,53 @@
               <a:t>Etkinlik: Öğrencilere bir sunum hazırlatın ve kaynak göstermeyi öğretin</a:t>
             </a:r>
           </a:p>
+          <a:p/>
+          <a:p>
+            <a:r>
+              <a:t>🎨 GÖRSELLEŞTİRME ÖNERİLERİ:</a:t>
+            </a:r>
+          </a:p>
+          <a:p/>
+          <a:p>
+            <a:r>
+              <a:t>📸 Görsel: LAN ve WAN ağ topolojileri şeması</a:t>
+            </a:r>
+          </a:p>
+          <a:p>
+            <a:r>
+              <a:t>🎬 Video: İnternet nasıl çalışır? Animasyonlu anlatım</a:t>
+            </a:r>
+          </a:p>
+          <a:p>
+            <a:r>
+              <a:t>💡 İnfografik: Ev ağı kurulumu diyagramı</a:t>
+            </a:r>
+          </a:p>
+          <a:p>
+            <a:r>
+              <a:t>📸 Görsel: Telif hakları sembolleri (©, ®, ™)</a:t>
+            </a:r>
+          </a:p>
+          <a:p>
+            <a:r>
+              <a:t>🎬 Video: Dijital etik ve telif hakları</a:t>
+            </a:r>
+          </a:p>
+          <a:p>
+            <a:r>
+              <a:t>💡 İnfografik: Lisans türleri karşılaştırması</a:t>
+            </a:r>
+          </a:p>
+          <a:p>
+            <a:r>
+              <a:t>📸 Görsel: Koşullu yapılar akış diyagramı</a:t>
+            </a:r>
+          </a:p>
+          <a:p>
+            <a:r>
+              <a:t>🎬 Video: Koşullu ifadeler Scratch'te</a:t>
+            </a:r>
+          </a:p>
         </p:txBody>
       </p:sp>
       <p:sp>
@@ -1014,6 +1308,43 @@
               <a:t>Etkinlik: Öğrencilere bir hafta boyunca internet kullanım sürelerini kaydetmelerini isteyin</a:t>
             </a:r>
           </a:p>
+          <a:p/>
+          <a:p>
+            <a:r>
+              <a:t>🎨 GÖRSELLEŞTİRME ÖNERİLERİ:</a:t>
+            </a:r>
+          </a:p>
+          <a:p/>
+          <a:p>
+            <a:r>
+              <a:t>📸 Görsel: LAN ve WAN ağ topolojileri şeması</a:t>
+            </a:r>
+          </a:p>
+          <a:p>
+            <a:r>
+              <a:t>🎬 Video: İnternet nasıl çalışır? Animasyonlu anlatım</a:t>
+            </a:r>
+          </a:p>
+          <a:p>
+            <a:r>
+              <a:t>💡 İnfografik: Ev ağı kurulumu diyagramı</a:t>
+            </a:r>
+          </a:p>
+          <a:p>
+            <a:r>
+              <a:t>📸 Görsel: Yapay zeka uygulama örnekleri (Siri, Alexa, ChatGPT)</a:t>
+            </a:r>
+          </a:p>
+          <a:p>
+            <a:r>
+              <a:t>🎬 Video: Yapay zeka nedir? Çocuklar için anlatım</a:t>
+            </a:r>
+          </a:p>
+          <a:p>
+            <a:r>
+              <a:t>💡 İnfografik: AI kullanım alanları</a:t>
+            </a:r>
+          </a:p>
         </p:txBody>
       </p:sp>
       <p:sp>
@@ -1084,6 +1415,108 @@
               <a:t>Quiz: Ünite sonu quiz yapın</a:t>
             </a:r>
           </a:p>
+          <a:p/>
+          <a:p>
+            <a:r>
+              <a:t>🎨 GÖRSELLEŞTİRME ÖNERİLERİ:</a:t>
+            </a:r>
+          </a:p>
+          <a:p/>
+          <a:p>
+            <a:r>
+              <a:t>📸 Görsel: CPU, RAM ve anakart fotoğrafları</a:t>
+            </a:r>
+          </a:p>
+          <a:p>
+            <a:r>
+              <a:t>🎬 Video: Bilgisayar donanımı tanıtım videosu (1-2 dk)</a:t>
+            </a:r>
+          </a:p>
+          <a:p>
+            <a:r>
+              <a:t>💡 İnfografik: Bilgisayar bileşenleri şeması</a:t>
+            </a:r>
+          </a:p>
+          <a:p>
+            <a:r>
+              <a:t>📸 Görsel: LAN ve WAN ağ topolojileri şeması</a:t>
+            </a:r>
+          </a:p>
+          <a:p>
+            <a:r>
+              <a:t>🎬 Video: İnternet nasıl çalışır? Animasyonlu anlatım</a:t>
+            </a:r>
+          </a:p>
+          <a:p>
+            <a:r>
+              <a:t>💡 İnfografik: Ev ağı kurulumu diyagramı</a:t>
+            </a:r>
+          </a:p>
+          <a:p>
+            <a:r>
+              <a:t>📸 Görsel: IP adresi formatı ve yapısı</a:t>
+            </a:r>
+          </a:p>
+          <a:p>
+            <a:r>
+              <a:t>🎬 Video: DNS nasıl çalışır? Animasyon</a:t>
+            </a:r>
+          </a:p>
+          <a:p>
+            <a:r>
+              <a:t>💡 İnfografik: TCP/IP protokol katmanları</a:t>
+            </a:r>
+          </a:p>
+          <a:p>
+            <a:r>
+              <a:t>📸 Görsel: Telif hakları sembolleri (©, ®, ™)</a:t>
+            </a:r>
+          </a:p>
+          <a:p>
+            <a:r>
+              <a:t>🎬 Video: Dijital etik ve telif hakları</a:t>
+            </a:r>
+          </a:p>
+          <a:p>
+            <a:r>
+              <a:t>💡 İnfografik: Lisans türleri karşılaştırması</a:t>
+            </a:r>
+          </a:p>
+          <a:p>
+            <a:r>
+              <a:t>📸 Görsel: Yapay zeka uygulama örnekleri (Siri, Alexa, ChatGPT)</a:t>
+            </a:r>
+          </a:p>
+          <a:p>
+            <a:r>
+              <a:t>🎬 Video: Yapay zeka nedir? Çocuklar için anlatım</a:t>
+            </a:r>
+          </a:p>
+          <a:p>
+            <a:r>
+              <a:t>💡 İnfografik: AI kullanım alanları</a:t>
+            </a:r>
+          </a:p>
+          <a:p>
+            <a:r>
+              <a:t>📸 Görsel: Koşullu yapılar akış diyagramı</a:t>
+            </a:r>
+          </a:p>
+          <a:p>
+            <a:r>
+              <a:t>🎬 Video: Koşullu ifadeler Scratch'te</a:t>
+            </a:r>
+          </a:p>
+          <a:p>
+            <a:r>
+              <a:t>📸 Görsel: Dijital çağ görselleri ve teknoloji örnekleri</a:t>
+            </a:r>
+          </a:p>
+          <a:p>
+            <a:r>
+              <a:t>🎬 Video: Bilişim teknolojilerinin tarihçesi</a:t>
+            </a:r>
+          </a:p>
         </p:txBody>
       </p:sp>
       <p:sp>
@@ -1154,6 +1587,169 @@
               <a:t>Not: Belirtilen videoları önceden izleyin</a:t>
             </a:r>
           </a:p>
+          <a:p/>
+          <a:p>
+            <a:r>
+              <a:t>🎨 GÖRSELLEŞTİRME ÖNERİLERİ:</a:t>
+            </a:r>
+          </a:p>
+          <a:p/>
+          <a:p>
+            <a:r>
+              <a:t>📸 Görsel: CPU, RAM ve anakart fotoğrafları</a:t>
+            </a:r>
+          </a:p>
+          <a:p>
+            <a:r>
+              <a:t>🎬 Video: Bilgisayar donanımı tanıtım videosu (1-2 dk)</a:t>
+            </a:r>
+          </a:p>
+          <a:p>
+            <a:r>
+              <a:t>💡 İnfografik: Bilgisayar bileşenleri şeması</a:t>
+            </a:r>
+          </a:p>
+          <a:p>
+            <a:r>
+              <a:t>📸 Görsel: LAN ve WAN ağ topolojileri şeması</a:t>
+            </a:r>
+          </a:p>
+          <a:p>
+            <a:r>
+              <a:t>🎬 Video: İnternet nasıl çalışır? Animasyonlu anlatım</a:t>
+            </a:r>
+          </a:p>
+          <a:p>
+            <a:r>
+              <a:t>💡 İnfografik: Ev ağı kurulumu diyagramı</a:t>
+            </a:r>
+          </a:p>
+          <a:p>
+            <a:r>
+              <a:t>📸 Görsel: IP adresi formatı ve yapısı</a:t>
+            </a:r>
+          </a:p>
+          <a:p>
+            <a:r>
+              <a:t>🎬 Video: DNS nasıl çalışır? Animasyon</a:t>
+            </a:r>
+          </a:p>
+          <a:p>
+            <a:r>
+              <a:t>💡 İnfografik: TCP/IP protokol katmanları</a:t>
+            </a:r>
+          </a:p>
+          <a:p>
+            <a:r>
+              <a:t>📸 Görsel: Güçlü şifre örnekleri vs zayıf şifre</a:t>
+            </a:r>
+          </a:p>
+          <a:p>
+            <a:r>
+              <a:t>🎬 Video: Şifre güvenliği önemi (1-2 dk)</a:t>
+            </a:r>
+          </a:p>
+          <a:p>
+            <a:r>
+              <a:t>💡 İnfografik: Güçlü şifre oluşturma kuralları</a:t>
+            </a:r>
+          </a:p>
+          <a:p>
+            <a:r>
+              <a:t>📸 Görsel: Koşullu yapılar akış diyagramı</a:t>
+            </a:r>
+          </a:p>
+          <a:p>
+            <a:r>
+              <a:t>🎬 Video: Koşullu ifadeler Scratch'te</a:t>
+            </a:r>
+          </a:p>
+        </p:txBody>
+      </p:sp>
+      <p:sp>
+        <p:nvSpPr>
+          <p:cNvPr id="4" name="Slide Number Placeholder 3"/>
+          <p:cNvSpPr>
+            <a:spLocks noGrp="1"/>
+          </p:cNvSpPr>
+          <p:nvPr>
+            <p:ph type="sldNum" idx="5" sz="quarter"/>
+          </p:nvPr>
+        </p:nvSpPr>
+        <p:spPr/>
+      </p:sp>
+    </p:spTree>
+  </p:cSld>
+  <p:clrMapOvr>
+    <a:masterClrMapping/>
+  </p:clrMapOvr>
+</p:notes>
+</file>
+
+<file path=ppt/notesSlides/notesSlide19.xml><?xml version="1.0" encoding="utf-8"?>
+<p:notes xmlns:a="http://schemas.openxmlformats.org/drawingml/2006/main" xmlns:p="http://schemas.openxmlformats.org/presentationml/2006/main" xmlns:r="http://schemas.openxmlformats.org/officeDocument/2006/relationships">
+  <p:cSld>
+    <p:spTree>
+      <p:nvGrpSpPr>
+        <p:cNvPr id="1" name=""/>
+        <p:cNvGrpSpPr/>
+        <p:nvPr/>
+      </p:nvGrpSpPr>
+      <p:grpSpPr>
+        <a:xfrm>
+          <a:off x="0" y="0"/>
+          <a:ext cx="0" cy="0"/>
+          <a:chOff x="0" y="0"/>
+          <a:chExt cx="0" cy="0"/>
+        </a:xfrm>
+      </p:grpSpPr>
+      <p:sp>
+        <p:nvSpPr>
+          <p:cNvPr id="2" name="Slide Image Placeholder 1"/>
+          <p:cNvSpPr>
+            <a:spLocks noGrp="1"/>
+          </p:cNvSpPr>
+          <p:nvPr>
+            <p:ph type="sldImg" idx="2"/>
+          </p:nvPr>
+        </p:nvSpPr>
+        <p:spPr/>
+      </p:sp>
+      <p:sp>
+        <p:nvSpPr>
+          <p:cNvPr id="3" name="Notes Placeholder 2"/>
+          <p:cNvSpPr>
+            <a:spLocks noGrp="1"/>
+          </p:cNvSpPr>
+          <p:nvPr>
+            <p:ph type="body" idx="3" sz="quarter"/>
+          </p:nvPr>
+        </p:nvSpPr>
+        <p:spPr/>
+        <p:txBody>
+          <a:bodyPr/>
+          <a:lstStyle/>
+          <a:p>
+            <a:r>
+              <a:t>🎨 GÖRSELLEŞTİRME ÖNERİLERİ:</a:t>
+            </a:r>
+          </a:p>
+          <a:p/>
+          <a:p>
+            <a:r>
+              <a:t>📸 Görsel: LAN ve WAN ağ topolojileri şeması</a:t>
+            </a:r>
+          </a:p>
+          <a:p>
+            <a:r>
+              <a:t>🎬 Video: İnternet nasıl çalışır? Animasyonlu anlatım</a:t>
+            </a:r>
+          </a:p>
+          <a:p>
+            <a:r>
+              <a:t>💡 İnfografik: Ev ağı kurulumu diyagramı</a:t>
+            </a:r>
+          </a:p>
         </p:txBody>
       </p:sp>
       <p:sp>
@@ -1224,6 +1820,119 @@
               <a:t>Görsel: Birbirine bağlı bilgisayarlar diyagramı gösterin</a:t>
             </a:r>
           </a:p>
+          <a:p/>
+          <a:p>
+            <a:r>
+              <a:t>🎨 GÖRSELLEŞTİRME ÖNERİLERİ:</a:t>
+            </a:r>
+          </a:p>
+          <a:p/>
+          <a:p>
+            <a:r>
+              <a:t>📸 Görsel: Çeşitli çıkış aygıtları fotoğrafları</a:t>
+            </a:r>
+          </a:p>
+          <a:p>
+            <a:r>
+              <a:t>🎬 Video: Monitör ve yazıcı çalışma prensibi</a:t>
+            </a:r>
+          </a:p>
+          <a:p>
+            <a:r>
+              <a:t>📸 Görsel: LAN ve WAN ağ topolojileri şeması</a:t>
+            </a:r>
+          </a:p>
+          <a:p>
+            <a:r>
+              <a:t>🎬 Video: İnternet nasıl çalışır? Animasyonlu anlatım</a:t>
+            </a:r>
+          </a:p>
+          <a:p>
+            <a:r>
+              <a:t>💡 İnfografik: Ev ağı kurulumu diyagramı</a:t>
+            </a:r>
+          </a:p>
+        </p:txBody>
+      </p:sp>
+      <p:sp>
+        <p:nvSpPr>
+          <p:cNvPr id="4" name="Slide Number Placeholder 3"/>
+          <p:cNvSpPr>
+            <a:spLocks noGrp="1"/>
+          </p:cNvSpPr>
+          <p:nvPr>
+            <p:ph type="sldNum" idx="5" sz="quarter"/>
+          </p:nvPr>
+        </p:nvSpPr>
+        <p:spPr/>
+      </p:sp>
+    </p:spTree>
+  </p:cSld>
+  <p:clrMapOvr>
+    <a:masterClrMapping/>
+  </p:clrMapOvr>
+</p:notes>
+</file>
+
+<file path=ppt/notesSlides/notesSlide20.xml><?xml version="1.0" encoding="utf-8"?>
+<p:notes xmlns:a="http://schemas.openxmlformats.org/drawingml/2006/main" xmlns:p="http://schemas.openxmlformats.org/presentationml/2006/main" xmlns:r="http://schemas.openxmlformats.org/officeDocument/2006/relationships">
+  <p:cSld>
+    <p:spTree>
+      <p:nvGrpSpPr>
+        <p:cNvPr id="1" name=""/>
+        <p:cNvGrpSpPr/>
+        <p:nvPr/>
+      </p:nvGrpSpPr>
+      <p:grpSpPr>
+        <a:xfrm>
+          <a:off x="0" y="0"/>
+          <a:ext cx="0" cy="0"/>
+          <a:chOff x="0" y="0"/>
+          <a:chExt cx="0" cy="0"/>
+        </a:xfrm>
+      </p:grpSpPr>
+      <p:sp>
+        <p:nvSpPr>
+          <p:cNvPr id="2" name="Slide Image Placeholder 1"/>
+          <p:cNvSpPr>
+            <a:spLocks noGrp="1"/>
+          </p:cNvSpPr>
+          <p:nvPr>
+            <p:ph type="sldImg" idx="2"/>
+          </p:nvPr>
+        </p:nvSpPr>
+        <p:spPr/>
+      </p:sp>
+      <p:sp>
+        <p:nvSpPr>
+          <p:cNvPr id="3" name="Notes Placeholder 2"/>
+          <p:cNvSpPr>
+            <a:spLocks noGrp="1"/>
+          </p:cNvSpPr>
+          <p:nvPr>
+            <p:ph type="body" idx="3" sz="quarter"/>
+          </p:nvPr>
+        </p:nvSpPr>
+        <p:spPr/>
+        <p:txBody>
+          <a:bodyPr/>
+          <a:lstStyle/>
+          <a:p>
+            <a:r>
+              <a:t>🎨 GÖRSELLEŞTİRME ÖNERİLERİ:</a:t>
+            </a:r>
+          </a:p>
+          <a:p/>
+          <a:p>
+            <a:r>
+              <a:t>📸 Görsel: Konuyla ilgili görsel içerik eklenebilir</a:t>
+            </a:r>
+          </a:p>
+          <a:p>
+            <a:r>
+              <a:t>💡 İlgili ekran görüntüleri veya şemalar eklenebilir</a:t>
+            </a:r>
+          </a:p>
         </p:txBody>
       </p:sp>
       <p:sp>
@@ -1294,6 +2003,63 @@
               <a:t>Etkinlik: Sınıfın bilgisayar ağını çizdirebilirsiniz. Hangi cihazlar bağlı?</a:t>
             </a:r>
           </a:p>
+          <a:p/>
+          <a:p>
+            <a:r>
+              <a:t>🎨 GÖRSELLEŞTİRME ÖNERİLERİ:</a:t>
+            </a:r>
+          </a:p>
+          <a:p/>
+          <a:p>
+            <a:r>
+              <a:t>📸 Görsel: Çeşitli çıkış aygıtları fotoğrafları</a:t>
+            </a:r>
+          </a:p>
+          <a:p>
+            <a:r>
+              <a:t>🎬 Video: Monitör ve yazıcı çalışma prensibi</a:t>
+            </a:r>
+          </a:p>
+          <a:p>
+            <a:r>
+              <a:t>📸 Görsel: LAN ve WAN ağ topolojileri şeması</a:t>
+            </a:r>
+          </a:p>
+          <a:p>
+            <a:r>
+              <a:t>🎬 Video: İnternet nasıl çalışır? Animasyonlu anlatım</a:t>
+            </a:r>
+          </a:p>
+          <a:p>
+            <a:r>
+              <a:t>💡 İnfografik: Ev ağı kurulumu diyagramı</a:t>
+            </a:r>
+          </a:p>
+          <a:p>
+            <a:r>
+              <a:t>📸 Görsel: Router, modem ve switch cihazları</a:t>
+            </a:r>
+          </a:p>
+          <a:p>
+            <a:r>
+              <a:t>🎬 Video: Modem ve router farkı</a:t>
+            </a:r>
+          </a:p>
+          <a:p>
+            <a:r>
+              <a:t>📸 Görsel: Farklı grafik türleri örnekleri</a:t>
+            </a:r>
+          </a:p>
+          <a:p>
+            <a:r>
+              <a:t>🎬 Video: Veri görselleştirme önemi</a:t>
+            </a:r>
+          </a:p>
+          <a:p>
+            <a:r>
+              <a:t>💡 İnfografik: Grafik türleri ve kullanım alanları</a:t>
+            </a:r>
+          </a:p>
         </p:txBody>
       </p:sp>
       <p:sp>
@@ -1364,6 +2130,53 @@
               <a:t>Video: 'İnternet Kablolarının Dünya Haritası' - Deniz altı internet kablolarını gösteren video</a:t>
             </a:r>
           </a:p>
+          <a:p/>
+          <a:p>
+            <a:r>
+              <a:t>🎨 GÖRSELLEŞTİRME ÖNERİLERİ:</a:t>
+            </a:r>
+          </a:p>
+          <a:p/>
+          <a:p>
+            <a:r>
+              <a:t>📸 Görsel: LAN ve WAN ağ topolojileri şeması</a:t>
+            </a:r>
+          </a:p>
+          <a:p>
+            <a:r>
+              <a:t>🎬 Video: İnternet nasıl çalışır? Animasyonlu anlatım</a:t>
+            </a:r>
+          </a:p>
+          <a:p>
+            <a:r>
+              <a:t>💡 İnfografik: Ev ağı kurulumu diyagramı</a:t>
+            </a:r>
+          </a:p>
+          <a:p>
+            <a:r>
+              <a:t>📸 Görsel: Koşullu yapılar akış diyagramı</a:t>
+            </a:r>
+          </a:p>
+          <a:p>
+            <a:r>
+              <a:t>🎬 Video: Koşullu ifadeler Scratch'te</a:t>
+            </a:r>
+          </a:p>
+          <a:p>
+            <a:r>
+              <a:t>📸 Görsel: Farklı grafik türleri örnekleri</a:t>
+            </a:r>
+          </a:p>
+          <a:p>
+            <a:r>
+              <a:t>🎬 Video: Veri görselleştirme önemi</a:t>
+            </a:r>
+          </a:p>
+          <a:p>
+            <a:r>
+              <a:t>💡 İnfografik: Grafik türleri ve kullanım alanları</a:t>
+            </a:r>
+          </a:p>
         </p:txBody>
       </p:sp>
       <p:sp>
@@ -1434,6 +2247,68 @@
               <a:t>Görsel: İnternet bağlantısı akış diyagramı çizin veya gösterin</a:t>
             </a:r>
           </a:p>
+          <a:p/>
+          <a:p>
+            <a:r>
+              <a:t>🎨 GÖRSELLEŞTİRME ÖNERİLERİ:</a:t>
+            </a:r>
+          </a:p>
+          <a:p/>
+          <a:p>
+            <a:r>
+              <a:t>📸 Görsel: LAN ve WAN ağ topolojileri şeması</a:t>
+            </a:r>
+          </a:p>
+          <a:p>
+            <a:r>
+              <a:t>🎬 Video: İnternet nasıl çalışır? Animasyonlu anlatım</a:t>
+            </a:r>
+          </a:p>
+          <a:p>
+            <a:r>
+              <a:t>💡 İnfografik: Ev ağı kurulumu diyagramı</a:t>
+            </a:r>
+          </a:p>
+          <a:p>
+            <a:r>
+              <a:t>📸 Görsel: Router, modem ve switch cihazları</a:t>
+            </a:r>
+          </a:p>
+          <a:p>
+            <a:r>
+              <a:t>🎬 Video: Modem ve router farkı</a:t>
+            </a:r>
+          </a:p>
+          <a:p>
+            <a:r>
+              <a:t>📸 Görsel: Farklı grafik türleri örnekleri</a:t>
+            </a:r>
+          </a:p>
+          <a:p>
+            <a:r>
+              <a:t>🎬 Video: Veri görselleştirme önemi</a:t>
+            </a:r>
+          </a:p>
+          <a:p>
+            <a:r>
+              <a:t>💡 İnfografik: Grafik türleri ve kullanım alanları</a:t>
+            </a:r>
+          </a:p>
+          <a:p>
+            <a:r>
+              <a:t>📸 Görsel: Temel tasarım prensipleri</a:t>
+            </a:r>
+          </a:p>
+          <a:p>
+            <a:r>
+              <a:t>🎬 Video: Dijital tasarıma giriş</a:t>
+            </a:r>
+          </a:p>
+          <a:p>
+            <a:r>
+              <a:t>💡 İnfografik: Renk teorisi ve uyumu</a:t>
+            </a:r>
+          </a:p>
         </p:txBody>
       </p:sp>
       <p:sp>
@@ -1504,6 +2379,68 @@
               <a:t>Etkinlik: Öğrencilere kendi IP adreslerini öğretmenin gözetiminde buldurtun</a:t>
             </a:r>
           </a:p>
+          <a:p/>
+          <a:p>
+            <a:r>
+              <a:t>🎨 GÖRSELLEŞTİRME ÖNERİLERİ:</a:t>
+            </a:r>
+          </a:p>
+          <a:p/>
+          <a:p>
+            <a:r>
+              <a:t>📸 Görsel: LAN ve WAN ağ topolojileri şeması</a:t>
+            </a:r>
+          </a:p>
+          <a:p>
+            <a:r>
+              <a:t>🎬 Video: İnternet nasıl çalışır? Animasyonlu anlatım</a:t>
+            </a:r>
+          </a:p>
+          <a:p>
+            <a:r>
+              <a:t>💡 İnfografik: Ev ağı kurulumu diyagramı</a:t>
+            </a:r>
+          </a:p>
+          <a:p>
+            <a:r>
+              <a:t>📸 Görsel: IP adresi formatı ve yapısı</a:t>
+            </a:r>
+          </a:p>
+          <a:p>
+            <a:r>
+              <a:t>🎬 Video: DNS nasıl çalışır? Animasyon</a:t>
+            </a:r>
+          </a:p>
+          <a:p>
+            <a:r>
+              <a:t>💡 İnfografik: TCP/IP protokol katmanları</a:t>
+            </a:r>
+          </a:p>
+          <a:p>
+            <a:r>
+              <a:t>📸 Görsel: Farklı grafik türleri örnekleri</a:t>
+            </a:r>
+          </a:p>
+          <a:p>
+            <a:r>
+              <a:t>🎬 Video: Veri görselleştirme önemi</a:t>
+            </a:r>
+          </a:p>
+          <a:p>
+            <a:r>
+              <a:t>💡 İnfografik: Grafik türleri ve kullanım alanları</a:t>
+            </a:r>
+          </a:p>
+          <a:p>
+            <a:r>
+              <a:t>📸 Görsel: Paint araçları ekran görüntüsü</a:t>
+            </a:r>
+          </a:p>
+          <a:p>
+            <a:r>
+              <a:t>🎬 Video: Paint ile basit çizim teknikleri</a:t>
+            </a:r>
+          </a:p>
         </p:txBody>
       </p:sp>
       <p:sp>
@@ -1574,6 +2511,58 @@
               <a:t>Görsel: DNS (Domain Name System) nasıl çalışır diyagramı</a:t>
             </a:r>
           </a:p>
+          <a:p/>
+          <a:p>
+            <a:r>
+              <a:t>🎨 GÖRSELLEŞTİRME ÖNERİLERİ:</a:t>
+            </a:r>
+          </a:p>
+          <a:p/>
+          <a:p>
+            <a:r>
+              <a:t>📸 Görsel: LAN ve WAN ağ topolojileri şeması</a:t>
+            </a:r>
+          </a:p>
+          <a:p>
+            <a:r>
+              <a:t>🎬 Video: İnternet nasıl çalışır? Animasyonlu anlatım</a:t>
+            </a:r>
+          </a:p>
+          <a:p>
+            <a:r>
+              <a:t>💡 İnfografik: Ev ağı kurulumu diyagramı</a:t>
+            </a:r>
+          </a:p>
+          <a:p>
+            <a:r>
+              <a:t>📸 Görsel: IP adresi formatı ve yapısı</a:t>
+            </a:r>
+          </a:p>
+          <a:p>
+            <a:r>
+              <a:t>🎬 Video: DNS nasıl çalışır? Animasyon</a:t>
+            </a:r>
+          </a:p>
+          <a:p>
+            <a:r>
+              <a:t>💡 İnfografik: TCP/IP protokol katmanları</a:t>
+            </a:r>
+          </a:p>
+          <a:p>
+            <a:r>
+              <a:t>📸 Görsel: Yapay zeka uygulama örnekleri (Siri, Alexa, ChatGPT)</a:t>
+            </a:r>
+          </a:p>
+          <a:p>
+            <a:r>
+              <a:t>🎬 Video: Yapay zeka nedir? Çocuklar için anlatım</a:t>
+            </a:r>
+          </a:p>
+          <a:p>
+            <a:r>
+              <a:t>💡 İnfografik: AI kullanım alanları</a:t>
+            </a:r>
+          </a:p>
         </p:txBody>
       </p:sp>
       <p:sp>
@@ -1644,6 +2633,43 @@
               <a:t>Etkinlik: Öğrencilere tarayıcıyı açtırın, bölümlerini gösterin, favorilere site eklemeyi öğretin</a:t>
             </a:r>
           </a:p>
+          <a:p/>
+          <a:p>
+            <a:r>
+              <a:t>🎨 GÖRSELLEŞTİRME ÖNERİLERİ:</a:t>
+            </a:r>
+          </a:p>
+          <a:p/>
+          <a:p>
+            <a:r>
+              <a:t>📸 Görsel: CPU, RAM ve anakart fotoğrafları</a:t>
+            </a:r>
+          </a:p>
+          <a:p>
+            <a:r>
+              <a:t>🎬 Video: Bilgisayar donanımı tanıtım videosu (1-2 dk)</a:t>
+            </a:r>
+          </a:p>
+          <a:p>
+            <a:r>
+              <a:t>💡 İnfografik: Bilgisayar bileşenleri şeması</a:t>
+            </a:r>
+          </a:p>
+          <a:p>
+            <a:r>
+              <a:t>📸 Görsel: LAN ve WAN ağ topolojileri şeması</a:t>
+            </a:r>
+          </a:p>
+          <a:p>
+            <a:r>
+              <a:t>🎬 Video: İnternet nasıl çalışır? Animasyonlu anlatım</a:t>
+            </a:r>
+          </a:p>
+          <a:p>
+            <a:r>
+              <a:t>💡 İnfografik: Ev ağı kurulumu diyagramı</a:t>
+            </a:r>
+          </a:p>
         </p:txBody>
       </p:sp>
       <p:sp>
@@ -1712,6 +2738,53 @@
           <a:p>
             <a:r>
               <a:t>Etkinlik: Öğrencilere Google'da pratik aramalar yaptırın. Tırnak ve eksi işaretini deneyin.</a:t>
+            </a:r>
+          </a:p>
+          <a:p/>
+          <a:p>
+            <a:r>
+              <a:t>🎨 GÖRSELLEŞTİRME ÖNERİLERİ:</a:t>
+            </a:r>
+          </a:p>
+          <a:p/>
+          <a:p>
+            <a:r>
+              <a:t>📸 Görsel: CPU, RAM ve anakart fotoğrafları</a:t>
+            </a:r>
+          </a:p>
+          <a:p>
+            <a:r>
+              <a:t>🎬 Video: Bilgisayar donanımı tanıtım videosu (1-2 dk)</a:t>
+            </a:r>
+          </a:p>
+          <a:p>
+            <a:r>
+              <a:t>💡 İnfografik: Bilgisayar bileşenleri şeması</a:t>
+            </a:r>
+          </a:p>
+          <a:p>
+            <a:r>
+              <a:t>📸 Görsel: LAN ve WAN ağ topolojileri şeması</a:t>
+            </a:r>
+          </a:p>
+          <a:p>
+            <a:r>
+              <a:t>🎬 Video: İnternet nasıl çalışır? Animasyonlu anlatım</a:t>
+            </a:r>
+          </a:p>
+          <a:p>
+            <a:r>
+              <a:t>💡 İnfografik: Ev ağı kurulumu diyagramı</a:t>
+            </a:r>
+          </a:p>
+          <a:p>
+            <a:r>
+              <a:t>📸 Görsel: KVKK logosu ve temel ilkeler</a:t>
+            </a:r>
+          </a:p>
+          <a:p>
+            <a:r>
+              <a:t>🎬 Video: Kişisel veri nedir? Animasyon</a:t>
             </a:r>
           </a:p>
         </p:txBody>
@@ -4888,6 +5961,7 @@
               <a:defRPr sz="2000"/>
             </a:pPr>
             <a:r>
+              <a:rPr sz="1400"/>
               <a:t>Arama motoru = İnternet'te bilgi bulan program</a:t>
             </a:r>
           </a:p>
@@ -4907,6 +5981,7 @@
               <a:defRPr sz="2000" b="1"/>
             </a:pPr>
             <a:r>
+              <a:rPr sz="1400"/>
               <a:t>✅ Popüler Arama Motorları:</a:t>
             </a:r>
           </a:p>
@@ -4918,6 +5993,7 @@
               <a:defRPr sz="1800"/>
             </a:pPr>
             <a:r>
+              <a:rPr sz="1400"/>
               <a:t>    • Google 🔍 (En popüler)</a:t>
             </a:r>
           </a:p>
@@ -4929,6 +6005,7 @@
               <a:defRPr sz="1800"/>
             </a:pPr>
             <a:r>
+              <a:rPr sz="1400"/>
               <a:t>    • Bing (Microsoft)</a:t>
             </a:r>
           </a:p>
@@ -4940,6 +6017,7 @@
               <a:defRPr sz="1800"/>
             </a:pPr>
             <a:r>
+              <a:rPr sz="1400"/>
               <a:t>    • Yandex</a:t>
             </a:r>
           </a:p>
@@ -4951,6 +6029,7 @@
               <a:defRPr sz="1800"/>
             </a:pPr>
             <a:r>
+              <a:rPr sz="1400"/>
               <a:t>    • DuckDuckGo (Gizlilik odaklı)</a:t>
             </a:r>
           </a:p>
@@ -4970,6 +6049,7 @@
               <a:defRPr sz="2000" b="1"/>
             </a:pPr>
             <a:r>
+              <a:rPr sz="1400"/>
               <a:t>📌 Arama Motoru Nasıl Çalışır?</a:t>
             </a:r>
           </a:p>
@@ -4981,6 +6061,7 @@
               <a:defRPr sz="1800"/>
             </a:pPr>
             <a:r>
+              <a:rPr sz="1400"/>
               <a:t>    • Milyarlarca web sayfasını tarar</a:t>
             </a:r>
           </a:p>
@@ -4992,6 +6073,7 @@
               <a:defRPr sz="1800"/>
             </a:pPr>
             <a:r>
+              <a:rPr sz="1400"/>
               <a:t>    • İçerikleri indexler (kataloglar)</a:t>
             </a:r>
           </a:p>
@@ -5003,6 +6085,7 @@
               <a:defRPr sz="1800"/>
             </a:pPr>
             <a:r>
+              <a:rPr sz="1400"/>
               <a:t>    • Arama yaptığında en uygun sonuçları gösterir</a:t>
             </a:r>
           </a:p>
@@ -5022,6 +6105,7 @@
               <a:defRPr sz="2000" b="1"/>
             </a:pPr>
             <a:r>
+              <a:rPr sz="1400"/>
               <a:t>💡 Etkili Arama İpuçları:</a:t>
             </a:r>
           </a:p>
@@ -5041,6 +6125,7 @@
               <a:defRPr sz="2000" b="1"/>
             </a:pPr>
             <a:r>
+              <a:rPr sz="1400"/>
               <a:t>✅ Doğru Kelimeler Kullan:</a:t>
             </a:r>
           </a:p>
@@ -5052,6 +6137,7 @@
               <a:defRPr sz="1800"/>
             </a:pPr>
             <a:r>
+              <a:rPr sz="1400"/>
               <a:t>    • Kısa ve net</a:t>
             </a:r>
           </a:p>
@@ -5063,6 +6149,7 @@
               <a:defRPr sz="1800"/>
             </a:pPr>
             <a:r>
+              <a:rPr sz="1400"/>
               <a:t>    • 'Ankara'nın başkenti' yerine 'Ankara başkent'</a:t>
             </a:r>
           </a:p>
@@ -5082,6 +6169,7 @@
               <a:defRPr sz="2000" b="1"/>
             </a:pPr>
             <a:r>
+              <a:rPr sz="1400"/>
               <a:t>✅ Tırnak İşareti Kullan:</a:t>
             </a:r>
           </a:p>
@@ -5093,6 +6181,7 @@
               <a:defRPr sz="1800"/>
             </a:pPr>
             <a:r>
+              <a:rPr sz="1400"/>
               <a:t>    • "Atatürk'ün hayatı" → Tam cümleyi arar</a:t>
             </a:r>
           </a:p>
@@ -5112,6 +6201,7 @@
               <a:defRPr sz="2000" b="1"/>
             </a:pPr>
             <a:r>
+              <a:rPr sz="1400"/>
               <a:t>✅ Eksi İşareti:</a:t>
             </a:r>
           </a:p>
@@ -5123,6 +6213,7 @@
               <a:defRPr sz="1800"/>
             </a:pPr>
             <a:r>
+              <a:rPr sz="1400"/>
               <a:t>    • Elma -telefon → Elma kelimesini arar, telefon kelimesini hariç tutar</a:t>
             </a:r>
           </a:p>
@@ -5221,6 +6312,7 @@
               <a:defRPr sz="2000"/>
             </a:pPr>
             <a:r>
+              <a:rPr sz="1600"/>
               <a:t>İnternet'te her şey doğru değildir!</a:t>
             </a:r>
           </a:p>
@@ -5240,6 +6332,7 @@
               <a:defRPr sz="2000" b="1"/>
             </a:pPr>
             <a:r>
+              <a:rPr sz="1600"/>
               <a:t>✅ Güvenilir Kaynak Özellikleri:</a:t>
             </a:r>
           </a:p>
@@ -5259,6 +6352,7 @@
               <a:defRPr sz="2000"/>
             </a:pPr>
             <a:r>
+              <a:rPr sz="1600"/>
               <a:t>🔒 Güvenilir Domain:</a:t>
             </a:r>
           </a:p>
@@ -5270,6 +6364,7 @@
               <a:defRPr sz="1800"/>
             </a:pPr>
             <a:r>
+              <a:rPr sz="1600"/>
               <a:t>    • .edu (eğitim kurumları)</a:t>
             </a:r>
           </a:p>
@@ -5281,6 +6376,7 @@
               <a:defRPr sz="1800"/>
             </a:pPr>
             <a:r>
+              <a:rPr sz="1600"/>
               <a:t>    • .gov (hükümet siteleri)</a:t>
             </a:r>
           </a:p>
@@ -5292,6 +6388,7 @@
               <a:defRPr sz="1800"/>
             </a:pPr>
             <a:r>
+              <a:rPr sz="1600"/>
               <a:t>    • .org (organizasyonlar)</a:t>
             </a:r>
           </a:p>
@@ -5311,6 +6408,7 @@
               <a:defRPr sz="2000"/>
             </a:pPr>
             <a:r>
+              <a:rPr sz="1600"/>
               <a:t>📝 Yazar Bilgisi:</a:t>
             </a:r>
           </a:p>
@@ -5322,6 +6420,7 @@
               <a:defRPr sz="1800"/>
             </a:pPr>
             <a:r>
+              <a:rPr sz="1600"/>
               <a:t>    • Kim yazmış?</a:t>
             </a:r>
           </a:p>
@@ -5333,6 +6432,7 @@
               <a:defRPr sz="1800"/>
             </a:pPr>
             <a:r>
+              <a:rPr sz="1600"/>
               <a:t>    • Uzman mı?</a:t>
             </a:r>
           </a:p>
@@ -5352,6 +6452,7 @@
               <a:defRPr sz="2000"/>
             </a:pPr>
             <a:r>
+              <a:rPr sz="1600"/>
               <a:t>📅 Güncel mi?</a:t>
             </a:r>
           </a:p>
@@ -5363,6 +6464,7 @@
               <a:defRPr sz="1800"/>
             </a:pPr>
             <a:r>
+              <a:rPr sz="1600"/>
               <a:t>    • Ne zaman yazılmış?</a:t>
             </a:r>
           </a:p>
@@ -5374,6 +6476,7 @@
               <a:defRPr sz="1800"/>
             </a:pPr>
             <a:r>
+              <a:rPr sz="1600"/>
               <a:t>    • Eski bilgiler yanlış olabilir</a:t>
             </a:r>
           </a:p>
@@ -5393,6 +6496,7 @@
               <a:defRPr sz="2000"/>
             </a:pPr>
             <a:r>
+              <a:rPr sz="1600"/>
               <a:t>📚 Kaynak Göstermiş mi?</a:t>
             </a:r>
           </a:p>
@@ -5404,6 +6508,7 @@
               <a:defRPr sz="1800"/>
             </a:pPr>
             <a:r>
+              <a:rPr sz="1600"/>
               <a:t>    • Bilgilerin kaynağı var mı?</a:t>
             </a:r>
           </a:p>
@@ -5423,6 +6528,7 @@
               <a:defRPr sz="2000" b="1"/>
             </a:pPr>
             <a:r>
+              <a:rPr sz="1600"/>
               <a:t>💡 Karşılaştır:</a:t>
             </a:r>
           </a:p>
@@ -5434,6 +6540,7 @@
               <a:defRPr sz="1800"/>
             </a:pPr>
             <a:r>
+              <a:rPr sz="1600"/>
               <a:t>    • Birden fazla kaynağa bak</a:t>
             </a:r>
           </a:p>
@@ -5445,6 +6552,7 @@
               <a:defRPr sz="1800"/>
             </a:pPr>
             <a:r>
+              <a:rPr sz="1600"/>
               <a:t>    • Aynı bilgiyi veren birkaç site var mı?</a:t>
             </a:r>
           </a:p>
@@ -5464,6 +6572,7 @@
               <a:defRPr sz="2000"/>
             </a:pPr>
             <a:r>
+              <a:rPr sz="1600"/>
               <a:t>⚠️ Dikkat:</a:t>
             </a:r>
           </a:p>
@@ -5475,6 +6584,7 @@
               <a:defRPr sz="2000"/>
             </a:pPr>
             <a:r>
+              <a:rPr sz="1600"/>
               <a:t>Wikipedia iyi başlangıç ama tek kaynak olmamalı!</a:t>
             </a:r>
           </a:p>
@@ -5573,6 +6683,7 @@
               <a:defRPr sz="2000"/>
             </a:pPr>
             <a:r>
+              <a:rPr sz="1400"/>
               <a:t>E-posta = Elektronik Posta (Email)</a:t>
             </a:r>
           </a:p>
@@ -5592,6 +6703,7 @@
               <a:defRPr sz="2000" b="1"/>
             </a:pPr>
             <a:r>
+              <a:rPr sz="1400"/>
               <a:t>✅ E-posta Sağlayıcıları:</a:t>
             </a:r>
           </a:p>
@@ -5603,6 +6715,7 @@
               <a:defRPr sz="1800"/>
             </a:pPr>
             <a:r>
+              <a:rPr sz="1400"/>
               <a:t>    • Gmail (Google)</a:t>
             </a:r>
           </a:p>
@@ -5614,6 +6727,7 @@
               <a:defRPr sz="1800"/>
             </a:pPr>
             <a:r>
+              <a:rPr sz="1400"/>
               <a:t>    • Outlook (Microsoft)</a:t>
             </a:r>
           </a:p>
@@ -5625,6 +6739,7 @@
               <a:defRPr sz="1800"/>
             </a:pPr>
             <a:r>
+              <a:rPr sz="1400"/>
               <a:t>    • Yandex Mail</a:t>
             </a:r>
           </a:p>
@@ -5644,6 +6759,7 @@
               <a:defRPr sz="2000" b="1"/>
             </a:pPr>
             <a:r>
+              <a:rPr sz="1400"/>
               <a:t>📌 E-posta Adresi Yapısı:</a:t>
             </a:r>
           </a:p>
@@ -5655,6 +6771,7 @@
               <a:defRPr sz="2000"/>
             </a:pPr>
             <a:r>
+              <a:rPr sz="1400"/>
               <a:t>kullaniciadi@gmail.com</a:t>
             </a:r>
           </a:p>
@@ -5666,6 +6783,7 @@
               <a:defRPr sz="1800"/>
             </a:pPr>
             <a:r>
+              <a:rPr sz="1400"/>
               <a:t>    • kullaniciadi = Sizin seçtiğiniz isim</a:t>
             </a:r>
           </a:p>
@@ -5677,6 +6795,7 @@
               <a:defRPr sz="1800"/>
             </a:pPr>
             <a:r>
+              <a:rPr sz="1400"/>
               <a:t>    • @ = 'at' işareti (zorunlu)</a:t>
             </a:r>
           </a:p>
@@ -5688,6 +6807,7 @@
               <a:defRPr sz="1800"/>
             </a:pPr>
             <a:r>
+              <a:rPr sz="1400"/>
               <a:t>    • gmail.com = E-posta sağlayıcı</a:t>
             </a:r>
           </a:p>
@@ -5707,6 +6827,7 @@
               <a:defRPr sz="2000" b="1"/>
             </a:pPr>
             <a:r>
+              <a:rPr sz="1400"/>
               <a:t>✅ E-posta Gönderme:</a:t>
             </a:r>
           </a:p>
@@ -5718,6 +6839,7 @@
               <a:defRPr sz="1800"/>
             </a:pPr>
             <a:r>
+              <a:rPr sz="1400"/>
               <a:t>    • Alıcı: Kime gönderilecek?</a:t>
             </a:r>
           </a:p>
@@ -5729,6 +6851,7 @@
               <a:defRPr sz="1800"/>
             </a:pPr>
             <a:r>
+              <a:rPr sz="1400"/>
               <a:t>    • Konu: Ne hakkında?</a:t>
             </a:r>
           </a:p>
@@ -5740,6 +6863,7 @@
               <a:defRPr sz="1800"/>
             </a:pPr>
             <a:r>
+              <a:rPr sz="1400"/>
               <a:t>    • Mesaj: İçerik</a:t>
             </a:r>
           </a:p>
@@ -5751,6 +6875,7 @@
               <a:defRPr sz="1800"/>
             </a:pPr>
             <a:r>
+              <a:rPr sz="1400"/>
               <a:t>    • Ek: Dosya eklenebilir</a:t>
             </a:r>
           </a:p>
@@ -5770,6 +6895,7 @@
               <a:defRPr sz="2000" b="1"/>
             </a:pPr>
             <a:r>
+              <a:rPr sz="1400"/>
               <a:t>💡 E-posta Etiği:</a:t>
             </a:r>
           </a:p>
@@ -5781,6 +6907,7 @@
               <a:defRPr sz="1800"/>
             </a:pPr>
             <a:r>
+              <a:rPr sz="1400"/>
               <a:t>    • Kibarca yaz</a:t>
             </a:r>
           </a:p>
@@ -5792,6 +6919,7 @@
               <a:defRPr sz="1800"/>
             </a:pPr>
             <a:r>
+              <a:rPr sz="1400"/>
               <a:t>    • Konuyu belirt</a:t>
             </a:r>
           </a:p>
@@ -5803,6 +6931,7 @@
               <a:defRPr sz="1800"/>
             </a:pPr>
             <a:r>
+              <a:rPr sz="1400"/>
               <a:t>    • İmza ekle</a:t>
             </a:r>
           </a:p>
@@ -5814,6 +6943,7 @@
               <a:defRPr sz="1800"/>
             </a:pPr>
             <a:r>
+              <a:rPr sz="1400"/>
               <a:t>    • Spam yapma (gereksiz mail gönderme)</a:t>
             </a:r>
           </a:p>
@@ -5833,6 +6963,7 @@
               <a:defRPr sz="2000" b="1"/>
             </a:pPr>
             <a:r>
+              <a:rPr sz="1400"/>
               <a:t>⚡ CC ve BCC:</a:t>
             </a:r>
           </a:p>
@@ -5844,6 +6975,7 @@
               <a:defRPr sz="1800"/>
             </a:pPr>
             <a:r>
+              <a:rPr sz="1400"/>
               <a:t>    • CC = Carbon Copy (Kopya gönder)</a:t>
             </a:r>
           </a:p>
@@ -5855,6 +6987,7 @@
               <a:defRPr sz="1800"/>
             </a:pPr>
             <a:r>
+              <a:rPr sz="1400"/>
               <a:t>    • BCC = Blind Carbon Copy (Gizli kopya)</a:t>
             </a:r>
           </a:p>
@@ -5953,6 +7086,7 @@
               <a:defRPr sz="2000"/>
             </a:pPr>
             <a:r>
+              <a:rPr sz="1600"/>
               <a:t>İnternet üzerinden iletişim kurma yolları:</a:t>
             </a:r>
           </a:p>
@@ -5972,6 +7106,7 @@
               <a:defRPr sz="2000" b="1"/>
             </a:pPr>
             <a:r>
+              <a:rPr sz="1600"/>
               <a:t>✅ Anlık Mesajlaşma:</a:t>
             </a:r>
           </a:p>
@@ -5983,6 +7118,7 @@
               <a:defRPr sz="1800"/>
             </a:pPr>
             <a:r>
+              <a:rPr sz="1600"/>
               <a:t>    • WhatsApp</a:t>
             </a:r>
           </a:p>
@@ -5994,6 +7130,7 @@
               <a:defRPr sz="1800"/>
             </a:pPr>
             <a:r>
+              <a:rPr sz="1600"/>
               <a:t>    • Telegram</a:t>
             </a:r>
           </a:p>
@@ -6005,6 +7142,7 @@
               <a:defRPr sz="1800"/>
             </a:pPr>
             <a:r>
+              <a:rPr sz="1600"/>
               <a:t>    • Messenger</a:t>
             </a:r>
           </a:p>
@@ -6024,6 +7162,7 @@
               <a:defRPr sz="2000"/>
             </a:pPr>
             <a:r>
+              <a:rPr sz="1600"/>
               <a:t>🎥 Görüntülü Görüşme:</a:t>
             </a:r>
           </a:p>
@@ -6035,6 +7174,7 @@
               <a:defRPr sz="1800"/>
             </a:pPr>
             <a:r>
+              <a:rPr sz="1600"/>
               <a:t>    • Zoom</a:t>
             </a:r>
           </a:p>
@@ -6046,6 +7186,7 @@
               <a:defRPr sz="1800"/>
             </a:pPr>
             <a:r>
+              <a:rPr sz="1600"/>
               <a:t>    • Google Meet</a:t>
             </a:r>
           </a:p>
@@ -6057,6 +7198,7 @@
               <a:defRPr sz="1800"/>
             </a:pPr>
             <a:r>
+              <a:rPr sz="1600"/>
               <a:t>    • Microsoft Teams</a:t>
             </a:r>
           </a:p>
@@ -6068,6 +7210,7 @@
               <a:defRPr sz="1800"/>
             </a:pPr>
             <a:r>
+              <a:rPr sz="1600"/>
               <a:t>    • Skype</a:t>
             </a:r>
           </a:p>
@@ -6087,6 +7230,7 @@
               <a:defRPr sz="2000"/>
             </a:pPr>
             <a:r>
+              <a:rPr sz="1600"/>
               <a:t>📱 Sosyal Medya:</a:t>
             </a:r>
           </a:p>
@@ -6098,6 +7242,7 @@
               <a:defRPr sz="1800"/>
             </a:pPr>
             <a:r>
+              <a:rPr sz="1600"/>
               <a:t>    • Instagram</a:t>
             </a:r>
           </a:p>
@@ -6109,6 +7254,7 @@
               <a:defRPr sz="1800"/>
             </a:pPr>
             <a:r>
+              <a:rPr sz="1600"/>
               <a:t>    • Twitter (X)</a:t>
             </a:r>
           </a:p>
@@ -6120,6 +7266,7 @@
               <a:defRPr sz="1800"/>
             </a:pPr>
             <a:r>
+              <a:rPr sz="1600"/>
               <a:t>    • TikTok</a:t>
             </a:r>
           </a:p>
@@ -6131,6 +7278,7 @@
               <a:defRPr sz="1800"/>
             </a:pPr>
             <a:r>
+              <a:rPr sz="1600"/>
               <a:t>    • (13 yaş sınırı var!)</a:t>
             </a:r>
           </a:p>
@@ -6150,6 +7298,7 @@
               <a:defRPr sz="2000"/>
             </a:pPr>
             <a:r>
+              <a:rPr sz="1600"/>
               <a:t>🎮 Oyun İçi Sohbet:</a:t>
             </a:r>
           </a:p>
@@ -6161,6 +7310,7 @@
               <a:defRPr sz="1800"/>
             </a:pPr>
             <a:r>
+              <a:rPr sz="1600"/>
               <a:t>    • Roblox, Minecraft</a:t>
             </a:r>
           </a:p>
@@ -6180,6 +7330,7 @@
               <a:defRPr sz="2000" b="1"/>
             </a:pPr>
             <a:r>
+              <a:rPr sz="1600"/>
               <a:t>💡 Çevrimiçi İletişim Kuralları:</a:t>
             </a:r>
           </a:p>
@@ -6191,6 +7342,7 @@
               <a:defRPr sz="1800"/>
             </a:pPr>
             <a:r>
+              <a:rPr sz="1600"/>
               <a:t>    • Saygılı ol</a:t>
             </a:r>
           </a:p>
@@ -6202,6 +7354,7 @@
               <a:defRPr sz="1800"/>
             </a:pPr>
             <a:r>
+              <a:rPr sz="1600"/>
               <a:t>    • Kişisel bilgi paylaşma</a:t>
             </a:r>
           </a:p>
@@ -6213,6 +7366,7 @@
               <a:defRPr sz="1800"/>
             </a:pPr>
             <a:r>
+              <a:rPr sz="1600"/>
               <a:t>    • Tanımadığın kişilerle konuşma</a:t>
             </a:r>
           </a:p>
@@ -6224,6 +7378,7 @@
               <a:defRPr sz="1800"/>
             </a:pPr>
             <a:r>
+              <a:rPr sz="1600"/>
               <a:t>    • Siber zorbalık yapma</a:t>
             </a:r>
           </a:p>
@@ -6322,6 +7477,7 @@
               <a:defRPr sz="2000"/>
             </a:pPr>
             <a:r>
+              <a:rPr sz="1400"/>
               <a:t>İnternet'i güvenle kullanmak çok önemli!</a:t>
             </a:r>
           </a:p>
@@ -6341,6 +7497,7 @@
               <a:defRPr sz="2000" b="1"/>
             </a:pPr>
             <a:r>
+              <a:rPr sz="1400"/>
               <a:t>✅ Temel Güvenlik Kuralları:</a:t>
             </a:r>
           </a:p>
@@ -6360,6 +7517,7 @@
               <a:defRPr sz="2000"/>
             </a:pPr>
             <a:r>
+              <a:rPr sz="1400"/>
               <a:t>🔐 Güçlü Şifre:</a:t>
             </a:r>
           </a:p>
@@ -6371,6 +7529,7 @@
               <a:defRPr sz="1800"/>
             </a:pPr>
             <a:r>
+              <a:rPr sz="1400"/>
               <a:t>    • En az 8 karakter</a:t>
             </a:r>
           </a:p>
@@ -6382,6 +7541,7 @@
               <a:defRPr sz="1800"/>
             </a:pPr>
             <a:r>
+              <a:rPr sz="1400"/>
               <a:t>    • Büyük harf, küçük harf, rakam, sembol</a:t>
             </a:r>
           </a:p>
@@ -6393,6 +7553,7 @@
               <a:defRPr sz="1800"/>
             </a:pPr>
             <a:r>
+              <a:rPr sz="1400"/>
               <a:t>    • Doğum tarihi kullanma!</a:t>
             </a:r>
           </a:p>
@@ -6412,6 +7573,7 @@
               <a:defRPr sz="2000"/>
             </a:pPr>
             <a:r>
+              <a:rPr sz="1400"/>
               <a:t>🙈 Kişisel Bilgileri Paylaşma:</a:t>
             </a:r>
           </a:p>
@@ -6423,6 +7585,7 @@
               <a:defRPr sz="1800"/>
             </a:pPr>
             <a:r>
+              <a:rPr sz="1400"/>
               <a:t>    • Adres, telefon, okul bilgilerini paylaşma</a:t>
             </a:r>
           </a:p>
@@ -6434,6 +7597,7 @@
               <a:defRPr sz="1800"/>
             </a:pPr>
             <a:r>
+              <a:rPr sz="1400"/>
               <a:t>    • Fotoğraf paylaşırken dikkatli ol</a:t>
             </a:r>
           </a:p>
@@ -6453,6 +7617,7 @@
               <a:defRPr sz="2000"/>
             </a:pPr>
             <a:r>
+              <a:rPr sz="1400"/>
               <a:t>👤 Tanımadığın Kişilerle:</a:t>
             </a:r>
           </a:p>
@@ -6464,6 +7629,7 @@
               <a:defRPr sz="1800"/>
             </a:pPr>
             <a:r>
+              <a:rPr sz="1400"/>
               <a:t>    • Buluşma</a:t>
             </a:r>
           </a:p>
@@ -6475,6 +7641,7 @@
               <a:defRPr sz="1800"/>
             </a:pPr>
             <a:r>
+              <a:rPr sz="1400"/>
               <a:t>    • Kişisel bilgi verme</a:t>
             </a:r>
           </a:p>
@@ -6486,6 +7653,7 @@
               <a:defRPr sz="1800"/>
             </a:pPr>
             <a:r>
+              <a:rPr sz="1400"/>
               <a:t>    • Ebeveynlerine haber ver</a:t>
             </a:r>
           </a:p>
@@ -6505,6 +7673,7 @@
               <a:defRPr sz="2000"/>
             </a:pPr>
             <a:r>
+              <a:rPr sz="1400"/>
               <a:t>🔗 Şüpheli Linkler:</a:t>
             </a:r>
           </a:p>
@@ -6516,6 +7685,7 @@
               <a:defRPr sz="1800"/>
             </a:pPr>
             <a:r>
+              <a:rPr sz="1400"/>
               <a:t>    • Bilmediğin linklere tıklama</a:t>
             </a:r>
           </a:p>
@@ -6527,6 +7697,7 @@
               <a:defRPr sz="1800"/>
             </a:pPr>
             <a:r>
+              <a:rPr sz="1400"/>
               <a:t>    • E-posta eklerini açmadan önce kontrol et</a:t>
             </a:r>
           </a:p>
@@ -6546,6 +7717,7 @@
               <a:defRPr sz="2000"/>
             </a:pPr>
             <a:r>
+              <a:rPr sz="1400"/>
               <a:t>💰 Online Alışveriş:</a:t>
             </a:r>
           </a:p>
@@ -6557,6 +7729,7 @@
               <a:defRPr sz="1800"/>
             </a:pPr>
             <a:r>
+              <a:rPr sz="1400"/>
               <a:t>    • Güvenli siteler (https://)</a:t>
             </a:r>
           </a:p>
@@ -6568,6 +7741,7 @@
               <a:defRPr sz="1800"/>
             </a:pPr>
             <a:r>
+              <a:rPr sz="1400"/>
               <a:t>    • Ebeveyn izni al</a:t>
             </a:r>
           </a:p>
@@ -6666,6 +7840,7 @@
               <a:defRPr sz="2000"/>
             </a:pPr>
             <a:r>
+              <a:rPr sz="1400"/>
               <a:t>Siber zorbalık = İnternet üzerinden yapılan zorbalık</a:t>
             </a:r>
           </a:p>
@@ -6685,6 +7860,7 @@
               <a:defRPr sz="2000" b="1"/>
             </a:pPr>
             <a:r>
+              <a:rPr sz="1400"/>
               <a:t>✅ Siber Zorbalık Örnekleri:</a:t>
             </a:r>
           </a:p>
@@ -6696,6 +7872,7 @@
               <a:defRPr sz="1800"/>
             </a:pPr>
             <a:r>
+              <a:rPr sz="1400"/>
               <a:t>    • Sosyal medyada kötü yorum yapma</a:t>
             </a:r>
           </a:p>
@@ -6707,6 +7884,7 @@
               <a:defRPr sz="1800"/>
             </a:pPr>
             <a:r>
+              <a:rPr sz="1400"/>
               <a:t>    • Utandırıcı fotoğraf paylaşma</a:t>
             </a:r>
           </a:p>
@@ -6718,6 +7896,7 @@
               <a:defRPr sz="1800"/>
             </a:pPr>
             <a:r>
+              <a:rPr sz="1400"/>
               <a:t>    • Tehdit mesajları gönderme</a:t>
             </a:r>
           </a:p>
@@ -6729,6 +7908,7 @@
               <a:defRPr sz="1800"/>
             </a:pPr>
             <a:r>
+              <a:rPr sz="1400"/>
               <a:t>    • Başkasını taklit edip kötü davranma</a:t>
             </a:r>
           </a:p>
@@ -6740,6 +7920,7 @@
               <a:defRPr sz="1800"/>
             </a:pPr>
             <a:r>
+              <a:rPr sz="1400"/>
               <a:t>    • Kasıtlı olarak dışlama</a:t>
             </a:r>
           </a:p>
@@ -6759,6 +7940,7 @@
               <a:defRPr sz="2000"/>
             </a:pPr>
             <a:r>
+              <a:rPr sz="1400"/>
               <a:t>❌ Siber Zorbalığa Hayır!</a:t>
             </a:r>
           </a:p>
@@ -6778,6 +7960,7 @@
               <a:defRPr sz="2000" b="1"/>
             </a:pPr>
             <a:r>
+              <a:rPr sz="1400"/>
               <a:t>💡 Siber Zorbalığa Uğrarsan:</a:t>
             </a:r>
           </a:p>
@@ -6789,6 +7972,7 @@
               <a:defRPr sz="1800"/>
             </a:pPr>
             <a:r>
+              <a:rPr sz="1400"/>
               <a:t>    • Cevap verme</a:t>
             </a:r>
           </a:p>
@@ -6800,6 +7984,7 @@
               <a:defRPr sz="1800"/>
             </a:pPr>
             <a:r>
+              <a:rPr sz="1400"/>
               <a:t>    • Kanıt sakla (ekran görüntüsü)</a:t>
             </a:r>
           </a:p>
@@ -6811,6 +7996,7 @@
               <a:defRPr sz="1800"/>
             </a:pPr>
             <a:r>
+              <a:rPr sz="1400"/>
               <a:t>    • Engelle</a:t>
             </a:r>
           </a:p>
@@ -6822,6 +8008,7 @@
               <a:defRPr sz="1800"/>
             </a:pPr>
             <a:r>
+              <a:rPr sz="1400"/>
               <a:t>    • Ebeveynlerine veya öğretmenine söyle</a:t>
             </a:r>
           </a:p>
@@ -6833,6 +8020,7 @@
               <a:defRPr sz="1800"/>
             </a:pPr>
             <a:r>
+              <a:rPr sz="1400"/>
               <a:t>    • Gerekirse şikayet et</a:t>
             </a:r>
           </a:p>
@@ -6852,6 +8040,7 @@
               <a:defRPr sz="2000" b="1"/>
             </a:pPr>
             <a:r>
+              <a:rPr sz="1400"/>
               <a:t>✅ Sen de Yapmamak İçin:</a:t>
             </a:r>
           </a:p>
@@ -6863,6 +8052,7 @@
               <a:defRPr sz="1800"/>
             </a:pPr>
             <a:r>
+              <a:rPr sz="1400"/>
               <a:t>    • Kızdığında mesaj atma, bekle</a:t>
             </a:r>
           </a:p>
@@ -6874,6 +8064,7 @@
               <a:defRPr sz="1800"/>
             </a:pPr>
             <a:r>
+              <a:rPr sz="1400"/>
               <a:t>    • Başkası hakkında kötü şey paylaşma</a:t>
             </a:r>
           </a:p>
@@ -6885,6 +8076,7 @@
               <a:defRPr sz="1800"/>
             </a:pPr>
             <a:r>
+              <a:rPr sz="1400"/>
               <a:t>    • Empati yap: Karşındaki nasıl hisseder?</a:t>
             </a:r>
           </a:p>
@@ -6904,6 +8096,7 @@
               <a:defRPr sz="2000" b="1"/>
             </a:pPr>
             <a:r>
+              <a:rPr sz="1400"/>
               <a:t>⚡ İnternet'te de gerçek hayat gibi davran!</a:t>
             </a:r>
           </a:p>
@@ -7002,6 +8195,7 @@
               <a:defRPr sz="2000"/>
             </a:pPr>
             <a:r>
+              <a:rPr sz="1400"/>
               <a:t>İnternet'teki her şey ücretsiz kullanılabilir mi?</a:t>
             </a:r>
           </a:p>
@@ -7021,6 +8215,7 @@
               <a:defRPr sz="2000"/>
             </a:pPr>
             <a:r>
+              <a:rPr sz="1400"/>
               <a:t>❌ HAYIR! Telif hakları internette de geçerli.</a:t>
             </a:r>
           </a:p>
@@ -7040,6 +8235,7 @@
               <a:defRPr sz="2000" b="1"/>
             </a:pPr>
             <a:r>
+              <a:rPr sz="1400"/>
               <a:t>✅ Telif Hakkı Nedir?</a:t>
             </a:r>
           </a:p>
@@ -7051,6 +8247,7 @@
               <a:defRPr sz="1800"/>
             </a:pPr>
             <a:r>
+              <a:rPr sz="1400"/>
               <a:t>    • Bir eserin yaratıcısının hakkı</a:t>
             </a:r>
           </a:p>
@@ -7062,6 +8259,7 @@
               <a:defRPr sz="1800"/>
             </a:pPr>
             <a:r>
+              <a:rPr sz="1400"/>
               <a:t>    • Müzik, video, fotoğraf, yazı, yazılım...</a:t>
             </a:r>
           </a:p>
@@ -7081,6 +8279,7 @@
               <a:defRPr sz="2000" b="1"/>
             </a:pPr>
             <a:r>
+              <a:rPr sz="1400"/>
               <a:t>📌 İnternet'te Telif İhlalleri:</a:t>
             </a:r>
           </a:p>
@@ -7092,6 +8291,7 @@
               <a:defRPr sz="1800"/>
             </a:pPr>
             <a:r>
+              <a:rPr sz="1400"/>
               <a:t>    • Başkasının fotoğrafını izinsiz kullanma</a:t>
             </a:r>
           </a:p>
@@ -7103,6 +8303,7 @@
               <a:defRPr sz="1800"/>
             </a:pPr>
             <a:r>
+              <a:rPr sz="1400"/>
               <a:t>    • Müziği indirip paylaşma</a:t>
             </a:r>
           </a:p>
@@ -7114,6 +8315,7 @@
               <a:defRPr sz="1800"/>
             </a:pPr>
             <a:r>
+              <a:rPr sz="1400"/>
               <a:t>    • Filmleri korsan izleme/indirme</a:t>
             </a:r>
           </a:p>
@@ -7125,6 +8327,7 @@
               <a:defRPr sz="1800"/>
             </a:pPr>
             <a:r>
+              <a:rPr sz="1400"/>
               <a:t>    • Başkasının yazısını kopyalayıp kendi adına yayınlama</a:t>
             </a:r>
           </a:p>
@@ -7144,6 +8347,7 @@
               <a:defRPr sz="2000" b="1"/>
             </a:pPr>
             <a:r>
+              <a:rPr sz="1400"/>
               <a:t>✅ Doğru Kullanım:</a:t>
             </a:r>
           </a:p>
@@ -7155,6 +8359,7 @@
               <a:defRPr sz="1800"/>
             </a:pPr>
             <a:r>
+              <a:rPr sz="1400"/>
               <a:t>    • Kaynak göster (nereden aldığını yaz)</a:t>
             </a:r>
           </a:p>
@@ -7166,6 +8371,7 @@
               <a:defRPr sz="1800"/>
             </a:pPr>
             <a:r>
+              <a:rPr sz="1400"/>
               <a:t>    • Serbest lisanslı içerikler kullan</a:t>
             </a:r>
           </a:p>
@@ -7177,6 +8383,7 @@
               <a:defRPr sz="1800"/>
             </a:pPr>
             <a:r>
+              <a:rPr sz="1400"/>
               <a:t>    • İzin iste</a:t>
             </a:r>
           </a:p>
@@ -7196,6 +8403,7 @@
               <a:defRPr sz="2000"/>
             </a:pPr>
             <a:r>
+              <a:rPr sz="1400"/>
               <a:t>🔍 Serbest İçerik Kaynakları:</a:t>
             </a:r>
           </a:p>
@@ -7207,6 +8415,7 @@
               <a:defRPr sz="1800"/>
             </a:pPr>
             <a:r>
+              <a:rPr sz="1400"/>
               <a:t>    • Creative Commons lisanslı görseller</a:t>
             </a:r>
           </a:p>
@@ -7218,6 +8427,7 @@
               <a:defRPr sz="1800"/>
             </a:pPr>
             <a:r>
+              <a:rPr sz="1400"/>
               <a:t>    • Pixabay, Unsplash (ücretsiz fotoğraflar)</a:t>
             </a:r>
           </a:p>
@@ -7237,6 +8447,7 @@
               <a:defRPr sz="2000" b="1"/>
             </a:pPr>
             <a:r>
+              <a:rPr sz="1400"/>
               <a:t>💡 İnternet'ten aldıysan kaynağını göster!</a:t>
             </a:r>
           </a:p>
@@ -7335,6 +8546,7 @@
               <a:defRPr sz="2000"/>
             </a:pPr>
             <a:r>
+              <a:rPr sz="1400"/>
               <a:t>İnternet faydalıdır ama dengeli kullanılmalı!</a:t>
             </a:r>
           </a:p>
@@ -7354,6 +8566,7 @@
               <a:defRPr sz="2000" b="1"/>
             </a:pPr>
             <a:r>
+              <a:rPr sz="1400"/>
               <a:t>✅ Sağlıklı İnternet Kullanımı:</a:t>
             </a:r>
           </a:p>
@@ -7373,6 +8586,7 @@
               <a:defRPr sz="2000"/>
             </a:pPr>
             <a:r>
+              <a:rPr sz="1400"/>
               <a:t>📱 Süre Sınırı:</a:t>
             </a:r>
           </a:p>
@@ -7384,6 +8598,7 @@
               <a:defRPr sz="1800"/>
             </a:pPr>
             <a:r>
+              <a:rPr sz="1400"/>
               <a:t>    • 5. sınıf için önerilen: Günde 1-2 saat</a:t>
             </a:r>
           </a:p>
@@ -7395,6 +8610,7 @@
               <a:defRPr sz="1800"/>
             </a:pPr>
             <a:r>
+              <a:rPr sz="1400"/>
               <a:t>    • Sık sık mola ver (20-20-20 kuralı)</a:t>
             </a:r>
           </a:p>
@@ -7414,6 +8630,7 @@
               <a:defRPr sz="2000"/>
             </a:pPr>
             <a:r>
+              <a:rPr sz="1400"/>
               <a:t>🛌 Uyku Öncelikli:</a:t>
             </a:r>
           </a:p>
@@ -7425,6 +8642,7 @@
               <a:defRPr sz="1800"/>
             </a:pPr>
             <a:r>
+              <a:rPr sz="1400"/>
               <a:t>    • Yatmadan önce ekran kullanma</a:t>
             </a:r>
           </a:p>
@@ -7436,6 +8654,7 @@
               <a:defRPr sz="1800"/>
             </a:pPr>
             <a:r>
+              <a:rPr sz="1400"/>
               <a:t>    • Telefon/tableti yatak odasında bırakma</a:t>
             </a:r>
           </a:p>
@@ -7455,6 +8674,7 @@
               <a:defRPr sz="2000"/>
             </a:pPr>
             <a:r>
+              <a:rPr sz="1400"/>
               <a:t>👨‍👩‍👧 Aile Zamanı:</a:t>
             </a:r>
           </a:p>
@@ -7466,6 +8686,7 @@
               <a:defRPr sz="1800"/>
             </a:pPr>
             <a:r>
+              <a:rPr sz="1400"/>
               <a:t>    • Yemekte telefon yok</a:t>
             </a:r>
           </a:p>
@@ -7477,6 +8698,7 @@
               <a:defRPr sz="1800"/>
             </a:pPr>
             <a:r>
+              <a:rPr sz="1400"/>
               <a:t>    • Aile ile vakit geçir</a:t>
             </a:r>
           </a:p>
@@ -7496,6 +8718,7 @@
               <a:defRPr sz="2000"/>
             </a:pPr>
             <a:r>
+              <a:rPr sz="1400"/>
               <a:t>🏃 Fiziksel Aktivite:</a:t>
             </a:r>
           </a:p>
@@ -7507,6 +8730,7 @@
               <a:defRPr sz="1800"/>
             </a:pPr>
             <a:r>
+              <a:rPr sz="1400"/>
               <a:t>    • Dışarı çık, spor yap</a:t>
             </a:r>
           </a:p>
@@ -7518,6 +8742,7 @@
               <a:defRPr sz="1800"/>
             </a:pPr>
             <a:r>
+              <a:rPr sz="1400"/>
               <a:t>    • Arkadaşlarla yüz yüze oyna</a:t>
             </a:r>
           </a:p>
@@ -7537,6 +8762,7 @@
               <a:defRPr sz="2000"/>
             </a:pPr>
             <a:r>
+              <a:rPr sz="1400"/>
               <a:t>📚 Ödev ve Okul:</a:t>
             </a:r>
           </a:p>
@@ -7548,6 +8774,7 @@
               <a:defRPr sz="1800"/>
             </a:pPr>
             <a:r>
+              <a:rPr sz="1400"/>
               <a:t>    • Önce ödevler</a:t>
             </a:r>
           </a:p>
@@ -7559,6 +8786,7 @@
               <a:defRPr sz="1800"/>
             </a:pPr>
             <a:r>
+              <a:rPr sz="1400"/>
               <a:t>    • Eğitsel içerikler izle</a:t>
             </a:r>
           </a:p>
@@ -7578,6 +8806,7 @@
               <a:defRPr sz="2000" b="1"/>
             </a:pPr>
             <a:r>
+              <a:rPr sz="1400"/>
               <a:t>💡 20-20-20 Kuralı:</a:t>
             </a:r>
           </a:p>
@@ -7589,6 +8818,7 @@
               <a:defRPr sz="2000"/>
             </a:pPr>
             <a:r>
+              <a:rPr sz="1400"/>
               <a:t>Her 20 dakikada, 20 saniye, 20 feet (6 metre) uzağa bak</a:t>
             </a:r>
           </a:p>
@@ -7687,6 +8917,7 @@
               <a:defRPr sz="2000"/>
             </a:pPr>
             <a:r>
+              <a:rPr sz="1600"/>
               <a:t>Bu ünitede neler öğrendik?</a:t>
             </a:r>
           </a:p>
@@ -7706,6 +8937,7 @@
               <a:defRPr sz="2000" b="1"/>
             </a:pPr>
             <a:r>
+              <a:rPr sz="1600"/>
               <a:t>✅ Bilgisayar ağları (LAN, WAN)</a:t>
             </a:r>
           </a:p>
@@ -7717,6 +8949,7 @@
               <a:defRPr sz="2000" b="1"/>
             </a:pPr>
             <a:r>
+              <a:rPr sz="1600"/>
               <a:t>✅ İnternet nasıl çalışır?</a:t>
             </a:r>
           </a:p>
@@ -7728,6 +8961,7 @@
               <a:defRPr sz="2000" b="1"/>
             </a:pPr>
             <a:r>
+              <a:rPr sz="1600"/>
               <a:t>✅ IP adresi ve Domain kavramları</a:t>
             </a:r>
           </a:p>
@@ -7739,6 +8973,7 @@
               <a:defRPr sz="2000" b="1"/>
             </a:pPr>
             <a:r>
+              <a:rPr sz="1600"/>
               <a:t>✅ İnternet tarayıcıları ve arama motorları</a:t>
             </a:r>
           </a:p>
@@ -7750,6 +8985,7 @@
               <a:defRPr sz="2000" b="1"/>
             </a:pPr>
             <a:r>
+              <a:rPr sz="1600"/>
               <a:t>✅ Etkili arama teknikleri</a:t>
             </a:r>
           </a:p>
@@ -7761,6 +8997,7 @@
               <a:defRPr sz="2000" b="1"/>
             </a:pPr>
             <a:r>
+              <a:rPr sz="1600"/>
               <a:t>✅ Güvenilir kaynak bulma</a:t>
             </a:r>
           </a:p>
@@ -7772,6 +9009,7 @@
               <a:defRPr sz="2000" b="1"/>
             </a:pPr>
             <a:r>
+              <a:rPr sz="1600"/>
               <a:t>✅ E-posta kullanımı ve etiği</a:t>
             </a:r>
           </a:p>
@@ -7783,6 +9021,7 @@
               <a:defRPr sz="2000" b="1"/>
             </a:pPr>
             <a:r>
+              <a:rPr sz="1600"/>
               <a:t>✅ Çevrimiçi iletişim araçları</a:t>
             </a:r>
           </a:p>
@@ -7794,6 +9033,7 @@
               <a:defRPr sz="2000" b="1"/>
             </a:pPr>
             <a:r>
+              <a:rPr sz="1600"/>
               <a:t>✅ İnternet güvenliği kuralları</a:t>
             </a:r>
           </a:p>
@@ -7805,6 +9045,7 @@
               <a:defRPr sz="2000" b="1"/>
             </a:pPr>
             <a:r>
+              <a:rPr sz="1600"/>
               <a:t>✅ Siber zorbalık</a:t>
             </a:r>
           </a:p>
@@ -7816,6 +9057,7 @@
               <a:defRPr sz="2000" b="1"/>
             </a:pPr>
             <a:r>
+              <a:rPr sz="1600"/>
               <a:t>✅ Telif hakları</a:t>
             </a:r>
           </a:p>
@@ -7827,6 +9069,7 @@
               <a:defRPr sz="2000" b="1"/>
             </a:pPr>
             <a:r>
+              <a:rPr sz="1600"/>
               <a:t>✅ Dengeli internet kullanımı</a:t>
             </a:r>
           </a:p>
@@ -7846,6 +9089,7 @@
               <a:defRPr sz="2000" b="1"/>
             </a:pPr>
             <a:r>
+              <a:rPr sz="1600"/>
               <a:t>💡 Anahtar Mesaj:</a:t>
             </a:r>
           </a:p>
@@ -7857,6 +9101,7 @@
               <a:defRPr sz="2000"/>
             </a:pPr>
             <a:r>
+              <a:rPr sz="1600"/>
               <a:t>İnternet harika bir araç ama güvenli ve dengeli kullanmalısın!</a:t>
             </a:r>
           </a:p>
@@ -7876,6 +9121,7 @@
               <a:defRPr sz="2000" b="1"/>
             </a:pPr>
             <a:r>
+              <a:rPr sz="1600"/>
               <a:t>🎯 Artık bilinçli bir dijital vatandaşsın!</a:t>
             </a:r>
           </a:p>
@@ -7974,6 +9220,7 @@
               <a:defRPr sz="2000"/>
             </a:pPr>
             <a:r>
+              <a:rPr sz="1400"/>
               <a:t>Daha fazla öğrenmek için:</a:t>
             </a:r>
           </a:p>
@@ -7993,6 +9240,7 @@
               <a:defRPr sz="2000"/>
             </a:pPr>
             <a:r>
+              <a:rPr sz="1400"/>
               <a:t>🎥 İzlenecek Videolar:</a:t>
             </a:r>
           </a:p>
@@ -8004,6 +9252,7 @@
               <a:defRPr sz="1800"/>
             </a:pPr>
             <a:r>
+              <a:rPr sz="1400"/>
               <a:t>    • 'İnternet Nasıl Çalışır?' - TRT Okul</a:t>
             </a:r>
           </a:p>
@@ -8015,6 +9264,7 @@
               <a:defRPr sz="1800"/>
             </a:pPr>
             <a:r>
+              <a:rPr sz="1400"/>
               <a:t>    • 'IP Adresi Nedir?' - Animasyonlu anlatım</a:t>
             </a:r>
           </a:p>
@@ -8026,6 +9276,7 @@
               <a:defRPr sz="1800"/>
             </a:pPr>
             <a:r>
+              <a:rPr sz="1400"/>
               <a:t>    • 'Güvenli İnternet Kullanımı' - MEB videoları</a:t>
             </a:r>
           </a:p>
@@ -8037,6 +9288,7 @@
               <a:defRPr sz="1800"/>
             </a:pPr>
             <a:r>
+              <a:rPr sz="1400"/>
               <a:t>    • 'Siber Zorbalığa Hayır' - Kısa film</a:t>
             </a:r>
           </a:p>
@@ -8056,6 +9308,7 @@
               <a:defRPr sz="2000"/>
             </a:pPr>
             <a:r>
+              <a:rPr sz="1400"/>
               <a:t>🌐 Keşfedilecek Siteler:</a:t>
             </a:r>
           </a:p>
@@ -8067,6 +9320,7 @@
               <a:defRPr sz="1800"/>
             </a:pPr>
             <a:r>
+              <a:rPr sz="1400"/>
               <a:t>    • https://guvenliweb.org.tr</a:t>
             </a:r>
           </a:p>
@@ -8078,6 +9332,7 @@
               <a:defRPr sz="1800"/>
             </a:pPr>
             <a:r>
+              <a:rPr sz="1400"/>
               <a:t>    • https://internetguvenlik.org</a:t>
             </a:r>
           </a:p>
@@ -8097,6 +9352,7 @@
               <a:defRPr sz="2000"/>
             </a:pPr>
             <a:r>
+              <a:rPr sz="1400"/>
               <a:t>🎮 Eğitici Oyunlar:</a:t>
             </a:r>
           </a:p>
@@ -8108,6 +9364,7 @@
               <a:defRPr sz="1800"/>
             </a:pPr>
             <a:r>
+              <a:rPr sz="1400"/>
               <a:t>    • 'İnternet Güvenliği Kahramanları' oyunu</a:t>
             </a:r>
           </a:p>
@@ -8127,6 +9384,7 @@
               <a:defRPr sz="2000"/>
             </a:pPr>
             <a:r>
+              <a:rPr sz="1400"/>
               <a:t>📖 Yapılacak Aktiviteler:</a:t>
             </a:r>
           </a:p>
@@ -8138,6 +9396,7 @@
               <a:defRPr sz="1800"/>
             </a:pPr>
             <a:r>
+              <a:rPr sz="1400"/>
               <a:t>    • Güçlü şifre oluşturma yarışması</a:t>
             </a:r>
           </a:p>
@@ -8149,6 +9408,7 @@
               <a:defRPr sz="1800"/>
             </a:pPr>
             <a:r>
+              <a:rPr sz="1400"/>
               <a:t>    • Arama motoru kullanım yarışması</a:t>
             </a:r>
           </a:p>
@@ -8160,6 +9420,7 @@
               <a:defRPr sz="1800"/>
             </a:pPr>
             <a:r>
+              <a:rPr sz="1400"/>
               <a:t>    • E-posta yazma pratiği</a:t>
             </a:r>
           </a:p>
@@ -8179,6 +9440,7 @@
               <a:defRPr sz="2000" b="1"/>
             </a:pPr>
             <a:r>
+              <a:rPr sz="1400"/>
               <a:t>💡 Güvenli internette buluşalım!</a:t>
             </a:r>
           </a:p>
@@ -8608,6 +9870,7 @@
               <a:defRPr sz="2000" b="1"/>
             </a:pPr>
             <a:r>
+              <a:rPr sz="1600"/>
               <a:t>🎯 Tanım:</a:t>
             </a:r>
           </a:p>
@@ -8619,6 +9882,7 @@
               <a:defRPr sz="2000"/>
             </a:pPr>
             <a:r>
+              <a:rPr sz="1600"/>
               <a:t>Bilgisayar ağı = Birbirine bağlı bilgisayar ve cihazlar</a:t>
             </a:r>
           </a:p>
@@ -8638,6 +9902,7 @@
               <a:defRPr sz="2000" b="1"/>
             </a:pPr>
             <a:r>
+              <a:rPr sz="1600"/>
               <a:t>✅ Ağın Amacı:</a:t>
             </a:r>
           </a:p>
@@ -8649,6 +9914,7 @@
               <a:defRPr sz="1800"/>
             </a:pPr>
             <a:r>
+              <a:rPr sz="1600"/>
               <a:t>    • Bilgi paylaşımı</a:t>
             </a:r>
           </a:p>
@@ -8660,6 +9926,7 @@
               <a:defRPr sz="1800"/>
             </a:pPr>
             <a:r>
+              <a:rPr sz="1600"/>
               <a:t>    • Kaynak paylaşımı (yazıcı, dosya)</a:t>
             </a:r>
           </a:p>
@@ -8671,6 +9938,7 @@
               <a:defRPr sz="1800"/>
             </a:pPr>
             <a:r>
+              <a:rPr sz="1600"/>
               <a:t>    • İletişim</a:t>
             </a:r>
           </a:p>
@@ -8682,6 +9950,7 @@
               <a:defRPr sz="1800"/>
             </a:pPr>
             <a:r>
+              <a:rPr sz="1600"/>
               <a:t>    • Oyun oynama (çok oyunculu)</a:t>
             </a:r>
           </a:p>
@@ -8701,6 +9970,7 @@
               <a:defRPr sz="2000" b="1"/>
             </a:pPr>
             <a:r>
+              <a:rPr sz="1600"/>
               <a:t>📌 Günlük Hayattan Örnekler:</a:t>
             </a:r>
           </a:p>
@@ -8712,6 +9982,7 @@
               <a:defRPr sz="1800"/>
             </a:pPr>
             <a:r>
+              <a:rPr sz="1600"/>
               <a:t>    • Evdeki Wi-Fi ağı</a:t>
             </a:r>
           </a:p>
@@ -8723,6 +9994,7 @@
               <a:defRPr sz="1800"/>
             </a:pPr>
             <a:r>
+              <a:rPr sz="1600"/>
               <a:t>    • Okulun bilgisayar laboratuvarı</a:t>
             </a:r>
           </a:p>
@@ -8734,6 +10006,7 @@
               <a:defRPr sz="1800"/>
             </a:pPr>
             <a:r>
+              <a:rPr sz="1600"/>
               <a:t>    • İnternet kafeler</a:t>
             </a:r>
           </a:p>
@@ -8745,6 +10018,7 @@
               <a:defRPr sz="1800"/>
             </a:pPr>
             <a:r>
+              <a:rPr sz="1600"/>
               <a:t>    • Online oyunlar (Roblox, Fortnite)</a:t>
             </a:r>
           </a:p>
@@ -8764,6 +10038,7 @@
               <a:defRPr sz="2000" b="1"/>
             </a:pPr>
             <a:r>
+              <a:rPr sz="1600"/>
               <a:t>💡 Ağ sayesinde:</a:t>
             </a:r>
           </a:p>
@@ -8775,6 +10050,7 @@
               <a:defRPr sz="1800"/>
             </a:pPr>
             <a:r>
+              <a:rPr sz="1600"/>
               <a:t>    • Dosyaları paylaşırsın</a:t>
             </a:r>
           </a:p>
@@ -8786,6 +10062,7 @@
               <a:defRPr sz="1800"/>
             </a:pPr>
             <a:r>
+              <a:rPr sz="1600"/>
               <a:t>    • Mesajlaşırsın</a:t>
             </a:r>
           </a:p>
@@ -8797,6 +10074,7 @@
               <a:defRPr sz="1800"/>
             </a:pPr>
             <a:r>
+              <a:rPr sz="1600"/>
               <a:t>    • Online oyun oynarsın</a:t>
             </a:r>
           </a:p>
@@ -8808,6 +10086,7 @@
               <a:defRPr sz="1800"/>
             </a:pPr>
             <a:r>
+              <a:rPr sz="1600"/>
               <a:t>    • Video izlersin</a:t>
             </a:r>
           </a:p>
@@ -8827,6 +10106,7 @@
               <a:defRPr sz="2000" b="1"/>
             </a:pPr>
             <a:r>
+              <a:rPr sz="1600"/>
               <a:t>⚡ Ağ olmadan internet de olmaz!</a:t>
             </a:r>
           </a:p>
@@ -8925,6 +10205,7 @@
               <a:defRPr sz="2000"/>
             </a:pPr>
             <a:r>
+              <a:rPr sz="1600"/>
               <a:t>LAN = Local Area Network (Yerel Alan Ağı)</a:t>
             </a:r>
           </a:p>
@@ -8944,6 +10225,7 @@
               <a:defRPr sz="2000" b="1"/>
             </a:pPr>
             <a:r>
+              <a:rPr sz="1600"/>
               <a:t>✅ Özellikler:</a:t>
             </a:r>
           </a:p>
@@ -8955,6 +10237,7 @@
               <a:defRPr sz="1800"/>
             </a:pPr>
             <a:r>
+              <a:rPr sz="1600"/>
               <a:t>    • Küçük bir alanda çalışır (ev, okul, ofis)</a:t>
             </a:r>
           </a:p>
@@ -8966,6 +10249,7 @@
               <a:defRPr sz="1800"/>
             </a:pPr>
             <a:r>
+              <a:rPr sz="1600"/>
               <a:t>    • Hızlı veri transferi</a:t>
             </a:r>
           </a:p>
@@ -8977,6 +10261,7 @@
               <a:defRPr sz="1800"/>
             </a:pPr>
             <a:r>
+              <a:rPr sz="1600"/>
               <a:t>    • Kablo veya Wi-Fi ile bağlantı</a:t>
             </a:r>
           </a:p>
@@ -8996,6 +10281,7 @@
               <a:defRPr sz="2000" b="1"/>
             </a:pPr>
             <a:r>
+              <a:rPr sz="1600"/>
               <a:t>📌 LAN Örnekleri:</a:t>
             </a:r>
           </a:p>
@@ -9015,6 +10301,7 @@
               <a:defRPr sz="2000"/>
             </a:pPr>
             <a:r>
+              <a:rPr sz="1600"/>
               <a:t>🏠 Evdeki LAN:</a:t>
             </a:r>
           </a:p>
@@ -9026,6 +10313,7 @@
               <a:defRPr sz="1800"/>
             </a:pPr>
             <a:r>
+              <a:rPr sz="1600"/>
               <a:t>    • Modem/Router</a:t>
             </a:r>
           </a:p>
@@ -9037,6 +10325,7 @@
               <a:defRPr sz="1800"/>
             </a:pPr>
             <a:r>
+              <a:rPr sz="1600"/>
               <a:t>    • Telefon, tablet, bilgisayar, TV</a:t>
             </a:r>
           </a:p>
@@ -9048,6 +10337,7 @@
               <a:defRPr sz="1800"/>
             </a:pPr>
             <a:r>
+              <a:rPr sz="1600"/>
               <a:t>    • Hepsi aynı Wi-Fi'ye bağlı</a:t>
             </a:r>
           </a:p>
@@ -9067,6 +10357,7 @@
               <a:defRPr sz="2000"/>
             </a:pPr>
             <a:r>
+              <a:rPr sz="1600"/>
               <a:t>🏫 Okuldaki LAN:</a:t>
             </a:r>
           </a:p>
@@ -9078,6 +10369,7 @@
               <a:defRPr sz="1800"/>
             </a:pPr>
             <a:r>
+              <a:rPr sz="1600"/>
               <a:t>    • Bilgisayar laboratuvarı</a:t>
             </a:r>
           </a:p>
@@ -9089,6 +10381,7 @@
               <a:defRPr sz="1800"/>
             </a:pPr>
             <a:r>
+              <a:rPr sz="1600"/>
               <a:t>    • Tüm bilgisayarlar birbirine bağlı</a:t>
             </a:r>
           </a:p>
@@ -9100,6 +10393,7 @@
               <a:defRPr sz="1800"/>
             </a:pPr>
             <a:r>
+              <a:rPr sz="1600"/>
               <a:t>    • Öğretmen dosya paylaşabilir</a:t>
             </a:r>
           </a:p>
@@ -9119,6 +10413,7 @@
               <a:defRPr sz="2000"/>
             </a:pPr>
             <a:r>
+              <a:rPr sz="1600"/>
               <a:t>💼 İş yerindeki LAN:</a:t>
             </a:r>
           </a:p>
@@ -9130,6 +10425,7 @@
               <a:defRPr sz="1800"/>
             </a:pPr>
             <a:r>
+              <a:rPr sz="1600"/>
               <a:t>    • Ofisteki tüm bilgisayarlar</a:t>
             </a:r>
           </a:p>
@@ -9141,6 +10437,7 @@
               <a:defRPr sz="1800"/>
             </a:pPr>
             <a:r>
+              <a:rPr sz="1600"/>
               <a:t>    • Ortak yazıcı kullanımı</a:t>
             </a:r>
           </a:p>
@@ -9160,6 +10457,7 @@
               <a:defRPr sz="2000" b="1"/>
             </a:pPr>
             <a:r>
+              <a:rPr sz="1600"/>
               <a:t>💡 LAN = Küçük ama hızlı ağ</a:t>
             </a:r>
           </a:p>
@@ -9258,6 +10556,7 @@
               <a:defRPr sz="2000"/>
             </a:pPr>
             <a:r>
+              <a:rPr sz="1400"/>
               <a:t>WAN = Wide Area Network (Geniş Alan Ağı)</a:t>
             </a:r>
           </a:p>
@@ -9277,6 +10576,7 @@
               <a:defRPr sz="2000" b="1"/>
             </a:pPr>
             <a:r>
+              <a:rPr sz="1400"/>
               <a:t>✅ WAN Özellikleri:</a:t>
             </a:r>
           </a:p>
@@ -9288,6 +10588,7 @@
               <a:defRPr sz="1800"/>
             </a:pPr>
             <a:r>
+              <a:rPr sz="1400"/>
               <a:t>    • Çok geniş alanda çalışır (şehirler, ülkeler)</a:t>
             </a:r>
           </a:p>
@@ -9299,6 +10600,7 @@
               <a:defRPr sz="1800"/>
             </a:pPr>
             <a:r>
+              <a:rPr sz="1400"/>
               <a:t>    • LAN'ları birbirine bağlar</a:t>
             </a:r>
           </a:p>
@@ -9310,6 +10612,7 @@
               <a:defRPr sz="1800"/>
             </a:pPr>
             <a:r>
+              <a:rPr sz="1400"/>
               <a:t>    • İnternet en büyük WAN'dır!</a:t>
             </a:r>
           </a:p>
@@ -9329,6 +10632,7 @@
               <a:defRPr sz="2000"/>
             </a:pPr>
             <a:r>
+              <a:rPr sz="1400"/>
               <a:t>🌐 İnternet:</a:t>
             </a:r>
           </a:p>
@@ -9340,6 +10644,7 @@
               <a:defRPr sz="2000"/>
             </a:pPr>
             <a:r>
+              <a:rPr sz="1400"/>
               <a:t>Dünyadaki tüm ağların birbirine bağlanması!</a:t>
             </a:r>
           </a:p>
@@ -9359,6 +10664,7 @@
               <a:defRPr sz="2000" b="1"/>
             </a:pPr>
             <a:r>
+              <a:rPr sz="1400"/>
               <a:t>📌 İnternet Sayesinde:</a:t>
             </a:r>
           </a:p>
@@ -9370,6 +10676,7 @@
               <a:defRPr sz="1800"/>
             </a:pPr>
             <a:r>
+              <a:rPr sz="1400"/>
               <a:t>    • Türkiye'den Amerika'ya mesaj göndeririz</a:t>
             </a:r>
           </a:p>
@@ -9381,6 +10688,7 @@
               <a:defRPr sz="1800"/>
             </a:pPr>
             <a:r>
+              <a:rPr sz="1400"/>
               <a:t>    • Dünyanın her yerinden video izleriz</a:t>
             </a:r>
           </a:p>
@@ -9392,6 +10700,7 @@
               <a:defRPr sz="1800"/>
             </a:pPr>
             <a:r>
+              <a:rPr sz="1400"/>
               <a:t>    • Online oyun oynarız</a:t>
             </a:r>
           </a:p>
@@ -9403,6 +10712,7 @@
               <a:defRPr sz="1800"/>
             </a:pPr>
             <a:r>
+              <a:rPr sz="1400"/>
               <a:t>    • Alışveriş yaparız</a:t>
             </a:r>
           </a:p>
@@ -9422,6 +10732,7 @@
               <a:defRPr sz="2000" b="1"/>
             </a:pPr>
             <a:r>
+              <a:rPr sz="1400"/>
               <a:t>💡 Fark:</a:t>
             </a:r>
           </a:p>
@@ -9433,6 +10744,7 @@
               <a:defRPr sz="1800"/>
             </a:pPr>
             <a:r>
+              <a:rPr sz="1400"/>
               <a:t>    • LAN = Evin içindeki ağ (WiFi)</a:t>
             </a:r>
           </a:p>
@@ -9444,6 +10756,7 @@
               <a:defRPr sz="1800"/>
             </a:pPr>
             <a:r>
+              <a:rPr sz="1400"/>
               <a:t>    • WAN = Tüm dünya (İnternet)</a:t>
             </a:r>
           </a:p>
@@ -9463,6 +10776,7 @@
               <a:defRPr sz="2000" b="1"/>
             </a:pPr>
             <a:r>
+              <a:rPr sz="1400"/>
               <a:t>⚡ İnternet = Ağların ağı!</a:t>
             </a:r>
           </a:p>
@@ -9474,6 +10788,7 @@
               <a:defRPr sz="2000"/>
             </a:pPr>
             <a:r>
+              <a:rPr sz="1400"/>
               <a:t>Milyarlarca cihaz birbiriyle bağlı</a:t>
             </a:r>
           </a:p>
@@ -9572,6 +10887,7 @@
               <a:defRPr sz="2000"/>
             </a:pPr>
             <a:r>
+              <a:rPr sz="1400"/>
               <a:t>İnternet'e bağlanmak için neler gerekir?</a:t>
             </a:r>
           </a:p>
@@ -9591,6 +10907,7 @@
               <a:defRPr sz="2000" b="1"/>
             </a:pPr>
             <a:r>
+              <a:rPr sz="1400"/>
               <a:t>✅ İnternet Bağlantısı İçin Gerekenler:</a:t>
             </a:r>
           </a:p>
@@ -9610,6 +10927,7 @@
               <a:defRPr sz="2000"/>
             </a:pPr>
             <a:r>
+              <a:rPr sz="1400"/>
               <a:t>1️⃣ İnternet Servis Sağlayıcı (ISP):</a:t>
             </a:r>
           </a:p>
@@ -9621,6 +10939,7 @@
               <a:defRPr sz="1800"/>
             </a:pPr>
             <a:r>
+              <a:rPr sz="1400"/>
               <a:t>    • Türk Telekom, Superonline, Vodafone</a:t>
             </a:r>
           </a:p>
@@ -9632,6 +10951,7 @@
               <a:defRPr sz="1800"/>
             </a:pPr>
             <a:r>
+              <a:rPr sz="1400"/>
               <a:t>    • İnterneti eve getirir</a:t>
             </a:r>
           </a:p>
@@ -9651,6 +10971,7 @@
               <a:defRPr sz="2000"/>
             </a:pPr>
             <a:r>
+              <a:rPr sz="1400"/>
               <a:t>2️⃣ Modem/Router:</a:t>
             </a:r>
           </a:p>
@@ -9662,6 +10983,7 @@
               <a:defRPr sz="1800"/>
             </a:pPr>
             <a:r>
+              <a:rPr sz="1400"/>
               <a:t>    • İnternet sinyalini dağıtır</a:t>
             </a:r>
           </a:p>
@@ -9673,6 +10995,7 @@
               <a:defRPr sz="1800"/>
             </a:pPr>
             <a:r>
+              <a:rPr sz="1400"/>
               <a:t>    • Wi-Fi oluşturur</a:t>
             </a:r>
           </a:p>
@@ -9692,6 +11015,7 @@
               <a:defRPr sz="2000"/>
             </a:pPr>
             <a:r>
+              <a:rPr sz="1400"/>
               <a:t>3️⃣ Cihazınız:</a:t>
             </a:r>
           </a:p>
@@ -9703,6 +11027,7 @@
               <a:defRPr sz="1800"/>
             </a:pPr>
             <a:r>
+              <a:rPr sz="1400"/>
               <a:t>    • Bilgisayar, telefon, tablet</a:t>
             </a:r>
           </a:p>
@@ -9722,6 +11047,7 @@
               <a:defRPr sz="2000" b="1"/>
             </a:pPr>
             <a:r>
+              <a:rPr sz="1400"/>
               <a:t>📌 Bağlantı Şekilleri:</a:t>
             </a:r>
           </a:p>
@@ -9733,6 +11059,7 @@
               <a:defRPr sz="1800"/>
             </a:pPr>
             <a:r>
+              <a:rPr sz="1400"/>
               <a:t>    • Kablo (Ethernet)</a:t>
             </a:r>
           </a:p>
@@ -9744,6 +11071,7 @@
               <a:defRPr sz="1800"/>
             </a:pPr>
             <a:r>
+              <a:rPr sz="1400"/>
               <a:t>    • Wi-Fi (Kablosuz)</a:t>
             </a:r>
           </a:p>
@@ -9755,6 +11083,7 @@
               <a:defRPr sz="1800"/>
             </a:pPr>
             <a:r>
+              <a:rPr sz="1400"/>
               <a:t>    • Mobil veri (4.5G, 5G)</a:t>
             </a:r>
           </a:p>
@@ -9774,6 +11103,7 @@
               <a:defRPr sz="2000" b="1"/>
             </a:pPr>
             <a:r>
+              <a:rPr sz="1400"/>
               <a:t>💡 Veri Paketi Yolculuğu:</a:t>
             </a:r>
           </a:p>
@@ -9785,6 +11115,7 @@
               <a:defRPr sz="2000"/>
             </a:pPr>
             <a:r>
+              <a:rPr sz="1400"/>
               <a:t>Bilgisayarınız → Modem → ISP → İnternet → Sunucu → Geri Dönüş</a:t>
             </a:r>
           </a:p>
@@ -9804,6 +11135,7 @@
               <a:defRPr sz="2000" b="1"/>
             </a:pPr>
             <a:r>
+              <a:rPr sz="1400"/>
               <a:t>⚡ Saniyede milyonlarca veri paketi gidip geliyor!</a:t>
             </a:r>
           </a:p>
@@ -9902,6 +11234,7 @@
               <a:defRPr sz="2000"/>
             </a:pPr>
             <a:r>
+              <a:rPr sz="1400"/>
               <a:t>IP = Internet Protocol (İnternet Protokolü)</a:t>
             </a:r>
           </a:p>
@@ -9921,6 +11254,7 @@
               <a:defRPr sz="2000" b="1"/>
             </a:pPr>
             <a:r>
+              <a:rPr sz="1400"/>
               <a:t>🎯 IP Adresi:</a:t>
             </a:r>
           </a:p>
@@ -9932,6 +11266,7 @@
               <a:defRPr sz="2000"/>
             </a:pPr>
             <a:r>
+              <a:rPr sz="1400"/>
               <a:t>İnternetteki her cihazın benzersiz kimlik numarası</a:t>
             </a:r>
           </a:p>
@@ -9951,6 +11286,7 @@
               <a:defRPr sz="2000" b="1"/>
             </a:pPr>
             <a:r>
+              <a:rPr sz="1400"/>
               <a:t>✅ Özellikler:</a:t>
             </a:r>
           </a:p>
@@ -9962,6 +11298,7 @@
               <a:defRPr sz="1800"/>
             </a:pPr>
             <a:r>
+              <a:rPr sz="1400"/>
               <a:t>    • 4 sayı grubundan oluşur</a:t>
             </a:r>
           </a:p>
@@ -9973,6 +11310,7 @@
               <a:defRPr sz="1800"/>
             </a:pPr>
             <a:r>
+              <a:rPr sz="1400"/>
               <a:t>    • Örnek: 192.168.1.1 veya 172.16.254.1</a:t>
             </a:r>
           </a:p>
@@ -9984,6 +11322,7 @@
               <a:defRPr sz="1800"/>
             </a:pPr>
             <a:r>
+              <a:rPr sz="1400"/>
               <a:t>    • Her cihazın IP'si farklıdır</a:t>
             </a:r>
           </a:p>
@@ -10003,6 +11342,7 @@
               <a:defRPr sz="2000" b="1"/>
             </a:pPr>
             <a:r>
+              <a:rPr sz="1400"/>
               <a:t>📌 IP Adresi Neden Önemli?</a:t>
             </a:r>
           </a:p>
@@ -10014,6 +11354,7 @@
               <a:defRPr sz="1800"/>
             </a:pPr>
             <a:r>
+              <a:rPr sz="1400"/>
               <a:t>    • Veri doğru cihaza ulaşır</a:t>
             </a:r>
           </a:p>
@@ -10025,6 +11366,7 @@
               <a:defRPr sz="1800"/>
             </a:pPr>
             <a:r>
+              <a:rPr sz="1400"/>
               <a:t>    • Adres sistemi gibi çalışır</a:t>
             </a:r>
           </a:p>
@@ -10044,6 +11386,7 @@
               <a:defRPr sz="2000" b="1"/>
             </a:pPr>
             <a:r>
+              <a:rPr sz="1400"/>
               <a:t>💡 Analoji:</a:t>
             </a:r>
           </a:p>
@@ -10055,6 +11398,7 @@
               <a:defRPr sz="2000"/>
             </a:pPr>
             <a:r>
+              <a:rPr sz="1400"/>
               <a:t>IP Adresi = Ev adresiniz</a:t>
             </a:r>
           </a:p>
@@ -10066,6 +11410,7 @@
               <a:defRPr sz="1800"/>
             </a:pPr>
             <a:r>
+              <a:rPr sz="1400"/>
               <a:t>    • Posta göndermek için adres gerekir</a:t>
             </a:r>
           </a:p>
@@ -10077,6 +11422,7 @@
               <a:defRPr sz="1800"/>
             </a:pPr>
             <a:r>
+              <a:rPr sz="1400"/>
               <a:t>    • İnternet'te veri göndermek için IP gerekir</a:t>
             </a:r>
           </a:p>
@@ -10096,6 +11442,7 @@
               <a:defRPr sz="2000"/>
             </a:pPr>
             <a:r>
+              <a:rPr sz="1400"/>
               <a:t>🔍 Kendi IP'nizi Öğrenme:</a:t>
             </a:r>
           </a:p>
@@ -10107,6 +11454,7 @@
               <a:defRPr sz="1800"/>
             </a:pPr>
             <a:r>
+              <a:rPr sz="1400"/>
               <a:t>    • Google'da 'IP adresim nedir?' yazın</a:t>
             </a:r>
           </a:p>
@@ -10118,6 +11466,7 @@
               <a:defRPr sz="1800"/>
             </a:pPr>
             <a:r>
+              <a:rPr sz="1400"/>
               <a:t>    • Komut İstemi: 'ipconfig' komutu</a:t>
             </a:r>
           </a:p>
@@ -10137,6 +11486,7 @@
               <a:defRPr sz="2000" b="1"/>
             </a:pPr>
             <a:r>
+              <a:rPr sz="1400"/>
               <a:t>⚡ İki tür IP var: IPv4 ve IPv6 (daha yeni)</a:t>
             </a:r>
           </a:p>
@@ -10235,6 +11585,7 @@
               <a:defRPr sz="2000"/>
             </a:pPr>
             <a:r>
+              <a:rPr sz="1400"/>
               <a:t>Domain = Web sitesinin kolay hatırlanan ismi</a:t>
             </a:r>
           </a:p>
@@ -10254,6 +11605,7 @@
               <a:defRPr sz="2000" b="1"/>
             </a:pPr>
             <a:r>
+              <a:rPr sz="1400"/>
               <a:t>✅ Örnekler:</a:t>
             </a:r>
           </a:p>
@@ -10265,6 +11617,7 @@
               <a:defRPr sz="1800"/>
             </a:pPr>
             <a:r>
+              <a:rPr sz="1400"/>
               <a:t>    • www.google.com</a:t>
             </a:r>
           </a:p>
@@ -10276,6 +11629,7 @@
               <a:defRPr sz="1800"/>
             </a:pPr>
             <a:r>
+              <a:rPr sz="1400"/>
               <a:t>    • www.youtube.com</a:t>
             </a:r>
           </a:p>
@@ -10287,6 +11641,7 @@
               <a:defRPr sz="1800"/>
             </a:pPr>
             <a:r>
+              <a:rPr sz="1400"/>
               <a:t>    • www.meb.gov.tr</a:t>
             </a:r>
           </a:p>
@@ -10306,6 +11661,7 @@
               <a:defRPr sz="2000" b="1"/>
             </a:pPr>
             <a:r>
+              <a:rPr sz="1400"/>
               <a:t>📌 Domain vs IP:</a:t>
             </a:r>
           </a:p>
@@ -10317,6 +11673,7 @@
               <a:defRPr sz="1800"/>
             </a:pPr>
             <a:r>
+              <a:rPr sz="1400"/>
               <a:t>    • IP: 172.217.16.142 (zor hatırlanır)</a:t>
             </a:r>
           </a:p>
@@ -10328,6 +11685,7 @@
               <a:defRPr sz="1800"/>
             </a:pPr>
             <a:r>
+              <a:rPr sz="1400"/>
               <a:t>    • Domain: google.com (kolay hatırlanır)</a:t>
             </a:r>
           </a:p>
@@ -10347,6 +11705,7 @@
               <a:defRPr sz="2000" b="1"/>
             </a:pPr>
             <a:r>
+              <a:rPr sz="1400"/>
               <a:t>💡 Analoji:</a:t>
             </a:r>
           </a:p>
@@ -10358,6 +11717,7 @@
               <a:defRPr sz="1800"/>
             </a:pPr>
             <a:r>
+              <a:rPr sz="1400"/>
               <a:t>    • IP Adresi = Telefon numarası (555-123-4567)</a:t>
             </a:r>
           </a:p>
@@ -10369,6 +11729,7 @@
               <a:defRPr sz="1800"/>
             </a:pPr>
             <a:r>
+              <a:rPr sz="1400"/>
               <a:t>    • Domain = Kişi adı (Ahmet)</a:t>
             </a:r>
           </a:p>
@@ -10380,6 +11741,7 @@
               <a:defRPr sz="2000"/>
             </a:pPr>
             <a:r>
+              <a:rPr sz="1400"/>
               <a:t>Hangi kolayca hatırlarsın?</a:t>
             </a:r>
           </a:p>
@@ -10399,6 +11761,7 @@
               <a:defRPr sz="2000"/>
             </a:pPr>
             <a:r>
+              <a:rPr sz="1400"/>
               <a:t>🔍 Domain Yapısı:</a:t>
             </a:r>
           </a:p>
@@ -10410,6 +11773,7 @@
               <a:defRPr sz="2000"/>
             </a:pPr>
             <a:r>
+              <a:rPr sz="1400"/>
               <a:t>www.meb.gov.tr</a:t>
             </a:r>
           </a:p>
@@ -10421,6 +11785,7 @@
               <a:defRPr sz="1800"/>
             </a:pPr>
             <a:r>
+              <a:rPr sz="1400"/>
               <a:t>    • meb = site adı</a:t>
             </a:r>
           </a:p>
@@ -10432,6 +11797,7 @@
               <a:defRPr sz="1800"/>
             </a:pPr>
             <a:r>
+              <a:rPr sz="1400"/>
               <a:t>    • gov = hükümet sitesi</a:t>
             </a:r>
           </a:p>
@@ -10443,6 +11809,7 @@
               <a:defRPr sz="1800"/>
             </a:pPr>
             <a:r>
+              <a:rPr sz="1400"/>
               <a:t>    • tr = Türkiye</a:t>
             </a:r>
           </a:p>
@@ -10462,6 +11829,7 @@
               <a:defRPr sz="2000" b="1"/>
             </a:pPr>
             <a:r>
+              <a:rPr sz="1400"/>
               <a:t>📌 Domain Uzantıları:</a:t>
             </a:r>
           </a:p>
@@ -10473,6 +11841,7 @@
               <a:defRPr sz="1800"/>
             </a:pPr>
             <a:r>
+              <a:rPr sz="1400"/>
               <a:t>    • .com = ticari</a:t>
             </a:r>
           </a:p>
@@ -10484,6 +11853,7 @@
               <a:defRPr sz="1800"/>
             </a:pPr>
             <a:r>
+              <a:rPr sz="1400"/>
               <a:t>    • .org = organizasyon</a:t>
             </a:r>
           </a:p>
@@ -10495,6 +11865,7 @@
               <a:defRPr sz="1800"/>
             </a:pPr>
             <a:r>
+              <a:rPr sz="1400"/>
               <a:t>    • .edu = eğitim</a:t>
             </a:r>
           </a:p>
@@ -10506,6 +11877,7 @@
               <a:defRPr sz="1800"/>
             </a:pPr>
             <a:r>
+              <a:rPr sz="1400"/>
               <a:t>    • .gov = hükümet</a:t>
             </a:r>
           </a:p>
@@ -10604,6 +11976,7 @@
               <a:defRPr sz="2000"/>
             </a:pPr>
             <a:r>
+              <a:rPr sz="1400"/>
               <a:t>Tarayıcı = İnternet'te gezinmek için kullanılan program</a:t>
             </a:r>
           </a:p>
@@ -10623,6 +11996,7 @@
               <a:defRPr sz="2000" b="1"/>
             </a:pPr>
             <a:r>
+              <a:rPr sz="1400"/>
               <a:t>✅ Popüler Tarayıcılar:</a:t>
             </a:r>
           </a:p>
@@ -10634,6 +12008,7 @@
               <a:defRPr sz="1800"/>
             </a:pPr>
             <a:r>
+              <a:rPr sz="1400"/>
               <a:t>    • Google Chrome 🔵</a:t>
             </a:r>
           </a:p>
@@ -10645,6 +12020,7 @@
               <a:defRPr sz="1800"/>
             </a:pPr>
             <a:r>
+              <a:rPr sz="1400"/>
               <a:t>    • Microsoft Edge 🔷</a:t>
             </a:r>
           </a:p>
@@ -10656,6 +12032,7 @@
               <a:defRPr sz="1800"/>
             </a:pPr>
             <a:r>
+              <a:rPr sz="1400"/>
               <a:t>    • Mozilla Firefox 🦊</a:t>
             </a:r>
           </a:p>
@@ -10667,6 +12044,7 @@
               <a:defRPr sz="1800"/>
             </a:pPr>
             <a:r>
+              <a:rPr sz="1400"/>
               <a:t>    • Safari 🧭 (Apple cihazlar)</a:t>
             </a:r>
           </a:p>
@@ -10678,6 +12056,7 @@
               <a:defRPr sz="1800"/>
             </a:pPr>
             <a:r>
+              <a:rPr sz="1400"/>
               <a:t>    • Opera</a:t>
             </a:r>
           </a:p>
@@ -10697,6 +12076,7 @@
               <a:defRPr sz="2000" b="1"/>
             </a:pPr>
             <a:r>
+              <a:rPr sz="1400"/>
               <a:t>📌 Tarayıcılar Ne İşe Yarar?</a:t>
             </a:r>
           </a:p>
@@ -10708,6 +12088,7 @@
               <a:defRPr sz="1800"/>
             </a:pPr>
             <a:r>
+              <a:rPr sz="1400"/>
               <a:t>    • Web sitelerini açar</a:t>
             </a:r>
           </a:p>
@@ -10719,6 +12100,7 @@
               <a:defRPr sz="1800"/>
             </a:pPr>
             <a:r>
+              <a:rPr sz="1400"/>
               <a:t>    • Videoları oynatır</a:t>
             </a:r>
           </a:p>
@@ -10730,6 +12112,7 @@
               <a:defRPr sz="1800"/>
             </a:pPr>
             <a:r>
+              <a:rPr sz="1400"/>
               <a:t>    • Dosya indirir</a:t>
             </a:r>
           </a:p>
@@ -10741,6 +12124,7 @@
               <a:defRPr sz="1800"/>
             </a:pPr>
             <a:r>
+              <a:rPr sz="1400"/>
               <a:t>    • Favorilere site ekler</a:t>
             </a:r>
           </a:p>
@@ -10752,6 +12136,7 @@
               <a:defRPr sz="1800"/>
             </a:pPr>
             <a:r>
+              <a:rPr sz="1400"/>
               <a:t>    • Gezinme geçmişini saklar</a:t>
             </a:r>
           </a:p>
@@ -10771,6 +12156,7 @@
               <a:defRPr sz="2000" b="1"/>
             </a:pPr>
             <a:r>
+              <a:rPr sz="1400"/>
               <a:t>💡 Tarayıcı Bölümleri:</a:t>
             </a:r>
           </a:p>
@@ -10782,6 +12168,7 @@
               <a:defRPr sz="1800"/>
             </a:pPr>
             <a:r>
+              <a:rPr sz="1400"/>
               <a:t>    • Adres çubuğu (URL yazılır)</a:t>
             </a:r>
           </a:p>
@@ -10793,6 +12180,7 @@
               <a:defRPr sz="1800"/>
             </a:pPr>
             <a:r>
+              <a:rPr sz="1400"/>
               <a:t>    • Geri/İleri butonları</a:t>
             </a:r>
           </a:p>
@@ -10804,6 +12192,7 @@
               <a:defRPr sz="1800"/>
             </a:pPr>
             <a:r>
+              <a:rPr sz="1400"/>
               <a:t>    • Yenile butonu</a:t>
             </a:r>
           </a:p>
@@ -10815,6 +12204,7 @@
               <a:defRPr sz="1800"/>
             </a:pPr>
             <a:r>
+              <a:rPr sz="1400"/>
               <a:t>    • Sekmeler (Tab)</a:t>
             </a:r>
           </a:p>
@@ -10826,6 +12216,7 @@
               <a:defRPr sz="1800"/>
             </a:pPr>
             <a:r>
+              <a:rPr sz="1400"/>
               <a:t>    • Favoriler/Yer imleri</a:t>
             </a:r>
           </a:p>
@@ -10845,6 +12236,7 @@
               <a:defRPr sz="2000" b="1"/>
             </a:pPr>
             <a:r>
+              <a:rPr sz="1400"/>
               <a:t>⚡ Güvenli tarayıcı kullanın, güncellemeleri yapın!</a:t>
             </a:r>
           </a:p>

--- a/sunumlar/5-sinif-unite3-aglar-iletisim-DETAYLI.pptx
+++ b/sunumlar/5-sinif-unite3-aglar-iletisim-DETAYLI.pptx
@@ -5815,7 +5815,7 @@
           <a:noFill/>
         </p:spPr>
         <p:txBody>
-          <a:bodyPr wrap="none">
+          <a:bodyPr wrap="square">
             <a:spAutoFit/>
           </a:bodyPr>
           <a:lstStyle/>
@@ -5850,7 +5850,7 @@
           <a:noFill/>
         </p:spPr>
         <p:txBody>
-          <a:bodyPr wrap="none">
+          <a:bodyPr wrap="square">
             <a:spAutoFit/>
           </a:bodyPr>
           <a:lstStyle/>
@@ -5898,7 +5898,7 @@
         </p:nvSpPr>
         <p:spPr/>
         <p:txBody>
-          <a:bodyPr/>
+          <a:bodyPr wrap="square"/>
           <a:lstStyle/>
           <a:p>
             <a:pPr>
@@ -5952,268 +5952,349 @@
             <a:spAutoFit/>
           </a:bodyPr>
           <a:lstStyle/>
-          <a:p/>
-          <a:p>
-            <a:pPr>
-              <a:spcAft>
-                <a:spcPts val="1200"/>
-              </a:spcAft>
-              <a:defRPr sz="2000"/>
-            </a:pPr>
-            <a:r>
-              <a:rPr sz="1400"/>
+          <a:p>
+            <a:pPr>
+              <a:lnSpc>
+                <a:spcPct val="90000"/>
+              </a:lnSpc>
+              <a:spcAft>
+                <a:spcPts val="300"/>
+              </a:spcAft>
+            </a:pPr>
+          </a:p>
+          <a:p>
+            <a:pPr>
+              <a:lnSpc>
+                <a:spcPct val="90000"/>
+              </a:lnSpc>
+              <a:spcAft>
+                <a:spcPts val="300"/>
+              </a:spcAft>
+              <a:defRPr sz="2000"/>
+            </a:pPr>
+            <a:r>
+              <a:rPr sz="1300"/>
               <a:t>Arama motoru = İnternet'te bilgi bulan program</a:t>
             </a:r>
           </a:p>
           <a:p>
             <a:pPr>
-              <a:spcAft>
-                <a:spcPts val="1200"/>
-              </a:spcAft>
-              <a:defRPr sz="2000"/>
-            </a:pPr>
-          </a:p>
-          <a:p>
-            <a:pPr>
-              <a:spcAft>
-                <a:spcPts val="1200"/>
+              <a:lnSpc>
+                <a:spcPct val="90000"/>
+              </a:lnSpc>
+              <a:spcAft>
+                <a:spcPts val="300"/>
+              </a:spcAft>
+              <a:defRPr sz="2000"/>
+            </a:pPr>
+          </a:p>
+          <a:p>
+            <a:pPr>
+              <a:lnSpc>
+                <a:spcPct val="90000"/>
+              </a:lnSpc>
+              <a:spcAft>
+                <a:spcPts val="300"/>
               </a:spcAft>
               <a:defRPr sz="2000" b="1"/>
             </a:pPr>
             <a:r>
-              <a:rPr sz="1400"/>
+              <a:rPr sz="1300"/>
               <a:t>✅ Popüler Arama Motorları:</a:t>
             </a:r>
           </a:p>
           <a:p>
             <a:pPr lvl="1">
-              <a:spcAft>
-                <a:spcPts val="1200"/>
-              </a:spcAft>
-              <a:defRPr sz="1800"/>
-            </a:pPr>
-            <a:r>
-              <a:rPr sz="1400"/>
+              <a:lnSpc>
+                <a:spcPct val="90000"/>
+              </a:lnSpc>
+              <a:spcAft>
+                <a:spcPts val="300"/>
+              </a:spcAft>
+              <a:defRPr sz="1800"/>
+            </a:pPr>
+            <a:r>
+              <a:rPr sz="1300"/>
               <a:t>    • Google 🔍 (En popüler)</a:t>
             </a:r>
           </a:p>
           <a:p>
             <a:pPr lvl="1">
-              <a:spcAft>
-                <a:spcPts val="1200"/>
-              </a:spcAft>
-              <a:defRPr sz="1800"/>
-            </a:pPr>
-            <a:r>
-              <a:rPr sz="1400"/>
+              <a:lnSpc>
+                <a:spcPct val="90000"/>
+              </a:lnSpc>
+              <a:spcAft>
+                <a:spcPts val="300"/>
+              </a:spcAft>
+              <a:defRPr sz="1800"/>
+            </a:pPr>
+            <a:r>
+              <a:rPr sz="1300"/>
               <a:t>    • Bing (Microsoft)</a:t>
             </a:r>
           </a:p>
           <a:p>
             <a:pPr lvl="1">
-              <a:spcAft>
-                <a:spcPts val="1200"/>
-              </a:spcAft>
-              <a:defRPr sz="1800"/>
-            </a:pPr>
-            <a:r>
-              <a:rPr sz="1400"/>
+              <a:lnSpc>
+                <a:spcPct val="90000"/>
+              </a:lnSpc>
+              <a:spcAft>
+                <a:spcPts val="300"/>
+              </a:spcAft>
+              <a:defRPr sz="1800"/>
+            </a:pPr>
+            <a:r>
+              <a:rPr sz="1300"/>
               <a:t>    • Yandex</a:t>
             </a:r>
           </a:p>
           <a:p>
             <a:pPr lvl="1">
-              <a:spcAft>
-                <a:spcPts val="1200"/>
-              </a:spcAft>
-              <a:defRPr sz="1800"/>
-            </a:pPr>
-            <a:r>
-              <a:rPr sz="1400"/>
+              <a:lnSpc>
+                <a:spcPct val="90000"/>
+              </a:lnSpc>
+              <a:spcAft>
+                <a:spcPts val="300"/>
+              </a:spcAft>
+              <a:defRPr sz="1800"/>
+            </a:pPr>
+            <a:r>
+              <a:rPr sz="1300"/>
               <a:t>    • DuckDuckGo (Gizlilik odaklı)</a:t>
             </a:r>
           </a:p>
           <a:p>
             <a:pPr>
-              <a:spcAft>
-                <a:spcPts val="1200"/>
-              </a:spcAft>
-              <a:defRPr sz="2000"/>
-            </a:pPr>
-          </a:p>
-          <a:p>
-            <a:pPr>
-              <a:spcAft>
-                <a:spcPts val="1200"/>
+              <a:lnSpc>
+                <a:spcPct val="90000"/>
+              </a:lnSpc>
+              <a:spcAft>
+                <a:spcPts val="300"/>
+              </a:spcAft>
+              <a:defRPr sz="2000"/>
+            </a:pPr>
+          </a:p>
+          <a:p>
+            <a:pPr>
+              <a:lnSpc>
+                <a:spcPct val="90000"/>
+              </a:lnSpc>
+              <a:spcAft>
+                <a:spcPts val="300"/>
               </a:spcAft>
               <a:defRPr sz="2000" b="1"/>
             </a:pPr>
             <a:r>
-              <a:rPr sz="1400"/>
+              <a:rPr sz="1300"/>
               <a:t>📌 Arama Motoru Nasıl Çalışır?</a:t>
             </a:r>
           </a:p>
           <a:p>
             <a:pPr lvl="1">
-              <a:spcAft>
-                <a:spcPts val="1200"/>
-              </a:spcAft>
-              <a:defRPr sz="1800"/>
-            </a:pPr>
-            <a:r>
-              <a:rPr sz="1400"/>
+              <a:lnSpc>
+                <a:spcPct val="90000"/>
+              </a:lnSpc>
+              <a:spcAft>
+                <a:spcPts val="300"/>
+              </a:spcAft>
+              <a:defRPr sz="1800"/>
+            </a:pPr>
+            <a:r>
+              <a:rPr sz="1300"/>
               <a:t>    • Milyarlarca web sayfasını tarar</a:t>
             </a:r>
           </a:p>
           <a:p>
             <a:pPr lvl="1">
-              <a:spcAft>
-                <a:spcPts val="1200"/>
-              </a:spcAft>
-              <a:defRPr sz="1800"/>
-            </a:pPr>
-            <a:r>
-              <a:rPr sz="1400"/>
+              <a:lnSpc>
+                <a:spcPct val="90000"/>
+              </a:lnSpc>
+              <a:spcAft>
+                <a:spcPts val="300"/>
+              </a:spcAft>
+              <a:defRPr sz="1800"/>
+            </a:pPr>
+            <a:r>
+              <a:rPr sz="1300"/>
               <a:t>    • İçerikleri indexler (kataloglar)</a:t>
             </a:r>
           </a:p>
           <a:p>
             <a:pPr lvl="1">
-              <a:spcAft>
-                <a:spcPts val="1200"/>
-              </a:spcAft>
-              <a:defRPr sz="1800"/>
-            </a:pPr>
-            <a:r>
-              <a:rPr sz="1400"/>
+              <a:lnSpc>
+                <a:spcPct val="90000"/>
+              </a:lnSpc>
+              <a:spcAft>
+                <a:spcPts val="300"/>
+              </a:spcAft>
+              <a:defRPr sz="1800"/>
+            </a:pPr>
+            <a:r>
+              <a:rPr sz="1300"/>
               <a:t>    • Arama yaptığında en uygun sonuçları gösterir</a:t>
             </a:r>
           </a:p>
           <a:p>
             <a:pPr>
-              <a:spcAft>
-                <a:spcPts val="1200"/>
-              </a:spcAft>
-              <a:defRPr sz="2000"/>
-            </a:pPr>
-          </a:p>
-          <a:p>
-            <a:pPr>
-              <a:spcAft>
-                <a:spcPts val="1200"/>
+              <a:lnSpc>
+                <a:spcPct val="90000"/>
+              </a:lnSpc>
+              <a:spcAft>
+                <a:spcPts val="300"/>
+              </a:spcAft>
+              <a:defRPr sz="2000"/>
+            </a:pPr>
+          </a:p>
+          <a:p>
+            <a:pPr>
+              <a:lnSpc>
+                <a:spcPct val="90000"/>
+              </a:lnSpc>
+              <a:spcAft>
+                <a:spcPts val="300"/>
               </a:spcAft>
               <a:defRPr sz="2000" b="1"/>
             </a:pPr>
             <a:r>
-              <a:rPr sz="1400"/>
+              <a:rPr sz="1300"/>
               <a:t>💡 Etkili Arama İpuçları:</a:t>
             </a:r>
           </a:p>
           <a:p>
             <a:pPr>
-              <a:spcAft>
-                <a:spcPts val="1200"/>
-              </a:spcAft>
-              <a:defRPr sz="2000"/>
-            </a:pPr>
-          </a:p>
-          <a:p>
-            <a:pPr>
-              <a:spcAft>
-                <a:spcPts val="1200"/>
+              <a:lnSpc>
+                <a:spcPct val="90000"/>
+              </a:lnSpc>
+              <a:spcAft>
+                <a:spcPts val="300"/>
+              </a:spcAft>
+              <a:defRPr sz="2000"/>
+            </a:pPr>
+          </a:p>
+          <a:p>
+            <a:pPr>
+              <a:lnSpc>
+                <a:spcPct val="90000"/>
+              </a:lnSpc>
+              <a:spcAft>
+                <a:spcPts val="300"/>
               </a:spcAft>
               <a:defRPr sz="2000" b="1"/>
             </a:pPr>
             <a:r>
-              <a:rPr sz="1400"/>
+              <a:rPr sz="1300"/>
               <a:t>✅ Doğru Kelimeler Kullan:</a:t>
             </a:r>
           </a:p>
           <a:p>
             <a:pPr lvl="1">
-              <a:spcAft>
-                <a:spcPts val="1200"/>
-              </a:spcAft>
-              <a:defRPr sz="1800"/>
-            </a:pPr>
-            <a:r>
-              <a:rPr sz="1400"/>
+              <a:lnSpc>
+                <a:spcPct val="90000"/>
+              </a:lnSpc>
+              <a:spcAft>
+                <a:spcPts val="300"/>
+              </a:spcAft>
+              <a:defRPr sz="1800"/>
+            </a:pPr>
+            <a:r>
+              <a:rPr sz="1300"/>
               <a:t>    • Kısa ve net</a:t>
             </a:r>
           </a:p>
           <a:p>
             <a:pPr lvl="1">
-              <a:spcAft>
-                <a:spcPts val="1200"/>
-              </a:spcAft>
-              <a:defRPr sz="1800"/>
-            </a:pPr>
-            <a:r>
-              <a:rPr sz="1400"/>
+              <a:lnSpc>
+                <a:spcPct val="90000"/>
+              </a:lnSpc>
+              <a:spcAft>
+                <a:spcPts val="300"/>
+              </a:spcAft>
+              <a:defRPr sz="1800"/>
+            </a:pPr>
+            <a:r>
+              <a:rPr sz="1300"/>
               <a:t>    • 'Ankara'nın başkenti' yerine 'Ankara başkent'</a:t>
             </a:r>
           </a:p>
           <a:p>
             <a:pPr>
-              <a:spcAft>
-                <a:spcPts val="1200"/>
-              </a:spcAft>
-              <a:defRPr sz="2000"/>
-            </a:pPr>
-          </a:p>
-          <a:p>
-            <a:pPr>
-              <a:spcAft>
-                <a:spcPts val="1200"/>
+              <a:lnSpc>
+                <a:spcPct val="90000"/>
+              </a:lnSpc>
+              <a:spcAft>
+                <a:spcPts val="300"/>
+              </a:spcAft>
+              <a:defRPr sz="2000"/>
+            </a:pPr>
+          </a:p>
+          <a:p>
+            <a:pPr>
+              <a:lnSpc>
+                <a:spcPct val="90000"/>
+              </a:lnSpc>
+              <a:spcAft>
+                <a:spcPts val="300"/>
               </a:spcAft>
               <a:defRPr sz="2000" b="1"/>
             </a:pPr>
             <a:r>
-              <a:rPr sz="1400"/>
+              <a:rPr sz="1300"/>
               <a:t>✅ Tırnak İşareti Kullan:</a:t>
             </a:r>
           </a:p>
           <a:p>
             <a:pPr lvl="1">
-              <a:spcAft>
-                <a:spcPts val="1200"/>
-              </a:spcAft>
-              <a:defRPr sz="1800"/>
-            </a:pPr>
-            <a:r>
-              <a:rPr sz="1400"/>
+              <a:lnSpc>
+                <a:spcPct val="90000"/>
+              </a:lnSpc>
+              <a:spcAft>
+                <a:spcPts val="300"/>
+              </a:spcAft>
+              <a:defRPr sz="1800"/>
+            </a:pPr>
+            <a:r>
+              <a:rPr sz="1300"/>
               <a:t>    • "Atatürk'ün hayatı" → Tam cümleyi arar</a:t>
             </a:r>
           </a:p>
           <a:p>
             <a:pPr>
-              <a:spcAft>
-                <a:spcPts val="1200"/>
-              </a:spcAft>
-              <a:defRPr sz="2000"/>
-            </a:pPr>
-          </a:p>
-          <a:p>
-            <a:pPr>
-              <a:spcAft>
-                <a:spcPts val="1200"/>
+              <a:lnSpc>
+                <a:spcPct val="90000"/>
+              </a:lnSpc>
+              <a:spcAft>
+                <a:spcPts val="300"/>
+              </a:spcAft>
+              <a:defRPr sz="2000"/>
+            </a:pPr>
+          </a:p>
+          <a:p>
+            <a:pPr>
+              <a:lnSpc>
+                <a:spcPct val="90000"/>
+              </a:lnSpc>
+              <a:spcAft>
+                <a:spcPts val="300"/>
               </a:spcAft>
               <a:defRPr sz="2000" b="1"/>
             </a:pPr>
             <a:r>
-              <a:rPr sz="1400"/>
+              <a:rPr sz="1300"/>
               <a:t>✅ Eksi İşareti:</a:t>
             </a:r>
           </a:p>
           <a:p>
             <a:pPr lvl="1">
-              <a:spcAft>
-                <a:spcPts val="1200"/>
-              </a:spcAft>
-              <a:defRPr sz="1800"/>
-            </a:pPr>
-            <a:r>
-              <a:rPr sz="1400"/>
+              <a:lnSpc>
+                <a:spcPct val="90000"/>
+              </a:lnSpc>
+              <a:spcAft>
+                <a:spcPts val="300"/>
+              </a:spcAft>
+              <a:defRPr sz="1800"/>
+            </a:pPr>
+            <a:r>
+              <a:rPr sz="1300"/>
               <a:t>    • Elma -telefon → Elma kelimesini arar, telefon kelimesini hariç tutar</a:t>
             </a:r>
           </a:p>
@@ -6249,7 +6330,7 @@
         </p:nvSpPr>
         <p:spPr/>
         <p:txBody>
-          <a:bodyPr/>
+          <a:bodyPr wrap="square"/>
           <a:lstStyle/>
           <a:p>
             <a:pPr>
@@ -6303,288 +6384,375 @@
             <a:spAutoFit/>
           </a:bodyPr>
           <a:lstStyle/>
-          <a:p/>
-          <a:p>
-            <a:pPr>
-              <a:spcAft>
-                <a:spcPts val="1200"/>
-              </a:spcAft>
-              <a:defRPr sz="2000"/>
-            </a:pPr>
-            <a:r>
-              <a:rPr sz="1600"/>
+          <a:p>
+            <a:pPr>
+              <a:lnSpc>
+                <a:spcPct val="90000"/>
+              </a:lnSpc>
+              <a:spcAft>
+                <a:spcPts val="300"/>
+              </a:spcAft>
+            </a:pPr>
+          </a:p>
+          <a:p>
+            <a:pPr>
+              <a:lnSpc>
+                <a:spcPct val="90000"/>
+              </a:lnSpc>
+              <a:spcAft>
+                <a:spcPts val="300"/>
+              </a:spcAft>
+              <a:defRPr sz="2000"/>
+            </a:pPr>
+            <a:r>
+              <a:rPr sz="1400"/>
               <a:t>İnternet'te her şey doğru değildir!</a:t>
             </a:r>
           </a:p>
           <a:p>
             <a:pPr>
-              <a:spcAft>
-                <a:spcPts val="1200"/>
-              </a:spcAft>
-              <a:defRPr sz="2000"/>
-            </a:pPr>
-          </a:p>
-          <a:p>
-            <a:pPr>
-              <a:spcAft>
-                <a:spcPts val="1200"/>
+              <a:lnSpc>
+                <a:spcPct val="90000"/>
+              </a:lnSpc>
+              <a:spcAft>
+                <a:spcPts val="300"/>
+              </a:spcAft>
+              <a:defRPr sz="2000"/>
+            </a:pPr>
+          </a:p>
+          <a:p>
+            <a:pPr>
+              <a:lnSpc>
+                <a:spcPct val="90000"/>
+              </a:lnSpc>
+              <a:spcAft>
+                <a:spcPts val="300"/>
               </a:spcAft>
               <a:defRPr sz="2000" b="1"/>
             </a:pPr>
             <a:r>
-              <a:rPr sz="1600"/>
+              <a:rPr sz="1400"/>
               <a:t>✅ Güvenilir Kaynak Özellikleri:</a:t>
             </a:r>
           </a:p>
           <a:p>
             <a:pPr>
-              <a:spcAft>
-                <a:spcPts val="1200"/>
-              </a:spcAft>
-              <a:defRPr sz="2000"/>
-            </a:pPr>
-          </a:p>
-          <a:p>
-            <a:pPr>
-              <a:spcAft>
-                <a:spcPts val="1200"/>
-              </a:spcAft>
-              <a:defRPr sz="2000"/>
-            </a:pPr>
-            <a:r>
-              <a:rPr sz="1600"/>
+              <a:lnSpc>
+                <a:spcPct val="90000"/>
+              </a:lnSpc>
+              <a:spcAft>
+                <a:spcPts val="300"/>
+              </a:spcAft>
+              <a:defRPr sz="2000"/>
+            </a:pPr>
+          </a:p>
+          <a:p>
+            <a:pPr>
+              <a:lnSpc>
+                <a:spcPct val="90000"/>
+              </a:lnSpc>
+              <a:spcAft>
+                <a:spcPts val="300"/>
+              </a:spcAft>
+              <a:defRPr sz="2000"/>
+            </a:pPr>
+            <a:r>
+              <a:rPr sz="1400"/>
               <a:t>🔒 Güvenilir Domain:</a:t>
             </a:r>
           </a:p>
           <a:p>
             <a:pPr lvl="1">
-              <a:spcAft>
-                <a:spcPts val="1200"/>
-              </a:spcAft>
-              <a:defRPr sz="1800"/>
-            </a:pPr>
-            <a:r>
-              <a:rPr sz="1600"/>
+              <a:lnSpc>
+                <a:spcPct val="90000"/>
+              </a:lnSpc>
+              <a:spcAft>
+                <a:spcPts val="300"/>
+              </a:spcAft>
+              <a:defRPr sz="1800"/>
+            </a:pPr>
+            <a:r>
+              <a:rPr sz="1400"/>
               <a:t>    • .edu (eğitim kurumları)</a:t>
             </a:r>
           </a:p>
           <a:p>
             <a:pPr lvl="1">
-              <a:spcAft>
-                <a:spcPts val="1200"/>
-              </a:spcAft>
-              <a:defRPr sz="1800"/>
-            </a:pPr>
-            <a:r>
-              <a:rPr sz="1600"/>
+              <a:lnSpc>
+                <a:spcPct val="90000"/>
+              </a:lnSpc>
+              <a:spcAft>
+                <a:spcPts val="300"/>
+              </a:spcAft>
+              <a:defRPr sz="1800"/>
+            </a:pPr>
+            <a:r>
+              <a:rPr sz="1400"/>
               <a:t>    • .gov (hükümet siteleri)</a:t>
             </a:r>
           </a:p>
           <a:p>
             <a:pPr lvl="1">
-              <a:spcAft>
-                <a:spcPts val="1200"/>
-              </a:spcAft>
-              <a:defRPr sz="1800"/>
-            </a:pPr>
-            <a:r>
-              <a:rPr sz="1600"/>
+              <a:lnSpc>
+                <a:spcPct val="90000"/>
+              </a:lnSpc>
+              <a:spcAft>
+                <a:spcPts val="300"/>
+              </a:spcAft>
+              <a:defRPr sz="1800"/>
+            </a:pPr>
+            <a:r>
+              <a:rPr sz="1400"/>
               <a:t>    • .org (organizasyonlar)</a:t>
             </a:r>
           </a:p>
           <a:p>
             <a:pPr>
-              <a:spcAft>
-                <a:spcPts val="1200"/>
-              </a:spcAft>
-              <a:defRPr sz="2000"/>
-            </a:pPr>
-          </a:p>
-          <a:p>
-            <a:pPr>
-              <a:spcAft>
-                <a:spcPts val="1200"/>
-              </a:spcAft>
-              <a:defRPr sz="2000"/>
-            </a:pPr>
-            <a:r>
-              <a:rPr sz="1600"/>
+              <a:lnSpc>
+                <a:spcPct val="90000"/>
+              </a:lnSpc>
+              <a:spcAft>
+                <a:spcPts val="300"/>
+              </a:spcAft>
+              <a:defRPr sz="2000"/>
+            </a:pPr>
+          </a:p>
+          <a:p>
+            <a:pPr>
+              <a:lnSpc>
+                <a:spcPct val="90000"/>
+              </a:lnSpc>
+              <a:spcAft>
+                <a:spcPts val="300"/>
+              </a:spcAft>
+              <a:defRPr sz="2000"/>
+            </a:pPr>
+            <a:r>
+              <a:rPr sz="1400"/>
               <a:t>📝 Yazar Bilgisi:</a:t>
             </a:r>
           </a:p>
           <a:p>
             <a:pPr lvl="1">
-              <a:spcAft>
-                <a:spcPts val="1200"/>
-              </a:spcAft>
-              <a:defRPr sz="1800"/>
-            </a:pPr>
-            <a:r>
-              <a:rPr sz="1600"/>
+              <a:lnSpc>
+                <a:spcPct val="90000"/>
+              </a:lnSpc>
+              <a:spcAft>
+                <a:spcPts val="300"/>
+              </a:spcAft>
+              <a:defRPr sz="1800"/>
+            </a:pPr>
+            <a:r>
+              <a:rPr sz="1400"/>
               <a:t>    • Kim yazmış?</a:t>
             </a:r>
           </a:p>
           <a:p>
             <a:pPr lvl="1">
-              <a:spcAft>
-                <a:spcPts val="1200"/>
-              </a:spcAft>
-              <a:defRPr sz="1800"/>
-            </a:pPr>
-            <a:r>
-              <a:rPr sz="1600"/>
+              <a:lnSpc>
+                <a:spcPct val="90000"/>
+              </a:lnSpc>
+              <a:spcAft>
+                <a:spcPts val="300"/>
+              </a:spcAft>
+              <a:defRPr sz="1800"/>
+            </a:pPr>
+            <a:r>
+              <a:rPr sz="1400"/>
               <a:t>    • Uzman mı?</a:t>
             </a:r>
           </a:p>
           <a:p>
             <a:pPr>
-              <a:spcAft>
-                <a:spcPts val="1200"/>
-              </a:spcAft>
-              <a:defRPr sz="2000"/>
-            </a:pPr>
-          </a:p>
-          <a:p>
-            <a:pPr>
-              <a:spcAft>
-                <a:spcPts val="1200"/>
-              </a:spcAft>
-              <a:defRPr sz="2000"/>
-            </a:pPr>
-            <a:r>
-              <a:rPr sz="1600"/>
+              <a:lnSpc>
+                <a:spcPct val="90000"/>
+              </a:lnSpc>
+              <a:spcAft>
+                <a:spcPts val="300"/>
+              </a:spcAft>
+              <a:defRPr sz="2000"/>
+            </a:pPr>
+          </a:p>
+          <a:p>
+            <a:pPr>
+              <a:lnSpc>
+                <a:spcPct val="90000"/>
+              </a:lnSpc>
+              <a:spcAft>
+                <a:spcPts val="300"/>
+              </a:spcAft>
+              <a:defRPr sz="2000"/>
+            </a:pPr>
+            <a:r>
+              <a:rPr sz="1400"/>
               <a:t>📅 Güncel mi?</a:t>
             </a:r>
           </a:p>
           <a:p>
             <a:pPr lvl="1">
-              <a:spcAft>
-                <a:spcPts val="1200"/>
-              </a:spcAft>
-              <a:defRPr sz="1800"/>
-            </a:pPr>
-            <a:r>
-              <a:rPr sz="1600"/>
+              <a:lnSpc>
+                <a:spcPct val="90000"/>
+              </a:lnSpc>
+              <a:spcAft>
+                <a:spcPts val="300"/>
+              </a:spcAft>
+              <a:defRPr sz="1800"/>
+            </a:pPr>
+            <a:r>
+              <a:rPr sz="1400"/>
               <a:t>    • Ne zaman yazılmış?</a:t>
             </a:r>
           </a:p>
           <a:p>
             <a:pPr lvl="1">
-              <a:spcAft>
-                <a:spcPts val="1200"/>
-              </a:spcAft>
-              <a:defRPr sz="1800"/>
-            </a:pPr>
-            <a:r>
-              <a:rPr sz="1600"/>
+              <a:lnSpc>
+                <a:spcPct val="90000"/>
+              </a:lnSpc>
+              <a:spcAft>
+                <a:spcPts val="300"/>
+              </a:spcAft>
+              <a:defRPr sz="1800"/>
+            </a:pPr>
+            <a:r>
+              <a:rPr sz="1400"/>
               <a:t>    • Eski bilgiler yanlış olabilir</a:t>
             </a:r>
           </a:p>
           <a:p>
             <a:pPr>
-              <a:spcAft>
-                <a:spcPts val="1200"/>
-              </a:spcAft>
-              <a:defRPr sz="2000"/>
-            </a:pPr>
-          </a:p>
-          <a:p>
-            <a:pPr>
-              <a:spcAft>
-                <a:spcPts val="1200"/>
-              </a:spcAft>
-              <a:defRPr sz="2000"/>
-            </a:pPr>
-            <a:r>
-              <a:rPr sz="1600"/>
+              <a:lnSpc>
+                <a:spcPct val="90000"/>
+              </a:lnSpc>
+              <a:spcAft>
+                <a:spcPts val="300"/>
+              </a:spcAft>
+              <a:defRPr sz="2000"/>
+            </a:pPr>
+          </a:p>
+          <a:p>
+            <a:pPr>
+              <a:lnSpc>
+                <a:spcPct val="90000"/>
+              </a:lnSpc>
+              <a:spcAft>
+                <a:spcPts val="300"/>
+              </a:spcAft>
+              <a:defRPr sz="2000"/>
+            </a:pPr>
+            <a:r>
+              <a:rPr sz="1400"/>
               <a:t>📚 Kaynak Göstermiş mi?</a:t>
             </a:r>
           </a:p>
           <a:p>
             <a:pPr lvl="1">
-              <a:spcAft>
-                <a:spcPts val="1200"/>
-              </a:spcAft>
-              <a:defRPr sz="1800"/>
-            </a:pPr>
-            <a:r>
-              <a:rPr sz="1600"/>
+              <a:lnSpc>
+                <a:spcPct val="90000"/>
+              </a:lnSpc>
+              <a:spcAft>
+                <a:spcPts val="300"/>
+              </a:spcAft>
+              <a:defRPr sz="1800"/>
+            </a:pPr>
+            <a:r>
+              <a:rPr sz="1400"/>
               <a:t>    • Bilgilerin kaynağı var mı?</a:t>
             </a:r>
           </a:p>
           <a:p>
             <a:pPr>
-              <a:spcAft>
-                <a:spcPts val="1200"/>
-              </a:spcAft>
-              <a:defRPr sz="2000"/>
-            </a:pPr>
-          </a:p>
-          <a:p>
-            <a:pPr>
-              <a:spcAft>
-                <a:spcPts val="1200"/>
+              <a:lnSpc>
+                <a:spcPct val="90000"/>
+              </a:lnSpc>
+              <a:spcAft>
+                <a:spcPts val="300"/>
+              </a:spcAft>
+              <a:defRPr sz="2000"/>
+            </a:pPr>
+          </a:p>
+          <a:p>
+            <a:pPr>
+              <a:lnSpc>
+                <a:spcPct val="90000"/>
+              </a:lnSpc>
+              <a:spcAft>
+                <a:spcPts val="300"/>
               </a:spcAft>
               <a:defRPr sz="2000" b="1"/>
             </a:pPr>
             <a:r>
-              <a:rPr sz="1600"/>
+              <a:rPr sz="1400"/>
               <a:t>💡 Karşılaştır:</a:t>
             </a:r>
           </a:p>
           <a:p>
             <a:pPr lvl="1">
-              <a:spcAft>
-                <a:spcPts val="1200"/>
-              </a:spcAft>
-              <a:defRPr sz="1800"/>
-            </a:pPr>
-            <a:r>
-              <a:rPr sz="1600"/>
+              <a:lnSpc>
+                <a:spcPct val="90000"/>
+              </a:lnSpc>
+              <a:spcAft>
+                <a:spcPts val="300"/>
+              </a:spcAft>
+              <a:defRPr sz="1800"/>
+            </a:pPr>
+            <a:r>
+              <a:rPr sz="1400"/>
               <a:t>    • Birden fazla kaynağa bak</a:t>
             </a:r>
           </a:p>
           <a:p>
             <a:pPr lvl="1">
-              <a:spcAft>
-                <a:spcPts val="1200"/>
-              </a:spcAft>
-              <a:defRPr sz="1800"/>
-            </a:pPr>
-            <a:r>
-              <a:rPr sz="1600"/>
+              <a:lnSpc>
+                <a:spcPct val="90000"/>
+              </a:lnSpc>
+              <a:spcAft>
+                <a:spcPts val="300"/>
+              </a:spcAft>
+              <a:defRPr sz="1800"/>
+            </a:pPr>
+            <a:r>
+              <a:rPr sz="1400"/>
               <a:t>    • Aynı bilgiyi veren birkaç site var mı?</a:t>
             </a:r>
           </a:p>
           <a:p>
             <a:pPr>
-              <a:spcAft>
-                <a:spcPts val="1200"/>
-              </a:spcAft>
-              <a:defRPr sz="2000"/>
-            </a:pPr>
-          </a:p>
-          <a:p>
-            <a:pPr>
-              <a:spcAft>
-                <a:spcPts val="1200"/>
-              </a:spcAft>
-              <a:defRPr sz="2000"/>
-            </a:pPr>
-            <a:r>
-              <a:rPr sz="1600"/>
+              <a:lnSpc>
+                <a:spcPct val="90000"/>
+              </a:lnSpc>
+              <a:spcAft>
+                <a:spcPts val="300"/>
+              </a:spcAft>
+              <a:defRPr sz="2000"/>
+            </a:pPr>
+          </a:p>
+          <a:p>
+            <a:pPr>
+              <a:lnSpc>
+                <a:spcPct val="90000"/>
+              </a:lnSpc>
+              <a:spcAft>
+                <a:spcPts val="300"/>
+              </a:spcAft>
+              <a:defRPr sz="2000"/>
+            </a:pPr>
+            <a:r>
+              <a:rPr sz="1400"/>
               <a:t>⚠️ Dikkat:</a:t>
             </a:r>
           </a:p>
           <a:p>
             <a:pPr>
-              <a:spcAft>
-                <a:spcPts val="1200"/>
-              </a:spcAft>
-              <a:defRPr sz="2000"/>
-            </a:pPr>
-            <a:r>
-              <a:rPr sz="1600"/>
+              <a:lnSpc>
+                <a:spcPct val="90000"/>
+              </a:lnSpc>
+              <a:spcAft>
+                <a:spcPts val="300"/>
+              </a:spcAft>
+              <a:defRPr sz="2000"/>
+            </a:pPr>
+            <a:r>
+              <a:rPr sz="1400"/>
               <a:t>Wikipedia iyi başlangıç ama tek kaynak olmamalı!</a:t>
             </a:r>
           </a:p>
@@ -6620,7 +6788,7 @@
         </p:nvSpPr>
         <p:spPr/>
         <p:txBody>
-          <a:bodyPr/>
+          <a:bodyPr wrap="square"/>
           <a:lstStyle/>
           <a:p>
             <a:pPr>
@@ -6674,320 +6842,413 @@
             <a:spAutoFit/>
           </a:bodyPr>
           <a:lstStyle/>
-          <a:p/>
-          <a:p>
-            <a:pPr>
-              <a:spcAft>
-                <a:spcPts val="1200"/>
-              </a:spcAft>
-              <a:defRPr sz="2000"/>
-            </a:pPr>
-            <a:r>
-              <a:rPr sz="1400"/>
+          <a:p>
+            <a:pPr>
+              <a:lnSpc>
+                <a:spcPct val="90000"/>
+              </a:lnSpc>
+              <a:spcAft>
+                <a:spcPts val="300"/>
+              </a:spcAft>
+            </a:pPr>
+          </a:p>
+          <a:p>
+            <a:pPr>
+              <a:lnSpc>
+                <a:spcPct val="90000"/>
+              </a:lnSpc>
+              <a:spcAft>
+                <a:spcPts val="300"/>
+              </a:spcAft>
+              <a:defRPr sz="2000"/>
+            </a:pPr>
+            <a:r>
+              <a:rPr sz="1300"/>
               <a:t>E-posta = Elektronik Posta (Email)</a:t>
             </a:r>
           </a:p>
           <a:p>
             <a:pPr>
-              <a:spcAft>
-                <a:spcPts val="1200"/>
-              </a:spcAft>
-              <a:defRPr sz="2000"/>
-            </a:pPr>
-          </a:p>
-          <a:p>
-            <a:pPr>
-              <a:spcAft>
-                <a:spcPts val="1200"/>
+              <a:lnSpc>
+                <a:spcPct val="90000"/>
+              </a:lnSpc>
+              <a:spcAft>
+                <a:spcPts val="300"/>
+              </a:spcAft>
+              <a:defRPr sz="2000"/>
+            </a:pPr>
+          </a:p>
+          <a:p>
+            <a:pPr>
+              <a:lnSpc>
+                <a:spcPct val="90000"/>
+              </a:lnSpc>
+              <a:spcAft>
+                <a:spcPts val="300"/>
               </a:spcAft>
               <a:defRPr sz="2000" b="1"/>
             </a:pPr>
             <a:r>
-              <a:rPr sz="1400"/>
+              <a:rPr sz="1300"/>
               <a:t>✅ E-posta Sağlayıcıları:</a:t>
             </a:r>
           </a:p>
           <a:p>
             <a:pPr lvl="1">
-              <a:spcAft>
-                <a:spcPts val="1200"/>
-              </a:spcAft>
-              <a:defRPr sz="1800"/>
-            </a:pPr>
-            <a:r>
-              <a:rPr sz="1400"/>
+              <a:lnSpc>
+                <a:spcPct val="90000"/>
+              </a:lnSpc>
+              <a:spcAft>
+                <a:spcPts val="300"/>
+              </a:spcAft>
+              <a:defRPr sz="1800"/>
+            </a:pPr>
+            <a:r>
+              <a:rPr sz="1300"/>
               <a:t>    • Gmail (Google)</a:t>
             </a:r>
           </a:p>
           <a:p>
             <a:pPr lvl="1">
-              <a:spcAft>
-                <a:spcPts val="1200"/>
-              </a:spcAft>
-              <a:defRPr sz="1800"/>
-            </a:pPr>
-            <a:r>
-              <a:rPr sz="1400"/>
+              <a:lnSpc>
+                <a:spcPct val="90000"/>
+              </a:lnSpc>
+              <a:spcAft>
+                <a:spcPts val="300"/>
+              </a:spcAft>
+              <a:defRPr sz="1800"/>
+            </a:pPr>
+            <a:r>
+              <a:rPr sz="1300"/>
               <a:t>    • Outlook (Microsoft)</a:t>
             </a:r>
           </a:p>
           <a:p>
             <a:pPr lvl="1">
-              <a:spcAft>
-                <a:spcPts val="1200"/>
-              </a:spcAft>
-              <a:defRPr sz="1800"/>
-            </a:pPr>
-            <a:r>
-              <a:rPr sz="1400"/>
+              <a:lnSpc>
+                <a:spcPct val="90000"/>
+              </a:lnSpc>
+              <a:spcAft>
+                <a:spcPts val="300"/>
+              </a:spcAft>
+              <a:defRPr sz="1800"/>
+            </a:pPr>
+            <a:r>
+              <a:rPr sz="1300"/>
               <a:t>    • Yandex Mail</a:t>
             </a:r>
           </a:p>
           <a:p>
             <a:pPr>
-              <a:spcAft>
-                <a:spcPts val="1200"/>
-              </a:spcAft>
-              <a:defRPr sz="2000"/>
-            </a:pPr>
-          </a:p>
-          <a:p>
-            <a:pPr>
-              <a:spcAft>
-                <a:spcPts val="1200"/>
+              <a:lnSpc>
+                <a:spcPct val="90000"/>
+              </a:lnSpc>
+              <a:spcAft>
+                <a:spcPts val="300"/>
+              </a:spcAft>
+              <a:defRPr sz="2000"/>
+            </a:pPr>
+          </a:p>
+          <a:p>
+            <a:pPr>
+              <a:lnSpc>
+                <a:spcPct val="90000"/>
+              </a:lnSpc>
+              <a:spcAft>
+                <a:spcPts val="300"/>
               </a:spcAft>
               <a:defRPr sz="2000" b="1"/>
             </a:pPr>
             <a:r>
-              <a:rPr sz="1400"/>
+              <a:rPr sz="1300"/>
               <a:t>📌 E-posta Adresi Yapısı:</a:t>
             </a:r>
           </a:p>
           <a:p>
             <a:pPr>
-              <a:spcAft>
-                <a:spcPts val="1200"/>
-              </a:spcAft>
-              <a:defRPr sz="2000"/>
-            </a:pPr>
-            <a:r>
-              <a:rPr sz="1400"/>
+              <a:lnSpc>
+                <a:spcPct val="90000"/>
+              </a:lnSpc>
+              <a:spcAft>
+                <a:spcPts val="300"/>
+              </a:spcAft>
+              <a:defRPr sz="2000"/>
+            </a:pPr>
+            <a:r>
+              <a:rPr sz="1300"/>
               <a:t>kullaniciadi@gmail.com</a:t>
             </a:r>
           </a:p>
           <a:p>
             <a:pPr lvl="1">
-              <a:spcAft>
-                <a:spcPts val="1200"/>
-              </a:spcAft>
-              <a:defRPr sz="1800"/>
-            </a:pPr>
-            <a:r>
-              <a:rPr sz="1400"/>
+              <a:lnSpc>
+                <a:spcPct val="90000"/>
+              </a:lnSpc>
+              <a:spcAft>
+                <a:spcPts val="300"/>
+              </a:spcAft>
+              <a:defRPr sz="1800"/>
+            </a:pPr>
+            <a:r>
+              <a:rPr sz="1300"/>
               <a:t>    • kullaniciadi = Sizin seçtiğiniz isim</a:t>
             </a:r>
           </a:p>
           <a:p>
             <a:pPr lvl="1">
-              <a:spcAft>
-                <a:spcPts val="1200"/>
-              </a:spcAft>
-              <a:defRPr sz="1800"/>
-            </a:pPr>
-            <a:r>
-              <a:rPr sz="1400"/>
+              <a:lnSpc>
+                <a:spcPct val="90000"/>
+              </a:lnSpc>
+              <a:spcAft>
+                <a:spcPts val="300"/>
+              </a:spcAft>
+              <a:defRPr sz="1800"/>
+            </a:pPr>
+            <a:r>
+              <a:rPr sz="1300"/>
               <a:t>    • @ = 'at' işareti (zorunlu)</a:t>
             </a:r>
           </a:p>
           <a:p>
             <a:pPr lvl="1">
-              <a:spcAft>
-                <a:spcPts val="1200"/>
-              </a:spcAft>
-              <a:defRPr sz="1800"/>
-            </a:pPr>
-            <a:r>
-              <a:rPr sz="1400"/>
+              <a:lnSpc>
+                <a:spcPct val="90000"/>
+              </a:lnSpc>
+              <a:spcAft>
+                <a:spcPts val="300"/>
+              </a:spcAft>
+              <a:defRPr sz="1800"/>
+            </a:pPr>
+            <a:r>
+              <a:rPr sz="1300"/>
               <a:t>    • gmail.com = E-posta sağlayıcı</a:t>
             </a:r>
           </a:p>
           <a:p>
             <a:pPr>
-              <a:spcAft>
-                <a:spcPts val="1200"/>
-              </a:spcAft>
-              <a:defRPr sz="2000"/>
-            </a:pPr>
-          </a:p>
-          <a:p>
-            <a:pPr>
-              <a:spcAft>
-                <a:spcPts val="1200"/>
+              <a:lnSpc>
+                <a:spcPct val="90000"/>
+              </a:lnSpc>
+              <a:spcAft>
+                <a:spcPts val="300"/>
+              </a:spcAft>
+              <a:defRPr sz="2000"/>
+            </a:pPr>
+          </a:p>
+          <a:p>
+            <a:pPr>
+              <a:lnSpc>
+                <a:spcPct val="90000"/>
+              </a:lnSpc>
+              <a:spcAft>
+                <a:spcPts val="300"/>
               </a:spcAft>
               <a:defRPr sz="2000" b="1"/>
             </a:pPr>
             <a:r>
-              <a:rPr sz="1400"/>
+              <a:rPr sz="1300"/>
               <a:t>✅ E-posta Gönderme:</a:t>
             </a:r>
           </a:p>
           <a:p>
             <a:pPr lvl="1">
-              <a:spcAft>
-                <a:spcPts val="1200"/>
-              </a:spcAft>
-              <a:defRPr sz="1800"/>
-            </a:pPr>
-            <a:r>
-              <a:rPr sz="1400"/>
+              <a:lnSpc>
+                <a:spcPct val="90000"/>
+              </a:lnSpc>
+              <a:spcAft>
+                <a:spcPts val="300"/>
+              </a:spcAft>
+              <a:defRPr sz="1800"/>
+            </a:pPr>
+            <a:r>
+              <a:rPr sz="1300"/>
               <a:t>    • Alıcı: Kime gönderilecek?</a:t>
             </a:r>
           </a:p>
           <a:p>
             <a:pPr lvl="1">
-              <a:spcAft>
-                <a:spcPts val="1200"/>
-              </a:spcAft>
-              <a:defRPr sz="1800"/>
-            </a:pPr>
-            <a:r>
-              <a:rPr sz="1400"/>
+              <a:lnSpc>
+                <a:spcPct val="90000"/>
+              </a:lnSpc>
+              <a:spcAft>
+                <a:spcPts val="300"/>
+              </a:spcAft>
+              <a:defRPr sz="1800"/>
+            </a:pPr>
+            <a:r>
+              <a:rPr sz="1300"/>
               <a:t>    • Konu: Ne hakkında?</a:t>
             </a:r>
           </a:p>
           <a:p>
             <a:pPr lvl="1">
-              <a:spcAft>
-                <a:spcPts val="1200"/>
-              </a:spcAft>
-              <a:defRPr sz="1800"/>
-            </a:pPr>
-            <a:r>
-              <a:rPr sz="1400"/>
+              <a:lnSpc>
+                <a:spcPct val="90000"/>
+              </a:lnSpc>
+              <a:spcAft>
+                <a:spcPts val="300"/>
+              </a:spcAft>
+              <a:defRPr sz="1800"/>
+            </a:pPr>
+            <a:r>
+              <a:rPr sz="1300"/>
               <a:t>    • Mesaj: İçerik</a:t>
             </a:r>
           </a:p>
           <a:p>
             <a:pPr lvl="1">
-              <a:spcAft>
-                <a:spcPts val="1200"/>
-              </a:spcAft>
-              <a:defRPr sz="1800"/>
-            </a:pPr>
-            <a:r>
-              <a:rPr sz="1400"/>
+              <a:lnSpc>
+                <a:spcPct val="90000"/>
+              </a:lnSpc>
+              <a:spcAft>
+                <a:spcPts val="300"/>
+              </a:spcAft>
+              <a:defRPr sz="1800"/>
+            </a:pPr>
+            <a:r>
+              <a:rPr sz="1300"/>
               <a:t>    • Ek: Dosya eklenebilir</a:t>
             </a:r>
           </a:p>
           <a:p>
             <a:pPr>
-              <a:spcAft>
-                <a:spcPts val="1200"/>
-              </a:spcAft>
-              <a:defRPr sz="2000"/>
-            </a:pPr>
-          </a:p>
-          <a:p>
-            <a:pPr>
-              <a:spcAft>
-                <a:spcPts val="1200"/>
+              <a:lnSpc>
+                <a:spcPct val="90000"/>
+              </a:lnSpc>
+              <a:spcAft>
+                <a:spcPts val="300"/>
+              </a:spcAft>
+              <a:defRPr sz="2000"/>
+            </a:pPr>
+          </a:p>
+          <a:p>
+            <a:pPr>
+              <a:lnSpc>
+                <a:spcPct val="90000"/>
+              </a:lnSpc>
+              <a:spcAft>
+                <a:spcPts val="300"/>
               </a:spcAft>
               <a:defRPr sz="2000" b="1"/>
             </a:pPr>
             <a:r>
-              <a:rPr sz="1400"/>
+              <a:rPr sz="1300"/>
               <a:t>💡 E-posta Etiği:</a:t>
             </a:r>
           </a:p>
           <a:p>
             <a:pPr lvl="1">
-              <a:spcAft>
-                <a:spcPts val="1200"/>
-              </a:spcAft>
-              <a:defRPr sz="1800"/>
-            </a:pPr>
-            <a:r>
-              <a:rPr sz="1400"/>
+              <a:lnSpc>
+                <a:spcPct val="90000"/>
+              </a:lnSpc>
+              <a:spcAft>
+                <a:spcPts val="300"/>
+              </a:spcAft>
+              <a:defRPr sz="1800"/>
+            </a:pPr>
+            <a:r>
+              <a:rPr sz="1300"/>
               <a:t>    • Kibarca yaz</a:t>
             </a:r>
           </a:p>
           <a:p>
             <a:pPr lvl="1">
-              <a:spcAft>
-                <a:spcPts val="1200"/>
-              </a:spcAft>
-              <a:defRPr sz="1800"/>
-            </a:pPr>
-            <a:r>
-              <a:rPr sz="1400"/>
+              <a:lnSpc>
+                <a:spcPct val="90000"/>
+              </a:lnSpc>
+              <a:spcAft>
+                <a:spcPts val="300"/>
+              </a:spcAft>
+              <a:defRPr sz="1800"/>
+            </a:pPr>
+            <a:r>
+              <a:rPr sz="1300"/>
               <a:t>    • Konuyu belirt</a:t>
             </a:r>
           </a:p>
           <a:p>
             <a:pPr lvl="1">
-              <a:spcAft>
-                <a:spcPts val="1200"/>
-              </a:spcAft>
-              <a:defRPr sz="1800"/>
-            </a:pPr>
-            <a:r>
-              <a:rPr sz="1400"/>
+              <a:lnSpc>
+                <a:spcPct val="90000"/>
+              </a:lnSpc>
+              <a:spcAft>
+                <a:spcPts val="300"/>
+              </a:spcAft>
+              <a:defRPr sz="1800"/>
+            </a:pPr>
+            <a:r>
+              <a:rPr sz="1300"/>
               <a:t>    • İmza ekle</a:t>
             </a:r>
           </a:p>
           <a:p>
             <a:pPr lvl="1">
-              <a:spcAft>
-                <a:spcPts val="1200"/>
-              </a:spcAft>
-              <a:defRPr sz="1800"/>
-            </a:pPr>
-            <a:r>
-              <a:rPr sz="1400"/>
+              <a:lnSpc>
+                <a:spcPct val="90000"/>
+              </a:lnSpc>
+              <a:spcAft>
+                <a:spcPts val="300"/>
+              </a:spcAft>
+              <a:defRPr sz="1800"/>
+            </a:pPr>
+            <a:r>
+              <a:rPr sz="1300"/>
               <a:t>    • Spam yapma (gereksiz mail gönderme)</a:t>
             </a:r>
           </a:p>
           <a:p>
             <a:pPr>
-              <a:spcAft>
-                <a:spcPts val="1200"/>
-              </a:spcAft>
-              <a:defRPr sz="2000"/>
-            </a:pPr>
-          </a:p>
-          <a:p>
-            <a:pPr>
-              <a:spcAft>
-                <a:spcPts val="1200"/>
+              <a:lnSpc>
+                <a:spcPct val="90000"/>
+              </a:lnSpc>
+              <a:spcAft>
+                <a:spcPts val="300"/>
+              </a:spcAft>
+              <a:defRPr sz="2000"/>
+            </a:pPr>
+          </a:p>
+          <a:p>
+            <a:pPr>
+              <a:lnSpc>
+                <a:spcPct val="90000"/>
+              </a:lnSpc>
+              <a:spcAft>
+                <a:spcPts val="300"/>
               </a:spcAft>
               <a:defRPr sz="2000" b="1"/>
             </a:pPr>
             <a:r>
-              <a:rPr sz="1400"/>
+              <a:rPr sz="1300"/>
               <a:t>⚡ CC ve BCC:</a:t>
             </a:r>
           </a:p>
           <a:p>
             <a:pPr lvl="1">
-              <a:spcAft>
-                <a:spcPts val="1200"/>
-              </a:spcAft>
-              <a:defRPr sz="1800"/>
-            </a:pPr>
-            <a:r>
-              <a:rPr sz="1400"/>
+              <a:lnSpc>
+                <a:spcPct val="90000"/>
+              </a:lnSpc>
+              <a:spcAft>
+                <a:spcPts val="300"/>
+              </a:spcAft>
+              <a:defRPr sz="1800"/>
+            </a:pPr>
+            <a:r>
+              <a:rPr sz="1300"/>
               <a:t>    • CC = Carbon Copy (Kopya gönder)</a:t>
             </a:r>
           </a:p>
           <a:p>
             <a:pPr lvl="1">
-              <a:spcAft>
-                <a:spcPts val="1200"/>
-              </a:spcAft>
-              <a:defRPr sz="1800"/>
-            </a:pPr>
-            <a:r>
-              <a:rPr sz="1400"/>
+              <a:lnSpc>
+                <a:spcPct val="90000"/>
+              </a:lnSpc>
+              <a:spcAft>
+                <a:spcPts val="300"/>
+              </a:spcAft>
+              <a:defRPr sz="1800"/>
+            </a:pPr>
+            <a:r>
+              <a:rPr sz="1300"/>
               <a:t>    • BCC = Blind Carbon Copy (Gizli kopya)</a:t>
             </a:r>
           </a:p>
@@ -7023,7 +7284,7 @@
         </p:nvSpPr>
         <p:spPr/>
         <p:txBody>
-          <a:bodyPr/>
+          <a:bodyPr wrap="square"/>
           <a:lstStyle/>
           <a:p>
             <a:pPr>
@@ -7077,308 +7338,398 @@
             <a:spAutoFit/>
           </a:bodyPr>
           <a:lstStyle/>
-          <a:p/>
-          <a:p>
-            <a:pPr>
-              <a:spcAft>
-                <a:spcPts val="1200"/>
-              </a:spcAft>
-              <a:defRPr sz="2000"/>
-            </a:pPr>
-            <a:r>
-              <a:rPr sz="1600"/>
+          <a:p>
+            <a:pPr>
+              <a:lnSpc>
+                <a:spcPct val="90000"/>
+              </a:lnSpc>
+              <a:spcAft>
+                <a:spcPts val="300"/>
+              </a:spcAft>
+            </a:pPr>
+          </a:p>
+          <a:p>
+            <a:pPr>
+              <a:lnSpc>
+                <a:spcPct val="90000"/>
+              </a:lnSpc>
+              <a:spcAft>
+                <a:spcPts val="300"/>
+              </a:spcAft>
+              <a:defRPr sz="2000"/>
+            </a:pPr>
+            <a:r>
+              <a:rPr sz="1400"/>
               <a:t>İnternet üzerinden iletişim kurma yolları:</a:t>
             </a:r>
           </a:p>
           <a:p>
             <a:pPr>
-              <a:spcAft>
-                <a:spcPts val="1200"/>
-              </a:spcAft>
-              <a:defRPr sz="2000"/>
-            </a:pPr>
-          </a:p>
-          <a:p>
-            <a:pPr>
-              <a:spcAft>
-                <a:spcPts val="1200"/>
+              <a:lnSpc>
+                <a:spcPct val="90000"/>
+              </a:lnSpc>
+              <a:spcAft>
+                <a:spcPts val="300"/>
+              </a:spcAft>
+              <a:defRPr sz="2000"/>
+            </a:pPr>
+          </a:p>
+          <a:p>
+            <a:pPr>
+              <a:lnSpc>
+                <a:spcPct val="90000"/>
+              </a:lnSpc>
+              <a:spcAft>
+                <a:spcPts val="300"/>
               </a:spcAft>
               <a:defRPr sz="2000" b="1"/>
             </a:pPr>
             <a:r>
-              <a:rPr sz="1600"/>
+              <a:rPr sz="1400"/>
               <a:t>✅ Anlık Mesajlaşma:</a:t>
             </a:r>
           </a:p>
           <a:p>
             <a:pPr lvl="1">
-              <a:spcAft>
-                <a:spcPts val="1200"/>
-              </a:spcAft>
-              <a:defRPr sz="1800"/>
-            </a:pPr>
-            <a:r>
-              <a:rPr sz="1600"/>
+              <a:lnSpc>
+                <a:spcPct val="90000"/>
+              </a:lnSpc>
+              <a:spcAft>
+                <a:spcPts val="300"/>
+              </a:spcAft>
+              <a:defRPr sz="1800"/>
+            </a:pPr>
+            <a:r>
+              <a:rPr sz="1400"/>
               <a:t>    • WhatsApp</a:t>
             </a:r>
           </a:p>
           <a:p>
             <a:pPr lvl="1">
-              <a:spcAft>
-                <a:spcPts val="1200"/>
-              </a:spcAft>
-              <a:defRPr sz="1800"/>
-            </a:pPr>
-            <a:r>
-              <a:rPr sz="1600"/>
+              <a:lnSpc>
+                <a:spcPct val="90000"/>
+              </a:lnSpc>
+              <a:spcAft>
+                <a:spcPts val="300"/>
+              </a:spcAft>
+              <a:defRPr sz="1800"/>
+            </a:pPr>
+            <a:r>
+              <a:rPr sz="1400"/>
               <a:t>    • Telegram</a:t>
             </a:r>
           </a:p>
           <a:p>
             <a:pPr lvl="1">
-              <a:spcAft>
-                <a:spcPts val="1200"/>
-              </a:spcAft>
-              <a:defRPr sz="1800"/>
-            </a:pPr>
-            <a:r>
-              <a:rPr sz="1600"/>
+              <a:lnSpc>
+                <a:spcPct val="90000"/>
+              </a:lnSpc>
+              <a:spcAft>
+                <a:spcPts val="300"/>
+              </a:spcAft>
+              <a:defRPr sz="1800"/>
+            </a:pPr>
+            <a:r>
+              <a:rPr sz="1400"/>
               <a:t>    • Messenger</a:t>
             </a:r>
           </a:p>
           <a:p>
             <a:pPr>
-              <a:spcAft>
-                <a:spcPts val="1200"/>
-              </a:spcAft>
-              <a:defRPr sz="2000"/>
-            </a:pPr>
-          </a:p>
-          <a:p>
-            <a:pPr>
-              <a:spcAft>
-                <a:spcPts val="1200"/>
-              </a:spcAft>
-              <a:defRPr sz="2000"/>
-            </a:pPr>
-            <a:r>
-              <a:rPr sz="1600"/>
+              <a:lnSpc>
+                <a:spcPct val="90000"/>
+              </a:lnSpc>
+              <a:spcAft>
+                <a:spcPts val="300"/>
+              </a:spcAft>
+              <a:defRPr sz="2000"/>
+            </a:pPr>
+          </a:p>
+          <a:p>
+            <a:pPr>
+              <a:lnSpc>
+                <a:spcPct val="90000"/>
+              </a:lnSpc>
+              <a:spcAft>
+                <a:spcPts val="300"/>
+              </a:spcAft>
+              <a:defRPr sz="2000"/>
+            </a:pPr>
+            <a:r>
+              <a:rPr sz="1400"/>
               <a:t>🎥 Görüntülü Görüşme:</a:t>
             </a:r>
           </a:p>
           <a:p>
             <a:pPr lvl="1">
-              <a:spcAft>
-                <a:spcPts val="1200"/>
-              </a:spcAft>
-              <a:defRPr sz="1800"/>
-            </a:pPr>
-            <a:r>
-              <a:rPr sz="1600"/>
+              <a:lnSpc>
+                <a:spcPct val="90000"/>
+              </a:lnSpc>
+              <a:spcAft>
+                <a:spcPts val="300"/>
+              </a:spcAft>
+              <a:defRPr sz="1800"/>
+            </a:pPr>
+            <a:r>
+              <a:rPr sz="1400"/>
               <a:t>    • Zoom</a:t>
             </a:r>
           </a:p>
           <a:p>
             <a:pPr lvl="1">
-              <a:spcAft>
-                <a:spcPts val="1200"/>
-              </a:spcAft>
-              <a:defRPr sz="1800"/>
-            </a:pPr>
-            <a:r>
-              <a:rPr sz="1600"/>
+              <a:lnSpc>
+                <a:spcPct val="90000"/>
+              </a:lnSpc>
+              <a:spcAft>
+                <a:spcPts val="300"/>
+              </a:spcAft>
+              <a:defRPr sz="1800"/>
+            </a:pPr>
+            <a:r>
+              <a:rPr sz="1400"/>
               <a:t>    • Google Meet</a:t>
             </a:r>
           </a:p>
           <a:p>
             <a:pPr lvl="1">
-              <a:spcAft>
-                <a:spcPts val="1200"/>
-              </a:spcAft>
-              <a:defRPr sz="1800"/>
-            </a:pPr>
-            <a:r>
-              <a:rPr sz="1600"/>
+              <a:lnSpc>
+                <a:spcPct val="90000"/>
+              </a:lnSpc>
+              <a:spcAft>
+                <a:spcPts val="300"/>
+              </a:spcAft>
+              <a:defRPr sz="1800"/>
+            </a:pPr>
+            <a:r>
+              <a:rPr sz="1400"/>
               <a:t>    • Microsoft Teams</a:t>
             </a:r>
           </a:p>
           <a:p>
             <a:pPr lvl="1">
-              <a:spcAft>
-                <a:spcPts val="1200"/>
-              </a:spcAft>
-              <a:defRPr sz="1800"/>
-            </a:pPr>
-            <a:r>
-              <a:rPr sz="1600"/>
+              <a:lnSpc>
+                <a:spcPct val="90000"/>
+              </a:lnSpc>
+              <a:spcAft>
+                <a:spcPts val="300"/>
+              </a:spcAft>
+              <a:defRPr sz="1800"/>
+            </a:pPr>
+            <a:r>
+              <a:rPr sz="1400"/>
               <a:t>    • Skype</a:t>
             </a:r>
           </a:p>
           <a:p>
             <a:pPr>
-              <a:spcAft>
-                <a:spcPts val="1200"/>
-              </a:spcAft>
-              <a:defRPr sz="2000"/>
-            </a:pPr>
-          </a:p>
-          <a:p>
-            <a:pPr>
-              <a:spcAft>
-                <a:spcPts val="1200"/>
-              </a:spcAft>
-              <a:defRPr sz="2000"/>
-            </a:pPr>
-            <a:r>
-              <a:rPr sz="1600"/>
+              <a:lnSpc>
+                <a:spcPct val="90000"/>
+              </a:lnSpc>
+              <a:spcAft>
+                <a:spcPts val="300"/>
+              </a:spcAft>
+              <a:defRPr sz="2000"/>
+            </a:pPr>
+          </a:p>
+          <a:p>
+            <a:pPr>
+              <a:lnSpc>
+                <a:spcPct val="90000"/>
+              </a:lnSpc>
+              <a:spcAft>
+                <a:spcPts val="300"/>
+              </a:spcAft>
+              <a:defRPr sz="2000"/>
+            </a:pPr>
+            <a:r>
+              <a:rPr sz="1400"/>
               <a:t>📱 Sosyal Medya:</a:t>
             </a:r>
           </a:p>
           <a:p>
             <a:pPr lvl="1">
-              <a:spcAft>
-                <a:spcPts val="1200"/>
-              </a:spcAft>
-              <a:defRPr sz="1800"/>
-            </a:pPr>
-            <a:r>
-              <a:rPr sz="1600"/>
+              <a:lnSpc>
+                <a:spcPct val="90000"/>
+              </a:lnSpc>
+              <a:spcAft>
+                <a:spcPts val="300"/>
+              </a:spcAft>
+              <a:defRPr sz="1800"/>
+            </a:pPr>
+            <a:r>
+              <a:rPr sz="1400"/>
               <a:t>    • Instagram</a:t>
             </a:r>
           </a:p>
           <a:p>
             <a:pPr lvl="1">
-              <a:spcAft>
-                <a:spcPts val="1200"/>
-              </a:spcAft>
-              <a:defRPr sz="1800"/>
-            </a:pPr>
-            <a:r>
-              <a:rPr sz="1600"/>
+              <a:lnSpc>
+                <a:spcPct val="90000"/>
+              </a:lnSpc>
+              <a:spcAft>
+                <a:spcPts val="300"/>
+              </a:spcAft>
+              <a:defRPr sz="1800"/>
+            </a:pPr>
+            <a:r>
+              <a:rPr sz="1400"/>
               <a:t>    • Twitter (X)</a:t>
             </a:r>
           </a:p>
           <a:p>
             <a:pPr lvl="1">
-              <a:spcAft>
-                <a:spcPts val="1200"/>
-              </a:spcAft>
-              <a:defRPr sz="1800"/>
-            </a:pPr>
-            <a:r>
-              <a:rPr sz="1600"/>
+              <a:lnSpc>
+                <a:spcPct val="90000"/>
+              </a:lnSpc>
+              <a:spcAft>
+                <a:spcPts val="300"/>
+              </a:spcAft>
+              <a:defRPr sz="1800"/>
+            </a:pPr>
+            <a:r>
+              <a:rPr sz="1400"/>
               <a:t>    • TikTok</a:t>
             </a:r>
           </a:p>
           <a:p>
             <a:pPr lvl="1">
-              <a:spcAft>
-                <a:spcPts val="1200"/>
-              </a:spcAft>
-              <a:defRPr sz="1800"/>
-            </a:pPr>
-            <a:r>
-              <a:rPr sz="1600"/>
+              <a:lnSpc>
+                <a:spcPct val="90000"/>
+              </a:lnSpc>
+              <a:spcAft>
+                <a:spcPts val="300"/>
+              </a:spcAft>
+              <a:defRPr sz="1800"/>
+            </a:pPr>
+            <a:r>
+              <a:rPr sz="1400"/>
               <a:t>    • (13 yaş sınırı var!)</a:t>
             </a:r>
           </a:p>
           <a:p>
             <a:pPr>
-              <a:spcAft>
-                <a:spcPts val="1200"/>
-              </a:spcAft>
-              <a:defRPr sz="2000"/>
-            </a:pPr>
-          </a:p>
-          <a:p>
-            <a:pPr>
-              <a:spcAft>
-                <a:spcPts val="1200"/>
-              </a:spcAft>
-              <a:defRPr sz="2000"/>
-            </a:pPr>
-            <a:r>
-              <a:rPr sz="1600"/>
+              <a:lnSpc>
+                <a:spcPct val="90000"/>
+              </a:lnSpc>
+              <a:spcAft>
+                <a:spcPts val="300"/>
+              </a:spcAft>
+              <a:defRPr sz="2000"/>
+            </a:pPr>
+          </a:p>
+          <a:p>
+            <a:pPr>
+              <a:lnSpc>
+                <a:spcPct val="90000"/>
+              </a:lnSpc>
+              <a:spcAft>
+                <a:spcPts val="300"/>
+              </a:spcAft>
+              <a:defRPr sz="2000"/>
+            </a:pPr>
+            <a:r>
+              <a:rPr sz="1400"/>
               <a:t>🎮 Oyun İçi Sohbet:</a:t>
             </a:r>
           </a:p>
           <a:p>
             <a:pPr lvl="1">
-              <a:spcAft>
-                <a:spcPts val="1200"/>
-              </a:spcAft>
-              <a:defRPr sz="1800"/>
-            </a:pPr>
-            <a:r>
-              <a:rPr sz="1600"/>
+              <a:lnSpc>
+                <a:spcPct val="90000"/>
+              </a:lnSpc>
+              <a:spcAft>
+                <a:spcPts val="300"/>
+              </a:spcAft>
+              <a:defRPr sz="1800"/>
+            </a:pPr>
+            <a:r>
+              <a:rPr sz="1400"/>
               <a:t>    • Roblox, Minecraft</a:t>
             </a:r>
           </a:p>
           <a:p>
             <a:pPr>
-              <a:spcAft>
-                <a:spcPts val="1200"/>
-              </a:spcAft>
-              <a:defRPr sz="2000"/>
-            </a:pPr>
-          </a:p>
-          <a:p>
-            <a:pPr>
-              <a:spcAft>
-                <a:spcPts val="1200"/>
+              <a:lnSpc>
+                <a:spcPct val="90000"/>
+              </a:lnSpc>
+              <a:spcAft>
+                <a:spcPts val="300"/>
+              </a:spcAft>
+              <a:defRPr sz="2000"/>
+            </a:pPr>
+          </a:p>
+          <a:p>
+            <a:pPr>
+              <a:lnSpc>
+                <a:spcPct val="90000"/>
+              </a:lnSpc>
+              <a:spcAft>
+                <a:spcPts val="300"/>
               </a:spcAft>
               <a:defRPr sz="2000" b="1"/>
             </a:pPr>
             <a:r>
-              <a:rPr sz="1600"/>
+              <a:rPr sz="1400"/>
               <a:t>💡 Çevrimiçi İletişim Kuralları:</a:t>
             </a:r>
           </a:p>
           <a:p>
             <a:pPr lvl="1">
-              <a:spcAft>
-                <a:spcPts val="1200"/>
-              </a:spcAft>
-              <a:defRPr sz="1800"/>
-            </a:pPr>
-            <a:r>
-              <a:rPr sz="1600"/>
+              <a:lnSpc>
+                <a:spcPct val="90000"/>
+              </a:lnSpc>
+              <a:spcAft>
+                <a:spcPts val="300"/>
+              </a:spcAft>
+              <a:defRPr sz="1800"/>
+            </a:pPr>
+            <a:r>
+              <a:rPr sz="1400"/>
               <a:t>    • Saygılı ol</a:t>
             </a:r>
           </a:p>
           <a:p>
             <a:pPr lvl="1">
-              <a:spcAft>
-                <a:spcPts val="1200"/>
-              </a:spcAft>
-              <a:defRPr sz="1800"/>
-            </a:pPr>
-            <a:r>
-              <a:rPr sz="1600"/>
+              <a:lnSpc>
+                <a:spcPct val="90000"/>
+              </a:lnSpc>
+              <a:spcAft>
+                <a:spcPts val="300"/>
+              </a:spcAft>
+              <a:defRPr sz="1800"/>
+            </a:pPr>
+            <a:r>
+              <a:rPr sz="1400"/>
               <a:t>    • Kişisel bilgi paylaşma</a:t>
             </a:r>
           </a:p>
           <a:p>
             <a:pPr lvl="1">
-              <a:spcAft>
-                <a:spcPts val="1200"/>
-              </a:spcAft>
-              <a:defRPr sz="1800"/>
-            </a:pPr>
-            <a:r>
-              <a:rPr sz="1600"/>
+              <a:lnSpc>
+                <a:spcPct val="90000"/>
+              </a:lnSpc>
+              <a:spcAft>
+                <a:spcPts val="300"/>
+              </a:spcAft>
+              <a:defRPr sz="1800"/>
+            </a:pPr>
+            <a:r>
+              <a:rPr sz="1400"/>
               <a:t>    • Tanımadığın kişilerle konuşma</a:t>
             </a:r>
           </a:p>
           <a:p>
             <a:pPr lvl="1">
-              <a:spcAft>
-                <a:spcPts val="1200"/>
-              </a:spcAft>
-              <a:defRPr sz="1800"/>
-            </a:pPr>
-            <a:r>
-              <a:rPr sz="1600"/>
+              <a:lnSpc>
+                <a:spcPct val="90000"/>
+              </a:lnSpc>
+              <a:spcAft>
+                <a:spcPts val="300"/>
+              </a:spcAft>
+              <a:defRPr sz="1800"/>
+            </a:pPr>
+            <a:r>
+              <a:rPr sz="1400"/>
               <a:t>    • Siber zorbalık yapma</a:t>
             </a:r>
           </a:p>
@@ -7414,7 +7765,7 @@
         </p:nvSpPr>
         <p:spPr/>
         <p:txBody>
-          <a:bodyPr/>
+          <a:bodyPr wrap="square"/>
           <a:lstStyle/>
           <a:p>
             <a:pPr>
@@ -7468,280 +7819,364 @@
             <a:spAutoFit/>
           </a:bodyPr>
           <a:lstStyle/>
-          <a:p/>
-          <a:p>
-            <a:pPr>
-              <a:spcAft>
-                <a:spcPts val="1200"/>
-              </a:spcAft>
-              <a:defRPr sz="2000"/>
-            </a:pPr>
-            <a:r>
-              <a:rPr sz="1400"/>
+          <a:p>
+            <a:pPr>
+              <a:lnSpc>
+                <a:spcPct val="90000"/>
+              </a:lnSpc>
+              <a:spcAft>
+                <a:spcPts val="300"/>
+              </a:spcAft>
+            </a:pPr>
+          </a:p>
+          <a:p>
+            <a:pPr>
+              <a:lnSpc>
+                <a:spcPct val="90000"/>
+              </a:lnSpc>
+              <a:spcAft>
+                <a:spcPts val="300"/>
+              </a:spcAft>
+              <a:defRPr sz="2000"/>
+            </a:pPr>
+            <a:r>
+              <a:rPr sz="1300"/>
               <a:t>İnternet'i güvenle kullanmak çok önemli!</a:t>
             </a:r>
           </a:p>
           <a:p>
             <a:pPr>
-              <a:spcAft>
-                <a:spcPts val="1200"/>
-              </a:spcAft>
-              <a:defRPr sz="2000"/>
-            </a:pPr>
-          </a:p>
-          <a:p>
-            <a:pPr>
-              <a:spcAft>
-                <a:spcPts val="1200"/>
+              <a:lnSpc>
+                <a:spcPct val="90000"/>
+              </a:lnSpc>
+              <a:spcAft>
+                <a:spcPts val="300"/>
+              </a:spcAft>
+              <a:defRPr sz="2000"/>
+            </a:pPr>
+          </a:p>
+          <a:p>
+            <a:pPr>
+              <a:lnSpc>
+                <a:spcPct val="90000"/>
+              </a:lnSpc>
+              <a:spcAft>
+                <a:spcPts val="300"/>
               </a:spcAft>
               <a:defRPr sz="2000" b="1"/>
             </a:pPr>
             <a:r>
-              <a:rPr sz="1400"/>
+              <a:rPr sz="1300"/>
               <a:t>✅ Temel Güvenlik Kuralları:</a:t>
             </a:r>
           </a:p>
           <a:p>
             <a:pPr>
-              <a:spcAft>
-                <a:spcPts val="1200"/>
-              </a:spcAft>
-              <a:defRPr sz="2000"/>
-            </a:pPr>
-          </a:p>
-          <a:p>
-            <a:pPr>
-              <a:spcAft>
-                <a:spcPts val="1200"/>
-              </a:spcAft>
-              <a:defRPr sz="2000"/>
-            </a:pPr>
-            <a:r>
-              <a:rPr sz="1400"/>
+              <a:lnSpc>
+                <a:spcPct val="90000"/>
+              </a:lnSpc>
+              <a:spcAft>
+                <a:spcPts val="300"/>
+              </a:spcAft>
+              <a:defRPr sz="2000"/>
+            </a:pPr>
+          </a:p>
+          <a:p>
+            <a:pPr>
+              <a:lnSpc>
+                <a:spcPct val="90000"/>
+              </a:lnSpc>
+              <a:spcAft>
+                <a:spcPts val="300"/>
+              </a:spcAft>
+              <a:defRPr sz="2000"/>
+            </a:pPr>
+            <a:r>
+              <a:rPr sz="1300"/>
               <a:t>🔐 Güçlü Şifre:</a:t>
             </a:r>
           </a:p>
           <a:p>
             <a:pPr lvl="1">
-              <a:spcAft>
-                <a:spcPts val="1200"/>
-              </a:spcAft>
-              <a:defRPr sz="1800"/>
-            </a:pPr>
-            <a:r>
-              <a:rPr sz="1400"/>
+              <a:lnSpc>
+                <a:spcPct val="90000"/>
+              </a:lnSpc>
+              <a:spcAft>
+                <a:spcPts val="300"/>
+              </a:spcAft>
+              <a:defRPr sz="1800"/>
+            </a:pPr>
+            <a:r>
+              <a:rPr sz="1300"/>
               <a:t>    • En az 8 karakter</a:t>
             </a:r>
           </a:p>
           <a:p>
             <a:pPr lvl="1">
-              <a:spcAft>
-                <a:spcPts val="1200"/>
-              </a:spcAft>
-              <a:defRPr sz="1800"/>
-            </a:pPr>
-            <a:r>
-              <a:rPr sz="1400"/>
+              <a:lnSpc>
+                <a:spcPct val="90000"/>
+              </a:lnSpc>
+              <a:spcAft>
+                <a:spcPts val="300"/>
+              </a:spcAft>
+              <a:defRPr sz="1800"/>
+            </a:pPr>
+            <a:r>
+              <a:rPr sz="1300"/>
               <a:t>    • Büyük harf, küçük harf, rakam, sembol</a:t>
             </a:r>
           </a:p>
           <a:p>
             <a:pPr lvl="1">
-              <a:spcAft>
-                <a:spcPts val="1200"/>
-              </a:spcAft>
-              <a:defRPr sz="1800"/>
-            </a:pPr>
-            <a:r>
-              <a:rPr sz="1400"/>
+              <a:lnSpc>
+                <a:spcPct val="90000"/>
+              </a:lnSpc>
+              <a:spcAft>
+                <a:spcPts val="300"/>
+              </a:spcAft>
+              <a:defRPr sz="1800"/>
+            </a:pPr>
+            <a:r>
+              <a:rPr sz="1300"/>
               <a:t>    • Doğum tarihi kullanma!</a:t>
             </a:r>
           </a:p>
           <a:p>
             <a:pPr>
-              <a:spcAft>
-                <a:spcPts val="1200"/>
-              </a:spcAft>
-              <a:defRPr sz="2000"/>
-            </a:pPr>
-          </a:p>
-          <a:p>
-            <a:pPr>
-              <a:spcAft>
-                <a:spcPts val="1200"/>
-              </a:spcAft>
-              <a:defRPr sz="2000"/>
-            </a:pPr>
-            <a:r>
-              <a:rPr sz="1400"/>
+              <a:lnSpc>
+                <a:spcPct val="90000"/>
+              </a:lnSpc>
+              <a:spcAft>
+                <a:spcPts val="300"/>
+              </a:spcAft>
+              <a:defRPr sz="2000"/>
+            </a:pPr>
+          </a:p>
+          <a:p>
+            <a:pPr>
+              <a:lnSpc>
+                <a:spcPct val="90000"/>
+              </a:lnSpc>
+              <a:spcAft>
+                <a:spcPts val="300"/>
+              </a:spcAft>
+              <a:defRPr sz="2000"/>
+            </a:pPr>
+            <a:r>
+              <a:rPr sz="1300"/>
               <a:t>🙈 Kişisel Bilgileri Paylaşma:</a:t>
             </a:r>
           </a:p>
           <a:p>
             <a:pPr lvl="1">
-              <a:spcAft>
-                <a:spcPts val="1200"/>
-              </a:spcAft>
-              <a:defRPr sz="1800"/>
-            </a:pPr>
-            <a:r>
-              <a:rPr sz="1400"/>
+              <a:lnSpc>
+                <a:spcPct val="90000"/>
+              </a:lnSpc>
+              <a:spcAft>
+                <a:spcPts val="300"/>
+              </a:spcAft>
+              <a:defRPr sz="1800"/>
+            </a:pPr>
+            <a:r>
+              <a:rPr sz="1300"/>
               <a:t>    • Adres, telefon, okul bilgilerini paylaşma</a:t>
             </a:r>
           </a:p>
           <a:p>
             <a:pPr lvl="1">
-              <a:spcAft>
-                <a:spcPts val="1200"/>
-              </a:spcAft>
-              <a:defRPr sz="1800"/>
-            </a:pPr>
-            <a:r>
-              <a:rPr sz="1400"/>
+              <a:lnSpc>
+                <a:spcPct val="90000"/>
+              </a:lnSpc>
+              <a:spcAft>
+                <a:spcPts val="300"/>
+              </a:spcAft>
+              <a:defRPr sz="1800"/>
+            </a:pPr>
+            <a:r>
+              <a:rPr sz="1300"/>
               <a:t>    • Fotoğraf paylaşırken dikkatli ol</a:t>
             </a:r>
           </a:p>
           <a:p>
             <a:pPr>
-              <a:spcAft>
-                <a:spcPts val="1200"/>
-              </a:spcAft>
-              <a:defRPr sz="2000"/>
-            </a:pPr>
-          </a:p>
-          <a:p>
-            <a:pPr>
-              <a:spcAft>
-                <a:spcPts val="1200"/>
-              </a:spcAft>
-              <a:defRPr sz="2000"/>
-            </a:pPr>
-            <a:r>
-              <a:rPr sz="1400"/>
+              <a:lnSpc>
+                <a:spcPct val="90000"/>
+              </a:lnSpc>
+              <a:spcAft>
+                <a:spcPts val="300"/>
+              </a:spcAft>
+              <a:defRPr sz="2000"/>
+            </a:pPr>
+          </a:p>
+          <a:p>
+            <a:pPr>
+              <a:lnSpc>
+                <a:spcPct val="90000"/>
+              </a:lnSpc>
+              <a:spcAft>
+                <a:spcPts val="300"/>
+              </a:spcAft>
+              <a:defRPr sz="2000"/>
+            </a:pPr>
+            <a:r>
+              <a:rPr sz="1300"/>
               <a:t>👤 Tanımadığın Kişilerle:</a:t>
             </a:r>
           </a:p>
           <a:p>
             <a:pPr lvl="1">
-              <a:spcAft>
-                <a:spcPts val="1200"/>
-              </a:spcAft>
-              <a:defRPr sz="1800"/>
-            </a:pPr>
-            <a:r>
-              <a:rPr sz="1400"/>
+              <a:lnSpc>
+                <a:spcPct val="90000"/>
+              </a:lnSpc>
+              <a:spcAft>
+                <a:spcPts val="300"/>
+              </a:spcAft>
+              <a:defRPr sz="1800"/>
+            </a:pPr>
+            <a:r>
+              <a:rPr sz="1300"/>
               <a:t>    • Buluşma</a:t>
             </a:r>
           </a:p>
           <a:p>
             <a:pPr lvl="1">
-              <a:spcAft>
-                <a:spcPts val="1200"/>
-              </a:spcAft>
-              <a:defRPr sz="1800"/>
-            </a:pPr>
-            <a:r>
-              <a:rPr sz="1400"/>
+              <a:lnSpc>
+                <a:spcPct val="90000"/>
+              </a:lnSpc>
+              <a:spcAft>
+                <a:spcPts val="300"/>
+              </a:spcAft>
+              <a:defRPr sz="1800"/>
+            </a:pPr>
+            <a:r>
+              <a:rPr sz="1300"/>
               <a:t>    • Kişisel bilgi verme</a:t>
             </a:r>
           </a:p>
           <a:p>
             <a:pPr lvl="1">
-              <a:spcAft>
-                <a:spcPts val="1200"/>
-              </a:spcAft>
-              <a:defRPr sz="1800"/>
-            </a:pPr>
-            <a:r>
-              <a:rPr sz="1400"/>
+              <a:lnSpc>
+                <a:spcPct val="90000"/>
+              </a:lnSpc>
+              <a:spcAft>
+                <a:spcPts val="300"/>
+              </a:spcAft>
+              <a:defRPr sz="1800"/>
+            </a:pPr>
+            <a:r>
+              <a:rPr sz="1300"/>
               <a:t>    • Ebeveynlerine haber ver</a:t>
             </a:r>
           </a:p>
           <a:p>
             <a:pPr>
-              <a:spcAft>
-                <a:spcPts val="1200"/>
-              </a:spcAft>
-              <a:defRPr sz="2000"/>
-            </a:pPr>
-          </a:p>
-          <a:p>
-            <a:pPr>
-              <a:spcAft>
-                <a:spcPts val="1200"/>
-              </a:spcAft>
-              <a:defRPr sz="2000"/>
-            </a:pPr>
-            <a:r>
-              <a:rPr sz="1400"/>
+              <a:lnSpc>
+                <a:spcPct val="90000"/>
+              </a:lnSpc>
+              <a:spcAft>
+                <a:spcPts val="300"/>
+              </a:spcAft>
+              <a:defRPr sz="2000"/>
+            </a:pPr>
+          </a:p>
+          <a:p>
+            <a:pPr>
+              <a:lnSpc>
+                <a:spcPct val="90000"/>
+              </a:lnSpc>
+              <a:spcAft>
+                <a:spcPts val="300"/>
+              </a:spcAft>
+              <a:defRPr sz="2000"/>
+            </a:pPr>
+            <a:r>
+              <a:rPr sz="1300"/>
               <a:t>🔗 Şüpheli Linkler:</a:t>
             </a:r>
           </a:p>
           <a:p>
             <a:pPr lvl="1">
-              <a:spcAft>
-                <a:spcPts val="1200"/>
-              </a:spcAft>
-              <a:defRPr sz="1800"/>
-            </a:pPr>
-            <a:r>
-              <a:rPr sz="1400"/>
+              <a:lnSpc>
+                <a:spcPct val="90000"/>
+              </a:lnSpc>
+              <a:spcAft>
+                <a:spcPts val="300"/>
+              </a:spcAft>
+              <a:defRPr sz="1800"/>
+            </a:pPr>
+            <a:r>
+              <a:rPr sz="1300"/>
               <a:t>    • Bilmediğin linklere tıklama</a:t>
             </a:r>
           </a:p>
           <a:p>
             <a:pPr lvl="1">
-              <a:spcAft>
-                <a:spcPts val="1200"/>
-              </a:spcAft>
-              <a:defRPr sz="1800"/>
-            </a:pPr>
-            <a:r>
-              <a:rPr sz="1400"/>
+              <a:lnSpc>
+                <a:spcPct val="90000"/>
+              </a:lnSpc>
+              <a:spcAft>
+                <a:spcPts val="300"/>
+              </a:spcAft>
+              <a:defRPr sz="1800"/>
+            </a:pPr>
+            <a:r>
+              <a:rPr sz="1300"/>
               <a:t>    • E-posta eklerini açmadan önce kontrol et</a:t>
             </a:r>
           </a:p>
           <a:p>
             <a:pPr>
-              <a:spcAft>
-                <a:spcPts val="1200"/>
-              </a:spcAft>
-              <a:defRPr sz="2000"/>
-            </a:pPr>
-          </a:p>
-          <a:p>
-            <a:pPr>
-              <a:spcAft>
-                <a:spcPts val="1200"/>
-              </a:spcAft>
-              <a:defRPr sz="2000"/>
-            </a:pPr>
-            <a:r>
-              <a:rPr sz="1400"/>
+              <a:lnSpc>
+                <a:spcPct val="90000"/>
+              </a:lnSpc>
+              <a:spcAft>
+                <a:spcPts val="300"/>
+              </a:spcAft>
+              <a:defRPr sz="2000"/>
+            </a:pPr>
+          </a:p>
+          <a:p>
+            <a:pPr>
+              <a:lnSpc>
+                <a:spcPct val="90000"/>
+              </a:lnSpc>
+              <a:spcAft>
+                <a:spcPts val="300"/>
+              </a:spcAft>
+              <a:defRPr sz="2000"/>
+            </a:pPr>
+            <a:r>
+              <a:rPr sz="1300"/>
               <a:t>💰 Online Alışveriş:</a:t>
             </a:r>
           </a:p>
           <a:p>
             <a:pPr lvl="1">
-              <a:spcAft>
-                <a:spcPts val="1200"/>
-              </a:spcAft>
-              <a:defRPr sz="1800"/>
-            </a:pPr>
-            <a:r>
-              <a:rPr sz="1400"/>
+              <a:lnSpc>
+                <a:spcPct val="90000"/>
+              </a:lnSpc>
+              <a:spcAft>
+                <a:spcPts val="300"/>
+              </a:spcAft>
+              <a:defRPr sz="1800"/>
+            </a:pPr>
+            <a:r>
+              <a:rPr sz="1300"/>
               <a:t>    • Güvenli siteler (https://)</a:t>
             </a:r>
           </a:p>
           <a:p>
             <a:pPr lvl="1">
-              <a:spcAft>
-                <a:spcPts val="1200"/>
-              </a:spcAft>
-              <a:defRPr sz="1800"/>
-            </a:pPr>
-            <a:r>
-              <a:rPr sz="1400"/>
+              <a:lnSpc>
+                <a:spcPct val="90000"/>
+              </a:lnSpc>
+              <a:spcAft>
+                <a:spcPts val="300"/>
+              </a:spcAft>
+              <a:defRPr sz="1800"/>
+            </a:pPr>
+            <a:r>
+              <a:rPr sz="1300"/>
               <a:t>    • Ebeveyn izni al</a:t>
             </a:r>
           </a:p>
@@ -7777,7 +8212,7 @@
         </p:nvSpPr>
         <p:spPr/>
         <p:txBody>
-          <a:bodyPr/>
+          <a:bodyPr wrap="square"/>
           <a:lstStyle/>
           <a:p>
             <a:pPr>
@@ -7831,272 +8266,353 @@
             <a:spAutoFit/>
           </a:bodyPr>
           <a:lstStyle/>
-          <a:p/>
-          <a:p>
-            <a:pPr>
-              <a:spcAft>
-                <a:spcPts val="1200"/>
-              </a:spcAft>
-              <a:defRPr sz="2000"/>
-            </a:pPr>
-            <a:r>
-              <a:rPr sz="1400"/>
+          <a:p>
+            <a:pPr>
+              <a:lnSpc>
+                <a:spcPct val="90000"/>
+              </a:lnSpc>
+              <a:spcAft>
+                <a:spcPts val="300"/>
+              </a:spcAft>
+            </a:pPr>
+          </a:p>
+          <a:p>
+            <a:pPr>
+              <a:lnSpc>
+                <a:spcPct val="90000"/>
+              </a:lnSpc>
+              <a:spcAft>
+                <a:spcPts val="300"/>
+              </a:spcAft>
+              <a:defRPr sz="2000"/>
+            </a:pPr>
+            <a:r>
+              <a:rPr sz="1200"/>
               <a:t>Siber zorbalık = İnternet üzerinden yapılan zorbalık</a:t>
             </a:r>
           </a:p>
           <a:p>
             <a:pPr>
-              <a:spcAft>
-                <a:spcPts val="1200"/>
-              </a:spcAft>
-              <a:defRPr sz="2000"/>
-            </a:pPr>
-          </a:p>
-          <a:p>
-            <a:pPr>
-              <a:spcAft>
-                <a:spcPts val="1200"/>
+              <a:lnSpc>
+                <a:spcPct val="90000"/>
+              </a:lnSpc>
+              <a:spcAft>
+                <a:spcPts val="300"/>
+              </a:spcAft>
+              <a:defRPr sz="2000"/>
+            </a:pPr>
+          </a:p>
+          <a:p>
+            <a:pPr>
+              <a:lnSpc>
+                <a:spcPct val="90000"/>
+              </a:lnSpc>
+              <a:spcAft>
+                <a:spcPts val="300"/>
               </a:spcAft>
               <a:defRPr sz="2000" b="1"/>
             </a:pPr>
             <a:r>
-              <a:rPr sz="1400"/>
+              <a:rPr sz="1200"/>
               <a:t>✅ Siber Zorbalık Örnekleri:</a:t>
             </a:r>
           </a:p>
           <a:p>
             <a:pPr lvl="1">
-              <a:spcAft>
-                <a:spcPts val="1200"/>
-              </a:spcAft>
-              <a:defRPr sz="1800"/>
-            </a:pPr>
-            <a:r>
-              <a:rPr sz="1400"/>
+              <a:lnSpc>
+                <a:spcPct val="90000"/>
+              </a:lnSpc>
+              <a:spcAft>
+                <a:spcPts val="300"/>
+              </a:spcAft>
+              <a:defRPr sz="1800"/>
+            </a:pPr>
+            <a:r>
+              <a:rPr sz="1200"/>
               <a:t>    • Sosyal medyada kötü yorum yapma</a:t>
             </a:r>
           </a:p>
           <a:p>
             <a:pPr lvl="1">
-              <a:spcAft>
-                <a:spcPts val="1200"/>
-              </a:spcAft>
-              <a:defRPr sz="1800"/>
-            </a:pPr>
-            <a:r>
-              <a:rPr sz="1400"/>
+              <a:lnSpc>
+                <a:spcPct val="90000"/>
+              </a:lnSpc>
+              <a:spcAft>
+                <a:spcPts val="300"/>
+              </a:spcAft>
+              <a:defRPr sz="1800"/>
+            </a:pPr>
+            <a:r>
+              <a:rPr sz="1200"/>
               <a:t>    • Utandırıcı fotoğraf paylaşma</a:t>
             </a:r>
           </a:p>
           <a:p>
             <a:pPr lvl="1">
-              <a:spcAft>
-                <a:spcPts val="1200"/>
-              </a:spcAft>
-              <a:defRPr sz="1800"/>
-            </a:pPr>
-            <a:r>
-              <a:rPr sz="1400"/>
+              <a:lnSpc>
+                <a:spcPct val="90000"/>
+              </a:lnSpc>
+              <a:spcAft>
+                <a:spcPts val="300"/>
+              </a:spcAft>
+              <a:defRPr sz="1800"/>
+            </a:pPr>
+            <a:r>
+              <a:rPr sz="1200"/>
               <a:t>    • Tehdit mesajları gönderme</a:t>
             </a:r>
           </a:p>
           <a:p>
             <a:pPr lvl="1">
-              <a:spcAft>
-                <a:spcPts val="1200"/>
-              </a:spcAft>
-              <a:defRPr sz="1800"/>
-            </a:pPr>
-            <a:r>
-              <a:rPr sz="1400"/>
+              <a:lnSpc>
+                <a:spcPct val="90000"/>
+              </a:lnSpc>
+              <a:spcAft>
+                <a:spcPts val="300"/>
+              </a:spcAft>
+              <a:defRPr sz="1800"/>
+            </a:pPr>
+            <a:r>
+              <a:rPr sz="1200"/>
               <a:t>    • Başkasını taklit edip kötü davranma</a:t>
             </a:r>
           </a:p>
           <a:p>
             <a:pPr lvl="1">
-              <a:spcAft>
-                <a:spcPts val="1200"/>
-              </a:spcAft>
-              <a:defRPr sz="1800"/>
-            </a:pPr>
-            <a:r>
-              <a:rPr sz="1400"/>
+              <a:lnSpc>
+                <a:spcPct val="90000"/>
+              </a:lnSpc>
+              <a:spcAft>
+                <a:spcPts val="300"/>
+              </a:spcAft>
+              <a:defRPr sz="1800"/>
+            </a:pPr>
+            <a:r>
+              <a:rPr sz="1200"/>
               <a:t>    • Kasıtlı olarak dışlama</a:t>
             </a:r>
           </a:p>
           <a:p>
             <a:pPr>
-              <a:spcAft>
-                <a:spcPts val="1200"/>
-              </a:spcAft>
-              <a:defRPr sz="2000"/>
-            </a:pPr>
-          </a:p>
-          <a:p>
-            <a:pPr>
-              <a:spcAft>
-                <a:spcPts val="1200"/>
-              </a:spcAft>
-              <a:defRPr sz="2000"/>
-            </a:pPr>
-            <a:r>
-              <a:rPr sz="1400"/>
+              <a:lnSpc>
+                <a:spcPct val="90000"/>
+              </a:lnSpc>
+              <a:spcAft>
+                <a:spcPts val="300"/>
+              </a:spcAft>
+              <a:defRPr sz="2000"/>
+            </a:pPr>
+          </a:p>
+          <a:p>
+            <a:pPr>
+              <a:lnSpc>
+                <a:spcPct val="90000"/>
+              </a:lnSpc>
+              <a:spcAft>
+                <a:spcPts val="300"/>
+              </a:spcAft>
+              <a:defRPr sz="2000"/>
+            </a:pPr>
+            <a:r>
+              <a:rPr sz="1200"/>
               <a:t>❌ Siber Zorbalığa Hayır!</a:t>
             </a:r>
           </a:p>
           <a:p>
             <a:pPr>
-              <a:spcAft>
-                <a:spcPts val="1200"/>
-              </a:spcAft>
-              <a:defRPr sz="2000"/>
-            </a:pPr>
-          </a:p>
-          <a:p>
-            <a:pPr>
-              <a:spcAft>
-                <a:spcPts val="1200"/>
+              <a:lnSpc>
+                <a:spcPct val="90000"/>
+              </a:lnSpc>
+              <a:spcAft>
+                <a:spcPts val="300"/>
+              </a:spcAft>
+              <a:defRPr sz="2000"/>
+            </a:pPr>
+          </a:p>
+          <a:p>
+            <a:pPr>
+              <a:lnSpc>
+                <a:spcPct val="90000"/>
+              </a:lnSpc>
+              <a:spcAft>
+                <a:spcPts val="300"/>
               </a:spcAft>
               <a:defRPr sz="2000" b="1"/>
             </a:pPr>
             <a:r>
-              <a:rPr sz="1400"/>
+              <a:rPr sz="1200"/>
               <a:t>💡 Siber Zorbalığa Uğrarsan:</a:t>
             </a:r>
           </a:p>
           <a:p>
             <a:pPr lvl="1">
-              <a:spcAft>
-                <a:spcPts val="1200"/>
-              </a:spcAft>
-              <a:defRPr sz="1800"/>
-            </a:pPr>
-            <a:r>
-              <a:rPr sz="1400"/>
+              <a:lnSpc>
+                <a:spcPct val="90000"/>
+              </a:lnSpc>
+              <a:spcAft>
+                <a:spcPts val="300"/>
+              </a:spcAft>
+              <a:defRPr sz="1800"/>
+            </a:pPr>
+            <a:r>
+              <a:rPr sz="1200"/>
               <a:t>    • Cevap verme</a:t>
             </a:r>
           </a:p>
           <a:p>
             <a:pPr lvl="1">
-              <a:spcAft>
-                <a:spcPts val="1200"/>
-              </a:spcAft>
-              <a:defRPr sz="1800"/>
-            </a:pPr>
-            <a:r>
-              <a:rPr sz="1400"/>
+              <a:lnSpc>
+                <a:spcPct val="90000"/>
+              </a:lnSpc>
+              <a:spcAft>
+                <a:spcPts val="300"/>
+              </a:spcAft>
+              <a:defRPr sz="1800"/>
+            </a:pPr>
+            <a:r>
+              <a:rPr sz="1200"/>
               <a:t>    • Kanıt sakla (ekran görüntüsü)</a:t>
             </a:r>
           </a:p>
           <a:p>
             <a:pPr lvl="1">
-              <a:spcAft>
-                <a:spcPts val="1200"/>
-              </a:spcAft>
-              <a:defRPr sz="1800"/>
-            </a:pPr>
-            <a:r>
-              <a:rPr sz="1400"/>
+              <a:lnSpc>
+                <a:spcPct val="90000"/>
+              </a:lnSpc>
+              <a:spcAft>
+                <a:spcPts val="300"/>
+              </a:spcAft>
+              <a:defRPr sz="1800"/>
+            </a:pPr>
+            <a:r>
+              <a:rPr sz="1200"/>
               <a:t>    • Engelle</a:t>
             </a:r>
           </a:p>
           <a:p>
             <a:pPr lvl="1">
-              <a:spcAft>
-                <a:spcPts val="1200"/>
-              </a:spcAft>
-              <a:defRPr sz="1800"/>
-            </a:pPr>
-            <a:r>
-              <a:rPr sz="1400"/>
+              <a:lnSpc>
+                <a:spcPct val="90000"/>
+              </a:lnSpc>
+              <a:spcAft>
+                <a:spcPts val="300"/>
+              </a:spcAft>
+              <a:defRPr sz="1800"/>
+            </a:pPr>
+            <a:r>
+              <a:rPr sz="1200"/>
               <a:t>    • Ebeveynlerine veya öğretmenine söyle</a:t>
             </a:r>
           </a:p>
           <a:p>
             <a:pPr lvl="1">
-              <a:spcAft>
-                <a:spcPts val="1200"/>
-              </a:spcAft>
-              <a:defRPr sz="1800"/>
-            </a:pPr>
-            <a:r>
-              <a:rPr sz="1400"/>
+              <a:lnSpc>
+                <a:spcPct val="90000"/>
+              </a:lnSpc>
+              <a:spcAft>
+                <a:spcPts val="300"/>
+              </a:spcAft>
+              <a:defRPr sz="1800"/>
+            </a:pPr>
+            <a:r>
+              <a:rPr sz="1200"/>
               <a:t>    • Gerekirse şikayet et</a:t>
             </a:r>
           </a:p>
           <a:p>
             <a:pPr>
-              <a:spcAft>
-                <a:spcPts val="1200"/>
-              </a:spcAft>
-              <a:defRPr sz="2000"/>
-            </a:pPr>
-          </a:p>
-          <a:p>
-            <a:pPr>
-              <a:spcAft>
-                <a:spcPts val="1200"/>
+              <a:lnSpc>
+                <a:spcPct val="90000"/>
+              </a:lnSpc>
+              <a:spcAft>
+                <a:spcPts val="300"/>
+              </a:spcAft>
+              <a:defRPr sz="2000"/>
+            </a:pPr>
+          </a:p>
+          <a:p>
+            <a:pPr>
+              <a:lnSpc>
+                <a:spcPct val="90000"/>
+              </a:lnSpc>
+              <a:spcAft>
+                <a:spcPts val="300"/>
               </a:spcAft>
               <a:defRPr sz="2000" b="1"/>
             </a:pPr>
             <a:r>
-              <a:rPr sz="1400"/>
+              <a:rPr sz="1200"/>
               <a:t>✅ Sen de Yapmamak İçin:</a:t>
             </a:r>
           </a:p>
           <a:p>
             <a:pPr lvl="1">
-              <a:spcAft>
-                <a:spcPts val="1200"/>
-              </a:spcAft>
-              <a:defRPr sz="1800"/>
-            </a:pPr>
-            <a:r>
-              <a:rPr sz="1400"/>
+              <a:lnSpc>
+                <a:spcPct val="90000"/>
+              </a:lnSpc>
+              <a:spcAft>
+                <a:spcPts val="300"/>
+              </a:spcAft>
+              <a:defRPr sz="1800"/>
+            </a:pPr>
+            <a:r>
+              <a:rPr sz="1200"/>
               <a:t>    • Kızdığında mesaj atma, bekle</a:t>
             </a:r>
           </a:p>
           <a:p>
             <a:pPr lvl="1">
-              <a:spcAft>
-                <a:spcPts val="1200"/>
-              </a:spcAft>
-              <a:defRPr sz="1800"/>
-            </a:pPr>
-            <a:r>
-              <a:rPr sz="1400"/>
+              <a:lnSpc>
+                <a:spcPct val="90000"/>
+              </a:lnSpc>
+              <a:spcAft>
+                <a:spcPts val="300"/>
+              </a:spcAft>
+              <a:defRPr sz="1800"/>
+            </a:pPr>
+            <a:r>
+              <a:rPr sz="1200"/>
               <a:t>    • Başkası hakkında kötü şey paylaşma</a:t>
             </a:r>
           </a:p>
           <a:p>
             <a:pPr lvl="1">
-              <a:spcAft>
-                <a:spcPts val="1200"/>
-              </a:spcAft>
-              <a:defRPr sz="1800"/>
-            </a:pPr>
-            <a:r>
-              <a:rPr sz="1400"/>
+              <a:lnSpc>
+                <a:spcPct val="90000"/>
+              </a:lnSpc>
+              <a:spcAft>
+                <a:spcPts val="300"/>
+              </a:spcAft>
+              <a:defRPr sz="1800"/>
+            </a:pPr>
+            <a:r>
+              <a:rPr sz="1200"/>
               <a:t>    • Empati yap: Karşındaki nasıl hisseder?</a:t>
             </a:r>
           </a:p>
           <a:p>
             <a:pPr>
-              <a:spcAft>
-                <a:spcPts val="1200"/>
-              </a:spcAft>
-              <a:defRPr sz="2000"/>
-            </a:pPr>
-          </a:p>
-          <a:p>
-            <a:pPr>
-              <a:spcAft>
-                <a:spcPts val="1200"/>
+              <a:lnSpc>
+                <a:spcPct val="90000"/>
+              </a:lnSpc>
+              <a:spcAft>
+                <a:spcPts val="300"/>
+              </a:spcAft>
+              <a:defRPr sz="2000"/>
+            </a:pPr>
+          </a:p>
+          <a:p>
+            <a:pPr>
+              <a:lnSpc>
+                <a:spcPct val="90000"/>
+              </a:lnSpc>
+              <a:spcAft>
+                <a:spcPts val="300"/>
               </a:spcAft>
               <a:defRPr sz="2000" b="1"/>
             </a:pPr>
             <a:r>
-              <a:rPr sz="1400"/>
+              <a:rPr sz="1200"/>
               <a:t>⚡ İnternet'te de gerçek hayat gibi davran!</a:t>
             </a:r>
           </a:p>
@@ -8132,7 +8648,7 @@
         </p:nvSpPr>
         <p:spPr/>
         <p:txBody>
-          <a:bodyPr/>
+          <a:bodyPr wrap="square"/>
           <a:lstStyle/>
           <a:p>
             <a:pPr>
@@ -8186,268 +8702,349 @@
             <a:spAutoFit/>
           </a:bodyPr>
           <a:lstStyle/>
-          <a:p/>
-          <a:p>
-            <a:pPr>
-              <a:spcAft>
-                <a:spcPts val="1200"/>
-              </a:spcAft>
-              <a:defRPr sz="2000"/>
-            </a:pPr>
-            <a:r>
-              <a:rPr sz="1400"/>
+          <a:p>
+            <a:pPr>
+              <a:lnSpc>
+                <a:spcPct val="90000"/>
+              </a:lnSpc>
+              <a:spcAft>
+                <a:spcPts val="300"/>
+              </a:spcAft>
+            </a:pPr>
+          </a:p>
+          <a:p>
+            <a:pPr>
+              <a:lnSpc>
+                <a:spcPct val="90000"/>
+              </a:lnSpc>
+              <a:spcAft>
+                <a:spcPts val="300"/>
+              </a:spcAft>
+              <a:defRPr sz="2000"/>
+            </a:pPr>
+            <a:r>
+              <a:rPr sz="1200"/>
               <a:t>İnternet'teki her şey ücretsiz kullanılabilir mi?</a:t>
             </a:r>
           </a:p>
           <a:p>
             <a:pPr>
-              <a:spcAft>
-                <a:spcPts val="1200"/>
-              </a:spcAft>
-              <a:defRPr sz="2000"/>
-            </a:pPr>
-          </a:p>
-          <a:p>
-            <a:pPr>
-              <a:spcAft>
-                <a:spcPts val="1200"/>
-              </a:spcAft>
-              <a:defRPr sz="2000"/>
-            </a:pPr>
-            <a:r>
-              <a:rPr sz="1400"/>
+              <a:lnSpc>
+                <a:spcPct val="90000"/>
+              </a:lnSpc>
+              <a:spcAft>
+                <a:spcPts val="300"/>
+              </a:spcAft>
+              <a:defRPr sz="2000"/>
+            </a:pPr>
+          </a:p>
+          <a:p>
+            <a:pPr>
+              <a:lnSpc>
+                <a:spcPct val="90000"/>
+              </a:lnSpc>
+              <a:spcAft>
+                <a:spcPts val="300"/>
+              </a:spcAft>
+              <a:defRPr sz="2000"/>
+            </a:pPr>
+            <a:r>
+              <a:rPr sz="1200"/>
               <a:t>❌ HAYIR! Telif hakları internette de geçerli.</a:t>
             </a:r>
           </a:p>
           <a:p>
             <a:pPr>
-              <a:spcAft>
-                <a:spcPts val="1200"/>
-              </a:spcAft>
-              <a:defRPr sz="2000"/>
-            </a:pPr>
-          </a:p>
-          <a:p>
-            <a:pPr>
-              <a:spcAft>
-                <a:spcPts val="1200"/>
+              <a:lnSpc>
+                <a:spcPct val="90000"/>
+              </a:lnSpc>
+              <a:spcAft>
+                <a:spcPts val="300"/>
+              </a:spcAft>
+              <a:defRPr sz="2000"/>
+            </a:pPr>
+          </a:p>
+          <a:p>
+            <a:pPr>
+              <a:lnSpc>
+                <a:spcPct val="90000"/>
+              </a:lnSpc>
+              <a:spcAft>
+                <a:spcPts val="300"/>
               </a:spcAft>
               <a:defRPr sz="2000" b="1"/>
             </a:pPr>
             <a:r>
-              <a:rPr sz="1400"/>
+              <a:rPr sz="1200"/>
               <a:t>✅ Telif Hakkı Nedir?</a:t>
             </a:r>
           </a:p>
           <a:p>
             <a:pPr lvl="1">
-              <a:spcAft>
-                <a:spcPts val="1200"/>
-              </a:spcAft>
-              <a:defRPr sz="1800"/>
-            </a:pPr>
-            <a:r>
-              <a:rPr sz="1400"/>
+              <a:lnSpc>
+                <a:spcPct val="90000"/>
+              </a:lnSpc>
+              <a:spcAft>
+                <a:spcPts val="300"/>
+              </a:spcAft>
+              <a:defRPr sz="1800"/>
+            </a:pPr>
+            <a:r>
+              <a:rPr sz="1200"/>
               <a:t>    • Bir eserin yaratıcısının hakkı</a:t>
             </a:r>
           </a:p>
           <a:p>
             <a:pPr lvl="1">
-              <a:spcAft>
-                <a:spcPts val="1200"/>
-              </a:spcAft>
-              <a:defRPr sz="1800"/>
-            </a:pPr>
-            <a:r>
-              <a:rPr sz="1400"/>
+              <a:lnSpc>
+                <a:spcPct val="90000"/>
+              </a:lnSpc>
+              <a:spcAft>
+                <a:spcPts val="300"/>
+              </a:spcAft>
+              <a:defRPr sz="1800"/>
+            </a:pPr>
+            <a:r>
+              <a:rPr sz="1200"/>
               <a:t>    • Müzik, video, fotoğraf, yazı, yazılım...</a:t>
             </a:r>
           </a:p>
           <a:p>
             <a:pPr>
-              <a:spcAft>
-                <a:spcPts val="1200"/>
-              </a:spcAft>
-              <a:defRPr sz="2000"/>
-            </a:pPr>
-          </a:p>
-          <a:p>
-            <a:pPr>
-              <a:spcAft>
-                <a:spcPts val="1200"/>
+              <a:lnSpc>
+                <a:spcPct val="90000"/>
+              </a:lnSpc>
+              <a:spcAft>
+                <a:spcPts val="300"/>
+              </a:spcAft>
+              <a:defRPr sz="2000"/>
+            </a:pPr>
+          </a:p>
+          <a:p>
+            <a:pPr>
+              <a:lnSpc>
+                <a:spcPct val="90000"/>
+              </a:lnSpc>
+              <a:spcAft>
+                <a:spcPts val="300"/>
               </a:spcAft>
               <a:defRPr sz="2000" b="1"/>
             </a:pPr>
             <a:r>
-              <a:rPr sz="1400"/>
+              <a:rPr sz="1200"/>
               <a:t>📌 İnternet'te Telif İhlalleri:</a:t>
             </a:r>
           </a:p>
           <a:p>
             <a:pPr lvl="1">
-              <a:spcAft>
-                <a:spcPts val="1200"/>
-              </a:spcAft>
-              <a:defRPr sz="1800"/>
-            </a:pPr>
-            <a:r>
-              <a:rPr sz="1400"/>
+              <a:lnSpc>
+                <a:spcPct val="90000"/>
+              </a:lnSpc>
+              <a:spcAft>
+                <a:spcPts val="300"/>
+              </a:spcAft>
+              <a:defRPr sz="1800"/>
+            </a:pPr>
+            <a:r>
+              <a:rPr sz="1200"/>
               <a:t>    • Başkasının fotoğrafını izinsiz kullanma</a:t>
             </a:r>
           </a:p>
           <a:p>
             <a:pPr lvl="1">
-              <a:spcAft>
-                <a:spcPts val="1200"/>
-              </a:spcAft>
-              <a:defRPr sz="1800"/>
-            </a:pPr>
-            <a:r>
-              <a:rPr sz="1400"/>
+              <a:lnSpc>
+                <a:spcPct val="90000"/>
+              </a:lnSpc>
+              <a:spcAft>
+                <a:spcPts val="300"/>
+              </a:spcAft>
+              <a:defRPr sz="1800"/>
+            </a:pPr>
+            <a:r>
+              <a:rPr sz="1200"/>
               <a:t>    • Müziği indirip paylaşma</a:t>
             </a:r>
           </a:p>
           <a:p>
             <a:pPr lvl="1">
-              <a:spcAft>
-                <a:spcPts val="1200"/>
-              </a:spcAft>
-              <a:defRPr sz="1800"/>
-            </a:pPr>
-            <a:r>
-              <a:rPr sz="1400"/>
+              <a:lnSpc>
+                <a:spcPct val="90000"/>
+              </a:lnSpc>
+              <a:spcAft>
+                <a:spcPts val="300"/>
+              </a:spcAft>
+              <a:defRPr sz="1800"/>
+            </a:pPr>
+            <a:r>
+              <a:rPr sz="1200"/>
               <a:t>    • Filmleri korsan izleme/indirme</a:t>
             </a:r>
           </a:p>
           <a:p>
             <a:pPr lvl="1">
-              <a:spcAft>
-                <a:spcPts val="1200"/>
-              </a:spcAft>
-              <a:defRPr sz="1800"/>
-            </a:pPr>
-            <a:r>
-              <a:rPr sz="1400"/>
+              <a:lnSpc>
+                <a:spcPct val="90000"/>
+              </a:lnSpc>
+              <a:spcAft>
+                <a:spcPts val="300"/>
+              </a:spcAft>
+              <a:defRPr sz="1800"/>
+            </a:pPr>
+            <a:r>
+              <a:rPr sz="1200"/>
               <a:t>    • Başkasının yazısını kopyalayıp kendi adına yayınlama</a:t>
             </a:r>
           </a:p>
           <a:p>
             <a:pPr>
-              <a:spcAft>
-                <a:spcPts val="1200"/>
-              </a:spcAft>
-              <a:defRPr sz="2000"/>
-            </a:pPr>
-          </a:p>
-          <a:p>
-            <a:pPr>
-              <a:spcAft>
-                <a:spcPts val="1200"/>
+              <a:lnSpc>
+                <a:spcPct val="90000"/>
+              </a:lnSpc>
+              <a:spcAft>
+                <a:spcPts val="300"/>
+              </a:spcAft>
+              <a:defRPr sz="2000"/>
+            </a:pPr>
+          </a:p>
+          <a:p>
+            <a:pPr>
+              <a:lnSpc>
+                <a:spcPct val="90000"/>
+              </a:lnSpc>
+              <a:spcAft>
+                <a:spcPts val="300"/>
               </a:spcAft>
               <a:defRPr sz="2000" b="1"/>
             </a:pPr>
             <a:r>
-              <a:rPr sz="1400"/>
+              <a:rPr sz="1200"/>
               <a:t>✅ Doğru Kullanım:</a:t>
             </a:r>
           </a:p>
           <a:p>
             <a:pPr lvl="1">
-              <a:spcAft>
-                <a:spcPts val="1200"/>
-              </a:spcAft>
-              <a:defRPr sz="1800"/>
-            </a:pPr>
-            <a:r>
-              <a:rPr sz="1400"/>
+              <a:lnSpc>
+                <a:spcPct val="90000"/>
+              </a:lnSpc>
+              <a:spcAft>
+                <a:spcPts val="300"/>
+              </a:spcAft>
+              <a:defRPr sz="1800"/>
+            </a:pPr>
+            <a:r>
+              <a:rPr sz="1200"/>
               <a:t>    • Kaynak göster (nereden aldığını yaz)</a:t>
             </a:r>
           </a:p>
           <a:p>
             <a:pPr lvl="1">
-              <a:spcAft>
-                <a:spcPts val="1200"/>
-              </a:spcAft>
-              <a:defRPr sz="1800"/>
-            </a:pPr>
-            <a:r>
-              <a:rPr sz="1400"/>
+              <a:lnSpc>
+                <a:spcPct val="90000"/>
+              </a:lnSpc>
+              <a:spcAft>
+                <a:spcPts val="300"/>
+              </a:spcAft>
+              <a:defRPr sz="1800"/>
+            </a:pPr>
+            <a:r>
+              <a:rPr sz="1200"/>
               <a:t>    • Serbest lisanslı içerikler kullan</a:t>
             </a:r>
           </a:p>
           <a:p>
             <a:pPr lvl="1">
-              <a:spcAft>
-                <a:spcPts val="1200"/>
-              </a:spcAft>
-              <a:defRPr sz="1800"/>
-            </a:pPr>
-            <a:r>
-              <a:rPr sz="1400"/>
+              <a:lnSpc>
+                <a:spcPct val="90000"/>
+              </a:lnSpc>
+              <a:spcAft>
+                <a:spcPts val="300"/>
+              </a:spcAft>
+              <a:defRPr sz="1800"/>
+            </a:pPr>
+            <a:r>
+              <a:rPr sz="1200"/>
               <a:t>    • İzin iste</a:t>
             </a:r>
           </a:p>
           <a:p>
             <a:pPr>
-              <a:spcAft>
-                <a:spcPts val="1200"/>
-              </a:spcAft>
-              <a:defRPr sz="2000"/>
-            </a:pPr>
-          </a:p>
-          <a:p>
-            <a:pPr>
-              <a:spcAft>
-                <a:spcPts val="1200"/>
-              </a:spcAft>
-              <a:defRPr sz="2000"/>
-            </a:pPr>
-            <a:r>
-              <a:rPr sz="1400"/>
+              <a:lnSpc>
+                <a:spcPct val="90000"/>
+              </a:lnSpc>
+              <a:spcAft>
+                <a:spcPts val="300"/>
+              </a:spcAft>
+              <a:defRPr sz="2000"/>
+            </a:pPr>
+          </a:p>
+          <a:p>
+            <a:pPr>
+              <a:lnSpc>
+                <a:spcPct val="90000"/>
+              </a:lnSpc>
+              <a:spcAft>
+                <a:spcPts val="300"/>
+              </a:spcAft>
+              <a:defRPr sz="2000"/>
+            </a:pPr>
+            <a:r>
+              <a:rPr sz="1200"/>
               <a:t>🔍 Serbest İçerik Kaynakları:</a:t>
             </a:r>
           </a:p>
           <a:p>
             <a:pPr lvl="1">
-              <a:spcAft>
-                <a:spcPts val="1200"/>
-              </a:spcAft>
-              <a:defRPr sz="1800"/>
-            </a:pPr>
-            <a:r>
-              <a:rPr sz="1400"/>
+              <a:lnSpc>
+                <a:spcPct val="90000"/>
+              </a:lnSpc>
+              <a:spcAft>
+                <a:spcPts val="300"/>
+              </a:spcAft>
+              <a:defRPr sz="1800"/>
+            </a:pPr>
+            <a:r>
+              <a:rPr sz="1200"/>
               <a:t>    • Creative Commons lisanslı görseller</a:t>
             </a:r>
           </a:p>
           <a:p>
             <a:pPr lvl="1">
-              <a:spcAft>
-                <a:spcPts val="1200"/>
-              </a:spcAft>
-              <a:defRPr sz="1800"/>
-            </a:pPr>
-            <a:r>
-              <a:rPr sz="1400"/>
+              <a:lnSpc>
+                <a:spcPct val="90000"/>
+              </a:lnSpc>
+              <a:spcAft>
+                <a:spcPts val="300"/>
+              </a:spcAft>
+              <a:defRPr sz="1800"/>
+            </a:pPr>
+            <a:r>
+              <a:rPr sz="1200"/>
               <a:t>    • Pixabay, Unsplash (ücretsiz fotoğraflar)</a:t>
             </a:r>
           </a:p>
           <a:p>
             <a:pPr>
-              <a:spcAft>
-                <a:spcPts val="1200"/>
-              </a:spcAft>
-              <a:defRPr sz="2000"/>
-            </a:pPr>
-          </a:p>
-          <a:p>
-            <a:pPr>
-              <a:spcAft>
-                <a:spcPts val="1200"/>
+              <a:lnSpc>
+                <a:spcPct val="90000"/>
+              </a:lnSpc>
+              <a:spcAft>
+                <a:spcPts val="300"/>
+              </a:spcAft>
+              <a:defRPr sz="2000"/>
+            </a:pPr>
+          </a:p>
+          <a:p>
+            <a:pPr>
+              <a:lnSpc>
+                <a:spcPct val="90000"/>
+              </a:lnSpc>
+              <a:spcAft>
+                <a:spcPts val="300"/>
               </a:spcAft>
               <a:defRPr sz="2000" b="1"/>
             </a:pPr>
             <a:r>
-              <a:rPr sz="1400"/>
+              <a:rPr sz="1200"/>
               <a:t>💡 İnternet'ten aldıysan kaynağını göster!</a:t>
             </a:r>
           </a:p>
@@ -8483,7 +9080,7 @@
         </p:nvSpPr>
         <p:spPr/>
         <p:txBody>
-          <a:bodyPr/>
+          <a:bodyPr wrap="square"/>
           <a:lstStyle/>
           <a:p>
             <a:pPr>
@@ -8537,288 +9134,375 @@
             <a:spAutoFit/>
           </a:bodyPr>
           <a:lstStyle/>
-          <a:p/>
-          <a:p>
-            <a:pPr>
-              <a:spcAft>
-                <a:spcPts val="1200"/>
-              </a:spcAft>
-              <a:defRPr sz="2000"/>
-            </a:pPr>
-            <a:r>
-              <a:rPr sz="1400"/>
+          <a:p>
+            <a:pPr>
+              <a:lnSpc>
+                <a:spcPct val="90000"/>
+              </a:lnSpc>
+              <a:spcAft>
+                <a:spcPts val="300"/>
+              </a:spcAft>
+            </a:pPr>
+          </a:p>
+          <a:p>
+            <a:pPr>
+              <a:lnSpc>
+                <a:spcPct val="90000"/>
+              </a:lnSpc>
+              <a:spcAft>
+                <a:spcPts val="300"/>
+              </a:spcAft>
+              <a:defRPr sz="2000"/>
+            </a:pPr>
+            <a:r>
+              <a:rPr sz="1300"/>
               <a:t>İnternet faydalıdır ama dengeli kullanılmalı!</a:t>
             </a:r>
           </a:p>
           <a:p>
             <a:pPr>
-              <a:spcAft>
-                <a:spcPts val="1200"/>
-              </a:spcAft>
-              <a:defRPr sz="2000"/>
-            </a:pPr>
-          </a:p>
-          <a:p>
-            <a:pPr>
-              <a:spcAft>
-                <a:spcPts val="1200"/>
+              <a:lnSpc>
+                <a:spcPct val="90000"/>
+              </a:lnSpc>
+              <a:spcAft>
+                <a:spcPts val="300"/>
+              </a:spcAft>
+              <a:defRPr sz="2000"/>
+            </a:pPr>
+          </a:p>
+          <a:p>
+            <a:pPr>
+              <a:lnSpc>
+                <a:spcPct val="90000"/>
+              </a:lnSpc>
+              <a:spcAft>
+                <a:spcPts val="300"/>
               </a:spcAft>
               <a:defRPr sz="2000" b="1"/>
             </a:pPr>
             <a:r>
-              <a:rPr sz="1400"/>
+              <a:rPr sz="1300"/>
               <a:t>✅ Sağlıklı İnternet Kullanımı:</a:t>
             </a:r>
           </a:p>
           <a:p>
             <a:pPr>
-              <a:spcAft>
-                <a:spcPts val="1200"/>
-              </a:spcAft>
-              <a:defRPr sz="2000"/>
-            </a:pPr>
-          </a:p>
-          <a:p>
-            <a:pPr>
-              <a:spcAft>
-                <a:spcPts val="1200"/>
-              </a:spcAft>
-              <a:defRPr sz="2000"/>
-            </a:pPr>
-            <a:r>
-              <a:rPr sz="1400"/>
+              <a:lnSpc>
+                <a:spcPct val="90000"/>
+              </a:lnSpc>
+              <a:spcAft>
+                <a:spcPts val="300"/>
+              </a:spcAft>
+              <a:defRPr sz="2000"/>
+            </a:pPr>
+          </a:p>
+          <a:p>
+            <a:pPr>
+              <a:lnSpc>
+                <a:spcPct val="90000"/>
+              </a:lnSpc>
+              <a:spcAft>
+                <a:spcPts val="300"/>
+              </a:spcAft>
+              <a:defRPr sz="2000"/>
+            </a:pPr>
+            <a:r>
+              <a:rPr sz="1300"/>
               <a:t>📱 Süre Sınırı:</a:t>
             </a:r>
           </a:p>
           <a:p>
             <a:pPr lvl="1">
-              <a:spcAft>
-                <a:spcPts val="1200"/>
-              </a:spcAft>
-              <a:defRPr sz="1800"/>
-            </a:pPr>
-            <a:r>
-              <a:rPr sz="1400"/>
+              <a:lnSpc>
+                <a:spcPct val="90000"/>
+              </a:lnSpc>
+              <a:spcAft>
+                <a:spcPts val="300"/>
+              </a:spcAft>
+              <a:defRPr sz="1800"/>
+            </a:pPr>
+            <a:r>
+              <a:rPr sz="1300"/>
               <a:t>    • 5. sınıf için önerilen: Günde 1-2 saat</a:t>
             </a:r>
           </a:p>
           <a:p>
             <a:pPr lvl="1">
-              <a:spcAft>
-                <a:spcPts val="1200"/>
-              </a:spcAft>
-              <a:defRPr sz="1800"/>
-            </a:pPr>
-            <a:r>
-              <a:rPr sz="1400"/>
+              <a:lnSpc>
+                <a:spcPct val="90000"/>
+              </a:lnSpc>
+              <a:spcAft>
+                <a:spcPts val="300"/>
+              </a:spcAft>
+              <a:defRPr sz="1800"/>
+            </a:pPr>
+            <a:r>
+              <a:rPr sz="1300"/>
               <a:t>    • Sık sık mola ver (20-20-20 kuralı)</a:t>
             </a:r>
           </a:p>
           <a:p>
             <a:pPr>
-              <a:spcAft>
-                <a:spcPts val="1200"/>
-              </a:spcAft>
-              <a:defRPr sz="2000"/>
-            </a:pPr>
-          </a:p>
-          <a:p>
-            <a:pPr>
-              <a:spcAft>
-                <a:spcPts val="1200"/>
-              </a:spcAft>
-              <a:defRPr sz="2000"/>
-            </a:pPr>
-            <a:r>
-              <a:rPr sz="1400"/>
+              <a:lnSpc>
+                <a:spcPct val="90000"/>
+              </a:lnSpc>
+              <a:spcAft>
+                <a:spcPts val="300"/>
+              </a:spcAft>
+              <a:defRPr sz="2000"/>
+            </a:pPr>
+          </a:p>
+          <a:p>
+            <a:pPr>
+              <a:lnSpc>
+                <a:spcPct val="90000"/>
+              </a:lnSpc>
+              <a:spcAft>
+                <a:spcPts val="300"/>
+              </a:spcAft>
+              <a:defRPr sz="2000"/>
+            </a:pPr>
+            <a:r>
+              <a:rPr sz="1300"/>
               <a:t>🛌 Uyku Öncelikli:</a:t>
             </a:r>
           </a:p>
           <a:p>
             <a:pPr lvl="1">
-              <a:spcAft>
-                <a:spcPts val="1200"/>
-              </a:spcAft>
-              <a:defRPr sz="1800"/>
-            </a:pPr>
-            <a:r>
-              <a:rPr sz="1400"/>
+              <a:lnSpc>
+                <a:spcPct val="90000"/>
+              </a:lnSpc>
+              <a:spcAft>
+                <a:spcPts val="300"/>
+              </a:spcAft>
+              <a:defRPr sz="1800"/>
+            </a:pPr>
+            <a:r>
+              <a:rPr sz="1300"/>
               <a:t>    • Yatmadan önce ekran kullanma</a:t>
             </a:r>
           </a:p>
           <a:p>
             <a:pPr lvl="1">
-              <a:spcAft>
-                <a:spcPts val="1200"/>
-              </a:spcAft>
-              <a:defRPr sz="1800"/>
-            </a:pPr>
-            <a:r>
-              <a:rPr sz="1400"/>
+              <a:lnSpc>
+                <a:spcPct val="90000"/>
+              </a:lnSpc>
+              <a:spcAft>
+                <a:spcPts val="300"/>
+              </a:spcAft>
+              <a:defRPr sz="1800"/>
+            </a:pPr>
+            <a:r>
+              <a:rPr sz="1300"/>
               <a:t>    • Telefon/tableti yatak odasında bırakma</a:t>
             </a:r>
           </a:p>
           <a:p>
             <a:pPr>
-              <a:spcAft>
-                <a:spcPts val="1200"/>
-              </a:spcAft>
-              <a:defRPr sz="2000"/>
-            </a:pPr>
-          </a:p>
-          <a:p>
-            <a:pPr>
-              <a:spcAft>
-                <a:spcPts val="1200"/>
-              </a:spcAft>
-              <a:defRPr sz="2000"/>
-            </a:pPr>
-            <a:r>
-              <a:rPr sz="1400"/>
+              <a:lnSpc>
+                <a:spcPct val="90000"/>
+              </a:lnSpc>
+              <a:spcAft>
+                <a:spcPts val="300"/>
+              </a:spcAft>
+              <a:defRPr sz="2000"/>
+            </a:pPr>
+          </a:p>
+          <a:p>
+            <a:pPr>
+              <a:lnSpc>
+                <a:spcPct val="90000"/>
+              </a:lnSpc>
+              <a:spcAft>
+                <a:spcPts val="300"/>
+              </a:spcAft>
+              <a:defRPr sz="2000"/>
+            </a:pPr>
+            <a:r>
+              <a:rPr sz="1300"/>
               <a:t>👨‍👩‍👧 Aile Zamanı:</a:t>
             </a:r>
           </a:p>
           <a:p>
             <a:pPr lvl="1">
-              <a:spcAft>
-                <a:spcPts val="1200"/>
-              </a:spcAft>
-              <a:defRPr sz="1800"/>
-            </a:pPr>
-            <a:r>
-              <a:rPr sz="1400"/>
+              <a:lnSpc>
+                <a:spcPct val="90000"/>
+              </a:lnSpc>
+              <a:spcAft>
+                <a:spcPts val="300"/>
+              </a:spcAft>
+              <a:defRPr sz="1800"/>
+            </a:pPr>
+            <a:r>
+              <a:rPr sz="1300"/>
               <a:t>    • Yemekte telefon yok</a:t>
             </a:r>
           </a:p>
           <a:p>
             <a:pPr lvl="1">
-              <a:spcAft>
-                <a:spcPts val="1200"/>
-              </a:spcAft>
-              <a:defRPr sz="1800"/>
-            </a:pPr>
-            <a:r>
-              <a:rPr sz="1400"/>
+              <a:lnSpc>
+                <a:spcPct val="90000"/>
+              </a:lnSpc>
+              <a:spcAft>
+                <a:spcPts val="300"/>
+              </a:spcAft>
+              <a:defRPr sz="1800"/>
+            </a:pPr>
+            <a:r>
+              <a:rPr sz="1300"/>
               <a:t>    • Aile ile vakit geçir</a:t>
             </a:r>
           </a:p>
           <a:p>
             <a:pPr>
-              <a:spcAft>
-                <a:spcPts val="1200"/>
-              </a:spcAft>
-              <a:defRPr sz="2000"/>
-            </a:pPr>
-          </a:p>
-          <a:p>
-            <a:pPr>
-              <a:spcAft>
-                <a:spcPts val="1200"/>
-              </a:spcAft>
-              <a:defRPr sz="2000"/>
-            </a:pPr>
-            <a:r>
-              <a:rPr sz="1400"/>
+              <a:lnSpc>
+                <a:spcPct val="90000"/>
+              </a:lnSpc>
+              <a:spcAft>
+                <a:spcPts val="300"/>
+              </a:spcAft>
+              <a:defRPr sz="2000"/>
+            </a:pPr>
+          </a:p>
+          <a:p>
+            <a:pPr>
+              <a:lnSpc>
+                <a:spcPct val="90000"/>
+              </a:lnSpc>
+              <a:spcAft>
+                <a:spcPts val="300"/>
+              </a:spcAft>
+              <a:defRPr sz="2000"/>
+            </a:pPr>
+            <a:r>
+              <a:rPr sz="1300"/>
               <a:t>🏃 Fiziksel Aktivite:</a:t>
             </a:r>
           </a:p>
           <a:p>
             <a:pPr lvl="1">
-              <a:spcAft>
-                <a:spcPts val="1200"/>
-              </a:spcAft>
-              <a:defRPr sz="1800"/>
-            </a:pPr>
-            <a:r>
-              <a:rPr sz="1400"/>
+              <a:lnSpc>
+                <a:spcPct val="90000"/>
+              </a:lnSpc>
+              <a:spcAft>
+                <a:spcPts val="300"/>
+              </a:spcAft>
+              <a:defRPr sz="1800"/>
+            </a:pPr>
+            <a:r>
+              <a:rPr sz="1300"/>
               <a:t>    • Dışarı çık, spor yap</a:t>
             </a:r>
           </a:p>
           <a:p>
             <a:pPr lvl="1">
-              <a:spcAft>
-                <a:spcPts val="1200"/>
-              </a:spcAft>
-              <a:defRPr sz="1800"/>
-            </a:pPr>
-            <a:r>
-              <a:rPr sz="1400"/>
+              <a:lnSpc>
+                <a:spcPct val="90000"/>
+              </a:lnSpc>
+              <a:spcAft>
+                <a:spcPts val="300"/>
+              </a:spcAft>
+              <a:defRPr sz="1800"/>
+            </a:pPr>
+            <a:r>
+              <a:rPr sz="1300"/>
               <a:t>    • Arkadaşlarla yüz yüze oyna</a:t>
             </a:r>
           </a:p>
           <a:p>
             <a:pPr>
-              <a:spcAft>
-                <a:spcPts val="1200"/>
-              </a:spcAft>
-              <a:defRPr sz="2000"/>
-            </a:pPr>
-          </a:p>
-          <a:p>
-            <a:pPr>
-              <a:spcAft>
-                <a:spcPts val="1200"/>
-              </a:spcAft>
-              <a:defRPr sz="2000"/>
-            </a:pPr>
-            <a:r>
-              <a:rPr sz="1400"/>
+              <a:lnSpc>
+                <a:spcPct val="90000"/>
+              </a:lnSpc>
+              <a:spcAft>
+                <a:spcPts val="300"/>
+              </a:spcAft>
+              <a:defRPr sz="2000"/>
+            </a:pPr>
+          </a:p>
+          <a:p>
+            <a:pPr>
+              <a:lnSpc>
+                <a:spcPct val="90000"/>
+              </a:lnSpc>
+              <a:spcAft>
+                <a:spcPts val="300"/>
+              </a:spcAft>
+              <a:defRPr sz="2000"/>
+            </a:pPr>
+            <a:r>
+              <a:rPr sz="1300"/>
               <a:t>📚 Ödev ve Okul:</a:t>
             </a:r>
           </a:p>
           <a:p>
             <a:pPr lvl="1">
-              <a:spcAft>
-                <a:spcPts val="1200"/>
-              </a:spcAft>
-              <a:defRPr sz="1800"/>
-            </a:pPr>
-            <a:r>
-              <a:rPr sz="1400"/>
+              <a:lnSpc>
+                <a:spcPct val="90000"/>
+              </a:lnSpc>
+              <a:spcAft>
+                <a:spcPts val="300"/>
+              </a:spcAft>
+              <a:defRPr sz="1800"/>
+            </a:pPr>
+            <a:r>
+              <a:rPr sz="1300"/>
               <a:t>    • Önce ödevler</a:t>
             </a:r>
           </a:p>
           <a:p>
             <a:pPr lvl="1">
-              <a:spcAft>
-                <a:spcPts val="1200"/>
-              </a:spcAft>
-              <a:defRPr sz="1800"/>
-            </a:pPr>
-            <a:r>
-              <a:rPr sz="1400"/>
+              <a:lnSpc>
+                <a:spcPct val="90000"/>
+              </a:lnSpc>
+              <a:spcAft>
+                <a:spcPts val="300"/>
+              </a:spcAft>
+              <a:defRPr sz="1800"/>
+            </a:pPr>
+            <a:r>
+              <a:rPr sz="1300"/>
               <a:t>    • Eğitsel içerikler izle</a:t>
             </a:r>
           </a:p>
           <a:p>
             <a:pPr>
-              <a:spcAft>
-                <a:spcPts val="1200"/>
-              </a:spcAft>
-              <a:defRPr sz="2000"/>
-            </a:pPr>
-          </a:p>
-          <a:p>
-            <a:pPr>
-              <a:spcAft>
-                <a:spcPts val="1200"/>
+              <a:lnSpc>
+                <a:spcPct val="90000"/>
+              </a:lnSpc>
+              <a:spcAft>
+                <a:spcPts val="300"/>
+              </a:spcAft>
+              <a:defRPr sz="2000"/>
+            </a:pPr>
+          </a:p>
+          <a:p>
+            <a:pPr>
+              <a:lnSpc>
+                <a:spcPct val="90000"/>
+              </a:lnSpc>
+              <a:spcAft>
+                <a:spcPts val="300"/>
               </a:spcAft>
               <a:defRPr sz="2000" b="1"/>
             </a:pPr>
             <a:r>
-              <a:rPr sz="1400"/>
+              <a:rPr sz="1300"/>
               <a:t>💡 20-20-20 Kuralı:</a:t>
             </a:r>
           </a:p>
           <a:p>
             <a:pPr>
-              <a:spcAft>
-                <a:spcPts val="1200"/>
-              </a:spcAft>
-              <a:defRPr sz="2000"/>
-            </a:pPr>
-            <a:r>
-              <a:rPr sz="1400"/>
+              <a:lnSpc>
+                <a:spcPct val="90000"/>
+              </a:lnSpc>
+              <a:spcAft>
+                <a:spcPts val="300"/>
+              </a:spcAft>
+              <a:defRPr sz="2000"/>
+            </a:pPr>
+            <a:r>
+              <a:rPr sz="1300"/>
               <a:t>Her 20 dakikada, 20 saniye, 20 feet (6 metre) uzağa bak</a:t>
             </a:r>
           </a:p>
@@ -8854,7 +9538,7 @@
         </p:nvSpPr>
         <p:spPr/>
         <p:txBody>
-          <a:bodyPr/>
+          <a:bodyPr wrap="square"/>
           <a:lstStyle/>
           <a:p>
             <a:pPr>
@@ -8908,220 +9592,286 @@
             <a:spAutoFit/>
           </a:bodyPr>
           <a:lstStyle/>
-          <a:p/>
-          <a:p>
-            <a:pPr>
-              <a:spcAft>
-                <a:spcPts val="1200"/>
-              </a:spcAft>
-              <a:defRPr sz="2000"/>
-            </a:pPr>
-            <a:r>
-              <a:rPr sz="1600"/>
+          <a:p>
+            <a:pPr>
+              <a:lnSpc>
+                <a:spcPct val="90000"/>
+              </a:lnSpc>
+              <a:spcAft>
+                <a:spcPts val="300"/>
+              </a:spcAft>
+            </a:pPr>
+          </a:p>
+          <a:p>
+            <a:pPr>
+              <a:lnSpc>
+                <a:spcPct val="90000"/>
+              </a:lnSpc>
+              <a:spcAft>
+                <a:spcPts val="300"/>
+              </a:spcAft>
+              <a:defRPr sz="2000"/>
+            </a:pPr>
+            <a:r>
+              <a:rPr sz="1400"/>
               <a:t>Bu ünitede neler öğrendik?</a:t>
             </a:r>
           </a:p>
           <a:p>
             <a:pPr>
-              <a:spcAft>
-                <a:spcPts val="1200"/>
-              </a:spcAft>
-              <a:defRPr sz="2000"/>
-            </a:pPr>
-          </a:p>
-          <a:p>
-            <a:pPr>
-              <a:spcAft>
-                <a:spcPts val="1200"/>
+              <a:lnSpc>
+                <a:spcPct val="90000"/>
+              </a:lnSpc>
+              <a:spcAft>
+                <a:spcPts val="300"/>
+              </a:spcAft>
+              <a:defRPr sz="2000"/>
+            </a:pPr>
+          </a:p>
+          <a:p>
+            <a:pPr>
+              <a:lnSpc>
+                <a:spcPct val="90000"/>
+              </a:lnSpc>
+              <a:spcAft>
+                <a:spcPts val="300"/>
               </a:spcAft>
               <a:defRPr sz="2000" b="1"/>
             </a:pPr>
             <a:r>
-              <a:rPr sz="1600"/>
+              <a:rPr sz="1400"/>
               <a:t>✅ Bilgisayar ağları (LAN, WAN)</a:t>
             </a:r>
           </a:p>
           <a:p>
             <a:pPr>
-              <a:spcAft>
-                <a:spcPts val="1200"/>
+              <a:lnSpc>
+                <a:spcPct val="90000"/>
+              </a:lnSpc>
+              <a:spcAft>
+                <a:spcPts val="300"/>
               </a:spcAft>
               <a:defRPr sz="2000" b="1"/>
             </a:pPr>
             <a:r>
-              <a:rPr sz="1600"/>
+              <a:rPr sz="1400"/>
               <a:t>✅ İnternet nasıl çalışır?</a:t>
             </a:r>
           </a:p>
           <a:p>
             <a:pPr>
-              <a:spcAft>
-                <a:spcPts val="1200"/>
+              <a:lnSpc>
+                <a:spcPct val="90000"/>
+              </a:lnSpc>
+              <a:spcAft>
+                <a:spcPts val="300"/>
               </a:spcAft>
               <a:defRPr sz="2000" b="1"/>
             </a:pPr>
             <a:r>
-              <a:rPr sz="1600"/>
+              <a:rPr sz="1400"/>
               <a:t>✅ IP adresi ve Domain kavramları</a:t>
             </a:r>
           </a:p>
           <a:p>
             <a:pPr>
-              <a:spcAft>
-                <a:spcPts val="1200"/>
+              <a:lnSpc>
+                <a:spcPct val="90000"/>
+              </a:lnSpc>
+              <a:spcAft>
+                <a:spcPts val="300"/>
               </a:spcAft>
               <a:defRPr sz="2000" b="1"/>
             </a:pPr>
             <a:r>
-              <a:rPr sz="1600"/>
+              <a:rPr sz="1400"/>
               <a:t>✅ İnternet tarayıcıları ve arama motorları</a:t>
             </a:r>
           </a:p>
           <a:p>
             <a:pPr>
-              <a:spcAft>
-                <a:spcPts val="1200"/>
+              <a:lnSpc>
+                <a:spcPct val="90000"/>
+              </a:lnSpc>
+              <a:spcAft>
+                <a:spcPts val="300"/>
               </a:spcAft>
               <a:defRPr sz="2000" b="1"/>
             </a:pPr>
             <a:r>
-              <a:rPr sz="1600"/>
+              <a:rPr sz="1400"/>
               <a:t>✅ Etkili arama teknikleri</a:t>
             </a:r>
           </a:p>
           <a:p>
             <a:pPr>
-              <a:spcAft>
-                <a:spcPts val="1200"/>
+              <a:lnSpc>
+                <a:spcPct val="90000"/>
+              </a:lnSpc>
+              <a:spcAft>
+                <a:spcPts val="300"/>
               </a:spcAft>
               <a:defRPr sz="2000" b="1"/>
             </a:pPr>
             <a:r>
-              <a:rPr sz="1600"/>
+              <a:rPr sz="1400"/>
               <a:t>✅ Güvenilir kaynak bulma</a:t>
             </a:r>
           </a:p>
           <a:p>
             <a:pPr>
-              <a:spcAft>
-                <a:spcPts val="1200"/>
+              <a:lnSpc>
+                <a:spcPct val="90000"/>
+              </a:lnSpc>
+              <a:spcAft>
+                <a:spcPts val="300"/>
               </a:spcAft>
               <a:defRPr sz="2000" b="1"/>
             </a:pPr>
             <a:r>
-              <a:rPr sz="1600"/>
+              <a:rPr sz="1400"/>
               <a:t>✅ E-posta kullanımı ve etiği</a:t>
             </a:r>
           </a:p>
           <a:p>
             <a:pPr>
-              <a:spcAft>
-                <a:spcPts val="1200"/>
+              <a:lnSpc>
+                <a:spcPct val="90000"/>
+              </a:lnSpc>
+              <a:spcAft>
+                <a:spcPts val="300"/>
               </a:spcAft>
               <a:defRPr sz="2000" b="1"/>
             </a:pPr>
             <a:r>
-              <a:rPr sz="1600"/>
+              <a:rPr sz="1400"/>
               <a:t>✅ Çevrimiçi iletişim araçları</a:t>
             </a:r>
           </a:p>
           <a:p>
             <a:pPr>
-              <a:spcAft>
-                <a:spcPts val="1200"/>
+              <a:lnSpc>
+                <a:spcPct val="90000"/>
+              </a:lnSpc>
+              <a:spcAft>
+                <a:spcPts val="300"/>
               </a:spcAft>
               <a:defRPr sz="2000" b="1"/>
             </a:pPr>
             <a:r>
-              <a:rPr sz="1600"/>
+              <a:rPr sz="1400"/>
               <a:t>✅ İnternet güvenliği kuralları</a:t>
             </a:r>
           </a:p>
           <a:p>
             <a:pPr>
-              <a:spcAft>
-                <a:spcPts val="1200"/>
+              <a:lnSpc>
+                <a:spcPct val="90000"/>
+              </a:lnSpc>
+              <a:spcAft>
+                <a:spcPts val="300"/>
               </a:spcAft>
               <a:defRPr sz="2000" b="1"/>
             </a:pPr>
             <a:r>
-              <a:rPr sz="1600"/>
+              <a:rPr sz="1400"/>
               <a:t>✅ Siber zorbalık</a:t>
             </a:r>
           </a:p>
           <a:p>
             <a:pPr>
-              <a:spcAft>
-                <a:spcPts val="1200"/>
+              <a:lnSpc>
+                <a:spcPct val="90000"/>
+              </a:lnSpc>
+              <a:spcAft>
+                <a:spcPts val="300"/>
               </a:spcAft>
               <a:defRPr sz="2000" b="1"/>
             </a:pPr>
             <a:r>
-              <a:rPr sz="1600"/>
+              <a:rPr sz="1400"/>
               <a:t>✅ Telif hakları</a:t>
             </a:r>
           </a:p>
           <a:p>
             <a:pPr>
-              <a:spcAft>
-                <a:spcPts val="1200"/>
+              <a:lnSpc>
+                <a:spcPct val="90000"/>
+              </a:lnSpc>
+              <a:spcAft>
+                <a:spcPts val="300"/>
               </a:spcAft>
               <a:defRPr sz="2000" b="1"/>
             </a:pPr>
             <a:r>
-              <a:rPr sz="1600"/>
+              <a:rPr sz="1400"/>
               <a:t>✅ Dengeli internet kullanımı</a:t>
             </a:r>
           </a:p>
           <a:p>
             <a:pPr>
-              <a:spcAft>
-                <a:spcPts val="1200"/>
-              </a:spcAft>
-              <a:defRPr sz="2000"/>
-            </a:pPr>
-          </a:p>
-          <a:p>
-            <a:pPr>
-              <a:spcAft>
-                <a:spcPts val="1200"/>
+              <a:lnSpc>
+                <a:spcPct val="90000"/>
+              </a:lnSpc>
+              <a:spcAft>
+                <a:spcPts val="300"/>
+              </a:spcAft>
+              <a:defRPr sz="2000"/>
+            </a:pPr>
+          </a:p>
+          <a:p>
+            <a:pPr>
+              <a:lnSpc>
+                <a:spcPct val="90000"/>
+              </a:lnSpc>
+              <a:spcAft>
+                <a:spcPts val="300"/>
               </a:spcAft>
               <a:defRPr sz="2000" b="1"/>
             </a:pPr>
             <a:r>
-              <a:rPr sz="1600"/>
+              <a:rPr sz="1400"/>
               <a:t>💡 Anahtar Mesaj:</a:t>
             </a:r>
           </a:p>
           <a:p>
             <a:pPr>
-              <a:spcAft>
-                <a:spcPts val="1200"/>
-              </a:spcAft>
-              <a:defRPr sz="2000"/>
-            </a:pPr>
-            <a:r>
-              <a:rPr sz="1600"/>
+              <a:lnSpc>
+                <a:spcPct val="90000"/>
+              </a:lnSpc>
+              <a:spcAft>
+                <a:spcPts val="300"/>
+              </a:spcAft>
+              <a:defRPr sz="2000"/>
+            </a:pPr>
+            <a:r>
+              <a:rPr sz="1400"/>
               <a:t>İnternet harika bir araç ama güvenli ve dengeli kullanmalısın!</a:t>
             </a:r>
           </a:p>
           <a:p>
             <a:pPr>
-              <a:spcAft>
-                <a:spcPts val="1200"/>
-              </a:spcAft>
-              <a:defRPr sz="2000"/>
-            </a:pPr>
-          </a:p>
-          <a:p>
-            <a:pPr>
-              <a:spcAft>
-                <a:spcPts val="1200"/>
+              <a:lnSpc>
+                <a:spcPct val="90000"/>
+              </a:lnSpc>
+              <a:spcAft>
+                <a:spcPts val="300"/>
+              </a:spcAft>
+              <a:defRPr sz="2000"/>
+            </a:pPr>
+          </a:p>
+          <a:p>
+            <a:pPr>
+              <a:lnSpc>
+                <a:spcPct val="90000"/>
+              </a:lnSpc>
+              <a:spcAft>
+                <a:spcPts val="300"/>
               </a:spcAft>
               <a:defRPr sz="2000" b="1"/>
             </a:pPr>
             <a:r>
-              <a:rPr sz="1600"/>
+              <a:rPr sz="1400"/>
               <a:t>🎯 Artık bilinçli bir dijital vatandaşsın!</a:t>
             </a:r>
           </a:p>
@@ -9157,7 +9907,7 @@
         </p:nvSpPr>
         <p:spPr/>
         <p:txBody>
-          <a:bodyPr/>
+          <a:bodyPr wrap="square"/>
           <a:lstStyle/>
           <a:p>
             <a:pPr>
@@ -9211,236 +9961,308 @@
             <a:spAutoFit/>
           </a:bodyPr>
           <a:lstStyle/>
-          <a:p/>
-          <a:p>
-            <a:pPr>
-              <a:spcAft>
-                <a:spcPts val="1200"/>
-              </a:spcAft>
-              <a:defRPr sz="2000"/>
-            </a:pPr>
-            <a:r>
-              <a:rPr sz="1400"/>
+          <a:p>
+            <a:pPr>
+              <a:lnSpc>
+                <a:spcPct val="90000"/>
+              </a:lnSpc>
+              <a:spcAft>
+                <a:spcPts val="300"/>
+              </a:spcAft>
+            </a:pPr>
+          </a:p>
+          <a:p>
+            <a:pPr>
+              <a:lnSpc>
+                <a:spcPct val="90000"/>
+              </a:lnSpc>
+              <a:spcAft>
+                <a:spcPts val="300"/>
+              </a:spcAft>
+              <a:defRPr sz="2000"/>
+            </a:pPr>
+            <a:r>
+              <a:rPr sz="1300"/>
               <a:t>Daha fazla öğrenmek için:</a:t>
             </a:r>
           </a:p>
           <a:p>
             <a:pPr>
-              <a:spcAft>
-                <a:spcPts val="1200"/>
-              </a:spcAft>
-              <a:defRPr sz="2000"/>
-            </a:pPr>
-          </a:p>
-          <a:p>
-            <a:pPr>
-              <a:spcAft>
-                <a:spcPts val="1200"/>
-              </a:spcAft>
-              <a:defRPr sz="2000"/>
-            </a:pPr>
-            <a:r>
-              <a:rPr sz="1400"/>
+              <a:lnSpc>
+                <a:spcPct val="90000"/>
+              </a:lnSpc>
+              <a:spcAft>
+                <a:spcPts val="300"/>
+              </a:spcAft>
+              <a:defRPr sz="2000"/>
+            </a:pPr>
+          </a:p>
+          <a:p>
+            <a:pPr>
+              <a:lnSpc>
+                <a:spcPct val="90000"/>
+              </a:lnSpc>
+              <a:spcAft>
+                <a:spcPts val="300"/>
+              </a:spcAft>
+              <a:defRPr sz="2000"/>
+            </a:pPr>
+            <a:r>
+              <a:rPr sz="1300"/>
               <a:t>🎥 İzlenecek Videolar:</a:t>
             </a:r>
           </a:p>
           <a:p>
             <a:pPr lvl="1">
-              <a:spcAft>
-                <a:spcPts val="1200"/>
-              </a:spcAft>
-              <a:defRPr sz="1800"/>
-            </a:pPr>
-            <a:r>
-              <a:rPr sz="1400"/>
+              <a:lnSpc>
+                <a:spcPct val="90000"/>
+              </a:lnSpc>
+              <a:spcAft>
+                <a:spcPts val="300"/>
+              </a:spcAft>
+              <a:defRPr sz="1800"/>
+            </a:pPr>
+            <a:r>
+              <a:rPr sz="1300"/>
               <a:t>    • 'İnternet Nasıl Çalışır?' - TRT Okul</a:t>
             </a:r>
           </a:p>
           <a:p>
             <a:pPr lvl="1">
-              <a:spcAft>
-                <a:spcPts val="1200"/>
-              </a:spcAft>
-              <a:defRPr sz="1800"/>
-            </a:pPr>
-            <a:r>
-              <a:rPr sz="1400"/>
+              <a:lnSpc>
+                <a:spcPct val="90000"/>
+              </a:lnSpc>
+              <a:spcAft>
+                <a:spcPts val="300"/>
+              </a:spcAft>
+              <a:defRPr sz="1800"/>
+            </a:pPr>
+            <a:r>
+              <a:rPr sz="1300"/>
               <a:t>    • 'IP Adresi Nedir?' - Animasyonlu anlatım</a:t>
             </a:r>
           </a:p>
           <a:p>
             <a:pPr lvl="1">
-              <a:spcAft>
-                <a:spcPts val="1200"/>
-              </a:spcAft>
-              <a:defRPr sz="1800"/>
-            </a:pPr>
-            <a:r>
-              <a:rPr sz="1400"/>
+              <a:lnSpc>
+                <a:spcPct val="90000"/>
+              </a:lnSpc>
+              <a:spcAft>
+                <a:spcPts val="300"/>
+              </a:spcAft>
+              <a:defRPr sz="1800"/>
+            </a:pPr>
+            <a:r>
+              <a:rPr sz="1300"/>
               <a:t>    • 'Güvenli İnternet Kullanımı' - MEB videoları</a:t>
             </a:r>
           </a:p>
           <a:p>
             <a:pPr lvl="1">
-              <a:spcAft>
-                <a:spcPts val="1200"/>
-              </a:spcAft>
-              <a:defRPr sz="1800"/>
-            </a:pPr>
-            <a:r>
-              <a:rPr sz="1400"/>
+              <a:lnSpc>
+                <a:spcPct val="90000"/>
+              </a:lnSpc>
+              <a:spcAft>
+                <a:spcPts val="300"/>
+              </a:spcAft>
+              <a:defRPr sz="1800"/>
+            </a:pPr>
+            <a:r>
+              <a:rPr sz="1300"/>
               <a:t>    • 'Siber Zorbalığa Hayır' - Kısa film</a:t>
             </a:r>
           </a:p>
           <a:p>
             <a:pPr>
-              <a:spcAft>
-                <a:spcPts val="1200"/>
-              </a:spcAft>
-              <a:defRPr sz="2000"/>
-            </a:pPr>
-          </a:p>
-          <a:p>
-            <a:pPr>
-              <a:spcAft>
-                <a:spcPts val="1200"/>
-              </a:spcAft>
-              <a:defRPr sz="2000"/>
-            </a:pPr>
-            <a:r>
-              <a:rPr sz="1400"/>
+              <a:lnSpc>
+                <a:spcPct val="90000"/>
+              </a:lnSpc>
+              <a:spcAft>
+                <a:spcPts val="300"/>
+              </a:spcAft>
+              <a:defRPr sz="2000"/>
+            </a:pPr>
+          </a:p>
+          <a:p>
+            <a:pPr>
+              <a:lnSpc>
+                <a:spcPct val="90000"/>
+              </a:lnSpc>
+              <a:spcAft>
+                <a:spcPts val="300"/>
+              </a:spcAft>
+              <a:defRPr sz="2000"/>
+            </a:pPr>
+            <a:r>
+              <a:rPr sz="1300"/>
               <a:t>🌐 Keşfedilecek Siteler:</a:t>
             </a:r>
           </a:p>
           <a:p>
             <a:pPr lvl="1">
-              <a:spcAft>
-                <a:spcPts val="1200"/>
-              </a:spcAft>
-              <a:defRPr sz="1800"/>
-            </a:pPr>
-            <a:r>
-              <a:rPr sz="1400"/>
+              <a:lnSpc>
+                <a:spcPct val="90000"/>
+              </a:lnSpc>
+              <a:spcAft>
+                <a:spcPts val="300"/>
+              </a:spcAft>
+              <a:defRPr sz="1800"/>
+            </a:pPr>
+            <a:r>
+              <a:rPr sz="1300"/>
               <a:t>    • https://guvenliweb.org.tr</a:t>
             </a:r>
           </a:p>
           <a:p>
             <a:pPr lvl="1">
-              <a:spcAft>
-                <a:spcPts val="1200"/>
-              </a:spcAft>
-              <a:defRPr sz="1800"/>
-            </a:pPr>
-            <a:r>
-              <a:rPr sz="1400"/>
+              <a:lnSpc>
+                <a:spcPct val="90000"/>
+              </a:lnSpc>
+              <a:spcAft>
+                <a:spcPts val="300"/>
+              </a:spcAft>
+              <a:defRPr sz="1800"/>
+            </a:pPr>
+            <a:r>
+              <a:rPr sz="1300"/>
               <a:t>    • https://internetguvenlik.org</a:t>
             </a:r>
           </a:p>
           <a:p>
             <a:pPr>
-              <a:spcAft>
-                <a:spcPts val="1200"/>
-              </a:spcAft>
-              <a:defRPr sz="2000"/>
-            </a:pPr>
-          </a:p>
-          <a:p>
-            <a:pPr>
-              <a:spcAft>
-                <a:spcPts val="1200"/>
-              </a:spcAft>
-              <a:defRPr sz="2000"/>
-            </a:pPr>
-            <a:r>
-              <a:rPr sz="1400"/>
+              <a:lnSpc>
+                <a:spcPct val="90000"/>
+              </a:lnSpc>
+              <a:spcAft>
+                <a:spcPts val="300"/>
+              </a:spcAft>
+              <a:defRPr sz="2000"/>
+            </a:pPr>
+          </a:p>
+          <a:p>
+            <a:pPr>
+              <a:lnSpc>
+                <a:spcPct val="90000"/>
+              </a:lnSpc>
+              <a:spcAft>
+                <a:spcPts val="300"/>
+              </a:spcAft>
+              <a:defRPr sz="2000"/>
+            </a:pPr>
+            <a:r>
+              <a:rPr sz="1300"/>
               <a:t>🎮 Eğitici Oyunlar:</a:t>
             </a:r>
           </a:p>
           <a:p>
             <a:pPr lvl="1">
-              <a:spcAft>
-                <a:spcPts val="1200"/>
-              </a:spcAft>
-              <a:defRPr sz="1800"/>
-            </a:pPr>
-            <a:r>
-              <a:rPr sz="1400"/>
+              <a:lnSpc>
+                <a:spcPct val="90000"/>
+              </a:lnSpc>
+              <a:spcAft>
+                <a:spcPts val="300"/>
+              </a:spcAft>
+              <a:defRPr sz="1800"/>
+            </a:pPr>
+            <a:r>
+              <a:rPr sz="1300"/>
               <a:t>    • 'İnternet Güvenliği Kahramanları' oyunu</a:t>
             </a:r>
           </a:p>
           <a:p>
             <a:pPr>
-              <a:spcAft>
-                <a:spcPts val="1200"/>
-              </a:spcAft>
-              <a:defRPr sz="2000"/>
-            </a:pPr>
-          </a:p>
-          <a:p>
-            <a:pPr>
-              <a:spcAft>
-                <a:spcPts val="1200"/>
-              </a:spcAft>
-              <a:defRPr sz="2000"/>
-            </a:pPr>
-            <a:r>
-              <a:rPr sz="1400"/>
+              <a:lnSpc>
+                <a:spcPct val="90000"/>
+              </a:lnSpc>
+              <a:spcAft>
+                <a:spcPts val="300"/>
+              </a:spcAft>
+              <a:defRPr sz="2000"/>
+            </a:pPr>
+          </a:p>
+          <a:p>
+            <a:pPr>
+              <a:lnSpc>
+                <a:spcPct val="90000"/>
+              </a:lnSpc>
+              <a:spcAft>
+                <a:spcPts val="300"/>
+              </a:spcAft>
+              <a:defRPr sz="2000"/>
+            </a:pPr>
+            <a:r>
+              <a:rPr sz="1300"/>
               <a:t>📖 Yapılacak Aktiviteler:</a:t>
             </a:r>
           </a:p>
           <a:p>
             <a:pPr lvl="1">
-              <a:spcAft>
-                <a:spcPts val="1200"/>
-              </a:spcAft>
-              <a:defRPr sz="1800"/>
-            </a:pPr>
-            <a:r>
-              <a:rPr sz="1400"/>
+              <a:lnSpc>
+                <a:spcPct val="90000"/>
+              </a:lnSpc>
+              <a:spcAft>
+                <a:spcPts val="300"/>
+              </a:spcAft>
+              <a:defRPr sz="1800"/>
+            </a:pPr>
+            <a:r>
+              <a:rPr sz="1300"/>
               <a:t>    • Güçlü şifre oluşturma yarışması</a:t>
             </a:r>
           </a:p>
           <a:p>
             <a:pPr lvl="1">
-              <a:spcAft>
-                <a:spcPts val="1200"/>
-              </a:spcAft>
-              <a:defRPr sz="1800"/>
-            </a:pPr>
-            <a:r>
-              <a:rPr sz="1400"/>
+              <a:lnSpc>
+                <a:spcPct val="90000"/>
+              </a:lnSpc>
+              <a:spcAft>
+                <a:spcPts val="300"/>
+              </a:spcAft>
+              <a:defRPr sz="1800"/>
+            </a:pPr>
+            <a:r>
+              <a:rPr sz="1300"/>
               <a:t>    • Arama motoru kullanım yarışması</a:t>
             </a:r>
           </a:p>
           <a:p>
             <a:pPr lvl="1">
-              <a:spcAft>
-                <a:spcPts val="1200"/>
-              </a:spcAft>
-              <a:defRPr sz="1800"/>
-            </a:pPr>
-            <a:r>
-              <a:rPr sz="1400"/>
+              <a:lnSpc>
+                <a:spcPct val="90000"/>
+              </a:lnSpc>
+              <a:spcAft>
+                <a:spcPts val="300"/>
+              </a:spcAft>
+              <a:defRPr sz="1800"/>
+            </a:pPr>
+            <a:r>
+              <a:rPr sz="1300"/>
               <a:t>    • E-posta yazma pratiği</a:t>
             </a:r>
           </a:p>
           <a:p>
             <a:pPr>
-              <a:spcAft>
-                <a:spcPts val="1200"/>
-              </a:spcAft>
-              <a:defRPr sz="2000"/>
-            </a:pPr>
-          </a:p>
-          <a:p>
-            <a:pPr>
-              <a:spcAft>
-                <a:spcPts val="1200"/>
+              <a:lnSpc>
+                <a:spcPct val="90000"/>
+              </a:lnSpc>
+              <a:spcAft>
+                <a:spcPts val="300"/>
+              </a:spcAft>
+              <a:defRPr sz="2000"/>
+            </a:pPr>
+          </a:p>
+          <a:p>
+            <a:pPr>
+              <a:lnSpc>
+                <a:spcPct val="90000"/>
+              </a:lnSpc>
+              <a:spcAft>
+                <a:spcPts val="300"/>
               </a:spcAft>
               <a:defRPr sz="2000" b="1"/>
             </a:pPr>
             <a:r>
-              <a:rPr sz="1400"/>
+              <a:rPr sz="1300"/>
               <a:t>💡 Güvenli internette buluşalım!</a:t>
             </a:r>
           </a:p>
@@ -9476,7 +10298,7 @@
         </p:nvSpPr>
         <p:spPr/>
         <p:txBody>
-          <a:bodyPr/>
+          <a:bodyPr wrap="square"/>
           <a:lstStyle/>
           <a:p>
             <a:pPr>
@@ -9530,152 +10352,215 @@
             <a:spAutoFit/>
           </a:bodyPr>
           <a:lstStyle/>
-          <a:p/>
-          <a:p>
-            <a:pPr>
-              <a:spcAft>
-                <a:spcPts val="1200"/>
-              </a:spcAft>
-              <a:defRPr sz="2000"/>
-            </a:pPr>
-            <a:r>
+          <a:p>
+            <a:pPr>
+              <a:lnSpc>
+                <a:spcPct val="90000"/>
+              </a:lnSpc>
+              <a:spcAft>
+                <a:spcPts val="300"/>
+              </a:spcAft>
+            </a:pPr>
+          </a:p>
+          <a:p>
+            <a:pPr>
+              <a:lnSpc>
+                <a:spcPct val="90000"/>
+              </a:lnSpc>
+              <a:spcAft>
+                <a:spcPts val="300"/>
+              </a:spcAft>
+              <a:defRPr sz="2000"/>
+            </a:pPr>
+            <a:r>
+              <a:rPr sz="1500"/>
               <a:t>Bu ünitede neler öğreneceğiz?</a:t>
             </a:r>
           </a:p>
           <a:p>
             <a:pPr>
-              <a:spcAft>
-                <a:spcPts val="1200"/>
-              </a:spcAft>
-              <a:defRPr sz="2000"/>
-            </a:pPr>
-          </a:p>
-          <a:p>
-            <a:pPr>
-              <a:spcAft>
-                <a:spcPts val="1200"/>
+              <a:lnSpc>
+                <a:spcPct val="90000"/>
+              </a:lnSpc>
+              <a:spcAft>
+                <a:spcPts val="300"/>
+              </a:spcAft>
+              <a:defRPr sz="2000"/>
+            </a:pPr>
+          </a:p>
+          <a:p>
+            <a:pPr>
+              <a:lnSpc>
+                <a:spcPct val="90000"/>
+              </a:lnSpc>
+              <a:spcAft>
+                <a:spcPts val="300"/>
               </a:spcAft>
               <a:defRPr sz="2000" b="1"/>
             </a:pPr>
             <a:r>
+              <a:rPr sz="1500"/>
               <a:t>✅ 1. Bilgisayar Ağları Nedir?</a:t>
             </a:r>
           </a:p>
           <a:p>
             <a:pPr>
-              <a:spcAft>
-                <a:spcPts val="1200"/>
+              <a:lnSpc>
+                <a:spcPct val="90000"/>
+              </a:lnSpc>
+              <a:spcAft>
+                <a:spcPts val="300"/>
               </a:spcAft>
               <a:defRPr sz="2000" b="1"/>
             </a:pPr>
             <a:r>
+              <a:rPr sz="1500"/>
               <a:t>✅ 2. Ağ Türleri (LAN, WAN, İnternet)</a:t>
             </a:r>
           </a:p>
           <a:p>
             <a:pPr>
-              <a:spcAft>
-                <a:spcPts val="1200"/>
+              <a:lnSpc>
+                <a:spcPct val="90000"/>
+              </a:lnSpc>
+              <a:spcAft>
+                <a:spcPts val="300"/>
               </a:spcAft>
               <a:defRPr sz="2000" b="1"/>
             </a:pPr>
             <a:r>
+              <a:rPr sz="1500"/>
               <a:t>✅ 3. İnternet Nasıl Çalışır?</a:t>
             </a:r>
           </a:p>
           <a:p>
             <a:pPr>
-              <a:spcAft>
-                <a:spcPts val="1200"/>
+              <a:lnSpc>
+                <a:spcPct val="90000"/>
+              </a:lnSpc>
+              <a:spcAft>
+                <a:spcPts val="300"/>
               </a:spcAft>
               <a:defRPr sz="2000" b="1"/>
             </a:pPr>
             <a:r>
+              <a:rPr sz="1500"/>
               <a:t>✅ 4. IP Adresi ve Domain</a:t>
             </a:r>
           </a:p>
           <a:p>
             <a:pPr>
-              <a:spcAft>
-                <a:spcPts val="1200"/>
+              <a:lnSpc>
+                <a:spcPct val="90000"/>
+              </a:lnSpc>
+              <a:spcAft>
+                <a:spcPts val="300"/>
               </a:spcAft>
               <a:defRPr sz="2000" b="1"/>
             </a:pPr>
             <a:r>
+              <a:rPr sz="1500"/>
               <a:t>✅ 5. İnternet Tarayıcıları</a:t>
             </a:r>
           </a:p>
           <a:p>
             <a:pPr>
-              <a:spcAft>
-                <a:spcPts val="1200"/>
+              <a:lnSpc>
+                <a:spcPct val="90000"/>
+              </a:lnSpc>
+              <a:spcAft>
+                <a:spcPts val="300"/>
               </a:spcAft>
               <a:defRPr sz="2000" b="1"/>
             </a:pPr>
             <a:r>
+              <a:rPr sz="1500"/>
               <a:t>✅ 6. Arama Motorları ve Etkili Arama</a:t>
             </a:r>
           </a:p>
           <a:p>
             <a:pPr>
-              <a:spcAft>
-                <a:spcPts val="1200"/>
+              <a:lnSpc>
+                <a:spcPct val="90000"/>
+              </a:lnSpc>
+              <a:spcAft>
+                <a:spcPts val="300"/>
               </a:spcAft>
               <a:defRPr sz="2000" b="1"/>
             </a:pPr>
             <a:r>
+              <a:rPr sz="1500"/>
               <a:t>✅ 7. E-posta Kullanımı</a:t>
             </a:r>
           </a:p>
           <a:p>
             <a:pPr>
-              <a:spcAft>
-                <a:spcPts val="1200"/>
+              <a:lnSpc>
+                <a:spcPct val="90000"/>
+              </a:lnSpc>
+              <a:spcAft>
+                <a:spcPts val="300"/>
               </a:spcAft>
               <a:defRPr sz="2000" b="1"/>
             </a:pPr>
             <a:r>
+              <a:rPr sz="1500"/>
               <a:t>✅ 8. Çevrimiçi İletişim Araçları</a:t>
             </a:r>
           </a:p>
           <a:p>
             <a:pPr>
-              <a:spcAft>
-                <a:spcPts val="1200"/>
+              <a:lnSpc>
+                <a:spcPct val="90000"/>
+              </a:lnSpc>
+              <a:spcAft>
+                <a:spcPts val="300"/>
               </a:spcAft>
               <a:defRPr sz="2000" b="1"/>
             </a:pPr>
             <a:r>
+              <a:rPr sz="1500"/>
               <a:t>✅ 9. İnternet Güvenliği</a:t>
             </a:r>
           </a:p>
           <a:p>
             <a:pPr>
-              <a:spcAft>
-                <a:spcPts val="1200"/>
-              </a:spcAft>
-              <a:defRPr sz="2000"/>
-            </a:pPr>
-          </a:p>
-          <a:p>
-            <a:pPr>
-              <a:spcAft>
-                <a:spcPts val="1200"/>
-              </a:spcAft>
-              <a:defRPr sz="2000"/>
-            </a:pPr>
-            <a:r>
+              <a:lnSpc>
+                <a:spcPct val="90000"/>
+              </a:lnSpc>
+              <a:spcAft>
+                <a:spcPts val="300"/>
+              </a:spcAft>
+              <a:defRPr sz="2000"/>
+            </a:pPr>
+          </a:p>
+          <a:p>
+            <a:pPr>
+              <a:lnSpc>
+                <a:spcPct val="90000"/>
+              </a:lnSpc>
+              <a:spcAft>
+                <a:spcPts val="300"/>
+              </a:spcAft>
+              <a:defRPr sz="2000"/>
+            </a:pPr>
+            <a:r>
+              <a:rPr sz="1500"/>
               <a:t>⏰ Süre: 3 Hafta</a:t>
             </a:r>
           </a:p>
           <a:p>
             <a:pPr>
-              <a:spcAft>
-                <a:spcPts val="1200"/>
+              <a:lnSpc>
+                <a:spcPct val="90000"/>
+              </a:lnSpc>
+              <a:spcAft>
+                <a:spcPts val="300"/>
               </a:spcAft>
               <a:defRPr sz="2000" b="1"/>
             </a:pPr>
             <a:r>
+              <a:rPr sz="1500"/>
               <a:t>🎯 Amaç: İnterneti ve ağları güvenle kullanabilmek!</a:t>
             </a:r>
           </a:p>
@@ -9724,7 +10609,7 @@
           <a:noFill/>
         </p:spPr>
         <p:txBody>
-          <a:bodyPr wrap="none">
+          <a:bodyPr wrap="square">
             <a:spAutoFit/>
           </a:bodyPr>
           <a:lstStyle/>
@@ -9759,7 +10644,7 @@
           <a:noFill/>
         </p:spPr>
         <p:txBody>
-          <a:bodyPr wrap="none">
+          <a:bodyPr wrap="square">
             <a:spAutoFit/>
           </a:bodyPr>
           <a:lstStyle/>
@@ -9807,7 +10692,7 @@
         </p:nvSpPr>
         <p:spPr/>
         <p:txBody>
-          <a:bodyPr/>
+          <a:bodyPr wrap="square"/>
           <a:lstStyle/>
           <a:p>
             <a:pPr>
@@ -9861,252 +10746,327 @@
             <a:spAutoFit/>
           </a:bodyPr>
           <a:lstStyle/>
-          <a:p/>
-          <a:p>
-            <a:pPr>
-              <a:spcAft>
-                <a:spcPts val="1200"/>
+          <a:p>
+            <a:pPr>
+              <a:lnSpc>
+                <a:spcPct val="90000"/>
+              </a:lnSpc>
+              <a:spcAft>
+                <a:spcPts val="300"/>
+              </a:spcAft>
+            </a:pPr>
+          </a:p>
+          <a:p>
+            <a:pPr>
+              <a:lnSpc>
+                <a:spcPct val="90000"/>
+              </a:lnSpc>
+              <a:spcAft>
+                <a:spcPts val="300"/>
               </a:spcAft>
               <a:defRPr sz="2000" b="1"/>
             </a:pPr>
             <a:r>
-              <a:rPr sz="1600"/>
+              <a:rPr sz="1400"/>
               <a:t>🎯 Tanım:</a:t>
             </a:r>
           </a:p>
           <a:p>
             <a:pPr>
-              <a:spcAft>
-                <a:spcPts val="1200"/>
-              </a:spcAft>
-              <a:defRPr sz="2000"/>
-            </a:pPr>
-            <a:r>
-              <a:rPr sz="1600"/>
+              <a:lnSpc>
+                <a:spcPct val="90000"/>
+              </a:lnSpc>
+              <a:spcAft>
+                <a:spcPts val="300"/>
+              </a:spcAft>
+              <a:defRPr sz="2000"/>
+            </a:pPr>
+            <a:r>
+              <a:rPr sz="1400"/>
               <a:t>Bilgisayar ağı = Birbirine bağlı bilgisayar ve cihazlar</a:t>
             </a:r>
           </a:p>
           <a:p>
             <a:pPr>
-              <a:spcAft>
-                <a:spcPts val="1200"/>
-              </a:spcAft>
-              <a:defRPr sz="2000"/>
-            </a:pPr>
-          </a:p>
-          <a:p>
-            <a:pPr>
-              <a:spcAft>
-                <a:spcPts val="1200"/>
+              <a:lnSpc>
+                <a:spcPct val="90000"/>
+              </a:lnSpc>
+              <a:spcAft>
+                <a:spcPts val="300"/>
+              </a:spcAft>
+              <a:defRPr sz="2000"/>
+            </a:pPr>
+          </a:p>
+          <a:p>
+            <a:pPr>
+              <a:lnSpc>
+                <a:spcPct val="90000"/>
+              </a:lnSpc>
+              <a:spcAft>
+                <a:spcPts val="300"/>
               </a:spcAft>
               <a:defRPr sz="2000" b="1"/>
             </a:pPr>
             <a:r>
-              <a:rPr sz="1600"/>
+              <a:rPr sz="1400"/>
               <a:t>✅ Ağın Amacı:</a:t>
             </a:r>
           </a:p>
           <a:p>
             <a:pPr lvl="1">
-              <a:spcAft>
-                <a:spcPts val="1200"/>
-              </a:spcAft>
-              <a:defRPr sz="1800"/>
-            </a:pPr>
-            <a:r>
-              <a:rPr sz="1600"/>
+              <a:lnSpc>
+                <a:spcPct val="90000"/>
+              </a:lnSpc>
+              <a:spcAft>
+                <a:spcPts val="300"/>
+              </a:spcAft>
+              <a:defRPr sz="1800"/>
+            </a:pPr>
+            <a:r>
+              <a:rPr sz="1400"/>
               <a:t>    • Bilgi paylaşımı</a:t>
             </a:r>
           </a:p>
           <a:p>
             <a:pPr lvl="1">
-              <a:spcAft>
-                <a:spcPts val="1200"/>
-              </a:spcAft>
-              <a:defRPr sz="1800"/>
-            </a:pPr>
-            <a:r>
-              <a:rPr sz="1600"/>
+              <a:lnSpc>
+                <a:spcPct val="90000"/>
+              </a:lnSpc>
+              <a:spcAft>
+                <a:spcPts val="300"/>
+              </a:spcAft>
+              <a:defRPr sz="1800"/>
+            </a:pPr>
+            <a:r>
+              <a:rPr sz="1400"/>
               <a:t>    • Kaynak paylaşımı (yazıcı, dosya)</a:t>
             </a:r>
           </a:p>
           <a:p>
             <a:pPr lvl="1">
-              <a:spcAft>
-                <a:spcPts val="1200"/>
-              </a:spcAft>
-              <a:defRPr sz="1800"/>
-            </a:pPr>
-            <a:r>
-              <a:rPr sz="1600"/>
+              <a:lnSpc>
+                <a:spcPct val="90000"/>
+              </a:lnSpc>
+              <a:spcAft>
+                <a:spcPts val="300"/>
+              </a:spcAft>
+              <a:defRPr sz="1800"/>
+            </a:pPr>
+            <a:r>
+              <a:rPr sz="1400"/>
               <a:t>    • İletişim</a:t>
             </a:r>
           </a:p>
           <a:p>
             <a:pPr lvl="1">
-              <a:spcAft>
-                <a:spcPts val="1200"/>
-              </a:spcAft>
-              <a:defRPr sz="1800"/>
-            </a:pPr>
-            <a:r>
-              <a:rPr sz="1600"/>
+              <a:lnSpc>
+                <a:spcPct val="90000"/>
+              </a:lnSpc>
+              <a:spcAft>
+                <a:spcPts val="300"/>
+              </a:spcAft>
+              <a:defRPr sz="1800"/>
+            </a:pPr>
+            <a:r>
+              <a:rPr sz="1400"/>
               <a:t>    • Oyun oynama (çok oyunculu)</a:t>
             </a:r>
           </a:p>
           <a:p>
             <a:pPr>
-              <a:spcAft>
-                <a:spcPts val="1200"/>
-              </a:spcAft>
-              <a:defRPr sz="2000"/>
-            </a:pPr>
-          </a:p>
-          <a:p>
-            <a:pPr>
-              <a:spcAft>
-                <a:spcPts val="1200"/>
+              <a:lnSpc>
+                <a:spcPct val="90000"/>
+              </a:lnSpc>
+              <a:spcAft>
+                <a:spcPts val="300"/>
+              </a:spcAft>
+              <a:defRPr sz="2000"/>
+            </a:pPr>
+          </a:p>
+          <a:p>
+            <a:pPr>
+              <a:lnSpc>
+                <a:spcPct val="90000"/>
+              </a:lnSpc>
+              <a:spcAft>
+                <a:spcPts val="300"/>
               </a:spcAft>
               <a:defRPr sz="2000" b="1"/>
             </a:pPr>
             <a:r>
-              <a:rPr sz="1600"/>
+              <a:rPr sz="1400"/>
               <a:t>📌 Günlük Hayattan Örnekler:</a:t>
             </a:r>
           </a:p>
           <a:p>
             <a:pPr lvl="1">
-              <a:spcAft>
-                <a:spcPts val="1200"/>
-              </a:spcAft>
-              <a:defRPr sz="1800"/>
-            </a:pPr>
-            <a:r>
-              <a:rPr sz="1600"/>
+              <a:lnSpc>
+                <a:spcPct val="90000"/>
+              </a:lnSpc>
+              <a:spcAft>
+                <a:spcPts val="300"/>
+              </a:spcAft>
+              <a:defRPr sz="1800"/>
+            </a:pPr>
+            <a:r>
+              <a:rPr sz="1400"/>
               <a:t>    • Evdeki Wi-Fi ağı</a:t>
             </a:r>
           </a:p>
           <a:p>
             <a:pPr lvl="1">
-              <a:spcAft>
-                <a:spcPts val="1200"/>
-              </a:spcAft>
-              <a:defRPr sz="1800"/>
-            </a:pPr>
-            <a:r>
-              <a:rPr sz="1600"/>
+              <a:lnSpc>
+                <a:spcPct val="90000"/>
+              </a:lnSpc>
+              <a:spcAft>
+                <a:spcPts val="300"/>
+              </a:spcAft>
+              <a:defRPr sz="1800"/>
+            </a:pPr>
+            <a:r>
+              <a:rPr sz="1400"/>
               <a:t>    • Okulun bilgisayar laboratuvarı</a:t>
             </a:r>
           </a:p>
           <a:p>
             <a:pPr lvl="1">
-              <a:spcAft>
-                <a:spcPts val="1200"/>
-              </a:spcAft>
-              <a:defRPr sz="1800"/>
-            </a:pPr>
-            <a:r>
-              <a:rPr sz="1600"/>
+              <a:lnSpc>
+                <a:spcPct val="90000"/>
+              </a:lnSpc>
+              <a:spcAft>
+                <a:spcPts val="300"/>
+              </a:spcAft>
+              <a:defRPr sz="1800"/>
+            </a:pPr>
+            <a:r>
+              <a:rPr sz="1400"/>
               <a:t>    • İnternet kafeler</a:t>
             </a:r>
           </a:p>
           <a:p>
             <a:pPr lvl="1">
-              <a:spcAft>
-                <a:spcPts val="1200"/>
-              </a:spcAft>
-              <a:defRPr sz="1800"/>
-            </a:pPr>
-            <a:r>
-              <a:rPr sz="1600"/>
+              <a:lnSpc>
+                <a:spcPct val="90000"/>
+              </a:lnSpc>
+              <a:spcAft>
+                <a:spcPts val="300"/>
+              </a:spcAft>
+              <a:defRPr sz="1800"/>
+            </a:pPr>
+            <a:r>
+              <a:rPr sz="1400"/>
               <a:t>    • Online oyunlar (Roblox, Fortnite)</a:t>
             </a:r>
           </a:p>
           <a:p>
             <a:pPr>
-              <a:spcAft>
-                <a:spcPts val="1200"/>
-              </a:spcAft>
-              <a:defRPr sz="2000"/>
-            </a:pPr>
-          </a:p>
-          <a:p>
-            <a:pPr>
-              <a:spcAft>
-                <a:spcPts val="1200"/>
+              <a:lnSpc>
+                <a:spcPct val="90000"/>
+              </a:lnSpc>
+              <a:spcAft>
+                <a:spcPts val="300"/>
+              </a:spcAft>
+              <a:defRPr sz="2000"/>
+            </a:pPr>
+          </a:p>
+          <a:p>
+            <a:pPr>
+              <a:lnSpc>
+                <a:spcPct val="90000"/>
+              </a:lnSpc>
+              <a:spcAft>
+                <a:spcPts val="300"/>
               </a:spcAft>
               <a:defRPr sz="2000" b="1"/>
             </a:pPr>
             <a:r>
-              <a:rPr sz="1600"/>
+              <a:rPr sz="1400"/>
               <a:t>💡 Ağ sayesinde:</a:t>
             </a:r>
           </a:p>
           <a:p>
             <a:pPr lvl="1">
-              <a:spcAft>
-                <a:spcPts val="1200"/>
-              </a:spcAft>
-              <a:defRPr sz="1800"/>
-            </a:pPr>
-            <a:r>
-              <a:rPr sz="1600"/>
+              <a:lnSpc>
+                <a:spcPct val="90000"/>
+              </a:lnSpc>
+              <a:spcAft>
+                <a:spcPts val="300"/>
+              </a:spcAft>
+              <a:defRPr sz="1800"/>
+            </a:pPr>
+            <a:r>
+              <a:rPr sz="1400"/>
               <a:t>    • Dosyaları paylaşırsın</a:t>
             </a:r>
           </a:p>
           <a:p>
             <a:pPr lvl="1">
-              <a:spcAft>
-                <a:spcPts val="1200"/>
-              </a:spcAft>
-              <a:defRPr sz="1800"/>
-            </a:pPr>
-            <a:r>
-              <a:rPr sz="1600"/>
+              <a:lnSpc>
+                <a:spcPct val="90000"/>
+              </a:lnSpc>
+              <a:spcAft>
+                <a:spcPts val="300"/>
+              </a:spcAft>
+              <a:defRPr sz="1800"/>
+            </a:pPr>
+            <a:r>
+              <a:rPr sz="1400"/>
               <a:t>    • Mesajlaşırsın</a:t>
             </a:r>
           </a:p>
           <a:p>
             <a:pPr lvl="1">
-              <a:spcAft>
-                <a:spcPts val="1200"/>
-              </a:spcAft>
-              <a:defRPr sz="1800"/>
-            </a:pPr>
-            <a:r>
-              <a:rPr sz="1600"/>
+              <a:lnSpc>
+                <a:spcPct val="90000"/>
+              </a:lnSpc>
+              <a:spcAft>
+                <a:spcPts val="300"/>
+              </a:spcAft>
+              <a:defRPr sz="1800"/>
+            </a:pPr>
+            <a:r>
+              <a:rPr sz="1400"/>
               <a:t>    • Online oyun oynarsın</a:t>
             </a:r>
           </a:p>
           <a:p>
             <a:pPr lvl="1">
-              <a:spcAft>
-                <a:spcPts val="1200"/>
-              </a:spcAft>
-              <a:defRPr sz="1800"/>
-            </a:pPr>
-            <a:r>
-              <a:rPr sz="1600"/>
+              <a:lnSpc>
+                <a:spcPct val="90000"/>
+              </a:lnSpc>
+              <a:spcAft>
+                <a:spcPts val="300"/>
+              </a:spcAft>
+              <a:defRPr sz="1800"/>
+            </a:pPr>
+            <a:r>
+              <a:rPr sz="1400"/>
               <a:t>    • Video izlersin</a:t>
             </a:r>
           </a:p>
           <a:p>
             <a:pPr>
-              <a:spcAft>
-                <a:spcPts val="1200"/>
-              </a:spcAft>
-              <a:defRPr sz="2000"/>
-            </a:pPr>
-          </a:p>
-          <a:p>
-            <a:pPr>
-              <a:spcAft>
-                <a:spcPts val="1200"/>
+              <a:lnSpc>
+                <a:spcPct val="90000"/>
+              </a:lnSpc>
+              <a:spcAft>
+                <a:spcPts val="300"/>
+              </a:spcAft>
+              <a:defRPr sz="2000"/>
+            </a:pPr>
+          </a:p>
+          <a:p>
+            <a:pPr>
+              <a:lnSpc>
+                <a:spcPct val="90000"/>
+              </a:lnSpc>
+              <a:spcAft>
+                <a:spcPts val="300"/>
               </a:spcAft>
               <a:defRPr sz="2000" b="1"/>
             </a:pPr>
             <a:r>
-              <a:rPr sz="1600"/>
+              <a:rPr sz="1400"/>
               <a:t>⚡ Ağ olmadan internet de olmaz!</a:t>
             </a:r>
           </a:p>
@@ -10142,7 +11102,7 @@
         </p:nvSpPr>
         <p:spPr/>
         <p:txBody>
-          <a:bodyPr/>
+          <a:bodyPr wrap="square"/>
           <a:lstStyle/>
           <a:p>
             <a:pPr>
@@ -10196,268 +11156,349 @@
             <a:spAutoFit/>
           </a:bodyPr>
           <a:lstStyle/>
-          <a:p/>
-          <a:p>
-            <a:pPr>
-              <a:spcAft>
-                <a:spcPts val="1200"/>
-              </a:spcAft>
-              <a:defRPr sz="2000"/>
-            </a:pPr>
-            <a:r>
-              <a:rPr sz="1600"/>
+          <a:p>
+            <a:pPr>
+              <a:lnSpc>
+                <a:spcPct val="90000"/>
+              </a:lnSpc>
+              <a:spcAft>
+                <a:spcPts val="300"/>
+              </a:spcAft>
+            </a:pPr>
+          </a:p>
+          <a:p>
+            <a:pPr>
+              <a:lnSpc>
+                <a:spcPct val="90000"/>
+              </a:lnSpc>
+              <a:spcAft>
+                <a:spcPts val="300"/>
+              </a:spcAft>
+              <a:defRPr sz="2000"/>
+            </a:pPr>
+            <a:r>
+              <a:rPr sz="1400"/>
               <a:t>LAN = Local Area Network (Yerel Alan Ağı)</a:t>
             </a:r>
           </a:p>
           <a:p>
             <a:pPr>
-              <a:spcAft>
-                <a:spcPts val="1200"/>
-              </a:spcAft>
-              <a:defRPr sz="2000"/>
-            </a:pPr>
-          </a:p>
-          <a:p>
-            <a:pPr>
-              <a:spcAft>
-                <a:spcPts val="1200"/>
+              <a:lnSpc>
+                <a:spcPct val="90000"/>
+              </a:lnSpc>
+              <a:spcAft>
+                <a:spcPts val="300"/>
+              </a:spcAft>
+              <a:defRPr sz="2000"/>
+            </a:pPr>
+          </a:p>
+          <a:p>
+            <a:pPr>
+              <a:lnSpc>
+                <a:spcPct val="90000"/>
+              </a:lnSpc>
+              <a:spcAft>
+                <a:spcPts val="300"/>
               </a:spcAft>
               <a:defRPr sz="2000" b="1"/>
             </a:pPr>
             <a:r>
-              <a:rPr sz="1600"/>
+              <a:rPr sz="1400"/>
               <a:t>✅ Özellikler:</a:t>
             </a:r>
           </a:p>
           <a:p>
             <a:pPr lvl="1">
-              <a:spcAft>
-                <a:spcPts val="1200"/>
-              </a:spcAft>
-              <a:defRPr sz="1800"/>
-            </a:pPr>
-            <a:r>
-              <a:rPr sz="1600"/>
+              <a:lnSpc>
+                <a:spcPct val="90000"/>
+              </a:lnSpc>
+              <a:spcAft>
+                <a:spcPts val="300"/>
+              </a:spcAft>
+              <a:defRPr sz="1800"/>
+            </a:pPr>
+            <a:r>
+              <a:rPr sz="1400"/>
               <a:t>    • Küçük bir alanda çalışır (ev, okul, ofis)</a:t>
             </a:r>
           </a:p>
           <a:p>
             <a:pPr lvl="1">
-              <a:spcAft>
-                <a:spcPts val="1200"/>
-              </a:spcAft>
-              <a:defRPr sz="1800"/>
-            </a:pPr>
-            <a:r>
-              <a:rPr sz="1600"/>
+              <a:lnSpc>
+                <a:spcPct val="90000"/>
+              </a:lnSpc>
+              <a:spcAft>
+                <a:spcPts val="300"/>
+              </a:spcAft>
+              <a:defRPr sz="1800"/>
+            </a:pPr>
+            <a:r>
+              <a:rPr sz="1400"/>
               <a:t>    • Hızlı veri transferi</a:t>
             </a:r>
           </a:p>
           <a:p>
             <a:pPr lvl="1">
-              <a:spcAft>
-                <a:spcPts val="1200"/>
-              </a:spcAft>
-              <a:defRPr sz="1800"/>
-            </a:pPr>
-            <a:r>
-              <a:rPr sz="1600"/>
+              <a:lnSpc>
+                <a:spcPct val="90000"/>
+              </a:lnSpc>
+              <a:spcAft>
+                <a:spcPts val="300"/>
+              </a:spcAft>
+              <a:defRPr sz="1800"/>
+            </a:pPr>
+            <a:r>
+              <a:rPr sz="1400"/>
               <a:t>    • Kablo veya Wi-Fi ile bağlantı</a:t>
             </a:r>
           </a:p>
           <a:p>
             <a:pPr>
-              <a:spcAft>
-                <a:spcPts val="1200"/>
-              </a:spcAft>
-              <a:defRPr sz="2000"/>
-            </a:pPr>
-          </a:p>
-          <a:p>
-            <a:pPr>
-              <a:spcAft>
-                <a:spcPts val="1200"/>
+              <a:lnSpc>
+                <a:spcPct val="90000"/>
+              </a:lnSpc>
+              <a:spcAft>
+                <a:spcPts val="300"/>
+              </a:spcAft>
+              <a:defRPr sz="2000"/>
+            </a:pPr>
+          </a:p>
+          <a:p>
+            <a:pPr>
+              <a:lnSpc>
+                <a:spcPct val="90000"/>
+              </a:lnSpc>
+              <a:spcAft>
+                <a:spcPts val="300"/>
               </a:spcAft>
               <a:defRPr sz="2000" b="1"/>
             </a:pPr>
             <a:r>
-              <a:rPr sz="1600"/>
+              <a:rPr sz="1400"/>
               <a:t>📌 LAN Örnekleri:</a:t>
             </a:r>
           </a:p>
           <a:p>
             <a:pPr>
-              <a:spcAft>
-                <a:spcPts val="1200"/>
-              </a:spcAft>
-              <a:defRPr sz="2000"/>
-            </a:pPr>
-          </a:p>
-          <a:p>
-            <a:pPr>
-              <a:spcAft>
-                <a:spcPts val="1200"/>
-              </a:spcAft>
-              <a:defRPr sz="2000"/>
-            </a:pPr>
-            <a:r>
-              <a:rPr sz="1600"/>
+              <a:lnSpc>
+                <a:spcPct val="90000"/>
+              </a:lnSpc>
+              <a:spcAft>
+                <a:spcPts val="300"/>
+              </a:spcAft>
+              <a:defRPr sz="2000"/>
+            </a:pPr>
+          </a:p>
+          <a:p>
+            <a:pPr>
+              <a:lnSpc>
+                <a:spcPct val="90000"/>
+              </a:lnSpc>
+              <a:spcAft>
+                <a:spcPts val="300"/>
+              </a:spcAft>
+              <a:defRPr sz="2000"/>
+            </a:pPr>
+            <a:r>
+              <a:rPr sz="1400"/>
               <a:t>🏠 Evdeki LAN:</a:t>
             </a:r>
           </a:p>
           <a:p>
             <a:pPr lvl="1">
-              <a:spcAft>
-                <a:spcPts val="1200"/>
-              </a:spcAft>
-              <a:defRPr sz="1800"/>
-            </a:pPr>
-            <a:r>
-              <a:rPr sz="1600"/>
+              <a:lnSpc>
+                <a:spcPct val="90000"/>
+              </a:lnSpc>
+              <a:spcAft>
+                <a:spcPts val="300"/>
+              </a:spcAft>
+              <a:defRPr sz="1800"/>
+            </a:pPr>
+            <a:r>
+              <a:rPr sz="1400"/>
               <a:t>    • Modem/Router</a:t>
             </a:r>
           </a:p>
           <a:p>
             <a:pPr lvl="1">
-              <a:spcAft>
-                <a:spcPts val="1200"/>
-              </a:spcAft>
-              <a:defRPr sz="1800"/>
-            </a:pPr>
-            <a:r>
-              <a:rPr sz="1600"/>
+              <a:lnSpc>
+                <a:spcPct val="90000"/>
+              </a:lnSpc>
+              <a:spcAft>
+                <a:spcPts val="300"/>
+              </a:spcAft>
+              <a:defRPr sz="1800"/>
+            </a:pPr>
+            <a:r>
+              <a:rPr sz="1400"/>
               <a:t>    • Telefon, tablet, bilgisayar, TV</a:t>
             </a:r>
           </a:p>
           <a:p>
             <a:pPr lvl="1">
-              <a:spcAft>
-                <a:spcPts val="1200"/>
-              </a:spcAft>
-              <a:defRPr sz="1800"/>
-            </a:pPr>
-            <a:r>
-              <a:rPr sz="1600"/>
+              <a:lnSpc>
+                <a:spcPct val="90000"/>
+              </a:lnSpc>
+              <a:spcAft>
+                <a:spcPts val="300"/>
+              </a:spcAft>
+              <a:defRPr sz="1800"/>
+            </a:pPr>
+            <a:r>
+              <a:rPr sz="1400"/>
               <a:t>    • Hepsi aynı Wi-Fi'ye bağlı</a:t>
             </a:r>
           </a:p>
           <a:p>
             <a:pPr>
-              <a:spcAft>
-                <a:spcPts val="1200"/>
-              </a:spcAft>
-              <a:defRPr sz="2000"/>
-            </a:pPr>
-          </a:p>
-          <a:p>
-            <a:pPr>
-              <a:spcAft>
-                <a:spcPts val="1200"/>
-              </a:spcAft>
-              <a:defRPr sz="2000"/>
-            </a:pPr>
-            <a:r>
-              <a:rPr sz="1600"/>
+              <a:lnSpc>
+                <a:spcPct val="90000"/>
+              </a:lnSpc>
+              <a:spcAft>
+                <a:spcPts val="300"/>
+              </a:spcAft>
+              <a:defRPr sz="2000"/>
+            </a:pPr>
+          </a:p>
+          <a:p>
+            <a:pPr>
+              <a:lnSpc>
+                <a:spcPct val="90000"/>
+              </a:lnSpc>
+              <a:spcAft>
+                <a:spcPts val="300"/>
+              </a:spcAft>
+              <a:defRPr sz="2000"/>
+            </a:pPr>
+            <a:r>
+              <a:rPr sz="1400"/>
               <a:t>🏫 Okuldaki LAN:</a:t>
             </a:r>
           </a:p>
           <a:p>
             <a:pPr lvl="1">
-              <a:spcAft>
-                <a:spcPts val="1200"/>
-              </a:spcAft>
-              <a:defRPr sz="1800"/>
-            </a:pPr>
-            <a:r>
-              <a:rPr sz="1600"/>
+              <a:lnSpc>
+                <a:spcPct val="90000"/>
+              </a:lnSpc>
+              <a:spcAft>
+                <a:spcPts val="300"/>
+              </a:spcAft>
+              <a:defRPr sz="1800"/>
+            </a:pPr>
+            <a:r>
+              <a:rPr sz="1400"/>
               <a:t>    • Bilgisayar laboratuvarı</a:t>
             </a:r>
           </a:p>
           <a:p>
             <a:pPr lvl="1">
-              <a:spcAft>
-                <a:spcPts val="1200"/>
-              </a:spcAft>
-              <a:defRPr sz="1800"/>
-            </a:pPr>
-            <a:r>
-              <a:rPr sz="1600"/>
+              <a:lnSpc>
+                <a:spcPct val="90000"/>
+              </a:lnSpc>
+              <a:spcAft>
+                <a:spcPts val="300"/>
+              </a:spcAft>
+              <a:defRPr sz="1800"/>
+            </a:pPr>
+            <a:r>
+              <a:rPr sz="1400"/>
               <a:t>    • Tüm bilgisayarlar birbirine bağlı</a:t>
             </a:r>
           </a:p>
           <a:p>
             <a:pPr lvl="1">
-              <a:spcAft>
-                <a:spcPts val="1200"/>
-              </a:spcAft>
-              <a:defRPr sz="1800"/>
-            </a:pPr>
-            <a:r>
-              <a:rPr sz="1600"/>
+              <a:lnSpc>
+                <a:spcPct val="90000"/>
+              </a:lnSpc>
+              <a:spcAft>
+                <a:spcPts val="300"/>
+              </a:spcAft>
+              <a:defRPr sz="1800"/>
+            </a:pPr>
+            <a:r>
+              <a:rPr sz="1400"/>
               <a:t>    • Öğretmen dosya paylaşabilir</a:t>
             </a:r>
           </a:p>
           <a:p>
             <a:pPr>
-              <a:spcAft>
-                <a:spcPts val="1200"/>
-              </a:spcAft>
-              <a:defRPr sz="2000"/>
-            </a:pPr>
-          </a:p>
-          <a:p>
-            <a:pPr>
-              <a:spcAft>
-                <a:spcPts val="1200"/>
-              </a:spcAft>
-              <a:defRPr sz="2000"/>
-            </a:pPr>
-            <a:r>
-              <a:rPr sz="1600"/>
+              <a:lnSpc>
+                <a:spcPct val="90000"/>
+              </a:lnSpc>
+              <a:spcAft>
+                <a:spcPts val="300"/>
+              </a:spcAft>
+              <a:defRPr sz="2000"/>
+            </a:pPr>
+          </a:p>
+          <a:p>
+            <a:pPr>
+              <a:lnSpc>
+                <a:spcPct val="90000"/>
+              </a:lnSpc>
+              <a:spcAft>
+                <a:spcPts val="300"/>
+              </a:spcAft>
+              <a:defRPr sz="2000"/>
+            </a:pPr>
+            <a:r>
+              <a:rPr sz="1400"/>
               <a:t>💼 İş yerindeki LAN:</a:t>
             </a:r>
           </a:p>
           <a:p>
             <a:pPr lvl="1">
-              <a:spcAft>
-                <a:spcPts val="1200"/>
-              </a:spcAft>
-              <a:defRPr sz="1800"/>
-            </a:pPr>
-            <a:r>
-              <a:rPr sz="1600"/>
+              <a:lnSpc>
+                <a:spcPct val="90000"/>
+              </a:lnSpc>
+              <a:spcAft>
+                <a:spcPts val="300"/>
+              </a:spcAft>
+              <a:defRPr sz="1800"/>
+            </a:pPr>
+            <a:r>
+              <a:rPr sz="1400"/>
               <a:t>    • Ofisteki tüm bilgisayarlar</a:t>
             </a:r>
           </a:p>
           <a:p>
             <a:pPr lvl="1">
-              <a:spcAft>
-                <a:spcPts val="1200"/>
-              </a:spcAft>
-              <a:defRPr sz="1800"/>
-            </a:pPr>
-            <a:r>
-              <a:rPr sz="1600"/>
+              <a:lnSpc>
+                <a:spcPct val="90000"/>
+              </a:lnSpc>
+              <a:spcAft>
+                <a:spcPts val="300"/>
+              </a:spcAft>
+              <a:defRPr sz="1800"/>
+            </a:pPr>
+            <a:r>
+              <a:rPr sz="1400"/>
               <a:t>    • Ortak yazıcı kullanımı</a:t>
             </a:r>
           </a:p>
           <a:p>
             <a:pPr>
-              <a:spcAft>
-                <a:spcPts val="1200"/>
-              </a:spcAft>
-              <a:defRPr sz="2000"/>
-            </a:pPr>
-          </a:p>
-          <a:p>
-            <a:pPr>
-              <a:spcAft>
-                <a:spcPts val="1200"/>
+              <a:lnSpc>
+                <a:spcPct val="90000"/>
+              </a:lnSpc>
+              <a:spcAft>
+                <a:spcPts val="300"/>
+              </a:spcAft>
+              <a:defRPr sz="2000"/>
+            </a:pPr>
+          </a:p>
+          <a:p>
+            <a:pPr>
+              <a:lnSpc>
+                <a:spcPct val="90000"/>
+              </a:lnSpc>
+              <a:spcAft>
+                <a:spcPts val="300"/>
               </a:spcAft>
               <a:defRPr sz="2000" b="1"/>
             </a:pPr>
             <a:r>
-              <a:rPr sz="1600"/>
+              <a:rPr sz="1400"/>
               <a:t>💡 LAN = Küçük ama hızlı ağ</a:t>
             </a:r>
           </a:p>
@@ -10493,7 +11534,7 @@
         </p:nvSpPr>
         <p:spPr/>
         <p:txBody>
-          <a:bodyPr/>
+          <a:bodyPr wrap="square"/>
           <a:lstStyle/>
           <a:p>
             <a:pPr>
@@ -10547,248 +11588,323 @@
             <a:spAutoFit/>
           </a:bodyPr>
           <a:lstStyle/>
-          <a:p/>
-          <a:p>
-            <a:pPr>
-              <a:spcAft>
-                <a:spcPts val="1200"/>
-              </a:spcAft>
-              <a:defRPr sz="2000"/>
-            </a:pPr>
-            <a:r>
-              <a:rPr sz="1400"/>
+          <a:p>
+            <a:pPr>
+              <a:lnSpc>
+                <a:spcPct val="90000"/>
+              </a:lnSpc>
+              <a:spcAft>
+                <a:spcPts val="300"/>
+              </a:spcAft>
+            </a:pPr>
+          </a:p>
+          <a:p>
+            <a:pPr>
+              <a:lnSpc>
+                <a:spcPct val="90000"/>
+              </a:lnSpc>
+              <a:spcAft>
+                <a:spcPts val="300"/>
+              </a:spcAft>
+              <a:defRPr sz="2000"/>
+            </a:pPr>
+            <a:r>
+              <a:rPr sz="1300"/>
               <a:t>WAN = Wide Area Network (Geniş Alan Ağı)</a:t>
             </a:r>
           </a:p>
           <a:p>
             <a:pPr>
-              <a:spcAft>
-                <a:spcPts val="1200"/>
-              </a:spcAft>
-              <a:defRPr sz="2000"/>
-            </a:pPr>
-          </a:p>
-          <a:p>
-            <a:pPr>
-              <a:spcAft>
-                <a:spcPts val="1200"/>
+              <a:lnSpc>
+                <a:spcPct val="90000"/>
+              </a:lnSpc>
+              <a:spcAft>
+                <a:spcPts val="300"/>
+              </a:spcAft>
+              <a:defRPr sz="2000"/>
+            </a:pPr>
+          </a:p>
+          <a:p>
+            <a:pPr>
+              <a:lnSpc>
+                <a:spcPct val="90000"/>
+              </a:lnSpc>
+              <a:spcAft>
+                <a:spcPts val="300"/>
               </a:spcAft>
               <a:defRPr sz="2000" b="1"/>
             </a:pPr>
             <a:r>
-              <a:rPr sz="1400"/>
+              <a:rPr sz="1300"/>
               <a:t>✅ WAN Özellikleri:</a:t>
             </a:r>
           </a:p>
           <a:p>
             <a:pPr lvl="1">
-              <a:spcAft>
-                <a:spcPts val="1200"/>
-              </a:spcAft>
-              <a:defRPr sz="1800"/>
-            </a:pPr>
-            <a:r>
-              <a:rPr sz="1400"/>
+              <a:lnSpc>
+                <a:spcPct val="90000"/>
+              </a:lnSpc>
+              <a:spcAft>
+                <a:spcPts val="300"/>
+              </a:spcAft>
+              <a:defRPr sz="1800"/>
+            </a:pPr>
+            <a:r>
+              <a:rPr sz="1300"/>
               <a:t>    • Çok geniş alanda çalışır (şehirler, ülkeler)</a:t>
             </a:r>
           </a:p>
           <a:p>
             <a:pPr lvl="1">
-              <a:spcAft>
-                <a:spcPts val="1200"/>
-              </a:spcAft>
-              <a:defRPr sz="1800"/>
-            </a:pPr>
-            <a:r>
-              <a:rPr sz="1400"/>
+              <a:lnSpc>
+                <a:spcPct val="90000"/>
+              </a:lnSpc>
+              <a:spcAft>
+                <a:spcPts val="300"/>
+              </a:spcAft>
+              <a:defRPr sz="1800"/>
+            </a:pPr>
+            <a:r>
+              <a:rPr sz="1300"/>
               <a:t>    • LAN'ları birbirine bağlar</a:t>
             </a:r>
           </a:p>
           <a:p>
             <a:pPr lvl="1">
-              <a:spcAft>
-                <a:spcPts val="1200"/>
-              </a:spcAft>
-              <a:defRPr sz="1800"/>
-            </a:pPr>
-            <a:r>
-              <a:rPr sz="1400"/>
+              <a:lnSpc>
+                <a:spcPct val="90000"/>
+              </a:lnSpc>
+              <a:spcAft>
+                <a:spcPts val="300"/>
+              </a:spcAft>
+              <a:defRPr sz="1800"/>
+            </a:pPr>
+            <a:r>
+              <a:rPr sz="1300"/>
               <a:t>    • İnternet en büyük WAN'dır!</a:t>
             </a:r>
           </a:p>
           <a:p>
             <a:pPr>
-              <a:spcAft>
-                <a:spcPts val="1200"/>
-              </a:spcAft>
-              <a:defRPr sz="2000"/>
-            </a:pPr>
-          </a:p>
-          <a:p>
-            <a:pPr>
-              <a:spcAft>
-                <a:spcPts val="1200"/>
-              </a:spcAft>
-              <a:defRPr sz="2000"/>
-            </a:pPr>
-            <a:r>
-              <a:rPr sz="1400"/>
+              <a:lnSpc>
+                <a:spcPct val="90000"/>
+              </a:lnSpc>
+              <a:spcAft>
+                <a:spcPts val="300"/>
+              </a:spcAft>
+              <a:defRPr sz="2000"/>
+            </a:pPr>
+          </a:p>
+          <a:p>
+            <a:pPr>
+              <a:lnSpc>
+                <a:spcPct val="90000"/>
+              </a:lnSpc>
+              <a:spcAft>
+                <a:spcPts val="300"/>
+              </a:spcAft>
+              <a:defRPr sz="2000"/>
+            </a:pPr>
+            <a:r>
+              <a:rPr sz="1300"/>
               <a:t>🌐 İnternet:</a:t>
             </a:r>
           </a:p>
           <a:p>
             <a:pPr>
-              <a:spcAft>
-                <a:spcPts val="1200"/>
-              </a:spcAft>
-              <a:defRPr sz="2000"/>
-            </a:pPr>
-            <a:r>
-              <a:rPr sz="1400"/>
+              <a:lnSpc>
+                <a:spcPct val="90000"/>
+              </a:lnSpc>
+              <a:spcAft>
+                <a:spcPts val="300"/>
+              </a:spcAft>
+              <a:defRPr sz="2000"/>
+            </a:pPr>
+            <a:r>
+              <a:rPr sz="1300"/>
               <a:t>Dünyadaki tüm ağların birbirine bağlanması!</a:t>
             </a:r>
           </a:p>
           <a:p>
             <a:pPr>
-              <a:spcAft>
-                <a:spcPts val="1200"/>
-              </a:spcAft>
-              <a:defRPr sz="2000"/>
-            </a:pPr>
-          </a:p>
-          <a:p>
-            <a:pPr>
-              <a:spcAft>
-                <a:spcPts val="1200"/>
+              <a:lnSpc>
+                <a:spcPct val="90000"/>
+              </a:lnSpc>
+              <a:spcAft>
+                <a:spcPts val="300"/>
+              </a:spcAft>
+              <a:defRPr sz="2000"/>
+            </a:pPr>
+          </a:p>
+          <a:p>
+            <a:pPr>
+              <a:lnSpc>
+                <a:spcPct val="90000"/>
+              </a:lnSpc>
+              <a:spcAft>
+                <a:spcPts val="300"/>
               </a:spcAft>
               <a:defRPr sz="2000" b="1"/>
             </a:pPr>
             <a:r>
-              <a:rPr sz="1400"/>
+              <a:rPr sz="1300"/>
               <a:t>📌 İnternet Sayesinde:</a:t>
             </a:r>
           </a:p>
           <a:p>
             <a:pPr lvl="1">
-              <a:spcAft>
-                <a:spcPts val="1200"/>
-              </a:spcAft>
-              <a:defRPr sz="1800"/>
-            </a:pPr>
-            <a:r>
-              <a:rPr sz="1400"/>
+              <a:lnSpc>
+                <a:spcPct val="90000"/>
+              </a:lnSpc>
+              <a:spcAft>
+                <a:spcPts val="300"/>
+              </a:spcAft>
+              <a:defRPr sz="1800"/>
+            </a:pPr>
+            <a:r>
+              <a:rPr sz="1300"/>
               <a:t>    • Türkiye'den Amerika'ya mesaj göndeririz</a:t>
             </a:r>
           </a:p>
           <a:p>
             <a:pPr lvl="1">
-              <a:spcAft>
-                <a:spcPts val="1200"/>
-              </a:spcAft>
-              <a:defRPr sz="1800"/>
-            </a:pPr>
-            <a:r>
-              <a:rPr sz="1400"/>
+              <a:lnSpc>
+                <a:spcPct val="90000"/>
+              </a:lnSpc>
+              <a:spcAft>
+                <a:spcPts val="300"/>
+              </a:spcAft>
+              <a:defRPr sz="1800"/>
+            </a:pPr>
+            <a:r>
+              <a:rPr sz="1300"/>
               <a:t>    • Dünyanın her yerinden video izleriz</a:t>
             </a:r>
           </a:p>
           <a:p>
             <a:pPr lvl="1">
-              <a:spcAft>
-                <a:spcPts val="1200"/>
-              </a:spcAft>
-              <a:defRPr sz="1800"/>
-            </a:pPr>
-            <a:r>
-              <a:rPr sz="1400"/>
+              <a:lnSpc>
+                <a:spcPct val="90000"/>
+              </a:lnSpc>
+              <a:spcAft>
+                <a:spcPts val="300"/>
+              </a:spcAft>
+              <a:defRPr sz="1800"/>
+            </a:pPr>
+            <a:r>
+              <a:rPr sz="1300"/>
               <a:t>    • Online oyun oynarız</a:t>
             </a:r>
           </a:p>
           <a:p>
             <a:pPr lvl="1">
-              <a:spcAft>
-                <a:spcPts val="1200"/>
-              </a:spcAft>
-              <a:defRPr sz="1800"/>
-            </a:pPr>
-            <a:r>
-              <a:rPr sz="1400"/>
+              <a:lnSpc>
+                <a:spcPct val="90000"/>
+              </a:lnSpc>
+              <a:spcAft>
+                <a:spcPts val="300"/>
+              </a:spcAft>
+              <a:defRPr sz="1800"/>
+            </a:pPr>
+            <a:r>
+              <a:rPr sz="1300"/>
               <a:t>    • Alışveriş yaparız</a:t>
             </a:r>
           </a:p>
           <a:p>
             <a:pPr>
-              <a:spcAft>
-                <a:spcPts val="1200"/>
-              </a:spcAft>
-              <a:defRPr sz="2000"/>
-            </a:pPr>
-          </a:p>
-          <a:p>
-            <a:pPr>
-              <a:spcAft>
-                <a:spcPts val="1200"/>
+              <a:lnSpc>
+                <a:spcPct val="90000"/>
+              </a:lnSpc>
+              <a:spcAft>
+                <a:spcPts val="300"/>
+              </a:spcAft>
+              <a:defRPr sz="2000"/>
+            </a:pPr>
+          </a:p>
+          <a:p>
+            <a:pPr>
+              <a:lnSpc>
+                <a:spcPct val="90000"/>
+              </a:lnSpc>
+              <a:spcAft>
+                <a:spcPts val="300"/>
               </a:spcAft>
               <a:defRPr sz="2000" b="1"/>
             </a:pPr>
             <a:r>
-              <a:rPr sz="1400"/>
+              <a:rPr sz="1300"/>
               <a:t>💡 Fark:</a:t>
             </a:r>
           </a:p>
           <a:p>
             <a:pPr lvl="1">
-              <a:spcAft>
-                <a:spcPts val="1200"/>
-              </a:spcAft>
-              <a:defRPr sz="1800"/>
-            </a:pPr>
-            <a:r>
-              <a:rPr sz="1400"/>
+              <a:lnSpc>
+                <a:spcPct val="90000"/>
+              </a:lnSpc>
+              <a:spcAft>
+                <a:spcPts val="300"/>
+              </a:spcAft>
+              <a:defRPr sz="1800"/>
+            </a:pPr>
+            <a:r>
+              <a:rPr sz="1300"/>
               <a:t>    • LAN = Evin içindeki ağ (WiFi)</a:t>
             </a:r>
           </a:p>
           <a:p>
             <a:pPr lvl="1">
-              <a:spcAft>
-                <a:spcPts val="1200"/>
-              </a:spcAft>
-              <a:defRPr sz="1800"/>
-            </a:pPr>
-            <a:r>
-              <a:rPr sz="1400"/>
+              <a:lnSpc>
+                <a:spcPct val="90000"/>
+              </a:lnSpc>
+              <a:spcAft>
+                <a:spcPts val="300"/>
+              </a:spcAft>
+              <a:defRPr sz="1800"/>
+            </a:pPr>
+            <a:r>
+              <a:rPr sz="1300"/>
               <a:t>    • WAN = Tüm dünya (İnternet)</a:t>
             </a:r>
           </a:p>
           <a:p>
             <a:pPr>
-              <a:spcAft>
-                <a:spcPts val="1200"/>
-              </a:spcAft>
-              <a:defRPr sz="2000"/>
-            </a:pPr>
-          </a:p>
-          <a:p>
-            <a:pPr>
-              <a:spcAft>
-                <a:spcPts val="1200"/>
+              <a:lnSpc>
+                <a:spcPct val="90000"/>
+              </a:lnSpc>
+              <a:spcAft>
+                <a:spcPts val="300"/>
+              </a:spcAft>
+              <a:defRPr sz="2000"/>
+            </a:pPr>
+          </a:p>
+          <a:p>
+            <a:pPr>
+              <a:lnSpc>
+                <a:spcPct val="90000"/>
+              </a:lnSpc>
+              <a:spcAft>
+                <a:spcPts val="300"/>
               </a:spcAft>
               <a:defRPr sz="2000" b="1"/>
             </a:pPr>
             <a:r>
-              <a:rPr sz="1400"/>
+              <a:rPr sz="1300"/>
               <a:t>⚡ İnternet = Ağların ağı!</a:t>
             </a:r>
           </a:p>
           <a:p>
             <a:pPr>
-              <a:spcAft>
-                <a:spcPts val="1200"/>
-              </a:spcAft>
-              <a:defRPr sz="2000"/>
-            </a:pPr>
-            <a:r>
-              <a:rPr sz="1400"/>
+              <a:lnSpc>
+                <a:spcPct val="90000"/>
+              </a:lnSpc>
+              <a:spcAft>
+                <a:spcPts val="300"/>
+              </a:spcAft>
+              <a:defRPr sz="2000"/>
+            </a:pPr>
+            <a:r>
+              <a:rPr sz="1300"/>
               <a:t>Milyarlarca cihaz birbiriyle bağlı</a:t>
             </a:r>
           </a:p>
@@ -10824,7 +11940,7 @@
         </p:nvSpPr>
         <p:spPr/>
         <p:txBody>
-          <a:bodyPr/>
+          <a:bodyPr wrap="square"/>
           <a:lstStyle/>
           <a:p>
             <a:pPr>
@@ -10878,264 +11994,345 @@
             <a:spAutoFit/>
           </a:bodyPr>
           <a:lstStyle/>
-          <a:p/>
-          <a:p>
-            <a:pPr>
-              <a:spcAft>
-                <a:spcPts val="1200"/>
-              </a:spcAft>
-              <a:defRPr sz="2000"/>
-            </a:pPr>
-            <a:r>
-              <a:rPr sz="1400"/>
+          <a:p>
+            <a:pPr>
+              <a:lnSpc>
+                <a:spcPct val="90000"/>
+              </a:lnSpc>
+              <a:spcAft>
+                <a:spcPts val="300"/>
+              </a:spcAft>
+            </a:pPr>
+          </a:p>
+          <a:p>
+            <a:pPr>
+              <a:lnSpc>
+                <a:spcPct val="90000"/>
+              </a:lnSpc>
+              <a:spcAft>
+                <a:spcPts val="300"/>
+              </a:spcAft>
+              <a:defRPr sz="2000"/>
+            </a:pPr>
+            <a:r>
+              <a:rPr sz="1300"/>
               <a:t>İnternet'e bağlanmak için neler gerekir?</a:t>
             </a:r>
           </a:p>
           <a:p>
             <a:pPr>
-              <a:spcAft>
-                <a:spcPts val="1200"/>
-              </a:spcAft>
-              <a:defRPr sz="2000"/>
-            </a:pPr>
-          </a:p>
-          <a:p>
-            <a:pPr>
-              <a:spcAft>
-                <a:spcPts val="1200"/>
+              <a:lnSpc>
+                <a:spcPct val="90000"/>
+              </a:lnSpc>
+              <a:spcAft>
+                <a:spcPts val="300"/>
+              </a:spcAft>
+              <a:defRPr sz="2000"/>
+            </a:pPr>
+          </a:p>
+          <a:p>
+            <a:pPr>
+              <a:lnSpc>
+                <a:spcPct val="90000"/>
+              </a:lnSpc>
+              <a:spcAft>
+                <a:spcPts val="300"/>
               </a:spcAft>
               <a:defRPr sz="2000" b="1"/>
             </a:pPr>
             <a:r>
-              <a:rPr sz="1400"/>
+              <a:rPr sz="1300"/>
               <a:t>✅ İnternet Bağlantısı İçin Gerekenler:</a:t>
             </a:r>
           </a:p>
           <a:p>
             <a:pPr>
-              <a:spcAft>
-                <a:spcPts val="1200"/>
-              </a:spcAft>
-              <a:defRPr sz="2000"/>
-            </a:pPr>
-          </a:p>
-          <a:p>
-            <a:pPr>
-              <a:spcAft>
-                <a:spcPts val="1200"/>
-              </a:spcAft>
-              <a:defRPr sz="2000"/>
-            </a:pPr>
-            <a:r>
-              <a:rPr sz="1400"/>
+              <a:lnSpc>
+                <a:spcPct val="90000"/>
+              </a:lnSpc>
+              <a:spcAft>
+                <a:spcPts val="300"/>
+              </a:spcAft>
+              <a:defRPr sz="2000"/>
+            </a:pPr>
+          </a:p>
+          <a:p>
+            <a:pPr>
+              <a:lnSpc>
+                <a:spcPct val="90000"/>
+              </a:lnSpc>
+              <a:spcAft>
+                <a:spcPts val="300"/>
+              </a:spcAft>
+              <a:defRPr sz="2000"/>
+            </a:pPr>
+            <a:r>
+              <a:rPr sz="1300"/>
               <a:t>1️⃣ İnternet Servis Sağlayıcı (ISP):</a:t>
             </a:r>
           </a:p>
           <a:p>
             <a:pPr lvl="1">
-              <a:spcAft>
-                <a:spcPts val="1200"/>
-              </a:spcAft>
-              <a:defRPr sz="1800"/>
-            </a:pPr>
-            <a:r>
-              <a:rPr sz="1400"/>
+              <a:lnSpc>
+                <a:spcPct val="90000"/>
+              </a:lnSpc>
+              <a:spcAft>
+                <a:spcPts val="300"/>
+              </a:spcAft>
+              <a:defRPr sz="1800"/>
+            </a:pPr>
+            <a:r>
+              <a:rPr sz="1300"/>
               <a:t>    • Türk Telekom, Superonline, Vodafone</a:t>
             </a:r>
           </a:p>
           <a:p>
             <a:pPr lvl="1">
-              <a:spcAft>
-                <a:spcPts val="1200"/>
-              </a:spcAft>
-              <a:defRPr sz="1800"/>
-            </a:pPr>
-            <a:r>
-              <a:rPr sz="1400"/>
+              <a:lnSpc>
+                <a:spcPct val="90000"/>
+              </a:lnSpc>
+              <a:spcAft>
+                <a:spcPts val="300"/>
+              </a:spcAft>
+              <a:defRPr sz="1800"/>
+            </a:pPr>
+            <a:r>
+              <a:rPr sz="1300"/>
               <a:t>    • İnterneti eve getirir</a:t>
             </a:r>
           </a:p>
           <a:p>
             <a:pPr>
-              <a:spcAft>
-                <a:spcPts val="1200"/>
-              </a:spcAft>
-              <a:defRPr sz="2000"/>
-            </a:pPr>
-          </a:p>
-          <a:p>
-            <a:pPr>
-              <a:spcAft>
-                <a:spcPts val="1200"/>
-              </a:spcAft>
-              <a:defRPr sz="2000"/>
-            </a:pPr>
-            <a:r>
-              <a:rPr sz="1400"/>
+              <a:lnSpc>
+                <a:spcPct val="90000"/>
+              </a:lnSpc>
+              <a:spcAft>
+                <a:spcPts val="300"/>
+              </a:spcAft>
+              <a:defRPr sz="2000"/>
+            </a:pPr>
+          </a:p>
+          <a:p>
+            <a:pPr>
+              <a:lnSpc>
+                <a:spcPct val="90000"/>
+              </a:lnSpc>
+              <a:spcAft>
+                <a:spcPts val="300"/>
+              </a:spcAft>
+              <a:defRPr sz="2000"/>
+            </a:pPr>
+            <a:r>
+              <a:rPr sz="1300"/>
               <a:t>2️⃣ Modem/Router:</a:t>
             </a:r>
           </a:p>
           <a:p>
             <a:pPr lvl="1">
-              <a:spcAft>
-                <a:spcPts val="1200"/>
-              </a:spcAft>
-              <a:defRPr sz="1800"/>
-            </a:pPr>
-            <a:r>
-              <a:rPr sz="1400"/>
+              <a:lnSpc>
+                <a:spcPct val="90000"/>
+              </a:lnSpc>
+              <a:spcAft>
+                <a:spcPts val="300"/>
+              </a:spcAft>
+              <a:defRPr sz="1800"/>
+            </a:pPr>
+            <a:r>
+              <a:rPr sz="1300"/>
               <a:t>    • İnternet sinyalini dağıtır</a:t>
             </a:r>
           </a:p>
           <a:p>
             <a:pPr lvl="1">
-              <a:spcAft>
-                <a:spcPts val="1200"/>
-              </a:spcAft>
-              <a:defRPr sz="1800"/>
-            </a:pPr>
-            <a:r>
-              <a:rPr sz="1400"/>
+              <a:lnSpc>
+                <a:spcPct val="90000"/>
+              </a:lnSpc>
+              <a:spcAft>
+                <a:spcPts val="300"/>
+              </a:spcAft>
+              <a:defRPr sz="1800"/>
+            </a:pPr>
+            <a:r>
+              <a:rPr sz="1300"/>
               <a:t>    • Wi-Fi oluşturur</a:t>
             </a:r>
           </a:p>
           <a:p>
             <a:pPr>
-              <a:spcAft>
-                <a:spcPts val="1200"/>
-              </a:spcAft>
-              <a:defRPr sz="2000"/>
-            </a:pPr>
-          </a:p>
-          <a:p>
-            <a:pPr>
-              <a:spcAft>
-                <a:spcPts val="1200"/>
-              </a:spcAft>
-              <a:defRPr sz="2000"/>
-            </a:pPr>
-            <a:r>
-              <a:rPr sz="1400"/>
+              <a:lnSpc>
+                <a:spcPct val="90000"/>
+              </a:lnSpc>
+              <a:spcAft>
+                <a:spcPts val="300"/>
+              </a:spcAft>
+              <a:defRPr sz="2000"/>
+            </a:pPr>
+          </a:p>
+          <a:p>
+            <a:pPr>
+              <a:lnSpc>
+                <a:spcPct val="90000"/>
+              </a:lnSpc>
+              <a:spcAft>
+                <a:spcPts val="300"/>
+              </a:spcAft>
+              <a:defRPr sz="2000"/>
+            </a:pPr>
+            <a:r>
+              <a:rPr sz="1300"/>
               <a:t>3️⃣ Cihazınız:</a:t>
             </a:r>
           </a:p>
           <a:p>
             <a:pPr lvl="1">
-              <a:spcAft>
-                <a:spcPts val="1200"/>
-              </a:spcAft>
-              <a:defRPr sz="1800"/>
-            </a:pPr>
-            <a:r>
-              <a:rPr sz="1400"/>
+              <a:lnSpc>
+                <a:spcPct val="90000"/>
+              </a:lnSpc>
+              <a:spcAft>
+                <a:spcPts val="300"/>
+              </a:spcAft>
+              <a:defRPr sz="1800"/>
+            </a:pPr>
+            <a:r>
+              <a:rPr sz="1300"/>
               <a:t>    • Bilgisayar, telefon, tablet</a:t>
             </a:r>
           </a:p>
           <a:p>
             <a:pPr>
-              <a:spcAft>
-                <a:spcPts val="1200"/>
-              </a:spcAft>
-              <a:defRPr sz="2000"/>
-            </a:pPr>
-          </a:p>
-          <a:p>
-            <a:pPr>
-              <a:spcAft>
-                <a:spcPts val="1200"/>
+              <a:lnSpc>
+                <a:spcPct val="90000"/>
+              </a:lnSpc>
+              <a:spcAft>
+                <a:spcPts val="300"/>
+              </a:spcAft>
+              <a:defRPr sz="2000"/>
+            </a:pPr>
+          </a:p>
+          <a:p>
+            <a:pPr>
+              <a:lnSpc>
+                <a:spcPct val="90000"/>
+              </a:lnSpc>
+              <a:spcAft>
+                <a:spcPts val="300"/>
               </a:spcAft>
               <a:defRPr sz="2000" b="1"/>
             </a:pPr>
             <a:r>
-              <a:rPr sz="1400"/>
+              <a:rPr sz="1300"/>
               <a:t>📌 Bağlantı Şekilleri:</a:t>
             </a:r>
           </a:p>
           <a:p>
             <a:pPr lvl="1">
-              <a:spcAft>
-                <a:spcPts val="1200"/>
-              </a:spcAft>
-              <a:defRPr sz="1800"/>
-            </a:pPr>
-            <a:r>
-              <a:rPr sz="1400"/>
+              <a:lnSpc>
+                <a:spcPct val="90000"/>
+              </a:lnSpc>
+              <a:spcAft>
+                <a:spcPts val="300"/>
+              </a:spcAft>
+              <a:defRPr sz="1800"/>
+            </a:pPr>
+            <a:r>
+              <a:rPr sz="1300"/>
               <a:t>    • Kablo (Ethernet)</a:t>
             </a:r>
           </a:p>
           <a:p>
             <a:pPr lvl="1">
-              <a:spcAft>
-                <a:spcPts val="1200"/>
-              </a:spcAft>
-              <a:defRPr sz="1800"/>
-            </a:pPr>
-            <a:r>
-              <a:rPr sz="1400"/>
+              <a:lnSpc>
+                <a:spcPct val="90000"/>
+              </a:lnSpc>
+              <a:spcAft>
+                <a:spcPts val="300"/>
+              </a:spcAft>
+              <a:defRPr sz="1800"/>
+            </a:pPr>
+            <a:r>
+              <a:rPr sz="1300"/>
               <a:t>    • Wi-Fi (Kablosuz)</a:t>
             </a:r>
           </a:p>
           <a:p>
             <a:pPr lvl="1">
-              <a:spcAft>
-                <a:spcPts val="1200"/>
-              </a:spcAft>
-              <a:defRPr sz="1800"/>
-            </a:pPr>
-            <a:r>
-              <a:rPr sz="1400"/>
+              <a:lnSpc>
+                <a:spcPct val="90000"/>
+              </a:lnSpc>
+              <a:spcAft>
+                <a:spcPts val="300"/>
+              </a:spcAft>
+              <a:defRPr sz="1800"/>
+            </a:pPr>
+            <a:r>
+              <a:rPr sz="1300"/>
               <a:t>    • Mobil veri (4.5G, 5G)</a:t>
             </a:r>
           </a:p>
           <a:p>
             <a:pPr>
-              <a:spcAft>
-                <a:spcPts val="1200"/>
-              </a:spcAft>
-              <a:defRPr sz="2000"/>
-            </a:pPr>
-          </a:p>
-          <a:p>
-            <a:pPr>
-              <a:spcAft>
-                <a:spcPts val="1200"/>
+              <a:lnSpc>
+                <a:spcPct val="90000"/>
+              </a:lnSpc>
+              <a:spcAft>
+                <a:spcPts val="300"/>
+              </a:spcAft>
+              <a:defRPr sz="2000"/>
+            </a:pPr>
+          </a:p>
+          <a:p>
+            <a:pPr>
+              <a:lnSpc>
+                <a:spcPct val="90000"/>
+              </a:lnSpc>
+              <a:spcAft>
+                <a:spcPts val="300"/>
               </a:spcAft>
               <a:defRPr sz="2000" b="1"/>
             </a:pPr>
             <a:r>
-              <a:rPr sz="1400"/>
+              <a:rPr sz="1300"/>
               <a:t>💡 Veri Paketi Yolculuğu:</a:t>
             </a:r>
           </a:p>
           <a:p>
             <a:pPr>
-              <a:spcAft>
-                <a:spcPts val="1200"/>
-              </a:spcAft>
-              <a:defRPr sz="2000"/>
-            </a:pPr>
-            <a:r>
-              <a:rPr sz="1400"/>
+              <a:lnSpc>
+                <a:spcPct val="90000"/>
+              </a:lnSpc>
+              <a:spcAft>
+                <a:spcPts val="300"/>
+              </a:spcAft>
+              <a:defRPr sz="2000"/>
+            </a:pPr>
+            <a:r>
+              <a:rPr sz="1300"/>
               <a:t>Bilgisayarınız → Modem → ISP → İnternet → Sunucu → Geri Dönüş</a:t>
             </a:r>
           </a:p>
           <a:p>
             <a:pPr>
-              <a:spcAft>
-                <a:spcPts val="1200"/>
-              </a:spcAft>
-              <a:defRPr sz="2000"/>
-            </a:pPr>
-          </a:p>
-          <a:p>
-            <a:pPr>
-              <a:spcAft>
-                <a:spcPts val="1200"/>
+              <a:lnSpc>
+                <a:spcPct val="90000"/>
+              </a:lnSpc>
+              <a:spcAft>
+                <a:spcPts val="300"/>
+              </a:spcAft>
+              <a:defRPr sz="2000"/>
+            </a:pPr>
+          </a:p>
+          <a:p>
+            <a:pPr>
+              <a:lnSpc>
+                <a:spcPct val="90000"/>
+              </a:lnSpc>
+              <a:spcAft>
+                <a:spcPts val="300"/>
               </a:spcAft>
               <a:defRPr sz="2000" b="1"/>
             </a:pPr>
             <a:r>
-              <a:rPr sz="1400"/>
+              <a:rPr sz="1300"/>
               <a:t>⚡ Saniyede milyonlarca veri paketi gidip geliyor!</a:t>
             </a:r>
           </a:p>
@@ -11171,7 +12368,7 @@
         </p:nvSpPr>
         <p:spPr/>
         <p:txBody>
-          <a:bodyPr/>
+          <a:bodyPr wrap="square"/>
           <a:lstStyle/>
           <a:p>
             <a:pPr>
@@ -11225,268 +12422,349 @@
             <a:spAutoFit/>
           </a:bodyPr>
           <a:lstStyle/>
-          <a:p/>
-          <a:p>
-            <a:pPr>
-              <a:spcAft>
-                <a:spcPts val="1200"/>
-              </a:spcAft>
-              <a:defRPr sz="2000"/>
-            </a:pPr>
-            <a:r>
-              <a:rPr sz="1400"/>
+          <a:p>
+            <a:pPr>
+              <a:lnSpc>
+                <a:spcPct val="90000"/>
+              </a:lnSpc>
+              <a:spcAft>
+                <a:spcPts val="300"/>
+              </a:spcAft>
+            </a:pPr>
+          </a:p>
+          <a:p>
+            <a:pPr>
+              <a:lnSpc>
+                <a:spcPct val="90000"/>
+              </a:lnSpc>
+              <a:spcAft>
+                <a:spcPts val="300"/>
+              </a:spcAft>
+              <a:defRPr sz="2000"/>
+            </a:pPr>
+            <a:r>
+              <a:rPr sz="1300"/>
               <a:t>IP = Internet Protocol (İnternet Protokolü)</a:t>
             </a:r>
           </a:p>
           <a:p>
             <a:pPr>
-              <a:spcAft>
-                <a:spcPts val="1200"/>
-              </a:spcAft>
-              <a:defRPr sz="2000"/>
-            </a:pPr>
-          </a:p>
-          <a:p>
-            <a:pPr>
-              <a:spcAft>
-                <a:spcPts val="1200"/>
+              <a:lnSpc>
+                <a:spcPct val="90000"/>
+              </a:lnSpc>
+              <a:spcAft>
+                <a:spcPts val="300"/>
+              </a:spcAft>
+              <a:defRPr sz="2000"/>
+            </a:pPr>
+          </a:p>
+          <a:p>
+            <a:pPr>
+              <a:lnSpc>
+                <a:spcPct val="90000"/>
+              </a:lnSpc>
+              <a:spcAft>
+                <a:spcPts val="300"/>
               </a:spcAft>
               <a:defRPr sz="2000" b="1"/>
             </a:pPr>
             <a:r>
-              <a:rPr sz="1400"/>
+              <a:rPr sz="1300"/>
               <a:t>🎯 IP Adresi:</a:t>
             </a:r>
           </a:p>
           <a:p>
             <a:pPr>
-              <a:spcAft>
-                <a:spcPts val="1200"/>
-              </a:spcAft>
-              <a:defRPr sz="2000"/>
-            </a:pPr>
-            <a:r>
-              <a:rPr sz="1400"/>
+              <a:lnSpc>
+                <a:spcPct val="90000"/>
+              </a:lnSpc>
+              <a:spcAft>
+                <a:spcPts val="300"/>
+              </a:spcAft>
+              <a:defRPr sz="2000"/>
+            </a:pPr>
+            <a:r>
+              <a:rPr sz="1300"/>
               <a:t>İnternetteki her cihazın benzersiz kimlik numarası</a:t>
             </a:r>
           </a:p>
           <a:p>
             <a:pPr>
-              <a:spcAft>
-                <a:spcPts val="1200"/>
-              </a:spcAft>
-              <a:defRPr sz="2000"/>
-            </a:pPr>
-          </a:p>
-          <a:p>
-            <a:pPr>
-              <a:spcAft>
-                <a:spcPts val="1200"/>
+              <a:lnSpc>
+                <a:spcPct val="90000"/>
+              </a:lnSpc>
+              <a:spcAft>
+                <a:spcPts val="300"/>
+              </a:spcAft>
+              <a:defRPr sz="2000"/>
+            </a:pPr>
+          </a:p>
+          <a:p>
+            <a:pPr>
+              <a:lnSpc>
+                <a:spcPct val="90000"/>
+              </a:lnSpc>
+              <a:spcAft>
+                <a:spcPts val="300"/>
               </a:spcAft>
               <a:defRPr sz="2000" b="1"/>
             </a:pPr>
             <a:r>
-              <a:rPr sz="1400"/>
+              <a:rPr sz="1300"/>
               <a:t>✅ Özellikler:</a:t>
             </a:r>
           </a:p>
           <a:p>
             <a:pPr lvl="1">
-              <a:spcAft>
-                <a:spcPts val="1200"/>
-              </a:spcAft>
-              <a:defRPr sz="1800"/>
-            </a:pPr>
-            <a:r>
-              <a:rPr sz="1400"/>
+              <a:lnSpc>
+                <a:spcPct val="90000"/>
+              </a:lnSpc>
+              <a:spcAft>
+                <a:spcPts val="300"/>
+              </a:spcAft>
+              <a:defRPr sz="1800"/>
+            </a:pPr>
+            <a:r>
+              <a:rPr sz="1300"/>
               <a:t>    • 4 sayı grubundan oluşur</a:t>
             </a:r>
           </a:p>
           <a:p>
             <a:pPr lvl="1">
-              <a:spcAft>
-                <a:spcPts val="1200"/>
-              </a:spcAft>
-              <a:defRPr sz="1800"/>
-            </a:pPr>
-            <a:r>
-              <a:rPr sz="1400"/>
+              <a:lnSpc>
+                <a:spcPct val="90000"/>
+              </a:lnSpc>
+              <a:spcAft>
+                <a:spcPts val="300"/>
+              </a:spcAft>
+              <a:defRPr sz="1800"/>
+            </a:pPr>
+            <a:r>
+              <a:rPr sz="1300"/>
               <a:t>    • Örnek: 192.168.1.1 veya 172.16.254.1</a:t>
             </a:r>
           </a:p>
           <a:p>
             <a:pPr lvl="1">
-              <a:spcAft>
-                <a:spcPts val="1200"/>
-              </a:spcAft>
-              <a:defRPr sz="1800"/>
-            </a:pPr>
-            <a:r>
-              <a:rPr sz="1400"/>
+              <a:lnSpc>
+                <a:spcPct val="90000"/>
+              </a:lnSpc>
+              <a:spcAft>
+                <a:spcPts val="300"/>
+              </a:spcAft>
+              <a:defRPr sz="1800"/>
+            </a:pPr>
+            <a:r>
+              <a:rPr sz="1300"/>
               <a:t>    • Her cihazın IP'si farklıdır</a:t>
             </a:r>
           </a:p>
           <a:p>
             <a:pPr>
-              <a:spcAft>
-                <a:spcPts val="1200"/>
-              </a:spcAft>
-              <a:defRPr sz="2000"/>
-            </a:pPr>
-          </a:p>
-          <a:p>
-            <a:pPr>
-              <a:spcAft>
-                <a:spcPts val="1200"/>
+              <a:lnSpc>
+                <a:spcPct val="90000"/>
+              </a:lnSpc>
+              <a:spcAft>
+                <a:spcPts val="300"/>
+              </a:spcAft>
+              <a:defRPr sz="2000"/>
+            </a:pPr>
+          </a:p>
+          <a:p>
+            <a:pPr>
+              <a:lnSpc>
+                <a:spcPct val="90000"/>
+              </a:lnSpc>
+              <a:spcAft>
+                <a:spcPts val="300"/>
               </a:spcAft>
               <a:defRPr sz="2000" b="1"/>
             </a:pPr>
             <a:r>
-              <a:rPr sz="1400"/>
+              <a:rPr sz="1300"/>
               <a:t>📌 IP Adresi Neden Önemli?</a:t>
             </a:r>
           </a:p>
           <a:p>
             <a:pPr lvl="1">
-              <a:spcAft>
-                <a:spcPts val="1200"/>
-              </a:spcAft>
-              <a:defRPr sz="1800"/>
-            </a:pPr>
-            <a:r>
-              <a:rPr sz="1400"/>
+              <a:lnSpc>
+                <a:spcPct val="90000"/>
+              </a:lnSpc>
+              <a:spcAft>
+                <a:spcPts val="300"/>
+              </a:spcAft>
+              <a:defRPr sz="1800"/>
+            </a:pPr>
+            <a:r>
+              <a:rPr sz="1300"/>
               <a:t>    • Veri doğru cihaza ulaşır</a:t>
             </a:r>
           </a:p>
           <a:p>
             <a:pPr lvl="1">
-              <a:spcAft>
-                <a:spcPts val="1200"/>
-              </a:spcAft>
-              <a:defRPr sz="1800"/>
-            </a:pPr>
-            <a:r>
-              <a:rPr sz="1400"/>
+              <a:lnSpc>
+                <a:spcPct val="90000"/>
+              </a:lnSpc>
+              <a:spcAft>
+                <a:spcPts val="300"/>
+              </a:spcAft>
+              <a:defRPr sz="1800"/>
+            </a:pPr>
+            <a:r>
+              <a:rPr sz="1300"/>
               <a:t>    • Adres sistemi gibi çalışır</a:t>
             </a:r>
           </a:p>
           <a:p>
             <a:pPr>
-              <a:spcAft>
-                <a:spcPts val="1200"/>
-              </a:spcAft>
-              <a:defRPr sz="2000"/>
-            </a:pPr>
-          </a:p>
-          <a:p>
-            <a:pPr>
-              <a:spcAft>
-                <a:spcPts val="1200"/>
+              <a:lnSpc>
+                <a:spcPct val="90000"/>
+              </a:lnSpc>
+              <a:spcAft>
+                <a:spcPts val="300"/>
+              </a:spcAft>
+              <a:defRPr sz="2000"/>
+            </a:pPr>
+          </a:p>
+          <a:p>
+            <a:pPr>
+              <a:lnSpc>
+                <a:spcPct val="90000"/>
+              </a:lnSpc>
+              <a:spcAft>
+                <a:spcPts val="300"/>
               </a:spcAft>
               <a:defRPr sz="2000" b="1"/>
             </a:pPr>
             <a:r>
-              <a:rPr sz="1400"/>
+              <a:rPr sz="1300"/>
               <a:t>💡 Analoji:</a:t>
             </a:r>
           </a:p>
           <a:p>
             <a:pPr>
-              <a:spcAft>
-                <a:spcPts val="1200"/>
-              </a:spcAft>
-              <a:defRPr sz="2000"/>
-            </a:pPr>
-            <a:r>
-              <a:rPr sz="1400"/>
+              <a:lnSpc>
+                <a:spcPct val="90000"/>
+              </a:lnSpc>
+              <a:spcAft>
+                <a:spcPts val="300"/>
+              </a:spcAft>
+              <a:defRPr sz="2000"/>
+            </a:pPr>
+            <a:r>
+              <a:rPr sz="1300"/>
               <a:t>IP Adresi = Ev adresiniz</a:t>
             </a:r>
           </a:p>
           <a:p>
             <a:pPr lvl="1">
-              <a:spcAft>
-                <a:spcPts val="1200"/>
-              </a:spcAft>
-              <a:defRPr sz="1800"/>
-            </a:pPr>
-            <a:r>
-              <a:rPr sz="1400"/>
+              <a:lnSpc>
+                <a:spcPct val="90000"/>
+              </a:lnSpc>
+              <a:spcAft>
+                <a:spcPts val="300"/>
+              </a:spcAft>
+              <a:defRPr sz="1800"/>
+            </a:pPr>
+            <a:r>
+              <a:rPr sz="1300"/>
               <a:t>    • Posta göndermek için adres gerekir</a:t>
             </a:r>
           </a:p>
           <a:p>
             <a:pPr lvl="1">
-              <a:spcAft>
-                <a:spcPts val="1200"/>
-              </a:spcAft>
-              <a:defRPr sz="1800"/>
-            </a:pPr>
-            <a:r>
-              <a:rPr sz="1400"/>
+              <a:lnSpc>
+                <a:spcPct val="90000"/>
+              </a:lnSpc>
+              <a:spcAft>
+                <a:spcPts val="300"/>
+              </a:spcAft>
+              <a:defRPr sz="1800"/>
+            </a:pPr>
+            <a:r>
+              <a:rPr sz="1300"/>
               <a:t>    • İnternet'te veri göndermek için IP gerekir</a:t>
             </a:r>
           </a:p>
           <a:p>
             <a:pPr>
-              <a:spcAft>
-                <a:spcPts val="1200"/>
-              </a:spcAft>
-              <a:defRPr sz="2000"/>
-            </a:pPr>
-          </a:p>
-          <a:p>
-            <a:pPr>
-              <a:spcAft>
-                <a:spcPts val="1200"/>
-              </a:spcAft>
-              <a:defRPr sz="2000"/>
-            </a:pPr>
-            <a:r>
-              <a:rPr sz="1400"/>
+              <a:lnSpc>
+                <a:spcPct val="90000"/>
+              </a:lnSpc>
+              <a:spcAft>
+                <a:spcPts val="300"/>
+              </a:spcAft>
+              <a:defRPr sz="2000"/>
+            </a:pPr>
+          </a:p>
+          <a:p>
+            <a:pPr>
+              <a:lnSpc>
+                <a:spcPct val="90000"/>
+              </a:lnSpc>
+              <a:spcAft>
+                <a:spcPts val="300"/>
+              </a:spcAft>
+              <a:defRPr sz="2000"/>
+            </a:pPr>
+            <a:r>
+              <a:rPr sz="1300"/>
               <a:t>🔍 Kendi IP'nizi Öğrenme:</a:t>
             </a:r>
           </a:p>
           <a:p>
             <a:pPr lvl="1">
-              <a:spcAft>
-                <a:spcPts val="1200"/>
-              </a:spcAft>
-              <a:defRPr sz="1800"/>
-            </a:pPr>
-            <a:r>
-              <a:rPr sz="1400"/>
+              <a:lnSpc>
+                <a:spcPct val="90000"/>
+              </a:lnSpc>
+              <a:spcAft>
+                <a:spcPts val="300"/>
+              </a:spcAft>
+              <a:defRPr sz="1800"/>
+            </a:pPr>
+            <a:r>
+              <a:rPr sz="1300"/>
               <a:t>    • Google'da 'IP adresim nedir?' yazın</a:t>
             </a:r>
           </a:p>
           <a:p>
             <a:pPr lvl="1">
-              <a:spcAft>
-                <a:spcPts val="1200"/>
-              </a:spcAft>
-              <a:defRPr sz="1800"/>
-            </a:pPr>
-            <a:r>
-              <a:rPr sz="1400"/>
+              <a:lnSpc>
+                <a:spcPct val="90000"/>
+              </a:lnSpc>
+              <a:spcAft>
+                <a:spcPts val="300"/>
+              </a:spcAft>
+              <a:defRPr sz="1800"/>
+            </a:pPr>
+            <a:r>
+              <a:rPr sz="1300"/>
               <a:t>    • Komut İstemi: 'ipconfig' komutu</a:t>
             </a:r>
           </a:p>
           <a:p>
             <a:pPr>
-              <a:spcAft>
-                <a:spcPts val="1200"/>
-              </a:spcAft>
-              <a:defRPr sz="2000"/>
-            </a:pPr>
-          </a:p>
-          <a:p>
-            <a:pPr>
-              <a:spcAft>
-                <a:spcPts val="1200"/>
+              <a:lnSpc>
+                <a:spcPct val="90000"/>
+              </a:lnSpc>
+              <a:spcAft>
+                <a:spcPts val="300"/>
+              </a:spcAft>
+              <a:defRPr sz="2000"/>
+            </a:pPr>
+          </a:p>
+          <a:p>
+            <a:pPr>
+              <a:lnSpc>
+                <a:spcPct val="90000"/>
+              </a:lnSpc>
+              <a:spcAft>
+                <a:spcPts val="300"/>
               </a:spcAft>
               <a:defRPr sz="2000" b="1"/>
             </a:pPr>
             <a:r>
-              <a:rPr sz="1400"/>
+              <a:rPr sz="1300"/>
               <a:t>⚡ İki tür IP var: IPv4 ve IPv6 (daha yeni)</a:t>
             </a:r>
           </a:p>
@@ -11522,7 +12800,7 @@
         </p:nvSpPr>
         <p:spPr/>
         <p:txBody>
-          <a:bodyPr/>
+          <a:bodyPr wrap="square"/>
           <a:lstStyle/>
           <a:p>
             <a:pPr>
@@ -11576,308 +12854,398 @@
             <a:spAutoFit/>
           </a:bodyPr>
           <a:lstStyle/>
-          <a:p/>
-          <a:p>
-            <a:pPr>
-              <a:spcAft>
-                <a:spcPts val="1200"/>
-              </a:spcAft>
-              <a:defRPr sz="2000"/>
-            </a:pPr>
-            <a:r>
-              <a:rPr sz="1400"/>
+          <a:p>
+            <a:pPr>
+              <a:lnSpc>
+                <a:spcPct val="90000"/>
+              </a:lnSpc>
+              <a:spcAft>
+                <a:spcPts val="300"/>
+              </a:spcAft>
+            </a:pPr>
+          </a:p>
+          <a:p>
+            <a:pPr>
+              <a:lnSpc>
+                <a:spcPct val="90000"/>
+              </a:lnSpc>
+              <a:spcAft>
+                <a:spcPts val="300"/>
+              </a:spcAft>
+              <a:defRPr sz="2000"/>
+            </a:pPr>
+            <a:r>
+              <a:rPr sz="1300"/>
               <a:t>Domain = Web sitesinin kolay hatırlanan ismi</a:t>
             </a:r>
           </a:p>
           <a:p>
             <a:pPr>
-              <a:spcAft>
-                <a:spcPts val="1200"/>
-              </a:spcAft>
-              <a:defRPr sz="2000"/>
-            </a:pPr>
-          </a:p>
-          <a:p>
-            <a:pPr>
-              <a:spcAft>
-                <a:spcPts val="1200"/>
+              <a:lnSpc>
+                <a:spcPct val="90000"/>
+              </a:lnSpc>
+              <a:spcAft>
+                <a:spcPts val="300"/>
+              </a:spcAft>
+              <a:defRPr sz="2000"/>
+            </a:pPr>
+          </a:p>
+          <a:p>
+            <a:pPr>
+              <a:lnSpc>
+                <a:spcPct val="90000"/>
+              </a:lnSpc>
+              <a:spcAft>
+                <a:spcPts val="300"/>
               </a:spcAft>
               <a:defRPr sz="2000" b="1"/>
             </a:pPr>
             <a:r>
-              <a:rPr sz="1400"/>
+              <a:rPr sz="1300"/>
               <a:t>✅ Örnekler:</a:t>
             </a:r>
           </a:p>
           <a:p>
             <a:pPr lvl="1">
-              <a:spcAft>
-                <a:spcPts val="1200"/>
-              </a:spcAft>
-              <a:defRPr sz="1800"/>
-            </a:pPr>
-            <a:r>
-              <a:rPr sz="1400"/>
+              <a:lnSpc>
+                <a:spcPct val="90000"/>
+              </a:lnSpc>
+              <a:spcAft>
+                <a:spcPts val="300"/>
+              </a:spcAft>
+              <a:defRPr sz="1800"/>
+            </a:pPr>
+            <a:r>
+              <a:rPr sz="1300"/>
               <a:t>    • www.google.com</a:t>
             </a:r>
           </a:p>
           <a:p>
             <a:pPr lvl="1">
-              <a:spcAft>
-                <a:spcPts val="1200"/>
-              </a:spcAft>
-              <a:defRPr sz="1800"/>
-            </a:pPr>
-            <a:r>
-              <a:rPr sz="1400"/>
+              <a:lnSpc>
+                <a:spcPct val="90000"/>
+              </a:lnSpc>
+              <a:spcAft>
+                <a:spcPts val="300"/>
+              </a:spcAft>
+              <a:defRPr sz="1800"/>
+            </a:pPr>
+            <a:r>
+              <a:rPr sz="1300"/>
               <a:t>    • www.youtube.com</a:t>
             </a:r>
           </a:p>
           <a:p>
             <a:pPr lvl="1">
-              <a:spcAft>
-                <a:spcPts val="1200"/>
-              </a:spcAft>
-              <a:defRPr sz="1800"/>
-            </a:pPr>
-            <a:r>
-              <a:rPr sz="1400"/>
+              <a:lnSpc>
+                <a:spcPct val="90000"/>
+              </a:lnSpc>
+              <a:spcAft>
+                <a:spcPts val="300"/>
+              </a:spcAft>
+              <a:defRPr sz="1800"/>
+            </a:pPr>
+            <a:r>
+              <a:rPr sz="1300"/>
               <a:t>    • www.meb.gov.tr</a:t>
             </a:r>
           </a:p>
           <a:p>
             <a:pPr>
-              <a:spcAft>
-                <a:spcPts val="1200"/>
-              </a:spcAft>
-              <a:defRPr sz="2000"/>
-            </a:pPr>
-          </a:p>
-          <a:p>
-            <a:pPr>
-              <a:spcAft>
-                <a:spcPts val="1200"/>
+              <a:lnSpc>
+                <a:spcPct val="90000"/>
+              </a:lnSpc>
+              <a:spcAft>
+                <a:spcPts val="300"/>
+              </a:spcAft>
+              <a:defRPr sz="2000"/>
+            </a:pPr>
+          </a:p>
+          <a:p>
+            <a:pPr>
+              <a:lnSpc>
+                <a:spcPct val="90000"/>
+              </a:lnSpc>
+              <a:spcAft>
+                <a:spcPts val="300"/>
               </a:spcAft>
               <a:defRPr sz="2000" b="1"/>
             </a:pPr>
             <a:r>
-              <a:rPr sz="1400"/>
+              <a:rPr sz="1300"/>
               <a:t>📌 Domain vs IP:</a:t>
             </a:r>
           </a:p>
           <a:p>
             <a:pPr lvl="1">
-              <a:spcAft>
-                <a:spcPts val="1200"/>
-              </a:spcAft>
-              <a:defRPr sz="1800"/>
-            </a:pPr>
-            <a:r>
-              <a:rPr sz="1400"/>
+              <a:lnSpc>
+                <a:spcPct val="90000"/>
+              </a:lnSpc>
+              <a:spcAft>
+                <a:spcPts val="300"/>
+              </a:spcAft>
+              <a:defRPr sz="1800"/>
+            </a:pPr>
+            <a:r>
+              <a:rPr sz="1300"/>
               <a:t>    • IP: 172.217.16.142 (zor hatırlanır)</a:t>
             </a:r>
           </a:p>
           <a:p>
             <a:pPr lvl="1">
-              <a:spcAft>
-                <a:spcPts val="1200"/>
-              </a:spcAft>
-              <a:defRPr sz="1800"/>
-            </a:pPr>
-            <a:r>
-              <a:rPr sz="1400"/>
+              <a:lnSpc>
+                <a:spcPct val="90000"/>
+              </a:lnSpc>
+              <a:spcAft>
+                <a:spcPts val="300"/>
+              </a:spcAft>
+              <a:defRPr sz="1800"/>
+            </a:pPr>
+            <a:r>
+              <a:rPr sz="1300"/>
               <a:t>    • Domain: google.com (kolay hatırlanır)</a:t>
             </a:r>
           </a:p>
           <a:p>
             <a:pPr>
-              <a:spcAft>
-                <a:spcPts val="1200"/>
-              </a:spcAft>
-              <a:defRPr sz="2000"/>
-            </a:pPr>
-          </a:p>
-          <a:p>
-            <a:pPr>
-              <a:spcAft>
-                <a:spcPts val="1200"/>
+              <a:lnSpc>
+                <a:spcPct val="90000"/>
+              </a:lnSpc>
+              <a:spcAft>
+                <a:spcPts val="300"/>
+              </a:spcAft>
+              <a:defRPr sz="2000"/>
+            </a:pPr>
+          </a:p>
+          <a:p>
+            <a:pPr>
+              <a:lnSpc>
+                <a:spcPct val="90000"/>
+              </a:lnSpc>
+              <a:spcAft>
+                <a:spcPts val="300"/>
               </a:spcAft>
               <a:defRPr sz="2000" b="1"/>
             </a:pPr>
             <a:r>
-              <a:rPr sz="1400"/>
+              <a:rPr sz="1300"/>
               <a:t>💡 Analoji:</a:t>
             </a:r>
           </a:p>
           <a:p>
             <a:pPr lvl="1">
-              <a:spcAft>
-                <a:spcPts val="1200"/>
-              </a:spcAft>
-              <a:defRPr sz="1800"/>
-            </a:pPr>
-            <a:r>
-              <a:rPr sz="1400"/>
+              <a:lnSpc>
+                <a:spcPct val="90000"/>
+              </a:lnSpc>
+              <a:spcAft>
+                <a:spcPts val="300"/>
+              </a:spcAft>
+              <a:defRPr sz="1800"/>
+            </a:pPr>
+            <a:r>
+              <a:rPr sz="1300"/>
               <a:t>    • IP Adresi = Telefon numarası (555-123-4567)</a:t>
             </a:r>
           </a:p>
           <a:p>
             <a:pPr lvl="1">
-              <a:spcAft>
-                <a:spcPts val="1200"/>
-              </a:spcAft>
-              <a:defRPr sz="1800"/>
-            </a:pPr>
-            <a:r>
-              <a:rPr sz="1400"/>
+              <a:lnSpc>
+                <a:spcPct val="90000"/>
+              </a:lnSpc>
+              <a:spcAft>
+                <a:spcPts val="300"/>
+              </a:spcAft>
+              <a:defRPr sz="1800"/>
+            </a:pPr>
+            <a:r>
+              <a:rPr sz="1300"/>
               <a:t>    • Domain = Kişi adı (Ahmet)</a:t>
             </a:r>
           </a:p>
           <a:p>
             <a:pPr>
-              <a:spcAft>
-                <a:spcPts val="1200"/>
-              </a:spcAft>
-              <a:defRPr sz="2000"/>
-            </a:pPr>
-            <a:r>
-              <a:rPr sz="1400"/>
+              <a:lnSpc>
+                <a:spcPct val="90000"/>
+              </a:lnSpc>
+              <a:spcAft>
+                <a:spcPts val="300"/>
+              </a:spcAft>
+              <a:defRPr sz="2000"/>
+            </a:pPr>
+            <a:r>
+              <a:rPr sz="1300"/>
               <a:t>Hangi kolayca hatırlarsın?</a:t>
             </a:r>
           </a:p>
           <a:p>
             <a:pPr>
-              <a:spcAft>
-                <a:spcPts val="1200"/>
-              </a:spcAft>
-              <a:defRPr sz="2000"/>
-            </a:pPr>
-          </a:p>
-          <a:p>
-            <a:pPr>
-              <a:spcAft>
-                <a:spcPts val="1200"/>
-              </a:spcAft>
-              <a:defRPr sz="2000"/>
-            </a:pPr>
-            <a:r>
-              <a:rPr sz="1400"/>
+              <a:lnSpc>
+                <a:spcPct val="90000"/>
+              </a:lnSpc>
+              <a:spcAft>
+                <a:spcPts val="300"/>
+              </a:spcAft>
+              <a:defRPr sz="2000"/>
+            </a:pPr>
+          </a:p>
+          <a:p>
+            <a:pPr>
+              <a:lnSpc>
+                <a:spcPct val="90000"/>
+              </a:lnSpc>
+              <a:spcAft>
+                <a:spcPts val="300"/>
+              </a:spcAft>
+              <a:defRPr sz="2000"/>
+            </a:pPr>
+            <a:r>
+              <a:rPr sz="1300"/>
               <a:t>🔍 Domain Yapısı:</a:t>
             </a:r>
           </a:p>
           <a:p>
             <a:pPr>
-              <a:spcAft>
-                <a:spcPts val="1200"/>
-              </a:spcAft>
-              <a:defRPr sz="2000"/>
-            </a:pPr>
-            <a:r>
-              <a:rPr sz="1400"/>
+              <a:lnSpc>
+                <a:spcPct val="90000"/>
+              </a:lnSpc>
+              <a:spcAft>
+                <a:spcPts val="300"/>
+              </a:spcAft>
+              <a:defRPr sz="2000"/>
+            </a:pPr>
+            <a:r>
+              <a:rPr sz="1300"/>
               <a:t>www.meb.gov.tr</a:t>
             </a:r>
           </a:p>
           <a:p>
             <a:pPr lvl="1">
-              <a:spcAft>
-                <a:spcPts val="1200"/>
-              </a:spcAft>
-              <a:defRPr sz="1800"/>
-            </a:pPr>
-            <a:r>
-              <a:rPr sz="1400"/>
+              <a:lnSpc>
+                <a:spcPct val="90000"/>
+              </a:lnSpc>
+              <a:spcAft>
+                <a:spcPts val="300"/>
+              </a:spcAft>
+              <a:defRPr sz="1800"/>
+            </a:pPr>
+            <a:r>
+              <a:rPr sz="1300"/>
               <a:t>    • meb = site adı</a:t>
             </a:r>
           </a:p>
           <a:p>
             <a:pPr lvl="1">
-              <a:spcAft>
-                <a:spcPts val="1200"/>
-              </a:spcAft>
-              <a:defRPr sz="1800"/>
-            </a:pPr>
-            <a:r>
-              <a:rPr sz="1400"/>
+              <a:lnSpc>
+                <a:spcPct val="90000"/>
+              </a:lnSpc>
+              <a:spcAft>
+                <a:spcPts val="300"/>
+              </a:spcAft>
+              <a:defRPr sz="1800"/>
+            </a:pPr>
+            <a:r>
+              <a:rPr sz="1300"/>
               <a:t>    • gov = hükümet sitesi</a:t>
             </a:r>
           </a:p>
           <a:p>
             <a:pPr lvl="1">
-              <a:spcAft>
-                <a:spcPts val="1200"/>
-              </a:spcAft>
-              <a:defRPr sz="1800"/>
-            </a:pPr>
-            <a:r>
-              <a:rPr sz="1400"/>
+              <a:lnSpc>
+                <a:spcPct val="90000"/>
+              </a:lnSpc>
+              <a:spcAft>
+                <a:spcPts val="300"/>
+              </a:spcAft>
+              <a:defRPr sz="1800"/>
+            </a:pPr>
+            <a:r>
+              <a:rPr sz="1300"/>
               <a:t>    • tr = Türkiye</a:t>
             </a:r>
           </a:p>
           <a:p>
             <a:pPr>
-              <a:spcAft>
-                <a:spcPts val="1200"/>
-              </a:spcAft>
-              <a:defRPr sz="2000"/>
-            </a:pPr>
-          </a:p>
-          <a:p>
-            <a:pPr>
-              <a:spcAft>
-                <a:spcPts val="1200"/>
+              <a:lnSpc>
+                <a:spcPct val="90000"/>
+              </a:lnSpc>
+              <a:spcAft>
+                <a:spcPts val="300"/>
+              </a:spcAft>
+              <a:defRPr sz="2000"/>
+            </a:pPr>
+          </a:p>
+          <a:p>
+            <a:pPr>
+              <a:lnSpc>
+                <a:spcPct val="90000"/>
+              </a:lnSpc>
+              <a:spcAft>
+                <a:spcPts val="300"/>
               </a:spcAft>
               <a:defRPr sz="2000" b="1"/>
             </a:pPr>
             <a:r>
-              <a:rPr sz="1400"/>
+              <a:rPr sz="1300"/>
               <a:t>📌 Domain Uzantıları:</a:t>
             </a:r>
           </a:p>
           <a:p>
             <a:pPr lvl="1">
-              <a:spcAft>
-                <a:spcPts val="1200"/>
-              </a:spcAft>
-              <a:defRPr sz="1800"/>
-            </a:pPr>
-            <a:r>
-              <a:rPr sz="1400"/>
+              <a:lnSpc>
+                <a:spcPct val="90000"/>
+              </a:lnSpc>
+              <a:spcAft>
+                <a:spcPts val="300"/>
+              </a:spcAft>
+              <a:defRPr sz="1800"/>
+            </a:pPr>
+            <a:r>
+              <a:rPr sz="1300"/>
               <a:t>    • .com = ticari</a:t>
             </a:r>
           </a:p>
           <a:p>
             <a:pPr lvl="1">
-              <a:spcAft>
-                <a:spcPts val="1200"/>
-              </a:spcAft>
-              <a:defRPr sz="1800"/>
-            </a:pPr>
-            <a:r>
-              <a:rPr sz="1400"/>
+              <a:lnSpc>
+                <a:spcPct val="90000"/>
+              </a:lnSpc>
+              <a:spcAft>
+                <a:spcPts val="300"/>
+              </a:spcAft>
+              <a:defRPr sz="1800"/>
+            </a:pPr>
+            <a:r>
+              <a:rPr sz="1300"/>
               <a:t>    • .org = organizasyon</a:t>
             </a:r>
           </a:p>
           <a:p>
             <a:pPr lvl="1">
-              <a:spcAft>
-                <a:spcPts val="1200"/>
-              </a:spcAft>
-              <a:defRPr sz="1800"/>
-            </a:pPr>
-            <a:r>
-              <a:rPr sz="1400"/>
+              <a:lnSpc>
+                <a:spcPct val="90000"/>
+              </a:lnSpc>
+              <a:spcAft>
+                <a:spcPts val="300"/>
+              </a:spcAft>
+              <a:defRPr sz="1800"/>
+            </a:pPr>
+            <a:r>
+              <a:rPr sz="1300"/>
               <a:t>    • .edu = eğitim</a:t>
             </a:r>
           </a:p>
           <a:p>
             <a:pPr lvl="1">
-              <a:spcAft>
-                <a:spcPts val="1200"/>
-              </a:spcAft>
-              <a:defRPr sz="1800"/>
-            </a:pPr>
-            <a:r>
-              <a:rPr sz="1400"/>
+              <a:lnSpc>
+                <a:spcPct val="90000"/>
+              </a:lnSpc>
+              <a:spcAft>
+                <a:spcPts val="300"/>
+              </a:spcAft>
+              <a:defRPr sz="1800"/>
+            </a:pPr>
+            <a:r>
+              <a:rPr sz="1300"/>
               <a:t>    • .gov = hükümet</a:t>
             </a:r>
           </a:p>
@@ -11913,7 +13281,7 @@
         </p:nvSpPr>
         <p:spPr/>
         <p:txBody>
-          <a:bodyPr/>
+          <a:bodyPr wrap="square"/>
           <a:lstStyle/>
           <a:p>
             <a:pPr>
@@ -11967,276 +13335,357 @@
             <a:spAutoFit/>
           </a:bodyPr>
           <a:lstStyle/>
-          <a:p/>
-          <a:p>
-            <a:pPr>
-              <a:spcAft>
-                <a:spcPts val="1200"/>
-              </a:spcAft>
-              <a:defRPr sz="2000"/>
-            </a:pPr>
-            <a:r>
-              <a:rPr sz="1400"/>
+          <a:p>
+            <a:pPr>
+              <a:lnSpc>
+                <a:spcPct val="90000"/>
+              </a:lnSpc>
+              <a:spcAft>
+                <a:spcPts val="300"/>
+              </a:spcAft>
+            </a:pPr>
+          </a:p>
+          <a:p>
+            <a:pPr>
+              <a:lnSpc>
+                <a:spcPct val="90000"/>
+              </a:lnSpc>
+              <a:spcAft>
+                <a:spcPts val="300"/>
+              </a:spcAft>
+              <a:defRPr sz="2000"/>
+            </a:pPr>
+            <a:r>
+              <a:rPr sz="1300"/>
               <a:t>Tarayıcı = İnternet'te gezinmek için kullanılan program</a:t>
             </a:r>
           </a:p>
           <a:p>
             <a:pPr>
-              <a:spcAft>
-                <a:spcPts val="1200"/>
-              </a:spcAft>
-              <a:defRPr sz="2000"/>
-            </a:pPr>
-          </a:p>
-          <a:p>
-            <a:pPr>
-              <a:spcAft>
-                <a:spcPts val="1200"/>
+              <a:lnSpc>
+                <a:spcPct val="90000"/>
+              </a:lnSpc>
+              <a:spcAft>
+                <a:spcPts val="300"/>
+              </a:spcAft>
+              <a:defRPr sz="2000"/>
+            </a:pPr>
+          </a:p>
+          <a:p>
+            <a:pPr>
+              <a:lnSpc>
+                <a:spcPct val="90000"/>
+              </a:lnSpc>
+              <a:spcAft>
+                <a:spcPts val="300"/>
               </a:spcAft>
               <a:defRPr sz="2000" b="1"/>
             </a:pPr>
             <a:r>
-              <a:rPr sz="1400"/>
+              <a:rPr sz="1300"/>
               <a:t>✅ Popüler Tarayıcılar:</a:t>
             </a:r>
           </a:p>
           <a:p>
             <a:pPr lvl="1">
-              <a:spcAft>
-                <a:spcPts val="1200"/>
-              </a:spcAft>
-              <a:defRPr sz="1800"/>
-            </a:pPr>
-            <a:r>
-              <a:rPr sz="1400"/>
+              <a:lnSpc>
+                <a:spcPct val="90000"/>
+              </a:lnSpc>
+              <a:spcAft>
+                <a:spcPts val="300"/>
+              </a:spcAft>
+              <a:defRPr sz="1800"/>
+            </a:pPr>
+            <a:r>
+              <a:rPr sz="1300"/>
               <a:t>    • Google Chrome 🔵</a:t>
             </a:r>
           </a:p>
           <a:p>
             <a:pPr lvl="1">
-              <a:spcAft>
-                <a:spcPts val="1200"/>
-              </a:spcAft>
-              <a:defRPr sz="1800"/>
-            </a:pPr>
-            <a:r>
-              <a:rPr sz="1400"/>
+              <a:lnSpc>
+                <a:spcPct val="90000"/>
+              </a:lnSpc>
+              <a:spcAft>
+                <a:spcPts val="300"/>
+              </a:spcAft>
+              <a:defRPr sz="1800"/>
+            </a:pPr>
+            <a:r>
+              <a:rPr sz="1300"/>
               <a:t>    • Microsoft Edge 🔷</a:t>
             </a:r>
           </a:p>
           <a:p>
             <a:pPr lvl="1">
-              <a:spcAft>
-                <a:spcPts val="1200"/>
-              </a:spcAft>
-              <a:defRPr sz="1800"/>
-            </a:pPr>
-            <a:r>
-              <a:rPr sz="1400"/>
+              <a:lnSpc>
+                <a:spcPct val="90000"/>
+              </a:lnSpc>
+              <a:spcAft>
+                <a:spcPts val="300"/>
+              </a:spcAft>
+              <a:defRPr sz="1800"/>
+            </a:pPr>
+            <a:r>
+              <a:rPr sz="1300"/>
               <a:t>    • Mozilla Firefox 🦊</a:t>
             </a:r>
           </a:p>
           <a:p>
             <a:pPr lvl="1">
-              <a:spcAft>
-                <a:spcPts val="1200"/>
-              </a:spcAft>
-              <a:defRPr sz="1800"/>
-            </a:pPr>
-            <a:r>
-              <a:rPr sz="1400"/>
+              <a:lnSpc>
+                <a:spcPct val="90000"/>
+              </a:lnSpc>
+              <a:spcAft>
+                <a:spcPts val="300"/>
+              </a:spcAft>
+              <a:defRPr sz="1800"/>
+            </a:pPr>
+            <a:r>
+              <a:rPr sz="1300"/>
               <a:t>    • Safari 🧭 (Apple cihazlar)</a:t>
             </a:r>
           </a:p>
           <a:p>
             <a:pPr lvl="1">
-              <a:spcAft>
-                <a:spcPts val="1200"/>
-              </a:spcAft>
-              <a:defRPr sz="1800"/>
-            </a:pPr>
-            <a:r>
-              <a:rPr sz="1400"/>
+              <a:lnSpc>
+                <a:spcPct val="90000"/>
+              </a:lnSpc>
+              <a:spcAft>
+                <a:spcPts val="300"/>
+              </a:spcAft>
+              <a:defRPr sz="1800"/>
+            </a:pPr>
+            <a:r>
+              <a:rPr sz="1300"/>
               <a:t>    • Opera</a:t>
             </a:r>
           </a:p>
           <a:p>
             <a:pPr>
-              <a:spcAft>
-                <a:spcPts val="1200"/>
-              </a:spcAft>
-              <a:defRPr sz="2000"/>
-            </a:pPr>
-          </a:p>
-          <a:p>
-            <a:pPr>
-              <a:spcAft>
-                <a:spcPts val="1200"/>
+              <a:lnSpc>
+                <a:spcPct val="90000"/>
+              </a:lnSpc>
+              <a:spcAft>
+                <a:spcPts val="300"/>
+              </a:spcAft>
+              <a:defRPr sz="2000"/>
+            </a:pPr>
+          </a:p>
+          <a:p>
+            <a:pPr>
+              <a:lnSpc>
+                <a:spcPct val="90000"/>
+              </a:lnSpc>
+              <a:spcAft>
+                <a:spcPts val="300"/>
               </a:spcAft>
               <a:defRPr sz="2000" b="1"/>
             </a:pPr>
             <a:r>
-              <a:rPr sz="1400"/>
+              <a:rPr sz="1300"/>
               <a:t>📌 Tarayıcılar Ne İşe Yarar?</a:t>
             </a:r>
           </a:p>
           <a:p>
             <a:pPr lvl="1">
-              <a:spcAft>
-                <a:spcPts val="1200"/>
-              </a:spcAft>
-              <a:defRPr sz="1800"/>
-            </a:pPr>
-            <a:r>
-              <a:rPr sz="1400"/>
+              <a:lnSpc>
+                <a:spcPct val="90000"/>
+              </a:lnSpc>
+              <a:spcAft>
+                <a:spcPts val="300"/>
+              </a:spcAft>
+              <a:defRPr sz="1800"/>
+            </a:pPr>
+            <a:r>
+              <a:rPr sz="1300"/>
               <a:t>    • Web sitelerini açar</a:t>
             </a:r>
           </a:p>
           <a:p>
             <a:pPr lvl="1">
-              <a:spcAft>
-                <a:spcPts val="1200"/>
-              </a:spcAft>
-              <a:defRPr sz="1800"/>
-            </a:pPr>
-            <a:r>
-              <a:rPr sz="1400"/>
+              <a:lnSpc>
+                <a:spcPct val="90000"/>
+              </a:lnSpc>
+              <a:spcAft>
+                <a:spcPts val="300"/>
+              </a:spcAft>
+              <a:defRPr sz="1800"/>
+            </a:pPr>
+            <a:r>
+              <a:rPr sz="1300"/>
               <a:t>    • Videoları oynatır</a:t>
             </a:r>
           </a:p>
           <a:p>
             <a:pPr lvl="1">
-              <a:spcAft>
-                <a:spcPts val="1200"/>
-              </a:spcAft>
-              <a:defRPr sz="1800"/>
-            </a:pPr>
-            <a:r>
-              <a:rPr sz="1400"/>
+              <a:lnSpc>
+                <a:spcPct val="90000"/>
+              </a:lnSpc>
+              <a:spcAft>
+                <a:spcPts val="300"/>
+              </a:spcAft>
+              <a:defRPr sz="1800"/>
+            </a:pPr>
+            <a:r>
+              <a:rPr sz="1300"/>
               <a:t>    • Dosya indirir</a:t>
             </a:r>
           </a:p>
           <a:p>
             <a:pPr lvl="1">
-              <a:spcAft>
-                <a:spcPts val="1200"/>
-              </a:spcAft>
-              <a:defRPr sz="1800"/>
-            </a:pPr>
-            <a:r>
-              <a:rPr sz="1400"/>
+              <a:lnSpc>
+                <a:spcPct val="90000"/>
+              </a:lnSpc>
+              <a:spcAft>
+                <a:spcPts val="300"/>
+              </a:spcAft>
+              <a:defRPr sz="1800"/>
+            </a:pPr>
+            <a:r>
+              <a:rPr sz="1300"/>
               <a:t>    • Favorilere site ekler</a:t>
             </a:r>
           </a:p>
           <a:p>
             <a:pPr lvl="1">
-              <a:spcAft>
-                <a:spcPts val="1200"/>
-              </a:spcAft>
-              <a:defRPr sz="1800"/>
-            </a:pPr>
-            <a:r>
-              <a:rPr sz="1400"/>
+              <a:lnSpc>
+                <a:spcPct val="90000"/>
+              </a:lnSpc>
+              <a:spcAft>
+                <a:spcPts val="300"/>
+              </a:spcAft>
+              <a:defRPr sz="1800"/>
+            </a:pPr>
+            <a:r>
+              <a:rPr sz="1300"/>
               <a:t>    • Gezinme geçmişini saklar</a:t>
             </a:r>
           </a:p>
           <a:p>
             <a:pPr>
-              <a:spcAft>
-                <a:spcPts val="1200"/>
-              </a:spcAft>
-              <a:defRPr sz="2000"/>
-            </a:pPr>
-          </a:p>
-          <a:p>
-            <a:pPr>
-              <a:spcAft>
-                <a:spcPts val="1200"/>
+              <a:lnSpc>
+                <a:spcPct val="90000"/>
+              </a:lnSpc>
+              <a:spcAft>
+                <a:spcPts val="300"/>
+              </a:spcAft>
+              <a:defRPr sz="2000"/>
+            </a:pPr>
+          </a:p>
+          <a:p>
+            <a:pPr>
+              <a:lnSpc>
+                <a:spcPct val="90000"/>
+              </a:lnSpc>
+              <a:spcAft>
+                <a:spcPts val="300"/>
               </a:spcAft>
               <a:defRPr sz="2000" b="1"/>
             </a:pPr>
             <a:r>
-              <a:rPr sz="1400"/>
+              <a:rPr sz="1300"/>
               <a:t>💡 Tarayıcı Bölümleri:</a:t>
             </a:r>
           </a:p>
           <a:p>
             <a:pPr lvl="1">
-              <a:spcAft>
-                <a:spcPts val="1200"/>
-              </a:spcAft>
-              <a:defRPr sz="1800"/>
-            </a:pPr>
-            <a:r>
-              <a:rPr sz="1400"/>
+              <a:lnSpc>
+                <a:spcPct val="90000"/>
+              </a:lnSpc>
+              <a:spcAft>
+                <a:spcPts val="300"/>
+              </a:spcAft>
+              <a:defRPr sz="1800"/>
+            </a:pPr>
+            <a:r>
+              <a:rPr sz="1300"/>
               <a:t>    • Adres çubuğu (URL yazılır)</a:t>
             </a:r>
           </a:p>
           <a:p>
             <a:pPr lvl="1">
-              <a:spcAft>
-                <a:spcPts val="1200"/>
-              </a:spcAft>
-              <a:defRPr sz="1800"/>
-            </a:pPr>
-            <a:r>
-              <a:rPr sz="1400"/>
+              <a:lnSpc>
+                <a:spcPct val="90000"/>
+              </a:lnSpc>
+              <a:spcAft>
+                <a:spcPts val="300"/>
+              </a:spcAft>
+              <a:defRPr sz="1800"/>
+            </a:pPr>
+            <a:r>
+              <a:rPr sz="1300"/>
               <a:t>    • Geri/İleri butonları</a:t>
             </a:r>
           </a:p>
           <a:p>
             <a:pPr lvl="1">
-              <a:spcAft>
-                <a:spcPts val="1200"/>
-              </a:spcAft>
-              <a:defRPr sz="1800"/>
-            </a:pPr>
-            <a:r>
-              <a:rPr sz="1400"/>
+              <a:lnSpc>
+                <a:spcPct val="90000"/>
+              </a:lnSpc>
+              <a:spcAft>
+                <a:spcPts val="300"/>
+              </a:spcAft>
+              <a:defRPr sz="1800"/>
+            </a:pPr>
+            <a:r>
+              <a:rPr sz="1300"/>
               <a:t>    • Yenile butonu</a:t>
             </a:r>
           </a:p>
           <a:p>
             <a:pPr lvl="1">
-              <a:spcAft>
-                <a:spcPts val="1200"/>
-              </a:spcAft>
-              <a:defRPr sz="1800"/>
-            </a:pPr>
-            <a:r>
-              <a:rPr sz="1400"/>
+              <a:lnSpc>
+                <a:spcPct val="90000"/>
+              </a:lnSpc>
+              <a:spcAft>
+                <a:spcPts val="300"/>
+              </a:spcAft>
+              <a:defRPr sz="1800"/>
+            </a:pPr>
+            <a:r>
+              <a:rPr sz="1300"/>
               <a:t>    • Sekmeler (Tab)</a:t>
             </a:r>
           </a:p>
           <a:p>
             <a:pPr lvl="1">
-              <a:spcAft>
-                <a:spcPts val="1200"/>
-              </a:spcAft>
-              <a:defRPr sz="1800"/>
-            </a:pPr>
-            <a:r>
-              <a:rPr sz="1400"/>
+              <a:lnSpc>
+                <a:spcPct val="90000"/>
+              </a:lnSpc>
+              <a:spcAft>
+                <a:spcPts val="300"/>
+              </a:spcAft>
+              <a:defRPr sz="1800"/>
+            </a:pPr>
+            <a:r>
+              <a:rPr sz="1300"/>
               <a:t>    • Favoriler/Yer imleri</a:t>
             </a:r>
           </a:p>
           <a:p>
             <a:pPr>
-              <a:spcAft>
-                <a:spcPts val="1200"/>
-              </a:spcAft>
-              <a:defRPr sz="2000"/>
-            </a:pPr>
-          </a:p>
-          <a:p>
-            <a:pPr>
-              <a:spcAft>
-                <a:spcPts val="1200"/>
+              <a:lnSpc>
+                <a:spcPct val="90000"/>
+              </a:lnSpc>
+              <a:spcAft>
+                <a:spcPts val="300"/>
+              </a:spcAft>
+              <a:defRPr sz="2000"/>
+            </a:pPr>
+          </a:p>
+          <a:p>
+            <a:pPr>
+              <a:lnSpc>
+                <a:spcPct val="90000"/>
+              </a:lnSpc>
+              <a:spcAft>
+                <a:spcPts val="300"/>
               </a:spcAft>
               <a:defRPr sz="2000" b="1"/>
             </a:pPr>
             <a:r>
-              <a:rPr sz="1400"/>
+              <a:rPr sz="1300"/>
               <a:t>⚡ Güvenli tarayıcı kullanın, güncellemeleri yapın!</a:t>
             </a:r>
           </a:p>

--- a/sunumlar/5-sinif-unite3-aglar-iletisim-DETAYLI.pptx
+++ b/sunumlar/5-sinif-unite3-aglar-iletisim-DETAYLI.pptx
@@ -5815,12 +5815,21 @@
           <a:noFill/>
         </p:spPr>
         <p:txBody>
-          <a:bodyPr wrap="square">
+          <a:bodyPr wrap="square" tIns="25400" bIns="25400" lIns="63500" rIns="63500">
             <a:spAutoFit/>
           </a:bodyPr>
           <a:lstStyle/>
           <a:p>
             <a:pPr algn="ctr">
+              <a:lnSpc>
+                <a:spcPct val="85000"/>
+              </a:lnSpc>
+              <a:spcBef>
+                <a:spcPts val="200"/>
+              </a:spcBef>
+              <a:spcAft>
+                <a:spcPts val="200"/>
+              </a:spcAft>
               <a:defRPr sz="5400" b="1">
                 <a:solidFill>
                   <a:srgbClr val="FFFFFF"/>
@@ -5828,6 +5837,7 @@
               </a:defRPr>
             </a:pPr>
             <a:r>
+              <a:rPr/>
               <a:t>ÜNİTE 3</a:t>
             </a:r>
           </a:p>
@@ -5850,12 +5860,21 @@
           <a:noFill/>
         </p:spPr>
         <p:txBody>
-          <a:bodyPr wrap="square">
+          <a:bodyPr wrap="square" tIns="25400" bIns="25400" lIns="63500" rIns="63500">
             <a:spAutoFit/>
           </a:bodyPr>
           <a:lstStyle/>
           <a:p>
             <a:pPr algn="ctr">
+              <a:lnSpc>
+                <a:spcPct val="85000"/>
+              </a:lnSpc>
+              <a:spcBef>
+                <a:spcPts val="200"/>
+              </a:spcBef>
+              <a:spcAft>
+                <a:spcPts val="200"/>
+              </a:spcAft>
               <a:defRPr sz="2800">
                 <a:solidFill>
                   <a:srgbClr val="FFFFFF"/>
@@ -5863,6 +5882,7 @@
               </a:defRPr>
             </a:pPr>
             <a:r>
+              <a:rPr/>
               <a:t>Ağlar ve İletişim</a:t>
             </a:r>
           </a:p>
@@ -5898,10 +5918,19 @@
         </p:nvSpPr>
         <p:spPr/>
         <p:txBody>
-          <a:bodyPr wrap="square"/>
+          <a:bodyPr wrap="square" tIns="25400" bIns="25400" lIns="63500" rIns="63500"/>
           <a:lstStyle/>
           <a:p>
             <a:pPr>
+              <a:lnSpc>
+                <a:spcPct val="85000"/>
+              </a:lnSpc>
+              <a:spcBef>
+                <a:spcPts val="200"/>
+              </a:spcBef>
+              <a:spcAft>
+                <a:spcPts val="200"/>
+              </a:spcAft>
               <a:defRPr sz="4000" b="1">
                 <a:solidFill>
                   <a:srgbClr val="667EEA"/>
@@ -5909,6 +5938,7 @@
               </a:defRPr>
             </a:pPr>
             <a:r>
+              <a:rPr/>
               <a:t>🔍 Arama Motorları</a:t>
             </a:r>
           </a:p>
@@ -5948,7 +5978,7 @@
           <a:noFill/>
         </p:spPr>
         <p:txBody>
-          <a:bodyPr wrap="square">
+          <a:bodyPr wrap="square" tIns="25400" bIns="25400" lIns="63500" rIns="63500">
             <a:spAutoFit/>
           </a:bodyPr>
           <a:lstStyle/>
@@ -5965,6 +5995,24 @@
           <a:p>
             <a:pPr>
               <a:lnSpc>
+                <a:spcPct val="85000"/>
+              </a:lnSpc>
+              <a:spcBef>
+                <a:spcPts val="200"/>
+              </a:spcBef>
+              <a:spcAft>
+                <a:spcPts val="200"/>
+              </a:spcAft>
+              <a:defRPr sz="2000"/>
+            </a:pPr>
+            <a:r>
+              <a:rPr sz="1300"/>
+              <a:t>Arama motoru = İnternet'te bilgi bulan program</a:t>
+            </a:r>
+          </a:p>
+          <a:p>
+            <a:pPr>
+              <a:lnSpc>
                 <a:spcPct val="90000"/>
               </a:lnSpc>
               <a:spcAft>
@@ -5972,9 +6020,95 @@
               </a:spcAft>
               <a:defRPr sz="2000"/>
             </a:pPr>
-            <a:r>
-              <a:rPr sz="1300"/>
-              <a:t>Arama motoru = İnternet'te bilgi bulan program</a:t>
+          </a:p>
+          <a:p>
+            <a:pPr>
+              <a:lnSpc>
+                <a:spcPct val="85000"/>
+              </a:lnSpc>
+              <a:spcBef>
+                <a:spcPts val="200"/>
+              </a:spcBef>
+              <a:spcAft>
+                <a:spcPts val="200"/>
+              </a:spcAft>
+              <a:defRPr sz="2000" b="1"/>
+            </a:pPr>
+            <a:r>
+              <a:rPr sz="1300"/>
+              <a:t>✅ Popüler Arama Motorları:</a:t>
+            </a:r>
+          </a:p>
+          <a:p>
+            <a:pPr lvl="1">
+              <a:lnSpc>
+                <a:spcPct val="85000"/>
+              </a:lnSpc>
+              <a:spcBef>
+                <a:spcPts val="200"/>
+              </a:spcBef>
+              <a:spcAft>
+                <a:spcPts val="200"/>
+              </a:spcAft>
+              <a:defRPr sz="1800"/>
+            </a:pPr>
+            <a:r>
+              <a:rPr sz="1300"/>
+              <a:t>    • Google 🔍 (En popüler)</a:t>
+            </a:r>
+          </a:p>
+          <a:p>
+            <a:pPr lvl="1">
+              <a:lnSpc>
+                <a:spcPct val="85000"/>
+              </a:lnSpc>
+              <a:spcBef>
+                <a:spcPts val="200"/>
+              </a:spcBef>
+              <a:spcAft>
+                <a:spcPts val="200"/>
+              </a:spcAft>
+              <a:defRPr sz="1800"/>
+            </a:pPr>
+            <a:r>
+              <a:rPr sz="1300"/>
+              <a:t>    • Bing (Microsoft)</a:t>
+            </a:r>
+          </a:p>
+          <a:p>
+            <a:pPr lvl="1">
+              <a:lnSpc>
+                <a:spcPct val="85000"/>
+              </a:lnSpc>
+              <a:spcBef>
+                <a:spcPts val="200"/>
+              </a:spcBef>
+              <a:spcAft>
+                <a:spcPts val="200"/>
+              </a:spcAft>
+              <a:defRPr sz="1800"/>
+            </a:pPr>
+            <a:r>
+              <a:rPr sz="1300"/>
+              <a:t>    • Yandex</a:t>
+            </a:r>
+          </a:p>
+          <a:p>
+            <a:pPr lvl="1">
+              <a:lnSpc>
+                <a:spcPct val="85000"/>
+              </a:lnSpc>
+              <a:spcBef>
+                <a:spcPts val="200"/>
+              </a:spcBef>
+              <a:spcAft>
+                <a:spcPts val="200"/>
+              </a:spcAft>
+              <a:defRPr sz="1800"/>
+            </a:pPr>
+            <a:r>
+              <a:rPr sz="1300"/>
+              <a:t>    • DuckDuckGo (Gizlilik odaklı)</a:t>
             </a:r>
           </a:p>
           <a:p>
@@ -5991,305 +6125,255 @@
           <a:p>
             <a:pPr>
               <a:lnSpc>
+                <a:spcPct val="85000"/>
+              </a:lnSpc>
+              <a:spcBef>
+                <a:spcPts val="200"/>
+              </a:spcBef>
+              <a:spcAft>
+                <a:spcPts val="200"/>
+              </a:spcAft>
+              <a:defRPr sz="2000" b="1"/>
+            </a:pPr>
+            <a:r>
+              <a:rPr sz="1300"/>
+              <a:t>📌 Arama Motoru Nasıl Çalışır?</a:t>
+            </a:r>
+          </a:p>
+          <a:p>
+            <a:pPr lvl="1">
+              <a:lnSpc>
+                <a:spcPct val="85000"/>
+              </a:lnSpc>
+              <a:spcBef>
+                <a:spcPts val="200"/>
+              </a:spcBef>
+              <a:spcAft>
+                <a:spcPts val="200"/>
+              </a:spcAft>
+              <a:defRPr sz="1800"/>
+            </a:pPr>
+            <a:r>
+              <a:rPr sz="1300"/>
+              <a:t>    • Milyarlarca web sayfasını tarar</a:t>
+            </a:r>
+          </a:p>
+          <a:p>
+            <a:pPr lvl="1">
+              <a:lnSpc>
+                <a:spcPct val="85000"/>
+              </a:lnSpc>
+              <a:spcBef>
+                <a:spcPts val="200"/>
+              </a:spcBef>
+              <a:spcAft>
+                <a:spcPts val="200"/>
+              </a:spcAft>
+              <a:defRPr sz="1800"/>
+            </a:pPr>
+            <a:r>
+              <a:rPr sz="1300"/>
+              <a:t>    • İçerikleri indexler (kataloglar)</a:t>
+            </a:r>
+          </a:p>
+          <a:p>
+            <a:pPr lvl="1">
+              <a:lnSpc>
+                <a:spcPct val="85000"/>
+              </a:lnSpc>
+              <a:spcBef>
+                <a:spcPts val="200"/>
+              </a:spcBef>
+              <a:spcAft>
+                <a:spcPts val="200"/>
+              </a:spcAft>
+              <a:defRPr sz="1800"/>
+            </a:pPr>
+            <a:r>
+              <a:rPr sz="1300"/>
+              <a:t>    • Arama yaptığında en uygun sonuçları gösterir</a:t>
+            </a:r>
+          </a:p>
+          <a:p>
+            <a:pPr>
+              <a:lnSpc>
                 <a:spcPct val="90000"/>
               </a:lnSpc>
               <a:spcAft>
                 <a:spcPts val="300"/>
               </a:spcAft>
+              <a:defRPr sz="2000"/>
+            </a:pPr>
+          </a:p>
+          <a:p>
+            <a:pPr>
+              <a:lnSpc>
+                <a:spcPct val="85000"/>
+              </a:lnSpc>
+              <a:spcBef>
+                <a:spcPts val="200"/>
+              </a:spcBef>
+              <a:spcAft>
+                <a:spcPts val="200"/>
+              </a:spcAft>
               <a:defRPr sz="2000" b="1"/>
             </a:pPr>
             <a:r>
               <a:rPr sz="1300"/>
-              <a:t>✅ Popüler Arama Motorları:</a:t>
-            </a:r>
-          </a:p>
-          <a:p>
-            <a:pPr lvl="1">
+              <a:t>💡 Etkili Arama İpuçları:</a:t>
+            </a:r>
+          </a:p>
+          <a:p>
+            <a:pPr>
               <a:lnSpc>
                 <a:spcPct val="90000"/>
               </a:lnSpc>
               <a:spcAft>
                 <a:spcPts val="300"/>
               </a:spcAft>
-              <a:defRPr sz="1800"/>
-            </a:pPr>
-            <a:r>
-              <a:rPr sz="1300"/>
-              <a:t>    • Google 🔍 (En popüler)</a:t>
-            </a:r>
-          </a:p>
-          <a:p>
-            <a:pPr lvl="1">
+              <a:defRPr sz="2000"/>
+            </a:pPr>
+          </a:p>
+          <a:p>
+            <a:pPr>
+              <a:lnSpc>
+                <a:spcPct val="85000"/>
+              </a:lnSpc>
+              <a:spcBef>
+                <a:spcPts val="200"/>
+              </a:spcBef>
+              <a:spcAft>
+                <a:spcPts val="200"/>
+              </a:spcAft>
+              <a:defRPr sz="2000" b="1"/>
+            </a:pPr>
+            <a:r>
+              <a:rPr sz="1300"/>
+              <a:t>✅ Doğru Kelimeler Kullan:</a:t>
+            </a:r>
+          </a:p>
+          <a:p>
+            <a:pPr lvl="1">
+              <a:lnSpc>
+                <a:spcPct val="85000"/>
+              </a:lnSpc>
+              <a:spcBef>
+                <a:spcPts val="200"/>
+              </a:spcBef>
+              <a:spcAft>
+                <a:spcPts val="200"/>
+              </a:spcAft>
+              <a:defRPr sz="1800"/>
+            </a:pPr>
+            <a:r>
+              <a:rPr sz="1300"/>
+              <a:t>    • Kısa ve net</a:t>
+            </a:r>
+          </a:p>
+          <a:p>
+            <a:pPr lvl="1">
+              <a:lnSpc>
+                <a:spcPct val="85000"/>
+              </a:lnSpc>
+              <a:spcBef>
+                <a:spcPts val="200"/>
+              </a:spcBef>
+              <a:spcAft>
+                <a:spcPts val="200"/>
+              </a:spcAft>
+              <a:defRPr sz="1800"/>
+            </a:pPr>
+            <a:r>
+              <a:rPr sz="1300"/>
+              <a:t>    • 'Ankara'nın başkenti' yerine 'Ankara başkent'</a:t>
+            </a:r>
+          </a:p>
+          <a:p>
+            <a:pPr>
               <a:lnSpc>
                 <a:spcPct val="90000"/>
               </a:lnSpc>
               <a:spcAft>
                 <a:spcPts val="300"/>
               </a:spcAft>
-              <a:defRPr sz="1800"/>
-            </a:pPr>
-            <a:r>
-              <a:rPr sz="1300"/>
-              <a:t>    • Bing (Microsoft)</a:t>
-            </a:r>
-          </a:p>
-          <a:p>
-            <a:pPr lvl="1">
+              <a:defRPr sz="2000"/>
+            </a:pPr>
+          </a:p>
+          <a:p>
+            <a:pPr>
+              <a:lnSpc>
+                <a:spcPct val="85000"/>
+              </a:lnSpc>
+              <a:spcBef>
+                <a:spcPts val="200"/>
+              </a:spcBef>
+              <a:spcAft>
+                <a:spcPts val="200"/>
+              </a:spcAft>
+              <a:defRPr sz="2000" b="1"/>
+            </a:pPr>
+            <a:r>
+              <a:rPr sz="1300"/>
+              <a:t>✅ Tırnak İşareti Kullan:</a:t>
+            </a:r>
+          </a:p>
+          <a:p>
+            <a:pPr lvl="1">
+              <a:lnSpc>
+                <a:spcPct val="85000"/>
+              </a:lnSpc>
+              <a:spcBef>
+                <a:spcPts val="200"/>
+              </a:spcBef>
+              <a:spcAft>
+                <a:spcPts val="200"/>
+              </a:spcAft>
+              <a:defRPr sz="1800"/>
+            </a:pPr>
+            <a:r>
+              <a:rPr sz="1300"/>
+              <a:t>    • "Atatürk'ün hayatı" → Tam cümleyi arar</a:t>
+            </a:r>
+          </a:p>
+          <a:p>
+            <a:pPr>
               <a:lnSpc>
                 <a:spcPct val="90000"/>
               </a:lnSpc>
               <a:spcAft>
                 <a:spcPts val="300"/>
               </a:spcAft>
-              <a:defRPr sz="1800"/>
-            </a:pPr>
-            <a:r>
-              <a:rPr sz="1300"/>
-              <a:t>    • Yandex</a:t>
-            </a:r>
-          </a:p>
-          <a:p>
-            <a:pPr lvl="1">
-              <a:lnSpc>
-                <a:spcPct val="90000"/>
-              </a:lnSpc>
-              <a:spcAft>
-                <a:spcPts val="300"/>
-              </a:spcAft>
-              <a:defRPr sz="1800"/>
-            </a:pPr>
-            <a:r>
-              <a:rPr sz="1300"/>
-              <a:t>    • DuckDuckGo (Gizlilik odaklı)</a:t>
-            </a:r>
-          </a:p>
-          <a:p>
-            <a:pPr>
-              <a:lnSpc>
-                <a:spcPct val="90000"/>
-              </a:lnSpc>
-              <a:spcAft>
-                <a:spcPts val="300"/>
-              </a:spcAft>
-              <a:defRPr sz="2000"/>
-            </a:pPr>
-          </a:p>
-          <a:p>
-            <a:pPr>
-              <a:lnSpc>
-                <a:spcPct val="90000"/>
-              </a:lnSpc>
-              <a:spcAft>
-                <a:spcPts val="300"/>
+              <a:defRPr sz="2000"/>
+            </a:pPr>
+          </a:p>
+          <a:p>
+            <a:pPr>
+              <a:lnSpc>
+                <a:spcPct val="85000"/>
+              </a:lnSpc>
+              <a:spcBef>
+                <a:spcPts val="200"/>
+              </a:spcBef>
+              <a:spcAft>
+                <a:spcPts val="200"/>
               </a:spcAft>
               <a:defRPr sz="2000" b="1"/>
             </a:pPr>
             <a:r>
               <a:rPr sz="1300"/>
-              <a:t>📌 Arama Motoru Nasıl Çalışır?</a:t>
-            </a:r>
-          </a:p>
-          <a:p>
-            <a:pPr lvl="1">
-              <a:lnSpc>
-                <a:spcPct val="90000"/>
-              </a:lnSpc>
-              <a:spcAft>
-                <a:spcPts val="300"/>
-              </a:spcAft>
-              <a:defRPr sz="1800"/>
-            </a:pPr>
-            <a:r>
-              <a:rPr sz="1300"/>
-              <a:t>    • Milyarlarca web sayfasını tarar</a:t>
-            </a:r>
-          </a:p>
-          <a:p>
-            <a:pPr lvl="1">
-              <a:lnSpc>
-                <a:spcPct val="90000"/>
-              </a:lnSpc>
-              <a:spcAft>
-                <a:spcPts val="300"/>
-              </a:spcAft>
-              <a:defRPr sz="1800"/>
-            </a:pPr>
-            <a:r>
-              <a:rPr sz="1300"/>
-              <a:t>    • İçerikleri indexler (kataloglar)</a:t>
-            </a:r>
-          </a:p>
-          <a:p>
-            <a:pPr lvl="1">
-              <a:lnSpc>
-                <a:spcPct val="90000"/>
-              </a:lnSpc>
-              <a:spcAft>
-                <a:spcPts val="300"/>
-              </a:spcAft>
-              <a:defRPr sz="1800"/>
-            </a:pPr>
-            <a:r>
-              <a:rPr sz="1300"/>
-              <a:t>    • Arama yaptığında en uygun sonuçları gösterir</a:t>
-            </a:r>
-          </a:p>
-          <a:p>
-            <a:pPr>
-              <a:lnSpc>
-                <a:spcPct val="90000"/>
-              </a:lnSpc>
-              <a:spcAft>
-                <a:spcPts val="300"/>
-              </a:spcAft>
-              <a:defRPr sz="2000"/>
-            </a:pPr>
-          </a:p>
-          <a:p>
-            <a:pPr>
-              <a:lnSpc>
-                <a:spcPct val="90000"/>
-              </a:lnSpc>
-              <a:spcAft>
-                <a:spcPts val="300"/>
-              </a:spcAft>
-              <a:defRPr sz="2000" b="1"/>
-            </a:pPr>
-            <a:r>
-              <a:rPr sz="1300"/>
-              <a:t>💡 Etkili Arama İpuçları:</a:t>
-            </a:r>
-          </a:p>
-          <a:p>
-            <a:pPr>
-              <a:lnSpc>
-                <a:spcPct val="90000"/>
-              </a:lnSpc>
-              <a:spcAft>
-                <a:spcPts val="300"/>
-              </a:spcAft>
-              <a:defRPr sz="2000"/>
-            </a:pPr>
-          </a:p>
-          <a:p>
-            <a:pPr>
-              <a:lnSpc>
-                <a:spcPct val="90000"/>
-              </a:lnSpc>
-              <a:spcAft>
-                <a:spcPts val="300"/>
-              </a:spcAft>
-              <a:defRPr sz="2000" b="1"/>
-            </a:pPr>
-            <a:r>
-              <a:rPr sz="1300"/>
-              <a:t>✅ Doğru Kelimeler Kullan:</a:t>
-            </a:r>
-          </a:p>
-          <a:p>
-            <a:pPr lvl="1">
-              <a:lnSpc>
-                <a:spcPct val="90000"/>
-              </a:lnSpc>
-              <a:spcAft>
-                <a:spcPts val="300"/>
-              </a:spcAft>
-              <a:defRPr sz="1800"/>
-            </a:pPr>
-            <a:r>
-              <a:rPr sz="1300"/>
-              <a:t>    • Kısa ve net</a:t>
-            </a:r>
-          </a:p>
-          <a:p>
-            <a:pPr lvl="1">
-              <a:lnSpc>
-                <a:spcPct val="90000"/>
-              </a:lnSpc>
-              <a:spcAft>
-                <a:spcPts val="300"/>
-              </a:spcAft>
-              <a:defRPr sz="1800"/>
-            </a:pPr>
-            <a:r>
-              <a:rPr sz="1300"/>
-              <a:t>    • 'Ankara'nın başkenti' yerine 'Ankara başkent'</a:t>
-            </a:r>
-          </a:p>
-          <a:p>
-            <a:pPr>
-              <a:lnSpc>
-                <a:spcPct val="90000"/>
-              </a:lnSpc>
-              <a:spcAft>
-                <a:spcPts val="300"/>
-              </a:spcAft>
-              <a:defRPr sz="2000"/>
-            </a:pPr>
-          </a:p>
-          <a:p>
-            <a:pPr>
-              <a:lnSpc>
-                <a:spcPct val="90000"/>
-              </a:lnSpc>
-              <a:spcAft>
-                <a:spcPts val="300"/>
-              </a:spcAft>
-              <a:defRPr sz="2000" b="1"/>
-            </a:pPr>
-            <a:r>
-              <a:rPr sz="1300"/>
-              <a:t>✅ Tırnak İşareti Kullan:</a:t>
-            </a:r>
-          </a:p>
-          <a:p>
-            <a:pPr lvl="1">
-              <a:lnSpc>
-                <a:spcPct val="90000"/>
-              </a:lnSpc>
-              <a:spcAft>
-                <a:spcPts val="300"/>
-              </a:spcAft>
-              <a:defRPr sz="1800"/>
-            </a:pPr>
-            <a:r>
-              <a:rPr sz="1300"/>
-              <a:t>    • "Atatürk'ün hayatı" → Tam cümleyi arar</a:t>
-            </a:r>
-          </a:p>
-          <a:p>
-            <a:pPr>
-              <a:lnSpc>
-                <a:spcPct val="90000"/>
-              </a:lnSpc>
-              <a:spcAft>
-                <a:spcPts val="300"/>
-              </a:spcAft>
-              <a:defRPr sz="2000"/>
-            </a:pPr>
-          </a:p>
-          <a:p>
-            <a:pPr>
-              <a:lnSpc>
-                <a:spcPct val="90000"/>
-              </a:lnSpc>
-              <a:spcAft>
-                <a:spcPts val="300"/>
-              </a:spcAft>
-              <a:defRPr sz="2000" b="1"/>
-            </a:pPr>
-            <a:r>
-              <a:rPr sz="1300"/>
               <a:t>✅ Eksi İşareti:</a:t>
             </a:r>
           </a:p>
           <a:p>
             <a:pPr lvl="1">
               <a:lnSpc>
-                <a:spcPct val="90000"/>
-              </a:lnSpc>
-              <a:spcAft>
-                <a:spcPts val="300"/>
+                <a:spcPct val="85000"/>
+              </a:lnSpc>
+              <a:spcBef>
+                <a:spcPts val="200"/>
+              </a:spcBef>
+              <a:spcAft>
+                <a:spcPts val="200"/>
               </a:spcAft>
               <a:defRPr sz="1800"/>
             </a:pPr>
@@ -6330,10 +6414,19 @@
         </p:nvSpPr>
         <p:spPr/>
         <p:txBody>
-          <a:bodyPr wrap="square"/>
+          <a:bodyPr wrap="square" tIns="25400" bIns="25400" lIns="63500" rIns="63500"/>
           <a:lstStyle/>
           <a:p>
             <a:pPr>
+              <a:lnSpc>
+                <a:spcPct val="85000"/>
+              </a:lnSpc>
+              <a:spcBef>
+                <a:spcPts val="200"/>
+              </a:spcBef>
+              <a:spcAft>
+                <a:spcPts val="200"/>
+              </a:spcAft>
               <a:defRPr sz="4000" b="1">
                 <a:solidFill>
                   <a:srgbClr val="667EEA"/>
@@ -6341,6 +6434,7 @@
               </a:defRPr>
             </a:pPr>
             <a:r>
+              <a:rPr/>
               <a:t>✅ Güvenilir Kaynak Nasıl Bulunur?</a:t>
             </a:r>
           </a:p>
@@ -6380,7 +6474,7 @@
           <a:noFill/>
         </p:spPr>
         <p:txBody>
-          <a:bodyPr wrap="square">
+          <a:bodyPr wrap="square" tIns="25400" bIns="25400" lIns="63500" rIns="63500">
             <a:spAutoFit/>
           </a:bodyPr>
           <a:lstStyle/>
@@ -6397,10 +6491,13 @@
           <a:p>
             <a:pPr>
               <a:lnSpc>
-                <a:spcPct val="90000"/>
-              </a:lnSpc>
-              <a:spcAft>
-                <a:spcPts val="300"/>
+                <a:spcPct val="85000"/>
+              </a:lnSpc>
+              <a:spcBef>
+                <a:spcPts val="200"/>
+              </a:spcBef>
+              <a:spcAft>
+                <a:spcPts val="200"/>
               </a:spcAft>
               <a:defRPr sz="2000"/>
             </a:pPr>
@@ -6423,10 +6520,13 @@
           <a:p>
             <a:pPr>
               <a:lnSpc>
-                <a:spcPct val="90000"/>
-              </a:lnSpc>
-              <a:spcAft>
-                <a:spcPts val="300"/>
+                <a:spcPct val="85000"/>
+              </a:lnSpc>
+              <a:spcBef>
+                <a:spcPts val="200"/>
+              </a:spcBef>
+              <a:spcAft>
+                <a:spcPts val="200"/>
               </a:spcAft>
               <a:defRPr sz="2000" b="1"/>
             </a:pPr>
@@ -6449,10 +6549,13 @@
           <a:p>
             <a:pPr>
               <a:lnSpc>
-                <a:spcPct val="90000"/>
-              </a:lnSpc>
-              <a:spcAft>
-                <a:spcPts val="300"/>
+                <a:spcPct val="85000"/>
+              </a:lnSpc>
+              <a:spcBef>
+                <a:spcPts val="200"/>
+              </a:spcBef>
+              <a:spcAft>
+                <a:spcPts val="200"/>
               </a:spcAft>
               <a:defRPr sz="2000"/>
             </a:pPr>
@@ -6464,10 +6567,13 @@
           <a:p>
             <a:pPr lvl="1">
               <a:lnSpc>
-                <a:spcPct val="90000"/>
-              </a:lnSpc>
-              <a:spcAft>
-                <a:spcPts val="300"/>
+                <a:spcPct val="85000"/>
+              </a:lnSpc>
+              <a:spcBef>
+                <a:spcPts val="200"/>
+              </a:spcBef>
+              <a:spcAft>
+                <a:spcPts val="200"/>
               </a:spcAft>
               <a:defRPr sz="1800"/>
             </a:pPr>
@@ -6479,10 +6585,13 @@
           <a:p>
             <a:pPr lvl="1">
               <a:lnSpc>
-                <a:spcPct val="90000"/>
-              </a:lnSpc>
-              <a:spcAft>
-                <a:spcPts val="300"/>
+                <a:spcPct val="85000"/>
+              </a:lnSpc>
+              <a:spcBef>
+                <a:spcPts val="200"/>
+              </a:spcBef>
+              <a:spcAft>
+                <a:spcPts val="200"/>
               </a:spcAft>
               <a:defRPr sz="1800"/>
             </a:pPr>
@@ -6494,10 +6603,13 @@
           <a:p>
             <a:pPr lvl="1">
               <a:lnSpc>
-                <a:spcPct val="90000"/>
-              </a:lnSpc>
-              <a:spcAft>
-                <a:spcPts val="300"/>
+                <a:spcPct val="85000"/>
+              </a:lnSpc>
+              <a:spcBef>
+                <a:spcPts val="200"/>
+              </a:spcBef>
+              <a:spcAft>
+                <a:spcPts val="200"/>
               </a:spcAft>
               <a:defRPr sz="1800"/>
             </a:pPr>
@@ -6520,10 +6632,13 @@
           <a:p>
             <a:pPr>
               <a:lnSpc>
-                <a:spcPct val="90000"/>
-              </a:lnSpc>
-              <a:spcAft>
-                <a:spcPts val="300"/>
+                <a:spcPct val="85000"/>
+              </a:lnSpc>
+              <a:spcBef>
+                <a:spcPts val="200"/>
+              </a:spcBef>
+              <a:spcAft>
+                <a:spcPts val="200"/>
               </a:spcAft>
               <a:defRPr sz="2000"/>
             </a:pPr>
@@ -6535,10 +6650,13 @@
           <a:p>
             <a:pPr lvl="1">
               <a:lnSpc>
-                <a:spcPct val="90000"/>
-              </a:lnSpc>
-              <a:spcAft>
-                <a:spcPts val="300"/>
+                <a:spcPct val="85000"/>
+              </a:lnSpc>
+              <a:spcBef>
+                <a:spcPts val="200"/>
+              </a:spcBef>
+              <a:spcAft>
+                <a:spcPts val="200"/>
               </a:spcAft>
               <a:defRPr sz="1800"/>
             </a:pPr>
@@ -6550,10 +6668,13 @@
           <a:p>
             <a:pPr lvl="1">
               <a:lnSpc>
-                <a:spcPct val="90000"/>
-              </a:lnSpc>
-              <a:spcAft>
-                <a:spcPts val="300"/>
+                <a:spcPct val="85000"/>
+              </a:lnSpc>
+              <a:spcBef>
+                <a:spcPts val="200"/>
+              </a:spcBef>
+              <a:spcAft>
+                <a:spcPts val="200"/>
               </a:spcAft>
               <a:defRPr sz="1800"/>
             </a:pPr>
@@ -6576,10 +6697,13 @@
           <a:p>
             <a:pPr>
               <a:lnSpc>
-                <a:spcPct val="90000"/>
-              </a:lnSpc>
-              <a:spcAft>
-                <a:spcPts val="300"/>
+                <a:spcPct val="85000"/>
+              </a:lnSpc>
+              <a:spcBef>
+                <a:spcPts val="200"/>
+              </a:spcBef>
+              <a:spcAft>
+                <a:spcPts val="200"/>
               </a:spcAft>
               <a:defRPr sz="2000"/>
             </a:pPr>
@@ -6591,10 +6715,13 @@
           <a:p>
             <a:pPr lvl="1">
               <a:lnSpc>
-                <a:spcPct val="90000"/>
-              </a:lnSpc>
-              <a:spcAft>
-                <a:spcPts val="300"/>
+                <a:spcPct val="85000"/>
+              </a:lnSpc>
+              <a:spcBef>
+                <a:spcPts val="200"/>
+              </a:spcBef>
+              <a:spcAft>
+                <a:spcPts val="200"/>
               </a:spcAft>
               <a:defRPr sz="1800"/>
             </a:pPr>
@@ -6606,10 +6733,13 @@
           <a:p>
             <a:pPr lvl="1">
               <a:lnSpc>
-                <a:spcPct val="90000"/>
-              </a:lnSpc>
-              <a:spcAft>
-                <a:spcPts val="300"/>
+                <a:spcPct val="85000"/>
+              </a:lnSpc>
+              <a:spcBef>
+                <a:spcPts val="200"/>
+              </a:spcBef>
+              <a:spcAft>
+                <a:spcPts val="200"/>
               </a:spcAft>
               <a:defRPr sz="1800"/>
             </a:pPr>
@@ -6632,10 +6762,13 @@
           <a:p>
             <a:pPr>
               <a:lnSpc>
-                <a:spcPct val="90000"/>
-              </a:lnSpc>
-              <a:spcAft>
-                <a:spcPts val="300"/>
+                <a:spcPct val="85000"/>
+              </a:lnSpc>
+              <a:spcBef>
+                <a:spcPts val="200"/>
+              </a:spcBef>
+              <a:spcAft>
+                <a:spcPts val="200"/>
               </a:spcAft>
               <a:defRPr sz="2000"/>
             </a:pPr>
@@ -6647,10 +6780,13 @@
           <a:p>
             <a:pPr lvl="1">
               <a:lnSpc>
-                <a:spcPct val="90000"/>
-              </a:lnSpc>
-              <a:spcAft>
-                <a:spcPts val="300"/>
+                <a:spcPct val="85000"/>
+              </a:lnSpc>
+              <a:spcBef>
+                <a:spcPts val="200"/>
+              </a:spcBef>
+              <a:spcAft>
+                <a:spcPts val="200"/>
               </a:spcAft>
               <a:defRPr sz="1800"/>
             </a:pPr>
@@ -6673,10 +6809,13 @@
           <a:p>
             <a:pPr>
               <a:lnSpc>
-                <a:spcPct val="90000"/>
-              </a:lnSpc>
-              <a:spcAft>
-                <a:spcPts val="300"/>
+                <a:spcPct val="85000"/>
+              </a:lnSpc>
+              <a:spcBef>
+                <a:spcPts val="200"/>
+              </a:spcBef>
+              <a:spcAft>
+                <a:spcPts val="200"/>
               </a:spcAft>
               <a:defRPr sz="2000" b="1"/>
             </a:pPr>
@@ -6688,10 +6827,13 @@
           <a:p>
             <a:pPr lvl="1">
               <a:lnSpc>
-                <a:spcPct val="90000"/>
-              </a:lnSpc>
-              <a:spcAft>
-                <a:spcPts val="300"/>
+                <a:spcPct val="85000"/>
+              </a:lnSpc>
+              <a:spcBef>
+                <a:spcPts val="200"/>
+              </a:spcBef>
+              <a:spcAft>
+                <a:spcPts val="200"/>
               </a:spcAft>
               <a:defRPr sz="1800"/>
             </a:pPr>
@@ -6703,10 +6845,13 @@
           <a:p>
             <a:pPr lvl="1">
               <a:lnSpc>
-                <a:spcPct val="90000"/>
-              </a:lnSpc>
-              <a:spcAft>
-                <a:spcPts val="300"/>
+                <a:spcPct val="85000"/>
+              </a:lnSpc>
+              <a:spcBef>
+                <a:spcPts val="200"/>
+              </a:spcBef>
+              <a:spcAft>
+                <a:spcPts val="200"/>
               </a:spcAft>
               <a:defRPr sz="1800"/>
             </a:pPr>
@@ -6729,10 +6874,13 @@
           <a:p>
             <a:pPr>
               <a:lnSpc>
-                <a:spcPct val="90000"/>
-              </a:lnSpc>
-              <a:spcAft>
-                <a:spcPts val="300"/>
+                <a:spcPct val="85000"/>
+              </a:lnSpc>
+              <a:spcBef>
+                <a:spcPts val="200"/>
+              </a:spcBef>
+              <a:spcAft>
+                <a:spcPts val="200"/>
               </a:spcAft>
               <a:defRPr sz="2000"/>
             </a:pPr>
@@ -6744,10 +6892,13 @@
           <a:p>
             <a:pPr>
               <a:lnSpc>
-                <a:spcPct val="90000"/>
-              </a:lnSpc>
-              <a:spcAft>
-                <a:spcPts val="300"/>
+                <a:spcPct val="85000"/>
+              </a:lnSpc>
+              <a:spcBef>
+                <a:spcPts val="200"/>
+              </a:spcBef>
+              <a:spcAft>
+                <a:spcPts val="200"/>
               </a:spcAft>
               <a:defRPr sz="2000"/>
             </a:pPr>
@@ -6788,10 +6939,19 @@
         </p:nvSpPr>
         <p:spPr/>
         <p:txBody>
-          <a:bodyPr wrap="square"/>
+          <a:bodyPr wrap="square" tIns="25400" bIns="25400" lIns="63500" rIns="63500"/>
           <a:lstStyle/>
           <a:p>
             <a:pPr>
+              <a:lnSpc>
+                <a:spcPct val="85000"/>
+              </a:lnSpc>
+              <a:spcBef>
+                <a:spcPts val="200"/>
+              </a:spcBef>
+              <a:spcAft>
+                <a:spcPts val="200"/>
+              </a:spcAft>
               <a:defRPr sz="4000" b="1">
                 <a:solidFill>
                   <a:srgbClr val="667EEA"/>
@@ -6799,6 +6959,7 @@
               </a:defRPr>
             </a:pPr>
             <a:r>
+              <a:rPr/>
               <a:t>📧 E-posta Kullanımı</a:t>
             </a:r>
           </a:p>
@@ -6838,7 +6999,7 @@
           <a:noFill/>
         </p:spPr>
         <p:txBody>
-          <a:bodyPr wrap="square">
+          <a:bodyPr wrap="square" tIns="25400" bIns="25400" lIns="63500" rIns="63500">
             <a:spAutoFit/>
           </a:bodyPr>
           <a:lstStyle/>
@@ -6855,6 +7016,24 @@
           <a:p>
             <a:pPr>
               <a:lnSpc>
+                <a:spcPct val="85000"/>
+              </a:lnSpc>
+              <a:spcBef>
+                <a:spcPts val="200"/>
+              </a:spcBef>
+              <a:spcAft>
+                <a:spcPts val="200"/>
+              </a:spcAft>
+              <a:defRPr sz="2000"/>
+            </a:pPr>
+            <a:r>
+              <a:rPr sz="1300"/>
+              <a:t>E-posta = Elektronik Posta (Email)</a:t>
+            </a:r>
+          </a:p>
+          <a:p>
+            <a:pPr>
+              <a:lnSpc>
                 <a:spcPct val="90000"/>
               </a:lnSpc>
               <a:spcAft>
@@ -6862,9 +7041,77 @@
               </a:spcAft>
               <a:defRPr sz="2000"/>
             </a:pPr>
-            <a:r>
-              <a:rPr sz="1300"/>
-              <a:t>E-posta = Elektronik Posta (Email)</a:t>
+          </a:p>
+          <a:p>
+            <a:pPr>
+              <a:lnSpc>
+                <a:spcPct val="85000"/>
+              </a:lnSpc>
+              <a:spcBef>
+                <a:spcPts val="200"/>
+              </a:spcBef>
+              <a:spcAft>
+                <a:spcPts val="200"/>
+              </a:spcAft>
+              <a:defRPr sz="2000" b="1"/>
+            </a:pPr>
+            <a:r>
+              <a:rPr sz="1300"/>
+              <a:t>✅ E-posta Sağlayıcıları:</a:t>
+            </a:r>
+          </a:p>
+          <a:p>
+            <a:pPr lvl="1">
+              <a:lnSpc>
+                <a:spcPct val="85000"/>
+              </a:lnSpc>
+              <a:spcBef>
+                <a:spcPts val="200"/>
+              </a:spcBef>
+              <a:spcAft>
+                <a:spcPts val="200"/>
+              </a:spcAft>
+              <a:defRPr sz="1800"/>
+            </a:pPr>
+            <a:r>
+              <a:rPr sz="1300"/>
+              <a:t>    • Gmail (Google)</a:t>
+            </a:r>
+          </a:p>
+          <a:p>
+            <a:pPr lvl="1">
+              <a:lnSpc>
+                <a:spcPct val="85000"/>
+              </a:lnSpc>
+              <a:spcBef>
+                <a:spcPts val="200"/>
+              </a:spcBef>
+              <a:spcAft>
+                <a:spcPts val="200"/>
+              </a:spcAft>
+              <a:defRPr sz="1800"/>
+            </a:pPr>
+            <a:r>
+              <a:rPr sz="1300"/>
+              <a:t>    • Outlook (Microsoft)</a:t>
+            </a:r>
+          </a:p>
+          <a:p>
+            <a:pPr lvl="1">
+              <a:lnSpc>
+                <a:spcPct val="85000"/>
+              </a:lnSpc>
+              <a:spcBef>
+                <a:spcPts val="200"/>
+              </a:spcBef>
+              <a:spcAft>
+                <a:spcPts val="200"/>
+              </a:spcAft>
+              <a:defRPr sz="1800"/>
+            </a:pPr>
+            <a:r>
+              <a:rPr sz="1300"/>
+              <a:t>    • Yandex Mail</a:t>
             </a:r>
           </a:p>
           <a:p>
@@ -6881,354 +7128,334 @@
           <a:p>
             <a:pPr>
               <a:lnSpc>
+                <a:spcPct val="85000"/>
+              </a:lnSpc>
+              <a:spcBef>
+                <a:spcPts val="200"/>
+              </a:spcBef>
+              <a:spcAft>
+                <a:spcPts val="200"/>
+              </a:spcAft>
+              <a:defRPr sz="2000" b="1"/>
+            </a:pPr>
+            <a:r>
+              <a:rPr sz="1300"/>
+              <a:t>📌 E-posta Adresi Yapısı:</a:t>
+            </a:r>
+          </a:p>
+          <a:p>
+            <a:pPr>
+              <a:lnSpc>
+                <a:spcPct val="85000"/>
+              </a:lnSpc>
+              <a:spcBef>
+                <a:spcPts val="200"/>
+              </a:spcBef>
+              <a:spcAft>
+                <a:spcPts val="200"/>
+              </a:spcAft>
+              <a:defRPr sz="2000"/>
+            </a:pPr>
+            <a:r>
+              <a:rPr sz="1300"/>
+              <a:t>kullaniciadi@gmail.com</a:t>
+            </a:r>
+          </a:p>
+          <a:p>
+            <a:pPr lvl="1">
+              <a:lnSpc>
+                <a:spcPct val="85000"/>
+              </a:lnSpc>
+              <a:spcBef>
+                <a:spcPts val="200"/>
+              </a:spcBef>
+              <a:spcAft>
+                <a:spcPts val="200"/>
+              </a:spcAft>
+              <a:defRPr sz="1800"/>
+            </a:pPr>
+            <a:r>
+              <a:rPr sz="1300"/>
+              <a:t>    • kullaniciadi = Sizin seçtiğiniz isim</a:t>
+            </a:r>
+          </a:p>
+          <a:p>
+            <a:pPr lvl="1">
+              <a:lnSpc>
+                <a:spcPct val="85000"/>
+              </a:lnSpc>
+              <a:spcBef>
+                <a:spcPts val="200"/>
+              </a:spcBef>
+              <a:spcAft>
+                <a:spcPts val="200"/>
+              </a:spcAft>
+              <a:defRPr sz="1800"/>
+            </a:pPr>
+            <a:r>
+              <a:rPr sz="1300"/>
+              <a:t>    • @ = 'at' işareti (zorunlu)</a:t>
+            </a:r>
+          </a:p>
+          <a:p>
+            <a:pPr lvl="1">
+              <a:lnSpc>
+                <a:spcPct val="85000"/>
+              </a:lnSpc>
+              <a:spcBef>
+                <a:spcPts val="200"/>
+              </a:spcBef>
+              <a:spcAft>
+                <a:spcPts val="200"/>
+              </a:spcAft>
+              <a:defRPr sz="1800"/>
+            </a:pPr>
+            <a:r>
+              <a:rPr sz="1300"/>
+              <a:t>    • gmail.com = E-posta sağlayıcı</a:t>
+            </a:r>
+          </a:p>
+          <a:p>
+            <a:pPr>
+              <a:lnSpc>
                 <a:spcPct val="90000"/>
               </a:lnSpc>
               <a:spcAft>
                 <a:spcPts val="300"/>
               </a:spcAft>
+              <a:defRPr sz="2000"/>
+            </a:pPr>
+          </a:p>
+          <a:p>
+            <a:pPr>
+              <a:lnSpc>
+                <a:spcPct val="85000"/>
+              </a:lnSpc>
+              <a:spcBef>
+                <a:spcPts val="200"/>
+              </a:spcBef>
+              <a:spcAft>
+                <a:spcPts val="200"/>
+              </a:spcAft>
               <a:defRPr sz="2000" b="1"/>
             </a:pPr>
             <a:r>
               <a:rPr sz="1300"/>
-              <a:t>✅ E-posta Sağlayıcıları:</a:t>
-            </a:r>
-          </a:p>
-          <a:p>
-            <a:pPr lvl="1">
+              <a:t>✅ E-posta Gönderme:</a:t>
+            </a:r>
+          </a:p>
+          <a:p>
+            <a:pPr lvl="1">
+              <a:lnSpc>
+                <a:spcPct val="85000"/>
+              </a:lnSpc>
+              <a:spcBef>
+                <a:spcPts val="200"/>
+              </a:spcBef>
+              <a:spcAft>
+                <a:spcPts val="200"/>
+              </a:spcAft>
+              <a:defRPr sz="1800"/>
+            </a:pPr>
+            <a:r>
+              <a:rPr sz="1300"/>
+              <a:t>    • Alıcı: Kime gönderilecek?</a:t>
+            </a:r>
+          </a:p>
+          <a:p>
+            <a:pPr lvl="1">
+              <a:lnSpc>
+                <a:spcPct val="85000"/>
+              </a:lnSpc>
+              <a:spcBef>
+                <a:spcPts val="200"/>
+              </a:spcBef>
+              <a:spcAft>
+                <a:spcPts val="200"/>
+              </a:spcAft>
+              <a:defRPr sz="1800"/>
+            </a:pPr>
+            <a:r>
+              <a:rPr sz="1300"/>
+              <a:t>    • Konu: Ne hakkında?</a:t>
+            </a:r>
+          </a:p>
+          <a:p>
+            <a:pPr lvl="1">
+              <a:lnSpc>
+                <a:spcPct val="85000"/>
+              </a:lnSpc>
+              <a:spcBef>
+                <a:spcPts val="200"/>
+              </a:spcBef>
+              <a:spcAft>
+                <a:spcPts val="200"/>
+              </a:spcAft>
+              <a:defRPr sz="1800"/>
+            </a:pPr>
+            <a:r>
+              <a:rPr sz="1300"/>
+              <a:t>    • Mesaj: İçerik</a:t>
+            </a:r>
+          </a:p>
+          <a:p>
+            <a:pPr lvl="1">
+              <a:lnSpc>
+                <a:spcPct val="85000"/>
+              </a:lnSpc>
+              <a:spcBef>
+                <a:spcPts val="200"/>
+              </a:spcBef>
+              <a:spcAft>
+                <a:spcPts val="200"/>
+              </a:spcAft>
+              <a:defRPr sz="1800"/>
+            </a:pPr>
+            <a:r>
+              <a:rPr sz="1300"/>
+              <a:t>    • Ek: Dosya eklenebilir</a:t>
+            </a:r>
+          </a:p>
+          <a:p>
+            <a:pPr>
               <a:lnSpc>
                 <a:spcPct val="90000"/>
               </a:lnSpc>
               <a:spcAft>
                 <a:spcPts val="300"/>
               </a:spcAft>
-              <a:defRPr sz="1800"/>
-            </a:pPr>
-            <a:r>
-              <a:rPr sz="1300"/>
-              <a:t>    • Gmail (Google)</a:t>
-            </a:r>
-          </a:p>
-          <a:p>
-            <a:pPr lvl="1">
+              <a:defRPr sz="2000"/>
+            </a:pPr>
+          </a:p>
+          <a:p>
+            <a:pPr>
+              <a:lnSpc>
+                <a:spcPct val="85000"/>
+              </a:lnSpc>
+              <a:spcBef>
+                <a:spcPts val="200"/>
+              </a:spcBef>
+              <a:spcAft>
+                <a:spcPts val="200"/>
+              </a:spcAft>
+              <a:defRPr sz="2000" b="1"/>
+            </a:pPr>
+            <a:r>
+              <a:rPr sz="1300"/>
+              <a:t>💡 E-posta Etiği:</a:t>
+            </a:r>
+          </a:p>
+          <a:p>
+            <a:pPr lvl="1">
+              <a:lnSpc>
+                <a:spcPct val="85000"/>
+              </a:lnSpc>
+              <a:spcBef>
+                <a:spcPts val="200"/>
+              </a:spcBef>
+              <a:spcAft>
+                <a:spcPts val="200"/>
+              </a:spcAft>
+              <a:defRPr sz="1800"/>
+            </a:pPr>
+            <a:r>
+              <a:rPr sz="1300"/>
+              <a:t>    • Kibarca yaz</a:t>
+            </a:r>
+          </a:p>
+          <a:p>
+            <a:pPr lvl="1">
+              <a:lnSpc>
+                <a:spcPct val="85000"/>
+              </a:lnSpc>
+              <a:spcBef>
+                <a:spcPts val="200"/>
+              </a:spcBef>
+              <a:spcAft>
+                <a:spcPts val="200"/>
+              </a:spcAft>
+              <a:defRPr sz="1800"/>
+            </a:pPr>
+            <a:r>
+              <a:rPr sz="1300"/>
+              <a:t>    • Konuyu belirt</a:t>
+            </a:r>
+          </a:p>
+          <a:p>
+            <a:pPr lvl="1">
+              <a:lnSpc>
+                <a:spcPct val="85000"/>
+              </a:lnSpc>
+              <a:spcBef>
+                <a:spcPts val="200"/>
+              </a:spcBef>
+              <a:spcAft>
+                <a:spcPts val="200"/>
+              </a:spcAft>
+              <a:defRPr sz="1800"/>
+            </a:pPr>
+            <a:r>
+              <a:rPr sz="1300"/>
+              <a:t>    • İmza ekle</a:t>
+            </a:r>
+          </a:p>
+          <a:p>
+            <a:pPr lvl="1">
+              <a:lnSpc>
+                <a:spcPct val="85000"/>
+              </a:lnSpc>
+              <a:spcBef>
+                <a:spcPts val="200"/>
+              </a:spcBef>
+              <a:spcAft>
+                <a:spcPts val="200"/>
+              </a:spcAft>
+              <a:defRPr sz="1800"/>
+            </a:pPr>
+            <a:r>
+              <a:rPr sz="1300"/>
+              <a:t>    • Spam yapma (gereksiz mail gönderme)</a:t>
+            </a:r>
+          </a:p>
+          <a:p>
+            <a:pPr>
               <a:lnSpc>
                 <a:spcPct val="90000"/>
               </a:lnSpc>
               <a:spcAft>
                 <a:spcPts val="300"/>
               </a:spcAft>
-              <a:defRPr sz="1800"/>
-            </a:pPr>
-            <a:r>
-              <a:rPr sz="1300"/>
-              <a:t>    • Outlook (Microsoft)</a:t>
-            </a:r>
-          </a:p>
-          <a:p>
-            <a:pPr lvl="1">
-              <a:lnSpc>
-                <a:spcPct val="90000"/>
-              </a:lnSpc>
-              <a:spcAft>
-                <a:spcPts val="300"/>
-              </a:spcAft>
-              <a:defRPr sz="1800"/>
-            </a:pPr>
-            <a:r>
-              <a:rPr sz="1300"/>
-              <a:t>    • Yandex Mail</a:t>
-            </a:r>
-          </a:p>
-          <a:p>
-            <a:pPr>
-              <a:lnSpc>
-                <a:spcPct val="90000"/>
-              </a:lnSpc>
-              <a:spcAft>
-                <a:spcPts val="300"/>
-              </a:spcAft>
-              <a:defRPr sz="2000"/>
-            </a:pPr>
-          </a:p>
-          <a:p>
-            <a:pPr>
-              <a:lnSpc>
-                <a:spcPct val="90000"/>
-              </a:lnSpc>
-              <a:spcAft>
-                <a:spcPts val="300"/>
+              <a:defRPr sz="2000"/>
+            </a:pPr>
+          </a:p>
+          <a:p>
+            <a:pPr>
+              <a:lnSpc>
+                <a:spcPct val="85000"/>
+              </a:lnSpc>
+              <a:spcBef>
+                <a:spcPts val="200"/>
+              </a:spcBef>
+              <a:spcAft>
+                <a:spcPts val="200"/>
               </a:spcAft>
               <a:defRPr sz="2000" b="1"/>
             </a:pPr>
             <a:r>
               <a:rPr sz="1300"/>
-              <a:t>📌 E-posta Adresi Yapısı:</a:t>
-            </a:r>
-          </a:p>
-          <a:p>
-            <a:pPr>
-              <a:lnSpc>
-                <a:spcPct val="90000"/>
-              </a:lnSpc>
-              <a:spcAft>
-                <a:spcPts val="300"/>
-              </a:spcAft>
-              <a:defRPr sz="2000"/>
-            </a:pPr>
-            <a:r>
-              <a:rPr sz="1300"/>
-              <a:t>kullaniciadi@gmail.com</a:t>
-            </a:r>
-          </a:p>
-          <a:p>
-            <a:pPr lvl="1">
-              <a:lnSpc>
-                <a:spcPct val="90000"/>
-              </a:lnSpc>
-              <a:spcAft>
-                <a:spcPts val="300"/>
-              </a:spcAft>
-              <a:defRPr sz="1800"/>
-            </a:pPr>
-            <a:r>
-              <a:rPr sz="1300"/>
-              <a:t>    • kullaniciadi = Sizin seçtiğiniz isim</a:t>
-            </a:r>
-          </a:p>
-          <a:p>
-            <a:pPr lvl="1">
-              <a:lnSpc>
-                <a:spcPct val="90000"/>
-              </a:lnSpc>
-              <a:spcAft>
-                <a:spcPts val="300"/>
-              </a:spcAft>
-              <a:defRPr sz="1800"/>
-            </a:pPr>
-            <a:r>
-              <a:rPr sz="1300"/>
-              <a:t>    • @ = 'at' işareti (zorunlu)</a:t>
-            </a:r>
-          </a:p>
-          <a:p>
-            <a:pPr lvl="1">
-              <a:lnSpc>
-                <a:spcPct val="90000"/>
-              </a:lnSpc>
-              <a:spcAft>
-                <a:spcPts val="300"/>
-              </a:spcAft>
-              <a:defRPr sz="1800"/>
-            </a:pPr>
-            <a:r>
-              <a:rPr sz="1300"/>
-              <a:t>    • gmail.com = E-posta sağlayıcı</a:t>
-            </a:r>
-          </a:p>
-          <a:p>
-            <a:pPr>
-              <a:lnSpc>
-                <a:spcPct val="90000"/>
-              </a:lnSpc>
-              <a:spcAft>
-                <a:spcPts val="300"/>
-              </a:spcAft>
-              <a:defRPr sz="2000"/>
-            </a:pPr>
-          </a:p>
-          <a:p>
-            <a:pPr>
-              <a:lnSpc>
-                <a:spcPct val="90000"/>
-              </a:lnSpc>
-              <a:spcAft>
-                <a:spcPts val="300"/>
-              </a:spcAft>
-              <a:defRPr sz="2000" b="1"/>
-            </a:pPr>
-            <a:r>
-              <a:rPr sz="1300"/>
-              <a:t>✅ E-posta Gönderme:</a:t>
-            </a:r>
-          </a:p>
-          <a:p>
-            <a:pPr lvl="1">
-              <a:lnSpc>
-                <a:spcPct val="90000"/>
-              </a:lnSpc>
-              <a:spcAft>
-                <a:spcPts val="300"/>
-              </a:spcAft>
-              <a:defRPr sz="1800"/>
-            </a:pPr>
-            <a:r>
-              <a:rPr sz="1300"/>
-              <a:t>    • Alıcı: Kime gönderilecek?</a:t>
-            </a:r>
-          </a:p>
-          <a:p>
-            <a:pPr lvl="1">
-              <a:lnSpc>
-                <a:spcPct val="90000"/>
-              </a:lnSpc>
-              <a:spcAft>
-                <a:spcPts val="300"/>
-              </a:spcAft>
-              <a:defRPr sz="1800"/>
-            </a:pPr>
-            <a:r>
-              <a:rPr sz="1300"/>
-              <a:t>    • Konu: Ne hakkında?</a:t>
-            </a:r>
-          </a:p>
-          <a:p>
-            <a:pPr lvl="1">
-              <a:lnSpc>
-                <a:spcPct val="90000"/>
-              </a:lnSpc>
-              <a:spcAft>
-                <a:spcPts val="300"/>
-              </a:spcAft>
-              <a:defRPr sz="1800"/>
-            </a:pPr>
-            <a:r>
-              <a:rPr sz="1300"/>
-              <a:t>    • Mesaj: İçerik</a:t>
-            </a:r>
-          </a:p>
-          <a:p>
-            <a:pPr lvl="1">
-              <a:lnSpc>
-                <a:spcPct val="90000"/>
-              </a:lnSpc>
-              <a:spcAft>
-                <a:spcPts val="300"/>
-              </a:spcAft>
-              <a:defRPr sz="1800"/>
-            </a:pPr>
-            <a:r>
-              <a:rPr sz="1300"/>
-              <a:t>    • Ek: Dosya eklenebilir</a:t>
-            </a:r>
-          </a:p>
-          <a:p>
-            <a:pPr>
-              <a:lnSpc>
-                <a:spcPct val="90000"/>
-              </a:lnSpc>
-              <a:spcAft>
-                <a:spcPts val="300"/>
-              </a:spcAft>
-              <a:defRPr sz="2000"/>
-            </a:pPr>
-          </a:p>
-          <a:p>
-            <a:pPr>
-              <a:lnSpc>
-                <a:spcPct val="90000"/>
-              </a:lnSpc>
-              <a:spcAft>
-                <a:spcPts val="300"/>
-              </a:spcAft>
-              <a:defRPr sz="2000" b="1"/>
-            </a:pPr>
-            <a:r>
-              <a:rPr sz="1300"/>
-              <a:t>💡 E-posta Etiği:</a:t>
-            </a:r>
-          </a:p>
-          <a:p>
-            <a:pPr lvl="1">
-              <a:lnSpc>
-                <a:spcPct val="90000"/>
-              </a:lnSpc>
-              <a:spcAft>
-                <a:spcPts val="300"/>
-              </a:spcAft>
-              <a:defRPr sz="1800"/>
-            </a:pPr>
-            <a:r>
-              <a:rPr sz="1300"/>
-              <a:t>    • Kibarca yaz</a:t>
-            </a:r>
-          </a:p>
-          <a:p>
-            <a:pPr lvl="1">
-              <a:lnSpc>
-                <a:spcPct val="90000"/>
-              </a:lnSpc>
-              <a:spcAft>
-                <a:spcPts val="300"/>
-              </a:spcAft>
-              <a:defRPr sz="1800"/>
-            </a:pPr>
-            <a:r>
-              <a:rPr sz="1300"/>
-              <a:t>    • Konuyu belirt</a:t>
-            </a:r>
-          </a:p>
-          <a:p>
-            <a:pPr lvl="1">
-              <a:lnSpc>
-                <a:spcPct val="90000"/>
-              </a:lnSpc>
-              <a:spcAft>
-                <a:spcPts val="300"/>
-              </a:spcAft>
-              <a:defRPr sz="1800"/>
-            </a:pPr>
-            <a:r>
-              <a:rPr sz="1300"/>
-              <a:t>    • İmza ekle</a:t>
-            </a:r>
-          </a:p>
-          <a:p>
-            <a:pPr lvl="1">
-              <a:lnSpc>
-                <a:spcPct val="90000"/>
-              </a:lnSpc>
-              <a:spcAft>
-                <a:spcPts val="300"/>
-              </a:spcAft>
-              <a:defRPr sz="1800"/>
-            </a:pPr>
-            <a:r>
-              <a:rPr sz="1300"/>
-              <a:t>    • Spam yapma (gereksiz mail gönderme)</a:t>
-            </a:r>
-          </a:p>
-          <a:p>
-            <a:pPr>
-              <a:lnSpc>
-                <a:spcPct val="90000"/>
-              </a:lnSpc>
-              <a:spcAft>
-                <a:spcPts val="300"/>
-              </a:spcAft>
-              <a:defRPr sz="2000"/>
-            </a:pPr>
-          </a:p>
-          <a:p>
-            <a:pPr>
-              <a:lnSpc>
-                <a:spcPct val="90000"/>
-              </a:lnSpc>
-              <a:spcAft>
-                <a:spcPts val="300"/>
-              </a:spcAft>
-              <a:defRPr sz="2000" b="1"/>
-            </a:pPr>
-            <a:r>
-              <a:rPr sz="1300"/>
               <a:t>⚡ CC ve BCC:</a:t>
             </a:r>
           </a:p>
           <a:p>
             <a:pPr lvl="1">
               <a:lnSpc>
-                <a:spcPct val="90000"/>
-              </a:lnSpc>
-              <a:spcAft>
-                <a:spcPts val="300"/>
+                <a:spcPct val="85000"/>
+              </a:lnSpc>
+              <a:spcBef>
+                <a:spcPts val="200"/>
+              </a:spcBef>
+              <a:spcAft>
+                <a:spcPts val="200"/>
               </a:spcAft>
               <a:defRPr sz="1800"/>
             </a:pPr>
@@ -7240,10 +7467,13 @@
           <a:p>
             <a:pPr lvl="1">
               <a:lnSpc>
-                <a:spcPct val="90000"/>
-              </a:lnSpc>
-              <a:spcAft>
-                <a:spcPts val="300"/>
+                <a:spcPct val="85000"/>
+              </a:lnSpc>
+              <a:spcBef>
+                <a:spcPts val="200"/>
+              </a:spcBef>
+              <a:spcAft>
+                <a:spcPts val="200"/>
               </a:spcAft>
               <a:defRPr sz="1800"/>
             </a:pPr>
@@ -7284,10 +7514,19 @@
         </p:nvSpPr>
         <p:spPr/>
         <p:txBody>
-          <a:bodyPr wrap="square"/>
+          <a:bodyPr wrap="square" tIns="25400" bIns="25400" lIns="63500" rIns="63500"/>
           <a:lstStyle/>
           <a:p>
             <a:pPr>
+              <a:lnSpc>
+                <a:spcPct val="85000"/>
+              </a:lnSpc>
+              <a:spcBef>
+                <a:spcPts val="200"/>
+              </a:spcBef>
+              <a:spcAft>
+                <a:spcPts val="200"/>
+              </a:spcAft>
               <a:defRPr sz="4000" b="1">
                 <a:solidFill>
                   <a:srgbClr val="667EEA"/>
@@ -7295,6 +7534,7 @@
               </a:defRPr>
             </a:pPr>
             <a:r>
+              <a:rPr/>
               <a:t>💬 Çevrimiçi İletişim Araçları</a:t>
             </a:r>
           </a:p>
@@ -7334,7 +7574,7 @@
           <a:noFill/>
         </p:spPr>
         <p:txBody>
-          <a:bodyPr wrap="square">
+          <a:bodyPr wrap="square" tIns="25400" bIns="25400" lIns="63500" rIns="63500">
             <a:spAutoFit/>
           </a:bodyPr>
           <a:lstStyle/>
@@ -7351,10 +7591,13 @@
           <a:p>
             <a:pPr>
               <a:lnSpc>
-                <a:spcPct val="90000"/>
-              </a:lnSpc>
-              <a:spcAft>
-                <a:spcPts val="300"/>
+                <a:spcPct val="85000"/>
+              </a:lnSpc>
+              <a:spcBef>
+                <a:spcPts val="200"/>
+              </a:spcBef>
+              <a:spcAft>
+                <a:spcPts val="200"/>
               </a:spcAft>
               <a:defRPr sz="2000"/>
             </a:pPr>
@@ -7377,10 +7620,13 @@
           <a:p>
             <a:pPr>
               <a:lnSpc>
-                <a:spcPct val="90000"/>
-              </a:lnSpc>
-              <a:spcAft>
-                <a:spcPts val="300"/>
+                <a:spcPct val="85000"/>
+              </a:lnSpc>
+              <a:spcBef>
+                <a:spcPts val="200"/>
+              </a:spcBef>
+              <a:spcAft>
+                <a:spcPts val="200"/>
               </a:spcAft>
               <a:defRPr sz="2000" b="1"/>
             </a:pPr>
@@ -7392,10 +7638,13 @@
           <a:p>
             <a:pPr lvl="1">
               <a:lnSpc>
-                <a:spcPct val="90000"/>
-              </a:lnSpc>
-              <a:spcAft>
-                <a:spcPts val="300"/>
+                <a:spcPct val="85000"/>
+              </a:lnSpc>
+              <a:spcBef>
+                <a:spcPts val="200"/>
+              </a:spcBef>
+              <a:spcAft>
+                <a:spcPts val="200"/>
               </a:spcAft>
               <a:defRPr sz="1800"/>
             </a:pPr>
@@ -7407,10 +7656,13 @@
           <a:p>
             <a:pPr lvl="1">
               <a:lnSpc>
-                <a:spcPct val="90000"/>
-              </a:lnSpc>
-              <a:spcAft>
-                <a:spcPts val="300"/>
+                <a:spcPct val="85000"/>
+              </a:lnSpc>
+              <a:spcBef>
+                <a:spcPts val="200"/>
+              </a:spcBef>
+              <a:spcAft>
+                <a:spcPts val="200"/>
               </a:spcAft>
               <a:defRPr sz="1800"/>
             </a:pPr>
@@ -7422,10 +7674,13 @@
           <a:p>
             <a:pPr lvl="1">
               <a:lnSpc>
-                <a:spcPct val="90000"/>
-              </a:lnSpc>
-              <a:spcAft>
-                <a:spcPts val="300"/>
+                <a:spcPct val="85000"/>
+              </a:lnSpc>
+              <a:spcBef>
+                <a:spcPts val="200"/>
+              </a:spcBef>
+              <a:spcAft>
+                <a:spcPts val="200"/>
               </a:spcAft>
               <a:defRPr sz="1800"/>
             </a:pPr>
@@ -7448,10 +7703,13 @@
           <a:p>
             <a:pPr>
               <a:lnSpc>
-                <a:spcPct val="90000"/>
-              </a:lnSpc>
-              <a:spcAft>
-                <a:spcPts val="300"/>
+                <a:spcPct val="85000"/>
+              </a:lnSpc>
+              <a:spcBef>
+                <a:spcPts val="200"/>
+              </a:spcBef>
+              <a:spcAft>
+                <a:spcPts val="200"/>
               </a:spcAft>
               <a:defRPr sz="2000"/>
             </a:pPr>
@@ -7463,10 +7721,13 @@
           <a:p>
             <a:pPr lvl="1">
               <a:lnSpc>
-                <a:spcPct val="90000"/>
-              </a:lnSpc>
-              <a:spcAft>
-                <a:spcPts val="300"/>
+                <a:spcPct val="85000"/>
+              </a:lnSpc>
+              <a:spcBef>
+                <a:spcPts val="200"/>
+              </a:spcBef>
+              <a:spcAft>
+                <a:spcPts val="200"/>
               </a:spcAft>
               <a:defRPr sz="1800"/>
             </a:pPr>
@@ -7478,10 +7739,13 @@
           <a:p>
             <a:pPr lvl="1">
               <a:lnSpc>
-                <a:spcPct val="90000"/>
-              </a:lnSpc>
-              <a:spcAft>
-                <a:spcPts val="300"/>
+                <a:spcPct val="85000"/>
+              </a:lnSpc>
+              <a:spcBef>
+                <a:spcPts val="200"/>
+              </a:spcBef>
+              <a:spcAft>
+                <a:spcPts val="200"/>
               </a:spcAft>
               <a:defRPr sz="1800"/>
             </a:pPr>
@@ -7493,10 +7757,13 @@
           <a:p>
             <a:pPr lvl="1">
               <a:lnSpc>
-                <a:spcPct val="90000"/>
-              </a:lnSpc>
-              <a:spcAft>
-                <a:spcPts val="300"/>
+                <a:spcPct val="85000"/>
+              </a:lnSpc>
+              <a:spcBef>
+                <a:spcPts val="200"/>
+              </a:spcBef>
+              <a:spcAft>
+                <a:spcPts val="200"/>
               </a:spcAft>
               <a:defRPr sz="1800"/>
             </a:pPr>
@@ -7508,10 +7775,13 @@
           <a:p>
             <a:pPr lvl="1">
               <a:lnSpc>
-                <a:spcPct val="90000"/>
-              </a:lnSpc>
-              <a:spcAft>
-                <a:spcPts val="300"/>
+                <a:spcPct val="85000"/>
+              </a:lnSpc>
+              <a:spcBef>
+                <a:spcPts val="200"/>
+              </a:spcBef>
+              <a:spcAft>
+                <a:spcPts val="200"/>
               </a:spcAft>
               <a:defRPr sz="1800"/>
             </a:pPr>
@@ -7534,10 +7804,13 @@
           <a:p>
             <a:pPr>
               <a:lnSpc>
-                <a:spcPct val="90000"/>
-              </a:lnSpc>
-              <a:spcAft>
-                <a:spcPts val="300"/>
+                <a:spcPct val="85000"/>
+              </a:lnSpc>
+              <a:spcBef>
+                <a:spcPts val="200"/>
+              </a:spcBef>
+              <a:spcAft>
+                <a:spcPts val="200"/>
               </a:spcAft>
               <a:defRPr sz="2000"/>
             </a:pPr>
@@ -7549,10 +7822,13 @@
           <a:p>
             <a:pPr lvl="1">
               <a:lnSpc>
-                <a:spcPct val="90000"/>
-              </a:lnSpc>
-              <a:spcAft>
-                <a:spcPts val="300"/>
+                <a:spcPct val="85000"/>
+              </a:lnSpc>
+              <a:spcBef>
+                <a:spcPts val="200"/>
+              </a:spcBef>
+              <a:spcAft>
+                <a:spcPts val="200"/>
               </a:spcAft>
               <a:defRPr sz="1800"/>
             </a:pPr>
@@ -7564,10 +7840,13 @@
           <a:p>
             <a:pPr lvl="1">
               <a:lnSpc>
-                <a:spcPct val="90000"/>
-              </a:lnSpc>
-              <a:spcAft>
-                <a:spcPts val="300"/>
+                <a:spcPct val="85000"/>
+              </a:lnSpc>
+              <a:spcBef>
+                <a:spcPts val="200"/>
+              </a:spcBef>
+              <a:spcAft>
+                <a:spcPts val="200"/>
               </a:spcAft>
               <a:defRPr sz="1800"/>
             </a:pPr>
@@ -7579,10 +7858,13 @@
           <a:p>
             <a:pPr lvl="1">
               <a:lnSpc>
-                <a:spcPct val="90000"/>
-              </a:lnSpc>
-              <a:spcAft>
-                <a:spcPts val="300"/>
+                <a:spcPct val="85000"/>
+              </a:lnSpc>
+              <a:spcBef>
+                <a:spcPts val="200"/>
+              </a:spcBef>
+              <a:spcAft>
+                <a:spcPts val="200"/>
               </a:spcAft>
               <a:defRPr sz="1800"/>
             </a:pPr>
@@ -7594,10 +7876,13 @@
           <a:p>
             <a:pPr lvl="1">
               <a:lnSpc>
-                <a:spcPct val="90000"/>
-              </a:lnSpc>
-              <a:spcAft>
-                <a:spcPts val="300"/>
+                <a:spcPct val="85000"/>
+              </a:lnSpc>
+              <a:spcBef>
+                <a:spcPts val="200"/>
+              </a:spcBef>
+              <a:spcAft>
+                <a:spcPts val="200"/>
               </a:spcAft>
               <a:defRPr sz="1800"/>
             </a:pPr>
@@ -7620,10 +7905,13 @@
           <a:p>
             <a:pPr>
               <a:lnSpc>
-                <a:spcPct val="90000"/>
-              </a:lnSpc>
-              <a:spcAft>
-                <a:spcPts val="300"/>
+                <a:spcPct val="85000"/>
+              </a:lnSpc>
+              <a:spcBef>
+                <a:spcPts val="200"/>
+              </a:spcBef>
+              <a:spcAft>
+                <a:spcPts val="200"/>
               </a:spcAft>
               <a:defRPr sz="2000"/>
             </a:pPr>
@@ -7635,10 +7923,13 @@
           <a:p>
             <a:pPr lvl="1">
               <a:lnSpc>
-                <a:spcPct val="90000"/>
-              </a:lnSpc>
-              <a:spcAft>
-                <a:spcPts val="300"/>
+                <a:spcPct val="85000"/>
+              </a:lnSpc>
+              <a:spcBef>
+                <a:spcPts val="200"/>
+              </a:spcBef>
+              <a:spcAft>
+                <a:spcPts val="200"/>
               </a:spcAft>
               <a:defRPr sz="1800"/>
             </a:pPr>
@@ -7661,10 +7952,13 @@
           <a:p>
             <a:pPr>
               <a:lnSpc>
-                <a:spcPct val="90000"/>
-              </a:lnSpc>
-              <a:spcAft>
-                <a:spcPts val="300"/>
+                <a:spcPct val="85000"/>
+              </a:lnSpc>
+              <a:spcBef>
+                <a:spcPts val="200"/>
+              </a:spcBef>
+              <a:spcAft>
+                <a:spcPts val="200"/>
               </a:spcAft>
               <a:defRPr sz="2000" b="1"/>
             </a:pPr>
@@ -7676,10 +7970,13 @@
           <a:p>
             <a:pPr lvl="1">
               <a:lnSpc>
-                <a:spcPct val="90000"/>
-              </a:lnSpc>
-              <a:spcAft>
-                <a:spcPts val="300"/>
+                <a:spcPct val="85000"/>
+              </a:lnSpc>
+              <a:spcBef>
+                <a:spcPts val="200"/>
+              </a:spcBef>
+              <a:spcAft>
+                <a:spcPts val="200"/>
               </a:spcAft>
               <a:defRPr sz="1800"/>
             </a:pPr>
@@ -7691,10 +7988,13 @@
           <a:p>
             <a:pPr lvl="1">
               <a:lnSpc>
-                <a:spcPct val="90000"/>
-              </a:lnSpc>
-              <a:spcAft>
-                <a:spcPts val="300"/>
+                <a:spcPct val="85000"/>
+              </a:lnSpc>
+              <a:spcBef>
+                <a:spcPts val="200"/>
+              </a:spcBef>
+              <a:spcAft>
+                <a:spcPts val="200"/>
               </a:spcAft>
               <a:defRPr sz="1800"/>
             </a:pPr>
@@ -7706,10 +8006,13 @@
           <a:p>
             <a:pPr lvl="1">
               <a:lnSpc>
-                <a:spcPct val="90000"/>
-              </a:lnSpc>
-              <a:spcAft>
-                <a:spcPts val="300"/>
+                <a:spcPct val="85000"/>
+              </a:lnSpc>
+              <a:spcBef>
+                <a:spcPts val="200"/>
+              </a:spcBef>
+              <a:spcAft>
+                <a:spcPts val="200"/>
               </a:spcAft>
               <a:defRPr sz="1800"/>
             </a:pPr>
@@ -7721,10 +8024,13 @@
           <a:p>
             <a:pPr lvl="1">
               <a:lnSpc>
-                <a:spcPct val="90000"/>
-              </a:lnSpc>
-              <a:spcAft>
-                <a:spcPts val="300"/>
+                <a:spcPct val="85000"/>
+              </a:lnSpc>
+              <a:spcBef>
+                <a:spcPts val="200"/>
+              </a:spcBef>
+              <a:spcAft>
+                <a:spcPts val="200"/>
               </a:spcAft>
               <a:defRPr sz="1800"/>
             </a:pPr>
@@ -7765,10 +8071,19 @@
         </p:nvSpPr>
         <p:spPr/>
         <p:txBody>
-          <a:bodyPr wrap="square"/>
+          <a:bodyPr wrap="square" tIns="25400" bIns="25400" lIns="63500" rIns="63500"/>
           <a:lstStyle/>
           <a:p>
             <a:pPr>
+              <a:lnSpc>
+                <a:spcPct val="85000"/>
+              </a:lnSpc>
+              <a:spcBef>
+                <a:spcPts val="200"/>
+              </a:spcBef>
+              <a:spcAft>
+                <a:spcPts val="200"/>
+              </a:spcAft>
               <a:defRPr sz="4000" b="1">
                 <a:solidFill>
                   <a:srgbClr val="667EEA"/>
@@ -7776,6 +8091,7 @@
               </a:defRPr>
             </a:pPr>
             <a:r>
+              <a:rPr/>
               <a:t>🔒 İnternet Güvenliği</a:t>
             </a:r>
           </a:p>
@@ -7815,7 +8131,7 @@
           <a:noFill/>
         </p:spPr>
         <p:txBody>
-          <a:bodyPr wrap="square">
+          <a:bodyPr wrap="square" tIns="25400" bIns="25400" lIns="63500" rIns="63500">
             <a:spAutoFit/>
           </a:bodyPr>
           <a:lstStyle/>
@@ -7832,6 +8148,24 @@
           <a:p>
             <a:pPr>
               <a:lnSpc>
+                <a:spcPct val="85000"/>
+              </a:lnSpc>
+              <a:spcBef>
+                <a:spcPts val="200"/>
+              </a:spcBef>
+              <a:spcAft>
+                <a:spcPts val="200"/>
+              </a:spcAft>
+              <a:defRPr sz="2000"/>
+            </a:pPr>
+            <a:r>
+              <a:rPr sz="1300"/>
+              <a:t>İnternet'i güvenle kullanmak çok önemli!</a:t>
+            </a:r>
+          </a:p>
+          <a:p>
+            <a:pPr>
+              <a:lnSpc>
                 <a:spcPct val="90000"/>
               </a:lnSpc>
               <a:spcAft>
@@ -7839,9 +8173,23 @@
               </a:spcAft>
               <a:defRPr sz="2000"/>
             </a:pPr>
-            <a:r>
-              <a:rPr sz="1300"/>
-              <a:t>İnternet'i güvenle kullanmak çok önemli!</a:t>
+          </a:p>
+          <a:p>
+            <a:pPr>
+              <a:lnSpc>
+                <a:spcPct val="85000"/>
+              </a:lnSpc>
+              <a:spcBef>
+                <a:spcPts val="200"/>
+              </a:spcBef>
+              <a:spcAft>
+                <a:spcPts val="200"/>
+              </a:spcAft>
+              <a:defRPr sz="2000" b="1"/>
+            </a:pPr>
+            <a:r>
+              <a:rPr sz="1300"/>
+              <a:t>✅ Temel Güvenlik Kuralları:</a:t>
             </a:r>
           </a:p>
           <a:p>
@@ -7858,16 +8206,138 @@
           <a:p>
             <a:pPr>
               <a:lnSpc>
+                <a:spcPct val="85000"/>
+              </a:lnSpc>
+              <a:spcBef>
+                <a:spcPts val="200"/>
+              </a:spcBef>
+              <a:spcAft>
+                <a:spcPts val="200"/>
+              </a:spcAft>
+              <a:defRPr sz="2000"/>
+            </a:pPr>
+            <a:r>
+              <a:rPr sz="1300"/>
+              <a:t>🔐 Güçlü Şifre:</a:t>
+            </a:r>
+          </a:p>
+          <a:p>
+            <a:pPr lvl="1">
+              <a:lnSpc>
+                <a:spcPct val="85000"/>
+              </a:lnSpc>
+              <a:spcBef>
+                <a:spcPts val="200"/>
+              </a:spcBef>
+              <a:spcAft>
+                <a:spcPts val="200"/>
+              </a:spcAft>
+              <a:defRPr sz="1800"/>
+            </a:pPr>
+            <a:r>
+              <a:rPr sz="1300"/>
+              <a:t>    • En az 8 karakter</a:t>
+            </a:r>
+          </a:p>
+          <a:p>
+            <a:pPr lvl="1">
+              <a:lnSpc>
+                <a:spcPct val="85000"/>
+              </a:lnSpc>
+              <a:spcBef>
+                <a:spcPts val="200"/>
+              </a:spcBef>
+              <a:spcAft>
+                <a:spcPts val="200"/>
+              </a:spcAft>
+              <a:defRPr sz="1800"/>
+            </a:pPr>
+            <a:r>
+              <a:rPr sz="1300"/>
+              <a:t>    • Büyük harf, küçük harf, rakam, sembol</a:t>
+            </a:r>
+          </a:p>
+          <a:p>
+            <a:pPr lvl="1">
+              <a:lnSpc>
+                <a:spcPct val="85000"/>
+              </a:lnSpc>
+              <a:spcBef>
+                <a:spcPts val="200"/>
+              </a:spcBef>
+              <a:spcAft>
+                <a:spcPts val="200"/>
+              </a:spcAft>
+              <a:defRPr sz="1800"/>
+            </a:pPr>
+            <a:r>
+              <a:rPr sz="1300"/>
+              <a:t>    • Doğum tarihi kullanma!</a:t>
+            </a:r>
+          </a:p>
+          <a:p>
+            <a:pPr>
+              <a:lnSpc>
                 <a:spcPct val="90000"/>
               </a:lnSpc>
               <a:spcAft>
                 <a:spcPts val="300"/>
               </a:spcAft>
-              <a:defRPr sz="2000" b="1"/>
-            </a:pPr>
-            <a:r>
-              <a:rPr sz="1300"/>
-              <a:t>✅ Temel Güvenlik Kuralları:</a:t>
+              <a:defRPr sz="2000"/>
+            </a:pPr>
+          </a:p>
+          <a:p>
+            <a:pPr>
+              <a:lnSpc>
+                <a:spcPct val="85000"/>
+              </a:lnSpc>
+              <a:spcBef>
+                <a:spcPts val="200"/>
+              </a:spcBef>
+              <a:spcAft>
+                <a:spcPts val="200"/>
+              </a:spcAft>
+              <a:defRPr sz="2000"/>
+            </a:pPr>
+            <a:r>
+              <a:rPr sz="1300"/>
+              <a:t>🙈 Kişisel Bilgileri Paylaşma:</a:t>
+            </a:r>
+          </a:p>
+          <a:p>
+            <a:pPr lvl="1">
+              <a:lnSpc>
+                <a:spcPct val="85000"/>
+              </a:lnSpc>
+              <a:spcBef>
+                <a:spcPts val="200"/>
+              </a:spcBef>
+              <a:spcAft>
+                <a:spcPts val="200"/>
+              </a:spcAft>
+              <a:defRPr sz="1800"/>
+            </a:pPr>
+            <a:r>
+              <a:rPr sz="1300"/>
+              <a:t>    • Adres, telefon, okul bilgilerini paylaşma</a:t>
+            </a:r>
+          </a:p>
+          <a:p>
+            <a:pPr lvl="1">
+              <a:lnSpc>
+                <a:spcPct val="85000"/>
+              </a:lnSpc>
+              <a:spcBef>
+                <a:spcPts val="200"/>
+              </a:spcBef>
+              <a:spcAft>
+                <a:spcPts val="200"/>
+              </a:spcAft>
+              <a:defRPr sz="1800"/>
+            </a:pPr>
+            <a:r>
+              <a:rPr sz="1300"/>
+              <a:t>    • Fotoğraf paylaşırken dikkatli ol</a:t>
             </a:r>
           </a:p>
           <a:p>
@@ -7884,6 +8354,78 @@
           <a:p>
             <a:pPr>
               <a:lnSpc>
+                <a:spcPct val="85000"/>
+              </a:lnSpc>
+              <a:spcBef>
+                <a:spcPts val="200"/>
+              </a:spcBef>
+              <a:spcAft>
+                <a:spcPts val="200"/>
+              </a:spcAft>
+              <a:defRPr sz="2000"/>
+            </a:pPr>
+            <a:r>
+              <a:rPr sz="1300"/>
+              <a:t>👤 Tanımadığın Kişilerle:</a:t>
+            </a:r>
+          </a:p>
+          <a:p>
+            <a:pPr lvl="1">
+              <a:lnSpc>
+                <a:spcPct val="85000"/>
+              </a:lnSpc>
+              <a:spcBef>
+                <a:spcPts val="200"/>
+              </a:spcBef>
+              <a:spcAft>
+                <a:spcPts val="200"/>
+              </a:spcAft>
+              <a:defRPr sz="1800"/>
+            </a:pPr>
+            <a:r>
+              <a:rPr sz="1300"/>
+              <a:t>    • Buluşma</a:t>
+            </a:r>
+          </a:p>
+          <a:p>
+            <a:pPr lvl="1">
+              <a:lnSpc>
+                <a:spcPct val="85000"/>
+              </a:lnSpc>
+              <a:spcBef>
+                <a:spcPts val="200"/>
+              </a:spcBef>
+              <a:spcAft>
+                <a:spcPts val="200"/>
+              </a:spcAft>
+              <a:defRPr sz="1800"/>
+            </a:pPr>
+            <a:r>
+              <a:rPr sz="1300"/>
+              <a:t>    • Kişisel bilgi verme</a:t>
+            </a:r>
+          </a:p>
+          <a:p>
+            <a:pPr lvl="1">
+              <a:lnSpc>
+                <a:spcPct val="85000"/>
+              </a:lnSpc>
+              <a:spcBef>
+                <a:spcPts val="200"/>
+              </a:spcBef>
+              <a:spcAft>
+                <a:spcPts val="200"/>
+              </a:spcAft>
+              <a:defRPr sz="1800"/>
+            </a:pPr>
+            <a:r>
+              <a:rPr sz="1300"/>
+              <a:t>    • Ebeveynlerine haber ver</a:t>
+            </a:r>
+          </a:p>
+          <a:p>
+            <a:pPr>
+              <a:lnSpc>
                 <a:spcPct val="90000"/>
               </a:lnSpc>
               <a:spcAft>
@@ -7891,257 +8433,82 @@
               </a:spcAft>
               <a:defRPr sz="2000"/>
             </a:pPr>
-            <a:r>
-              <a:rPr sz="1300"/>
-              <a:t>🔐 Güçlü Şifre:</a:t>
-            </a:r>
-          </a:p>
-          <a:p>
-            <a:pPr lvl="1">
+          </a:p>
+          <a:p>
+            <a:pPr>
+              <a:lnSpc>
+                <a:spcPct val="85000"/>
+              </a:lnSpc>
+              <a:spcBef>
+                <a:spcPts val="200"/>
+              </a:spcBef>
+              <a:spcAft>
+                <a:spcPts val="200"/>
+              </a:spcAft>
+              <a:defRPr sz="2000"/>
+            </a:pPr>
+            <a:r>
+              <a:rPr sz="1300"/>
+              <a:t>🔗 Şüpheli Linkler:</a:t>
+            </a:r>
+          </a:p>
+          <a:p>
+            <a:pPr lvl="1">
+              <a:lnSpc>
+                <a:spcPct val="85000"/>
+              </a:lnSpc>
+              <a:spcBef>
+                <a:spcPts val="200"/>
+              </a:spcBef>
+              <a:spcAft>
+                <a:spcPts val="200"/>
+              </a:spcAft>
+              <a:defRPr sz="1800"/>
+            </a:pPr>
+            <a:r>
+              <a:rPr sz="1300"/>
+              <a:t>    • Bilmediğin linklere tıklama</a:t>
+            </a:r>
+          </a:p>
+          <a:p>
+            <a:pPr lvl="1">
+              <a:lnSpc>
+                <a:spcPct val="85000"/>
+              </a:lnSpc>
+              <a:spcBef>
+                <a:spcPts val="200"/>
+              </a:spcBef>
+              <a:spcAft>
+                <a:spcPts val="200"/>
+              </a:spcAft>
+              <a:defRPr sz="1800"/>
+            </a:pPr>
+            <a:r>
+              <a:rPr sz="1300"/>
+              <a:t>    • E-posta eklerini açmadan önce kontrol et</a:t>
+            </a:r>
+          </a:p>
+          <a:p>
+            <a:pPr>
               <a:lnSpc>
                 <a:spcPct val="90000"/>
               </a:lnSpc>
               <a:spcAft>
                 <a:spcPts val="300"/>
               </a:spcAft>
-              <a:defRPr sz="1800"/>
-            </a:pPr>
-            <a:r>
-              <a:rPr sz="1300"/>
-              <a:t>    • En az 8 karakter</a:t>
-            </a:r>
-          </a:p>
-          <a:p>
-            <a:pPr lvl="1">
-              <a:lnSpc>
-                <a:spcPct val="90000"/>
-              </a:lnSpc>
-              <a:spcAft>
-                <a:spcPts val="300"/>
-              </a:spcAft>
-              <a:defRPr sz="1800"/>
-            </a:pPr>
-            <a:r>
-              <a:rPr sz="1300"/>
-              <a:t>    • Büyük harf, küçük harf, rakam, sembol</a:t>
-            </a:r>
-          </a:p>
-          <a:p>
-            <a:pPr lvl="1">
-              <a:lnSpc>
-                <a:spcPct val="90000"/>
-              </a:lnSpc>
-              <a:spcAft>
-                <a:spcPts val="300"/>
-              </a:spcAft>
-              <a:defRPr sz="1800"/>
-            </a:pPr>
-            <a:r>
-              <a:rPr sz="1300"/>
-              <a:t>    • Doğum tarihi kullanma!</a:t>
-            </a:r>
-          </a:p>
-          <a:p>
-            <a:pPr>
-              <a:lnSpc>
-                <a:spcPct val="90000"/>
-              </a:lnSpc>
-              <a:spcAft>
-                <a:spcPts val="300"/>
-              </a:spcAft>
-              <a:defRPr sz="2000"/>
-            </a:pPr>
-          </a:p>
-          <a:p>
-            <a:pPr>
-              <a:lnSpc>
-                <a:spcPct val="90000"/>
-              </a:lnSpc>
-              <a:spcAft>
-                <a:spcPts val="300"/>
-              </a:spcAft>
-              <a:defRPr sz="2000"/>
-            </a:pPr>
-            <a:r>
-              <a:rPr sz="1300"/>
-              <a:t>🙈 Kişisel Bilgileri Paylaşma:</a:t>
-            </a:r>
-          </a:p>
-          <a:p>
-            <a:pPr lvl="1">
-              <a:lnSpc>
-                <a:spcPct val="90000"/>
-              </a:lnSpc>
-              <a:spcAft>
-                <a:spcPts val="300"/>
-              </a:spcAft>
-              <a:defRPr sz="1800"/>
-            </a:pPr>
-            <a:r>
-              <a:rPr sz="1300"/>
-              <a:t>    • Adres, telefon, okul bilgilerini paylaşma</a:t>
-            </a:r>
-          </a:p>
-          <a:p>
-            <a:pPr lvl="1">
-              <a:lnSpc>
-                <a:spcPct val="90000"/>
-              </a:lnSpc>
-              <a:spcAft>
-                <a:spcPts val="300"/>
-              </a:spcAft>
-              <a:defRPr sz="1800"/>
-            </a:pPr>
-            <a:r>
-              <a:rPr sz="1300"/>
-              <a:t>    • Fotoğraf paylaşırken dikkatli ol</a:t>
-            </a:r>
-          </a:p>
-          <a:p>
-            <a:pPr>
-              <a:lnSpc>
-                <a:spcPct val="90000"/>
-              </a:lnSpc>
-              <a:spcAft>
-                <a:spcPts val="300"/>
-              </a:spcAft>
-              <a:defRPr sz="2000"/>
-            </a:pPr>
-          </a:p>
-          <a:p>
-            <a:pPr>
-              <a:lnSpc>
-                <a:spcPct val="90000"/>
-              </a:lnSpc>
-              <a:spcAft>
-                <a:spcPts val="300"/>
-              </a:spcAft>
-              <a:defRPr sz="2000"/>
-            </a:pPr>
-            <a:r>
-              <a:rPr sz="1300"/>
-              <a:t>👤 Tanımadığın Kişilerle:</a:t>
-            </a:r>
-          </a:p>
-          <a:p>
-            <a:pPr lvl="1">
-              <a:lnSpc>
-                <a:spcPct val="90000"/>
-              </a:lnSpc>
-              <a:spcAft>
-                <a:spcPts val="300"/>
-              </a:spcAft>
-              <a:defRPr sz="1800"/>
-            </a:pPr>
-            <a:r>
-              <a:rPr sz="1300"/>
-              <a:t>    • Buluşma</a:t>
-            </a:r>
-          </a:p>
-          <a:p>
-            <a:pPr lvl="1">
-              <a:lnSpc>
-                <a:spcPct val="90000"/>
-              </a:lnSpc>
-              <a:spcAft>
-                <a:spcPts val="300"/>
-              </a:spcAft>
-              <a:defRPr sz="1800"/>
-            </a:pPr>
-            <a:r>
-              <a:rPr sz="1300"/>
-              <a:t>    • Kişisel bilgi verme</a:t>
-            </a:r>
-          </a:p>
-          <a:p>
-            <a:pPr lvl="1">
-              <a:lnSpc>
-                <a:spcPct val="90000"/>
-              </a:lnSpc>
-              <a:spcAft>
-                <a:spcPts val="300"/>
-              </a:spcAft>
-              <a:defRPr sz="1800"/>
-            </a:pPr>
-            <a:r>
-              <a:rPr sz="1300"/>
-              <a:t>    • Ebeveynlerine haber ver</a:t>
-            </a:r>
-          </a:p>
-          <a:p>
-            <a:pPr>
-              <a:lnSpc>
-                <a:spcPct val="90000"/>
-              </a:lnSpc>
-              <a:spcAft>
-                <a:spcPts val="300"/>
-              </a:spcAft>
-              <a:defRPr sz="2000"/>
-            </a:pPr>
-          </a:p>
-          <a:p>
-            <a:pPr>
-              <a:lnSpc>
-                <a:spcPct val="90000"/>
-              </a:lnSpc>
-              <a:spcAft>
-                <a:spcPts val="300"/>
-              </a:spcAft>
-              <a:defRPr sz="2000"/>
-            </a:pPr>
-            <a:r>
-              <a:rPr sz="1300"/>
-              <a:t>🔗 Şüpheli Linkler:</a:t>
-            </a:r>
-          </a:p>
-          <a:p>
-            <a:pPr lvl="1">
-              <a:lnSpc>
-                <a:spcPct val="90000"/>
-              </a:lnSpc>
-              <a:spcAft>
-                <a:spcPts val="300"/>
-              </a:spcAft>
-              <a:defRPr sz="1800"/>
-            </a:pPr>
-            <a:r>
-              <a:rPr sz="1300"/>
-              <a:t>    • Bilmediğin linklere tıklama</a:t>
-            </a:r>
-          </a:p>
-          <a:p>
-            <a:pPr lvl="1">
-              <a:lnSpc>
-                <a:spcPct val="90000"/>
-              </a:lnSpc>
-              <a:spcAft>
-                <a:spcPts val="300"/>
-              </a:spcAft>
-              <a:defRPr sz="1800"/>
-            </a:pPr>
-            <a:r>
-              <a:rPr sz="1300"/>
-              <a:t>    • E-posta eklerini açmadan önce kontrol et</a:t>
-            </a:r>
-          </a:p>
-          <a:p>
-            <a:pPr>
-              <a:lnSpc>
-                <a:spcPct val="90000"/>
-              </a:lnSpc>
-              <a:spcAft>
-                <a:spcPts val="300"/>
-              </a:spcAft>
-              <a:defRPr sz="2000"/>
-            </a:pPr>
-          </a:p>
-          <a:p>
-            <a:pPr>
-              <a:lnSpc>
-                <a:spcPct val="90000"/>
-              </a:lnSpc>
-              <a:spcAft>
-                <a:spcPts val="300"/>
+              <a:defRPr sz="2000"/>
+            </a:pPr>
+          </a:p>
+          <a:p>
+            <a:pPr>
+              <a:lnSpc>
+                <a:spcPct val="85000"/>
+              </a:lnSpc>
+              <a:spcBef>
+                <a:spcPts val="200"/>
+              </a:spcBef>
+              <a:spcAft>
+                <a:spcPts val="200"/>
               </a:spcAft>
               <a:defRPr sz="2000"/>
             </a:pPr>
@@ -8153,10 +8520,13 @@
           <a:p>
             <a:pPr lvl="1">
               <a:lnSpc>
-                <a:spcPct val="90000"/>
-              </a:lnSpc>
-              <a:spcAft>
-                <a:spcPts val="300"/>
+                <a:spcPct val="85000"/>
+              </a:lnSpc>
+              <a:spcBef>
+                <a:spcPts val="200"/>
+              </a:spcBef>
+              <a:spcAft>
+                <a:spcPts val="200"/>
               </a:spcAft>
               <a:defRPr sz="1800"/>
             </a:pPr>
@@ -8168,10 +8538,13 @@
           <a:p>
             <a:pPr lvl="1">
               <a:lnSpc>
-                <a:spcPct val="90000"/>
-              </a:lnSpc>
-              <a:spcAft>
-                <a:spcPts val="300"/>
+                <a:spcPct val="85000"/>
+              </a:lnSpc>
+              <a:spcBef>
+                <a:spcPts val="200"/>
+              </a:spcBef>
+              <a:spcAft>
+                <a:spcPts val="200"/>
               </a:spcAft>
               <a:defRPr sz="1800"/>
             </a:pPr>
@@ -8212,10 +8585,19 @@
         </p:nvSpPr>
         <p:spPr/>
         <p:txBody>
-          <a:bodyPr wrap="square"/>
+          <a:bodyPr wrap="square" tIns="25400" bIns="25400" lIns="63500" rIns="63500"/>
           <a:lstStyle/>
           <a:p>
             <a:pPr>
+              <a:lnSpc>
+                <a:spcPct val="85000"/>
+              </a:lnSpc>
+              <a:spcBef>
+                <a:spcPts val="200"/>
+              </a:spcBef>
+              <a:spcAft>
+                <a:spcPts val="200"/>
+              </a:spcAft>
               <a:defRPr sz="4000" b="1">
                 <a:solidFill>
                   <a:srgbClr val="667EEA"/>
@@ -8223,6 +8605,7 @@
               </a:defRPr>
             </a:pPr>
             <a:r>
+              <a:rPr/>
               <a:t>🚫 Siber Zorbalık</a:t>
             </a:r>
           </a:p>
@@ -8262,7 +8645,7 @@
           <a:noFill/>
         </p:spPr>
         <p:txBody>
-          <a:bodyPr wrap="square">
+          <a:bodyPr wrap="square" tIns="25400" bIns="25400" lIns="63500" rIns="63500">
             <a:spAutoFit/>
           </a:bodyPr>
           <a:lstStyle/>
@@ -8279,10 +8662,13 @@
           <a:p>
             <a:pPr>
               <a:lnSpc>
-                <a:spcPct val="90000"/>
-              </a:lnSpc>
-              <a:spcAft>
-                <a:spcPts val="300"/>
+                <a:spcPct val="85000"/>
+              </a:lnSpc>
+              <a:spcBef>
+                <a:spcPts val="200"/>
+              </a:spcBef>
+              <a:spcAft>
+                <a:spcPts val="200"/>
               </a:spcAft>
               <a:defRPr sz="2000"/>
             </a:pPr>
@@ -8305,10 +8691,13 @@
           <a:p>
             <a:pPr>
               <a:lnSpc>
-                <a:spcPct val="90000"/>
-              </a:lnSpc>
-              <a:spcAft>
-                <a:spcPts val="300"/>
+                <a:spcPct val="85000"/>
+              </a:lnSpc>
+              <a:spcBef>
+                <a:spcPts val="200"/>
+              </a:spcBef>
+              <a:spcAft>
+                <a:spcPts val="200"/>
               </a:spcAft>
               <a:defRPr sz="2000" b="1"/>
             </a:pPr>
@@ -8320,10 +8709,13 @@
           <a:p>
             <a:pPr lvl="1">
               <a:lnSpc>
-                <a:spcPct val="90000"/>
-              </a:lnSpc>
-              <a:spcAft>
-                <a:spcPts val="300"/>
+                <a:spcPct val="85000"/>
+              </a:lnSpc>
+              <a:spcBef>
+                <a:spcPts val="200"/>
+              </a:spcBef>
+              <a:spcAft>
+                <a:spcPts val="200"/>
               </a:spcAft>
               <a:defRPr sz="1800"/>
             </a:pPr>
@@ -8335,10 +8727,13 @@
           <a:p>
             <a:pPr lvl="1">
               <a:lnSpc>
-                <a:spcPct val="90000"/>
-              </a:lnSpc>
-              <a:spcAft>
-                <a:spcPts val="300"/>
+                <a:spcPct val="85000"/>
+              </a:lnSpc>
+              <a:spcBef>
+                <a:spcPts val="200"/>
+              </a:spcBef>
+              <a:spcAft>
+                <a:spcPts val="200"/>
               </a:spcAft>
               <a:defRPr sz="1800"/>
             </a:pPr>
@@ -8350,10 +8745,13 @@
           <a:p>
             <a:pPr lvl="1">
               <a:lnSpc>
-                <a:spcPct val="90000"/>
-              </a:lnSpc>
-              <a:spcAft>
-                <a:spcPts val="300"/>
+                <a:spcPct val="85000"/>
+              </a:lnSpc>
+              <a:spcBef>
+                <a:spcPts val="200"/>
+              </a:spcBef>
+              <a:spcAft>
+                <a:spcPts val="200"/>
               </a:spcAft>
               <a:defRPr sz="1800"/>
             </a:pPr>
@@ -8365,10 +8763,13 @@
           <a:p>
             <a:pPr lvl="1">
               <a:lnSpc>
-                <a:spcPct val="90000"/>
-              </a:lnSpc>
-              <a:spcAft>
-                <a:spcPts val="300"/>
+                <a:spcPct val="85000"/>
+              </a:lnSpc>
+              <a:spcBef>
+                <a:spcPts val="200"/>
+              </a:spcBef>
+              <a:spcAft>
+                <a:spcPts val="200"/>
               </a:spcAft>
               <a:defRPr sz="1800"/>
             </a:pPr>
@@ -8380,10 +8781,13 @@
           <a:p>
             <a:pPr lvl="1">
               <a:lnSpc>
-                <a:spcPct val="90000"/>
-              </a:lnSpc>
-              <a:spcAft>
-                <a:spcPts val="300"/>
+                <a:spcPct val="85000"/>
+              </a:lnSpc>
+              <a:spcBef>
+                <a:spcPts val="200"/>
+              </a:spcBef>
+              <a:spcAft>
+                <a:spcPts val="200"/>
               </a:spcAft>
               <a:defRPr sz="1800"/>
             </a:pPr>
@@ -8406,10 +8810,13 @@
           <a:p>
             <a:pPr>
               <a:lnSpc>
-                <a:spcPct val="90000"/>
-              </a:lnSpc>
-              <a:spcAft>
-                <a:spcPts val="300"/>
+                <a:spcPct val="85000"/>
+              </a:lnSpc>
+              <a:spcBef>
+                <a:spcPts val="200"/>
+              </a:spcBef>
+              <a:spcAft>
+                <a:spcPts val="200"/>
               </a:spcAft>
               <a:defRPr sz="2000"/>
             </a:pPr>
@@ -8432,10 +8839,13 @@
           <a:p>
             <a:pPr>
               <a:lnSpc>
-                <a:spcPct val="90000"/>
-              </a:lnSpc>
-              <a:spcAft>
-                <a:spcPts val="300"/>
+                <a:spcPct val="85000"/>
+              </a:lnSpc>
+              <a:spcBef>
+                <a:spcPts val="200"/>
+              </a:spcBef>
+              <a:spcAft>
+                <a:spcPts val="200"/>
               </a:spcAft>
               <a:defRPr sz="2000" b="1"/>
             </a:pPr>
@@ -8447,10 +8857,13 @@
           <a:p>
             <a:pPr lvl="1">
               <a:lnSpc>
-                <a:spcPct val="90000"/>
-              </a:lnSpc>
-              <a:spcAft>
-                <a:spcPts val="300"/>
+                <a:spcPct val="85000"/>
+              </a:lnSpc>
+              <a:spcBef>
+                <a:spcPts val="200"/>
+              </a:spcBef>
+              <a:spcAft>
+                <a:spcPts val="200"/>
               </a:spcAft>
               <a:defRPr sz="1800"/>
             </a:pPr>
@@ -8462,10 +8875,13 @@
           <a:p>
             <a:pPr lvl="1">
               <a:lnSpc>
-                <a:spcPct val="90000"/>
-              </a:lnSpc>
-              <a:spcAft>
-                <a:spcPts val="300"/>
+                <a:spcPct val="85000"/>
+              </a:lnSpc>
+              <a:spcBef>
+                <a:spcPts val="200"/>
+              </a:spcBef>
+              <a:spcAft>
+                <a:spcPts val="200"/>
               </a:spcAft>
               <a:defRPr sz="1800"/>
             </a:pPr>
@@ -8477,10 +8893,13 @@
           <a:p>
             <a:pPr lvl="1">
               <a:lnSpc>
-                <a:spcPct val="90000"/>
-              </a:lnSpc>
-              <a:spcAft>
-                <a:spcPts val="300"/>
+                <a:spcPct val="85000"/>
+              </a:lnSpc>
+              <a:spcBef>
+                <a:spcPts val="200"/>
+              </a:spcBef>
+              <a:spcAft>
+                <a:spcPts val="200"/>
               </a:spcAft>
               <a:defRPr sz="1800"/>
             </a:pPr>
@@ -8492,10 +8911,13 @@
           <a:p>
             <a:pPr lvl="1">
               <a:lnSpc>
-                <a:spcPct val="90000"/>
-              </a:lnSpc>
-              <a:spcAft>
-                <a:spcPts val="300"/>
+                <a:spcPct val="85000"/>
+              </a:lnSpc>
+              <a:spcBef>
+                <a:spcPts val="200"/>
+              </a:spcBef>
+              <a:spcAft>
+                <a:spcPts val="200"/>
               </a:spcAft>
               <a:defRPr sz="1800"/>
             </a:pPr>
@@ -8507,10 +8929,13 @@
           <a:p>
             <a:pPr lvl="1">
               <a:lnSpc>
-                <a:spcPct val="90000"/>
-              </a:lnSpc>
-              <a:spcAft>
-                <a:spcPts val="300"/>
+                <a:spcPct val="85000"/>
+              </a:lnSpc>
+              <a:spcBef>
+                <a:spcPts val="200"/>
+              </a:spcBef>
+              <a:spcAft>
+                <a:spcPts val="200"/>
               </a:spcAft>
               <a:defRPr sz="1800"/>
             </a:pPr>
@@ -8533,10 +8958,13 @@
           <a:p>
             <a:pPr>
               <a:lnSpc>
-                <a:spcPct val="90000"/>
-              </a:lnSpc>
-              <a:spcAft>
-                <a:spcPts val="300"/>
+                <a:spcPct val="85000"/>
+              </a:lnSpc>
+              <a:spcBef>
+                <a:spcPts val="200"/>
+              </a:spcBef>
+              <a:spcAft>
+                <a:spcPts val="200"/>
               </a:spcAft>
               <a:defRPr sz="2000" b="1"/>
             </a:pPr>
@@ -8548,10 +8976,13 @@
           <a:p>
             <a:pPr lvl="1">
               <a:lnSpc>
-                <a:spcPct val="90000"/>
-              </a:lnSpc>
-              <a:spcAft>
-                <a:spcPts val="300"/>
+                <a:spcPct val="85000"/>
+              </a:lnSpc>
+              <a:spcBef>
+                <a:spcPts val="200"/>
+              </a:spcBef>
+              <a:spcAft>
+                <a:spcPts val="200"/>
               </a:spcAft>
               <a:defRPr sz="1800"/>
             </a:pPr>
@@ -8563,10 +8994,13 @@
           <a:p>
             <a:pPr lvl="1">
               <a:lnSpc>
-                <a:spcPct val="90000"/>
-              </a:lnSpc>
-              <a:spcAft>
-                <a:spcPts val="300"/>
+                <a:spcPct val="85000"/>
+              </a:lnSpc>
+              <a:spcBef>
+                <a:spcPts val="200"/>
+              </a:spcBef>
+              <a:spcAft>
+                <a:spcPts val="200"/>
               </a:spcAft>
               <a:defRPr sz="1800"/>
             </a:pPr>
@@ -8578,10 +9012,13 @@
           <a:p>
             <a:pPr lvl="1">
               <a:lnSpc>
-                <a:spcPct val="90000"/>
-              </a:lnSpc>
-              <a:spcAft>
-                <a:spcPts val="300"/>
+                <a:spcPct val="85000"/>
+              </a:lnSpc>
+              <a:spcBef>
+                <a:spcPts val="200"/>
+              </a:spcBef>
+              <a:spcAft>
+                <a:spcPts val="200"/>
               </a:spcAft>
               <a:defRPr sz="1800"/>
             </a:pPr>
@@ -8604,10 +9041,13 @@
           <a:p>
             <a:pPr>
               <a:lnSpc>
-                <a:spcPct val="90000"/>
-              </a:lnSpc>
-              <a:spcAft>
-                <a:spcPts val="300"/>
+                <a:spcPct val="85000"/>
+              </a:lnSpc>
+              <a:spcBef>
+                <a:spcPts val="200"/>
+              </a:spcBef>
+              <a:spcAft>
+                <a:spcPts val="200"/>
               </a:spcAft>
               <a:defRPr sz="2000" b="1"/>
             </a:pPr>
@@ -8648,10 +9088,19 @@
         </p:nvSpPr>
         <p:spPr/>
         <p:txBody>
-          <a:bodyPr wrap="square"/>
+          <a:bodyPr wrap="square" tIns="25400" bIns="25400" lIns="63500" rIns="63500"/>
           <a:lstStyle/>
           <a:p>
             <a:pPr>
+              <a:lnSpc>
+                <a:spcPct val="85000"/>
+              </a:lnSpc>
+              <a:spcBef>
+                <a:spcPts val="200"/>
+              </a:spcBef>
+              <a:spcAft>
+                <a:spcPts val="200"/>
+              </a:spcAft>
               <a:defRPr sz="4000" b="1">
                 <a:solidFill>
                   <a:srgbClr val="667EEA"/>
@@ -8659,6 +9108,7 @@
               </a:defRPr>
             </a:pPr>
             <a:r>
+              <a:rPr/>
               <a:t>©️ İnternet'te Telif Hakları</a:t>
             </a:r>
           </a:p>
@@ -8698,7 +9148,7 @@
           <a:noFill/>
         </p:spPr>
         <p:txBody>
-          <a:bodyPr wrap="square">
+          <a:bodyPr wrap="square" tIns="25400" bIns="25400" lIns="63500" rIns="63500">
             <a:spAutoFit/>
           </a:bodyPr>
           <a:lstStyle/>
@@ -8715,10 +9165,13 @@
           <a:p>
             <a:pPr>
               <a:lnSpc>
-                <a:spcPct val="90000"/>
-              </a:lnSpc>
-              <a:spcAft>
-                <a:spcPts val="300"/>
+                <a:spcPct val="85000"/>
+              </a:lnSpc>
+              <a:spcBef>
+                <a:spcPts val="200"/>
+              </a:spcBef>
+              <a:spcAft>
+                <a:spcPts val="200"/>
               </a:spcAft>
               <a:defRPr sz="2000"/>
             </a:pPr>
@@ -8741,10 +9194,13 @@
           <a:p>
             <a:pPr>
               <a:lnSpc>
-                <a:spcPct val="90000"/>
-              </a:lnSpc>
-              <a:spcAft>
-                <a:spcPts val="300"/>
+                <a:spcPct val="85000"/>
+              </a:lnSpc>
+              <a:spcBef>
+                <a:spcPts val="200"/>
+              </a:spcBef>
+              <a:spcAft>
+                <a:spcPts val="200"/>
               </a:spcAft>
               <a:defRPr sz="2000"/>
             </a:pPr>
@@ -8767,10 +9223,13 @@
           <a:p>
             <a:pPr>
               <a:lnSpc>
-                <a:spcPct val="90000"/>
-              </a:lnSpc>
-              <a:spcAft>
-                <a:spcPts val="300"/>
+                <a:spcPct val="85000"/>
+              </a:lnSpc>
+              <a:spcBef>
+                <a:spcPts val="200"/>
+              </a:spcBef>
+              <a:spcAft>
+                <a:spcPts val="200"/>
               </a:spcAft>
               <a:defRPr sz="2000" b="1"/>
             </a:pPr>
@@ -8782,10 +9241,13 @@
           <a:p>
             <a:pPr lvl="1">
               <a:lnSpc>
-                <a:spcPct val="90000"/>
-              </a:lnSpc>
-              <a:spcAft>
-                <a:spcPts val="300"/>
+                <a:spcPct val="85000"/>
+              </a:lnSpc>
+              <a:spcBef>
+                <a:spcPts val="200"/>
+              </a:spcBef>
+              <a:spcAft>
+                <a:spcPts val="200"/>
               </a:spcAft>
               <a:defRPr sz="1800"/>
             </a:pPr>
@@ -8797,10 +9259,13 @@
           <a:p>
             <a:pPr lvl="1">
               <a:lnSpc>
-                <a:spcPct val="90000"/>
-              </a:lnSpc>
-              <a:spcAft>
-                <a:spcPts val="300"/>
+                <a:spcPct val="85000"/>
+              </a:lnSpc>
+              <a:spcBef>
+                <a:spcPts val="200"/>
+              </a:spcBef>
+              <a:spcAft>
+                <a:spcPts val="200"/>
               </a:spcAft>
               <a:defRPr sz="1800"/>
             </a:pPr>
@@ -8823,10 +9288,13 @@
           <a:p>
             <a:pPr>
               <a:lnSpc>
-                <a:spcPct val="90000"/>
-              </a:lnSpc>
-              <a:spcAft>
-                <a:spcPts val="300"/>
+                <a:spcPct val="85000"/>
+              </a:lnSpc>
+              <a:spcBef>
+                <a:spcPts val="200"/>
+              </a:spcBef>
+              <a:spcAft>
+                <a:spcPts val="200"/>
               </a:spcAft>
               <a:defRPr sz="2000" b="1"/>
             </a:pPr>
@@ -8838,10 +9306,13 @@
           <a:p>
             <a:pPr lvl="1">
               <a:lnSpc>
-                <a:spcPct val="90000"/>
-              </a:lnSpc>
-              <a:spcAft>
-                <a:spcPts val="300"/>
+                <a:spcPct val="85000"/>
+              </a:lnSpc>
+              <a:spcBef>
+                <a:spcPts val="200"/>
+              </a:spcBef>
+              <a:spcAft>
+                <a:spcPts val="200"/>
               </a:spcAft>
               <a:defRPr sz="1800"/>
             </a:pPr>
@@ -8853,10 +9324,13 @@
           <a:p>
             <a:pPr lvl="1">
               <a:lnSpc>
-                <a:spcPct val="90000"/>
-              </a:lnSpc>
-              <a:spcAft>
-                <a:spcPts val="300"/>
+                <a:spcPct val="85000"/>
+              </a:lnSpc>
+              <a:spcBef>
+                <a:spcPts val="200"/>
+              </a:spcBef>
+              <a:spcAft>
+                <a:spcPts val="200"/>
               </a:spcAft>
               <a:defRPr sz="1800"/>
             </a:pPr>
@@ -8868,10 +9342,13 @@
           <a:p>
             <a:pPr lvl="1">
               <a:lnSpc>
-                <a:spcPct val="90000"/>
-              </a:lnSpc>
-              <a:spcAft>
-                <a:spcPts val="300"/>
+                <a:spcPct val="85000"/>
+              </a:lnSpc>
+              <a:spcBef>
+                <a:spcPts val="200"/>
+              </a:spcBef>
+              <a:spcAft>
+                <a:spcPts val="200"/>
               </a:spcAft>
               <a:defRPr sz="1800"/>
             </a:pPr>
@@ -8883,10 +9360,13 @@
           <a:p>
             <a:pPr lvl="1">
               <a:lnSpc>
-                <a:spcPct val="90000"/>
-              </a:lnSpc>
-              <a:spcAft>
-                <a:spcPts val="300"/>
+                <a:spcPct val="85000"/>
+              </a:lnSpc>
+              <a:spcBef>
+                <a:spcPts val="200"/>
+              </a:spcBef>
+              <a:spcAft>
+                <a:spcPts val="200"/>
               </a:spcAft>
               <a:defRPr sz="1800"/>
             </a:pPr>
@@ -8909,10 +9389,13 @@
           <a:p>
             <a:pPr>
               <a:lnSpc>
-                <a:spcPct val="90000"/>
-              </a:lnSpc>
-              <a:spcAft>
-                <a:spcPts val="300"/>
+                <a:spcPct val="85000"/>
+              </a:lnSpc>
+              <a:spcBef>
+                <a:spcPts val="200"/>
+              </a:spcBef>
+              <a:spcAft>
+                <a:spcPts val="200"/>
               </a:spcAft>
               <a:defRPr sz="2000" b="1"/>
             </a:pPr>
@@ -8924,10 +9407,13 @@
           <a:p>
             <a:pPr lvl="1">
               <a:lnSpc>
-                <a:spcPct val="90000"/>
-              </a:lnSpc>
-              <a:spcAft>
-                <a:spcPts val="300"/>
+                <a:spcPct val="85000"/>
+              </a:lnSpc>
+              <a:spcBef>
+                <a:spcPts val="200"/>
+              </a:spcBef>
+              <a:spcAft>
+                <a:spcPts val="200"/>
               </a:spcAft>
               <a:defRPr sz="1800"/>
             </a:pPr>
@@ -8939,10 +9425,13 @@
           <a:p>
             <a:pPr lvl="1">
               <a:lnSpc>
-                <a:spcPct val="90000"/>
-              </a:lnSpc>
-              <a:spcAft>
-                <a:spcPts val="300"/>
+                <a:spcPct val="85000"/>
+              </a:lnSpc>
+              <a:spcBef>
+                <a:spcPts val="200"/>
+              </a:spcBef>
+              <a:spcAft>
+                <a:spcPts val="200"/>
               </a:spcAft>
               <a:defRPr sz="1800"/>
             </a:pPr>
@@ -8954,10 +9443,13 @@
           <a:p>
             <a:pPr lvl="1">
               <a:lnSpc>
-                <a:spcPct val="90000"/>
-              </a:lnSpc>
-              <a:spcAft>
-                <a:spcPts val="300"/>
+                <a:spcPct val="85000"/>
+              </a:lnSpc>
+              <a:spcBef>
+                <a:spcPts val="200"/>
+              </a:spcBef>
+              <a:spcAft>
+                <a:spcPts val="200"/>
               </a:spcAft>
               <a:defRPr sz="1800"/>
             </a:pPr>
@@ -8980,10 +9472,13 @@
           <a:p>
             <a:pPr>
               <a:lnSpc>
-                <a:spcPct val="90000"/>
-              </a:lnSpc>
-              <a:spcAft>
-                <a:spcPts val="300"/>
+                <a:spcPct val="85000"/>
+              </a:lnSpc>
+              <a:spcBef>
+                <a:spcPts val="200"/>
+              </a:spcBef>
+              <a:spcAft>
+                <a:spcPts val="200"/>
               </a:spcAft>
               <a:defRPr sz="2000"/>
             </a:pPr>
@@ -8995,10 +9490,13 @@
           <a:p>
             <a:pPr lvl="1">
               <a:lnSpc>
-                <a:spcPct val="90000"/>
-              </a:lnSpc>
-              <a:spcAft>
-                <a:spcPts val="300"/>
+                <a:spcPct val="85000"/>
+              </a:lnSpc>
+              <a:spcBef>
+                <a:spcPts val="200"/>
+              </a:spcBef>
+              <a:spcAft>
+                <a:spcPts val="200"/>
               </a:spcAft>
               <a:defRPr sz="1800"/>
             </a:pPr>
@@ -9010,10 +9508,13 @@
           <a:p>
             <a:pPr lvl="1">
               <a:lnSpc>
-                <a:spcPct val="90000"/>
-              </a:lnSpc>
-              <a:spcAft>
-                <a:spcPts val="300"/>
+                <a:spcPct val="85000"/>
+              </a:lnSpc>
+              <a:spcBef>
+                <a:spcPts val="200"/>
+              </a:spcBef>
+              <a:spcAft>
+                <a:spcPts val="200"/>
               </a:spcAft>
               <a:defRPr sz="1800"/>
             </a:pPr>
@@ -9036,10 +9537,13 @@
           <a:p>
             <a:pPr>
               <a:lnSpc>
-                <a:spcPct val="90000"/>
-              </a:lnSpc>
-              <a:spcAft>
-                <a:spcPts val="300"/>
+                <a:spcPct val="85000"/>
+              </a:lnSpc>
+              <a:spcBef>
+                <a:spcPts val="200"/>
+              </a:spcBef>
+              <a:spcAft>
+                <a:spcPts val="200"/>
               </a:spcAft>
               <a:defRPr sz="2000" b="1"/>
             </a:pPr>
@@ -9080,10 +9584,19 @@
         </p:nvSpPr>
         <p:spPr/>
         <p:txBody>
-          <a:bodyPr wrap="square"/>
+          <a:bodyPr wrap="square" tIns="25400" bIns="25400" lIns="63500" rIns="63500"/>
           <a:lstStyle/>
           <a:p>
             <a:pPr>
+              <a:lnSpc>
+                <a:spcPct val="85000"/>
+              </a:lnSpc>
+              <a:spcBef>
+                <a:spcPts val="200"/>
+              </a:spcBef>
+              <a:spcAft>
+                <a:spcPts val="200"/>
+              </a:spcAft>
               <a:defRPr sz="4000" b="1">
                 <a:solidFill>
                   <a:srgbClr val="667EEA"/>
@@ -9091,6 +9604,7 @@
               </a:defRPr>
             </a:pPr>
             <a:r>
+              <a:rPr/>
               <a:t>⏰ Dengeli İnternet Kullanımı</a:t>
             </a:r>
           </a:p>
@@ -9130,7 +9644,7 @@
           <a:noFill/>
         </p:spPr>
         <p:txBody>
-          <a:bodyPr wrap="square">
+          <a:bodyPr wrap="square" tIns="25400" bIns="25400" lIns="63500" rIns="63500">
             <a:spAutoFit/>
           </a:bodyPr>
           <a:lstStyle/>
@@ -9147,6 +9661,24 @@
           <a:p>
             <a:pPr>
               <a:lnSpc>
+                <a:spcPct val="85000"/>
+              </a:lnSpc>
+              <a:spcBef>
+                <a:spcPts val="200"/>
+              </a:spcBef>
+              <a:spcAft>
+                <a:spcPts val="200"/>
+              </a:spcAft>
+              <a:defRPr sz="2000"/>
+            </a:pPr>
+            <a:r>
+              <a:rPr sz="1300"/>
+              <a:t>İnternet faydalıdır ama dengeli kullanılmalı!</a:t>
+            </a:r>
+          </a:p>
+          <a:p>
+            <a:pPr>
+              <a:lnSpc>
                 <a:spcPct val="90000"/>
               </a:lnSpc>
               <a:spcAft>
@@ -9154,9 +9686,23 @@
               </a:spcAft>
               <a:defRPr sz="2000"/>
             </a:pPr>
-            <a:r>
-              <a:rPr sz="1300"/>
-              <a:t>İnternet faydalıdır ama dengeli kullanılmalı!</a:t>
+          </a:p>
+          <a:p>
+            <a:pPr>
+              <a:lnSpc>
+                <a:spcPct val="85000"/>
+              </a:lnSpc>
+              <a:spcBef>
+                <a:spcPts val="200"/>
+              </a:spcBef>
+              <a:spcAft>
+                <a:spcPts val="200"/>
+              </a:spcAft>
+              <a:defRPr sz="2000" b="1"/>
+            </a:pPr>
+            <a:r>
+              <a:rPr sz="1300"/>
+              <a:t>✅ Sağlıklı İnternet Kullanımı:</a:t>
             </a:r>
           </a:p>
           <a:p>
@@ -9173,331 +9719,356 @@
           <a:p>
             <a:pPr>
               <a:lnSpc>
+                <a:spcPct val="85000"/>
+              </a:lnSpc>
+              <a:spcBef>
+                <a:spcPts val="200"/>
+              </a:spcBef>
+              <a:spcAft>
+                <a:spcPts val="200"/>
+              </a:spcAft>
+              <a:defRPr sz="2000"/>
+            </a:pPr>
+            <a:r>
+              <a:rPr sz="1300"/>
+              <a:t>📱 Süre Sınırı:</a:t>
+            </a:r>
+          </a:p>
+          <a:p>
+            <a:pPr lvl="1">
+              <a:lnSpc>
+                <a:spcPct val="85000"/>
+              </a:lnSpc>
+              <a:spcBef>
+                <a:spcPts val="200"/>
+              </a:spcBef>
+              <a:spcAft>
+                <a:spcPts val="200"/>
+              </a:spcAft>
+              <a:defRPr sz="1800"/>
+            </a:pPr>
+            <a:r>
+              <a:rPr sz="1300"/>
+              <a:t>    • 5. sınıf için önerilen: Günde 1-2 saat</a:t>
+            </a:r>
+          </a:p>
+          <a:p>
+            <a:pPr lvl="1">
+              <a:lnSpc>
+                <a:spcPct val="85000"/>
+              </a:lnSpc>
+              <a:spcBef>
+                <a:spcPts val="200"/>
+              </a:spcBef>
+              <a:spcAft>
+                <a:spcPts val="200"/>
+              </a:spcAft>
+              <a:defRPr sz="1800"/>
+            </a:pPr>
+            <a:r>
+              <a:rPr sz="1300"/>
+              <a:t>    • Sık sık mola ver (20-20-20 kuralı)</a:t>
+            </a:r>
+          </a:p>
+          <a:p>
+            <a:pPr>
+              <a:lnSpc>
                 <a:spcPct val="90000"/>
               </a:lnSpc>
               <a:spcAft>
                 <a:spcPts val="300"/>
               </a:spcAft>
+              <a:defRPr sz="2000"/>
+            </a:pPr>
+          </a:p>
+          <a:p>
+            <a:pPr>
+              <a:lnSpc>
+                <a:spcPct val="85000"/>
+              </a:lnSpc>
+              <a:spcBef>
+                <a:spcPts val="200"/>
+              </a:spcBef>
+              <a:spcAft>
+                <a:spcPts val="200"/>
+              </a:spcAft>
+              <a:defRPr sz="2000"/>
+            </a:pPr>
+            <a:r>
+              <a:rPr sz="1300"/>
+              <a:t>🛌 Uyku Öncelikli:</a:t>
+            </a:r>
+          </a:p>
+          <a:p>
+            <a:pPr lvl="1">
+              <a:lnSpc>
+                <a:spcPct val="85000"/>
+              </a:lnSpc>
+              <a:spcBef>
+                <a:spcPts val="200"/>
+              </a:spcBef>
+              <a:spcAft>
+                <a:spcPts val="200"/>
+              </a:spcAft>
+              <a:defRPr sz="1800"/>
+            </a:pPr>
+            <a:r>
+              <a:rPr sz="1300"/>
+              <a:t>    • Yatmadan önce ekran kullanma</a:t>
+            </a:r>
+          </a:p>
+          <a:p>
+            <a:pPr lvl="1">
+              <a:lnSpc>
+                <a:spcPct val="85000"/>
+              </a:lnSpc>
+              <a:spcBef>
+                <a:spcPts val="200"/>
+              </a:spcBef>
+              <a:spcAft>
+                <a:spcPts val="200"/>
+              </a:spcAft>
+              <a:defRPr sz="1800"/>
+            </a:pPr>
+            <a:r>
+              <a:rPr sz="1300"/>
+              <a:t>    • Telefon/tableti yatak odasında bırakma</a:t>
+            </a:r>
+          </a:p>
+          <a:p>
+            <a:pPr>
+              <a:lnSpc>
+                <a:spcPct val="90000"/>
+              </a:lnSpc>
+              <a:spcAft>
+                <a:spcPts val="300"/>
+              </a:spcAft>
+              <a:defRPr sz="2000"/>
+            </a:pPr>
+          </a:p>
+          <a:p>
+            <a:pPr>
+              <a:lnSpc>
+                <a:spcPct val="85000"/>
+              </a:lnSpc>
+              <a:spcBef>
+                <a:spcPts val="200"/>
+              </a:spcBef>
+              <a:spcAft>
+                <a:spcPts val="200"/>
+              </a:spcAft>
+              <a:defRPr sz="2000"/>
+            </a:pPr>
+            <a:r>
+              <a:rPr sz="1300"/>
+              <a:t>👨‍👩‍👧 Aile Zamanı:</a:t>
+            </a:r>
+          </a:p>
+          <a:p>
+            <a:pPr lvl="1">
+              <a:lnSpc>
+                <a:spcPct val="85000"/>
+              </a:lnSpc>
+              <a:spcBef>
+                <a:spcPts val="200"/>
+              </a:spcBef>
+              <a:spcAft>
+                <a:spcPts val="200"/>
+              </a:spcAft>
+              <a:defRPr sz="1800"/>
+            </a:pPr>
+            <a:r>
+              <a:rPr sz="1300"/>
+              <a:t>    • Yemekte telefon yok</a:t>
+            </a:r>
+          </a:p>
+          <a:p>
+            <a:pPr lvl="1">
+              <a:lnSpc>
+                <a:spcPct val="85000"/>
+              </a:lnSpc>
+              <a:spcBef>
+                <a:spcPts val="200"/>
+              </a:spcBef>
+              <a:spcAft>
+                <a:spcPts val="200"/>
+              </a:spcAft>
+              <a:defRPr sz="1800"/>
+            </a:pPr>
+            <a:r>
+              <a:rPr sz="1300"/>
+              <a:t>    • Aile ile vakit geçir</a:t>
+            </a:r>
+          </a:p>
+          <a:p>
+            <a:pPr>
+              <a:lnSpc>
+                <a:spcPct val="90000"/>
+              </a:lnSpc>
+              <a:spcAft>
+                <a:spcPts val="300"/>
+              </a:spcAft>
+              <a:defRPr sz="2000"/>
+            </a:pPr>
+          </a:p>
+          <a:p>
+            <a:pPr>
+              <a:lnSpc>
+                <a:spcPct val="85000"/>
+              </a:lnSpc>
+              <a:spcBef>
+                <a:spcPts val="200"/>
+              </a:spcBef>
+              <a:spcAft>
+                <a:spcPts val="200"/>
+              </a:spcAft>
+              <a:defRPr sz="2000"/>
+            </a:pPr>
+            <a:r>
+              <a:rPr sz="1300"/>
+              <a:t>🏃 Fiziksel Aktivite:</a:t>
+            </a:r>
+          </a:p>
+          <a:p>
+            <a:pPr lvl="1">
+              <a:lnSpc>
+                <a:spcPct val="85000"/>
+              </a:lnSpc>
+              <a:spcBef>
+                <a:spcPts val="200"/>
+              </a:spcBef>
+              <a:spcAft>
+                <a:spcPts val="200"/>
+              </a:spcAft>
+              <a:defRPr sz="1800"/>
+            </a:pPr>
+            <a:r>
+              <a:rPr sz="1300"/>
+              <a:t>    • Dışarı çık, spor yap</a:t>
+            </a:r>
+          </a:p>
+          <a:p>
+            <a:pPr lvl="1">
+              <a:lnSpc>
+                <a:spcPct val="85000"/>
+              </a:lnSpc>
+              <a:spcBef>
+                <a:spcPts val="200"/>
+              </a:spcBef>
+              <a:spcAft>
+                <a:spcPts val="200"/>
+              </a:spcAft>
+              <a:defRPr sz="1800"/>
+            </a:pPr>
+            <a:r>
+              <a:rPr sz="1300"/>
+              <a:t>    • Arkadaşlarla yüz yüze oyna</a:t>
+            </a:r>
+          </a:p>
+          <a:p>
+            <a:pPr>
+              <a:lnSpc>
+                <a:spcPct val="90000"/>
+              </a:lnSpc>
+              <a:spcAft>
+                <a:spcPts val="300"/>
+              </a:spcAft>
+              <a:defRPr sz="2000"/>
+            </a:pPr>
+          </a:p>
+          <a:p>
+            <a:pPr>
+              <a:lnSpc>
+                <a:spcPct val="85000"/>
+              </a:lnSpc>
+              <a:spcBef>
+                <a:spcPts val="200"/>
+              </a:spcBef>
+              <a:spcAft>
+                <a:spcPts val="200"/>
+              </a:spcAft>
+              <a:defRPr sz="2000"/>
+            </a:pPr>
+            <a:r>
+              <a:rPr sz="1300"/>
+              <a:t>📚 Ödev ve Okul:</a:t>
+            </a:r>
+          </a:p>
+          <a:p>
+            <a:pPr lvl="1">
+              <a:lnSpc>
+                <a:spcPct val="85000"/>
+              </a:lnSpc>
+              <a:spcBef>
+                <a:spcPts val="200"/>
+              </a:spcBef>
+              <a:spcAft>
+                <a:spcPts val="200"/>
+              </a:spcAft>
+              <a:defRPr sz="1800"/>
+            </a:pPr>
+            <a:r>
+              <a:rPr sz="1300"/>
+              <a:t>    • Önce ödevler</a:t>
+            </a:r>
+          </a:p>
+          <a:p>
+            <a:pPr lvl="1">
+              <a:lnSpc>
+                <a:spcPct val="85000"/>
+              </a:lnSpc>
+              <a:spcBef>
+                <a:spcPts val="200"/>
+              </a:spcBef>
+              <a:spcAft>
+                <a:spcPts val="200"/>
+              </a:spcAft>
+              <a:defRPr sz="1800"/>
+            </a:pPr>
+            <a:r>
+              <a:rPr sz="1300"/>
+              <a:t>    • Eğitsel içerikler izle</a:t>
+            </a:r>
+          </a:p>
+          <a:p>
+            <a:pPr>
+              <a:lnSpc>
+                <a:spcPct val="90000"/>
+              </a:lnSpc>
+              <a:spcAft>
+                <a:spcPts val="300"/>
+              </a:spcAft>
+              <a:defRPr sz="2000"/>
+            </a:pPr>
+          </a:p>
+          <a:p>
+            <a:pPr>
+              <a:lnSpc>
+                <a:spcPct val="85000"/>
+              </a:lnSpc>
+              <a:spcBef>
+                <a:spcPts val="200"/>
+              </a:spcBef>
+              <a:spcAft>
+                <a:spcPts val="200"/>
+              </a:spcAft>
               <a:defRPr sz="2000" b="1"/>
             </a:pPr>
             <a:r>
               <a:rPr sz="1300"/>
-              <a:t>✅ Sağlıklı İnternet Kullanımı:</a:t>
-            </a:r>
-          </a:p>
-          <a:p>
-            <a:pPr>
-              <a:lnSpc>
-                <a:spcPct val="90000"/>
-              </a:lnSpc>
-              <a:spcAft>
-                <a:spcPts val="300"/>
-              </a:spcAft>
-              <a:defRPr sz="2000"/>
-            </a:pPr>
-          </a:p>
-          <a:p>
-            <a:pPr>
-              <a:lnSpc>
-                <a:spcPct val="90000"/>
-              </a:lnSpc>
-              <a:spcAft>
-                <a:spcPts val="300"/>
-              </a:spcAft>
-              <a:defRPr sz="2000"/>
-            </a:pPr>
-            <a:r>
-              <a:rPr sz="1300"/>
-              <a:t>📱 Süre Sınırı:</a:t>
-            </a:r>
-          </a:p>
-          <a:p>
-            <a:pPr lvl="1">
-              <a:lnSpc>
-                <a:spcPct val="90000"/>
-              </a:lnSpc>
-              <a:spcAft>
-                <a:spcPts val="300"/>
-              </a:spcAft>
-              <a:defRPr sz="1800"/>
-            </a:pPr>
-            <a:r>
-              <a:rPr sz="1300"/>
-              <a:t>    • 5. sınıf için önerilen: Günde 1-2 saat</a:t>
-            </a:r>
-          </a:p>
-          <a:p>
-            <a:pPr lvl="1">
-              <a:lnSpc>
-                <a:spcPct val="90000"/>
-              </a:lnSpc>
-              <a:spcAft>
-                <a:spcPts val="300"/>
-              </a:spcAft>
-              <a:defRPr sz="1800"/>
-            </a:pPr>
-            <a:r>
-              <a:rPr sz="1300"/>
-              <a:t>    • Sık sık mola ver (20-20-20 kuralı)</a:t>
-            </a:r>
-          </a:p>
-          <a:p>
-            <a:pPr>
-              <a:lnSpc>
-                <a:spcPct val="90000"/>
-              </a:lnSpc>
-              <a:spcAft>
-                <a:spcPts val="300"/>
-              </a:spcAft>
-              <a:defRPr sz="2000"/>
-            </a:pPr>
-          </a:p>
-          <a:p>
-            <a:pPr>
-              <a:lnSpc>
-                <a:spcPct val="90000"/>
-              </a:lnSpc>
-              <a:spcAft>
-                <a:spcPts val="300"/>
-              </a:spcAft>
-              <a:defRPr sz="2000"/>
-            </a:pPr>
-            <a:r>
-              <a:rPr sz="1300"/>
-              <a:t>🛌 Uyku Öncelikli:</a:t>
-            </a:r>
-          </a:p>
-          <a:p>
-            <a:pPr lvl="1">
-              <a:lnSpc>
-                <a:spcPct val="90000"/>
-              </a:lnSpc>
-              <a:spcAft>
-                <a:spcPts val="300"/>
-              </a:spcAft>
-              <a:defRPr sz="1800"/>
-            </a:pPr>
-            <a:r>
-              <a:rPr sz="1300"/>
-              <a:t>    • Yatmadan önce ekran kullanma</a:t>
-            </a:r>
-          </a:p>
-          <a:p>
-            <a:pPr lvl="1">
-              <a:lnSpc>
-                <a:spcPct val="90000"/>
-              </a:lnSpc>
-              <a:spcAft>
-                <a:spcPts val="300"/>
-              </a:spcAft>
-              <a:defRPr sz="1800"/>
-            </a:pPr>
-            <a:r>
-              <a:rPr sz="1300"/>
-              <a:t>    • Telefon/tableti yatak odasında bırakma</a:t>
-            </a:r>
-          </a:p>
-          <a:p>
-            <a:pPr>
-              <a:lnSpc>
-                <a:spcPct val="90000"/>
-              </a:lnSpc>
-              <a:spcAft>
-                <a:spcPts val="300"/>
-              </a:spcAft>
-              <a:defRPr sz="2000"/>
-            </a:pPr>
-          </a:p>
-          <a:p>
-            <a:pPr>
-              <a:lnSpc>
-                <a:spcPct val="90000"/>
-              </a:lnSpc>
-              <a:spcAft>
-                <a:spcPts val="300"/>
-              </a:spcAft>
-              <a:defRPr sz="2000"/>
-            </a:pPr>
-            <a:r>
-              <a:rPr sz="1300"/>
-              <a:t>👨‍👩‍👧 Aile Zamanı:</a:t>
-            </a:r>
-          </a:p>
-          <a:p>
-            <a:pPr lvl="1">
-              <a:lnSpc>
-                <a:spcPct val="90000"/>
-              </a:lnSpc>
-              <a:spcAft>
-                <a:spcPts val="300"/>
-              </a:spcAft>
-              <a:defRPr sz="1800"/>
-            </a:pPr>
-            <a:r>
-              <a:rPr sz="1300"/>
-              <a:t>    • Yemekte telefon yok</a:t>
-            </a:r>
-          </a:p>
-          <a:p>
-            <a:pPr lvl="1">
-              <a:lnSpc>
-                <a:spcPct val="90000"/>
-              </a:lnSpc>
-              <a:spcAft>
-                <a:spcPts val="300"/>
-              </a:spcAft>
-              <a:defRPr sz="1800"/>
-            </a:pPr>
-            <a:r>
-              <a:rPr sz="1300"/>
-              <a:t>    • Aile ile vakit geçir</a:t>
-            </a:r>
-          </a:p>
-          <a:p>
-            <a:pPr>
-              <a:lnSpc>
-                <a:spcPct val="90000"/>
-              </a:lnSpc>
-              <a:spcAft>
-                <a:spcPts val="300"/>
-              </a:spcAft>
-              <a:defRPr sz="2000"/>
-            </a:pPr>
-          </a:p>
-          <a:p>
-            <a:pPr>
-              <a:lnSpc>
-                <a:spcPct val="90000"/>
-              </a:lnSpc>
-              <a:spcAft>
-                <a:spcPts val="300"/>
-              </a:spcAft>
-              <a:defRPr sz="2000"/>
-            </a:pPr>
-            <a:r>
-              <a:rPr sz="1300"/>
-              <a:t>🏃 Fiziksel Aktivite:</a:t>
-            </a:r>
-          </a:p>
-          <a:p>
-            <a:pPr lvl="1">
-              <a:lnSpc>
-                <a:spcPct val="90000"/>
-              </a:lnSpc>
-              <a:spcAft>
-                <a:spcPts val="300"/>
-              </a:spcAft>
-              <a:defRPr sz="1800"/>
-            </a:pPr>
-            <a:r>
-              <a:rPr sz="1300"/>
-              <a:t>    • Dışarı çık, spor yap</a:t>
-            </a:r>
-          </a:p>
-          <a:p>
-            <a:pPr lvl="1">
-              <a:lnSpc>
-                <a:spcPct val="90000"/>
-              </a:lnSpc>
-              <a:spcAft>
-                <a:spcPts val="300"/>
-              </a:spcAft>
-              <a:defRPr sz="1800"/>
-            </a:pPr>
-            <a:r>
-              <a:rPr sz="1300"/>
-              <a:t>    • Arkadaşlarla yüz yüze oyna</a:t>
-            </a:r>
-          </a:p>
-          <a:p>
-            <a:pPr>
-              <a:lnSpc>
-                <a:spcPct val="90000"/>
-              </a:lnSpc>
-              <a:spcAft>
-                <a:spcPts val="300"/>
-              </a:spcAft>
-              <a:defRPr sz="2000"/>
-            </a:pPr>
-          </a:p>
-          <a:p>
-            <a:pPr>
-              <a:lnSpc>
-                <a:spcPct val="90000"/>
-              </a:lnSpc>
-              <a:spcAft>
-                <a:spcPts val="300"/>
-              </a:spcAft>
-              <a:defRPr sz="2000"/>
-            </a:pPr>
-            <a:r>
-              <a:rPr sz="1300"/>
-              <a:t>📚 Ödev ve Okul:</a:t>
-            </a:r>
-          </a:p>
-          <a:p>
-            <a:pPr lvl="1">
-              <a:lnSpc>
-                <a:spcPct val="90000"/>
-              </a:lnSpc>
-              <a:spcAft>
-                <a:spcPts val="300"/>
-              </a:spcAft>
-              <a:defRPr sz="1800"/>
-            </a:pPr>
-            <a:r>
-              <a:rPr sz="1300"/>
-              <a:t>    • Önce ödevler</a:t>
-            </a:r>
-          </a:p>
-          <a:p>
-            <a:pPr lvl="1">
-              <a:lnSpc>
-                <a:spcPct val="90000"/>
-              </a:lnSpc>
-              <a:spcAft>
-                <a:spcPts val="300"/>
-              </a:spcAft>
-              <a:defRPr sz="1800"/>
-            </a:pPr>
-            <a:r>
-              <a:rPr sz="1300"/>
-              <a:t>    • Eğitsel içerikler izle</a:t>
-            </a:r>
-          </a:p>
-          <a:p>
-            <a:pPr>
-              <a:lnSpc>
-                <a:spcPct val="90000"/>
-              </a:lnSpc>
-              <a:spcAft>
-                <a:spcPts val="300"/>
-              </a:spcAft>
-              <a:defRPr sz="2000"/>
-            </a:pPr>
-          </a:p>
-          <a:p>
-            <a:pPr>
-              <a:lnSpc>
-                <a:spcPct val="90000"/>
-              </a:lnSpc>
-              <a:spcAft>
-                <a:spcPts val="300"/>
-              </a:spcAft>
-              <a:defRPr sz="2000" b="1"/>
-            </a:pPr>
-            <a:r>
-              <a:rPr sz="1300"/>
               <a:t>💡 20-20-20 Kuralı:</a:t>
             </a:r>
           </a:p>
           <a:p>
             <a:pPr>
               <a:lnSpc>
-                <a:spcPct val="90000"/>
-              </a:lnSpc>
-              <a:spcAft>
-                <a:spcPts val="300"/>
+                <a:spcPct val="85000"/>
+              </a:lnSpc>
+              <a:spcBef>
+                <a:spcPts val="200"/>
+              </a:spcBef>
+              <a:spcAft>
+                <a:spcPts val="200"/>
               </a:spcAft>
               <a:defRPr sz="2000"/>
             </a:pPr>
@@ -9538,10 +10109,19 @@
         </p:nvSpPr>
         <p:spPr/>
         <p:txBody>
-          <a:bodyPr wrap="square"/>
+          <a:bodyPr wrap="square" tIns="25400" bIns="25400" lIns="63500" rIns="63500"/>
           <a:lstStyle/>
           <a:p>
             <a:pPr>
+              <a:lnSpc>
+                <a:spcPct val="85000"/>
+              </a:lnSpc>
+              <a:spcBef>
+                <a:spcPts val="200"/>
+              </a:spcBef>
+              <a:spcAft>
+                <a:spcPts val="200"/>
+              </a:spcAft>
               <a:defRPr sz="4000" b="1">
                 <a:solidFill>
                   <a:srgbClr val="667EEA"/>
@@ -9549,6 +10129,7 @@
               </a:defRPr>
             </a:pPr>
             <a:r>
+              <a:rPr/>
               <a:t>📝 Ünite Özeti</a:t>
             </a:r>
           </a:p>
@@ -9588,7 +10169,7 @@
           <a:noFill/>
         </p:spPr>
         <p:txBody>
-          <a:bodyPr wrap="square">
+          <a:bodyPr wrap="square" tIns="25400" bIns="25400" lIns="63500" rIns="63500">
             <a:spAutoFit/>
           </a:bodyPr>
           <a:lstStyle/>
@@ -9605,10 +10186,13 @@
           <a:p>
             <a:pPr>
               <a:lnSpc>
-                <a:spcPct val="90000"/>
-              </a:lnSpc>
-              <a:spcAft>
-                <a:spcPts val="300"/>
+                <a:spcPct val="85000"/>
+              </a:lnSpc>
+              <a:spcBef>
+                <a:spcPts val="200"/>
+              </a:spcBef>
+              <a:spcAft>
+                <a:spcPts val="200"/>
               </a:spcAft>
               <a:defRPr sz="2000"/>
             </a:pPr>
@@ -9631,10 +10215,13 @@
           <a:p>
             <a:pPr>
               <a:lnSpc>
-                <a:spcPct val="90000"/>
-              </a:lnSpc>
-              <a:spcAft>
-                <a:spcPts val="300"/>
+                <a:spcPct val="85000"/>
+              </a:lnSpc>
+              <a:spcBef>
+                <a:spcPts val="200"/>
+              </a:spcBef>
+              <a:spcAft>
+                <a:spcPts val="200"/>
               </a:spcAft>
               <a:defRPr sz="2000" b="1"/>
             </a:pPr>
@@ -9646,10 +10233,13 @@
           <a:p>
             <a:pPr>
               <a:lnSpc>
-                <a:spcPct val="90000"/>
-              </a:lnSpc>
-              <a:spcAft>
-                <a:spcPts val="300"/>
+                <a:spcPct val="85000"/>
+              </a:lnSpc>
+              <a:spcBef>
+                <a:spcPts val="200"/>
+              </a:spcBef>
+              <a:spcAft>
+                <a:spcPts val="200"/>
               </a:spcAft>
               <a:defRPr sz="2000" b="1"/>
             </a:pPr>
@@ -9661,10 +10251,13 @@
           <a:p>
             <a:pPr>
               <a:lnSpc>
-                <a:spcPct val="90000"/>
-              </a:lnSpc>
-              <a:spcAft>
-                <a:spcPts val="300"/>
+                <a:spcPct val="85000"/>
+              </a:lnSpc>
+              <a:spcBef>
+                <a:spcPts val="200"/>
+              </a:spcBef>
+              <a:spcAft>
+                <a:spcPts val="200"/>
               </a:spcAft>
               <a:defRPr sz="2000" b="1"/>
             </a:pPr>
@@ -9676,10 +10269,13 @@
           <a:p>
             <a:pPr>
               <a:lnSpc>
-                <a:spcPct val="90000"/>
-              </a:lnSpc>
-              <a:spcAft>
-                <a:spcPts val="300"/>
+                <a:spcPct val="85000"/>
+              </a:lnSpc>
+              <a:spcBef>
+                <a:spcPts val="200"/>
+              </a:spcBef>
+              <a:spcAft>
+                <a:spcPts val="200"/>
               </a:spcAft>
               <a:defRPr sz="2000" b="1"/>
             </a:pPr>
@@ -9691,10 +10287,13 @@
           <a:p>
             <a:pPr>
               <a:lnSpc>
-                <a:spcPct val="90000"/>
-              </a:lnSpc>
-              <a:spcAft>
-                <a:spcPts val="300"/>
+                <a:spcPct val="85000"/>
+              </a:lnSpc>
+              <a:spcBef>
+                <a:spcPts val="200"/>
+              </a:spcBef>
+              <a:spcAft>
+                <a:spcPts val="200"/>
               </a:spcAft>
               <a:defRPr sz="2000" b="1"/>
             </a:pPr>
@@ -9706,10 +10305,13 @@
           <a:p>
             <a:pPr>
               <a:lnSpc>
-                <a:spcPct val="90000"/>
-              </a:lnSpc>
-              <a:spcAft>
-                <a:spcPts val="300"/>
+                <a:spcPct val="85000"/>
+              </a:lnSpc>
+              <a:spcBef>
+                <a:spcPts val="200"/>
+              </a:spcBef>
+              <a:spcAft>
+                <a:spcPts val="200"/>
               </a:spcAft>
               <a:defRPr sz="2000" b="1"/>
             </a:pPr>
@@ -9721,10 +10323,13 @@
           <a:p>
             <a:pPr>
               <a:lnSpc>
-                <a:spcPct val="90000"/>
-              </a:lnSpc>
-              <a:spcAft>
-                <a:spcPts val="300"/>
+                <a:spcPct val="85000"/>
+              </a:lnSpc>
+              <a:spcBef>
+                <a:spcPts val="200"/>
+              </a:spcBef>
+              <a:spcAft>
+                <a:spcPts val="200"/>
               </a:spcAft>
               <a:defRPr sz="2000" b="1"/>
             </a:pPr>
@@ -9736,10 +10341,13 @@
           <a:p>
             <a:pPr>
               <a:lnSpc>
-                <a:spcPct val="90000"/>
-              </a:lnSpc>
-              <a:spcAft>
-                <a:spcPts val="300"/>
+                <a:spcPct val="85000"/>
+              </a:lnSpc>
+              <a:spcBef>
+                <a:spcPts val="200"/>
+              </a:spcBef>
+              <a:spcAft>
+                <a:spcPts val="200"/>
               </a:spcAft>
               <a:defRPr sz="2000" b="1"/>
             </a:pPr>
@@ -9751,10 +10359,13 @@
           <a:p>
             <a:pPr>
               <a:lnSpc>
-                <a:spcPct val="90000"/>
-              </a:lnSpc>
-              <a:spcAft>
-                <a:spcPts val="300"/>
+                <a:spcPct val="85000"/>
+              </a:lnSpc>
+              <a:spcBef>
+                <a:spcPts val="200"/>
+              </a:spcBef>
+              <a:spcAft>
+                <a:spcPts val="200"/>
               </a:spcAft>
               <a:defRPr sz="2000" b="1"/>
             </a:pPr>
@@ -9766,10 +10377,13 @@
           <a:p>
             <a:pPr>
               <a:lnSpc>
-                <a:spcPct val="90000"/>
-              </a:lnSpc>
-              <a:spcAft>
-                <a:spcPts val="300"/>
+                <a:spcPct val="85000"/>
+              </a:lnSpc>
+              <a:spcBef>
+                <a:spcPts val="200"/>
+              </a:spcBef>
+              <a:spcAft>
+                <a:spcPts val="200"/>
               </a:spcAft>
               <a:defRPr sz="2000" b="1"/>
             </a:pPr>
@@ -9781,10 +10395,13 @@
           <a:p>
             <a:pPr>
               <a:lnSpc>
-                <a:spcPct val="90000"/>
-              </a:lnSpc>
-              <a:spcAft>
-                <a:spcPts val="300"/>
+                <a:spcPct val="85000"/>
+              </a:lnSpc>
+              <a:spcBef>
+                <a:spcPts val="200"/>
+              </a:spcBef>
+              <a:spcAft>
+                <a:spcPts val="200"/>
               </a:spcAft>
               <a:defRPr sz="2000" b="1"/>
             </a:pPr>
@@ -9796,10 +10413,13 @@
           <a:p>
             <a:pPr>
               <a:lnSpc>
-                <a:spcPct val="90000"/>
-              </a:lnSpc>
-              <a:spcAft>
-                <a:spcPts val="300"/>
+                <a:spcPct val="85000"/>
+              </a:lnSpc>
+              <a:spcBef>
+                <a:spcPts val="200"/>
+              </a:spcBef>
+              <a:spcAft>
+                <a:spcPts val="200"/>
               </a:spcAft>
               <a:defRPr sz="2000" b="1"/>
             </a:pPr>
@@ -9822,10 +10442,13 @@
           <a:p>
             <a:pPr>
               <a:lnSpc>
-                <a:spcPct val="90000"/>
-              </a:lnSpc>
-              <a:spcAft>
-                <a:spcPts val="300"/>
+                <a:spcPct val="85000"/>
+              </a:lnSpc>
+              <a:spcBef>
+                <a:spcPts val="200"/>
+              </a:spcBef>
+              <a:spcAft>
+                <a:spcPts val="200"/>
               </a:spcAft>
               <a:defRPr sz="2000" b="1"/>
             </a:pPr>
@@ -9837,10 +10460,13 @@
           <a:p>
             <a:pPr>
               <a:lnSpc>
-                <a:spcPct val="90000"/>
-              </a:lnSpc>
-              <a:spcAft>
-                <a:spcPts val="300"/>
+                <a:spcPct val="85000"/>
+              </a:lnSpc>
+              <a:spcBef>
+                <a:spcPts val="200"/>
+              </a:spcBef>
+              <a:spcAft>
+                <a:spcPts val="200"/>
               </a:spcAft>
               <a:defRPr sz="2000"/>
             </a:pPr>
@@ -9863,10 +10489,13 @@
           <a:p>
             <a:pPr>
               <a:lnSpc>
-                <a:spcPct val="90000"/>
-              </a:lnSpc>
-              <a:spcAft>
-                <a:spcPts val="300"/>
+                <a:spcPct val="85000"/>
+              </a:lnSpc>
+              <a:spcBef>
+                <a:spcPts val="200"/>
+              </a:spcBef>
+              <a:spcAft>
+                <a:spcPts val="200"/>
               </a:spcAft>
               <a:defRPr sz="2000" b="1"/>
             </a:pPr>
@@ -9907,10 +10536,19 @@
         </p:nvSpPr>
         <p:spPr/>
         <p:txBody>
-          <a:bodyPr wrap="square"/>
+          <a:bodyPr wrap="square" tIns="25400" bIns="25400" lIns="63500" rIns="63500"/>
           <a:lstStyle/>
           <a:p>
             <a:pPr>
+              <a:lnSpc>
+                <a:spcPct val="85000"/>
+              </a:lnSpc>
+              <a:spcBef>
+                <a:spcPts val="200"/>
+              </a:spcBef>
+              <a:spcAft>
+                <a:spcPts val="200"/>
+              </a:spcAft>
               <a:defRPr sz="4000" b="1">
                 <a:solidFill>
                   <a:srgbClr val="667EEA"/>
@@ -9918,6 +10556,7 @@
               </a:defRPr>
             </a:pPr>
             <a:r>
+              <a:rPr/>
               <a:t>📚 Kaynaklar ve Videolar</a:t>
             </a:r>
           </a:p>
@@ -9957,7 +10596,7 @@
           <a:noFill/>
         </p:spPr>
         <p:txBody>
-          <a:bodyPr wrap="square">
+          <a:bodyPr wrap="square" tIns="25400" bIns="25400" lIns="63500" rIns="63500">
             <a:spAutoFit/>
           </a:bodyPr>
           <a:lstStyle/>
@@ -9974,6 +10613,24 @@
           <a:p>
             <a:pPr>
               <a:lnSpc>
+                <a:spcPct val="85000"/>
+              </a:lnSpc>
+              <a:spcBef>
+                <a:spcPts val="200"/>
+              </a:spcBef>
+              <a:spcAft>
+                <a:spcPts val="200"/>
+              </a:spcAft>
+              <a:defRPr sz="2000"/>
+            </a:pPr>
+            <a:r>
+              <a:rPr sz="1300"/>
+              <a:t>Daha fazla öğrenmek için:</a:t>
+            </a:r>
+          </a:p>
+          <a:p>
+            <a:pPr>
+              <a:lnSpc>
                 <a:spcPct val="90000"/>
               </a:lnSpc>
               <a:spcAft>
@@ -9981,9 +10638,95 @@
               </a:spcAft>
               <a:defRPr sz="2000"/>
             </a:pPr>
-            <a:r>
-              <a:rPr sz="1300"/>
-              <a:t>Daha fazla öğrenmek için:</a:t>
+          </a:p>
+          <a:p>
+            <a:pPr>
+              <a:lnSpc>
+                <a:spcPct val="85000"/>
+              </a:lnSpc>
+              <a:spcBef>
+                <a:spcPts val="200"/>
+              </a:spcBef>
+              <a:spcAft>
+                <a:spcPts val="200"/>
+              </a:spcAft>
+              <a:defRPr sz="2000"/>
+            </a:pPr>
+            <a:r>
+              <a:rPr sz="1300"/>
+              <a:t>🎥 İzlenecek Videolar:</a:t>
+            </a:r>
+          </a:p>
+          <a:p>
+            <a:pPr lvl="1">
+              <a:lnSpc>
+                <a:spcPct val="85000"/>
+              </a:lnSpc>
+              <a:spcBef>
+                <a:spcPts val="200"/>
+              </a:spcBef>
+              <a:spcAft>
+                <a:spcPts val="200"/>
+              </a:spcAft>
+              <a:defRPr sz="1800"/>
+            </a:pPr>
+            <a:r>
+              <a:rPr sz="1300"/>
+              <a:t>    • 'İnternet Nasıl Çalışır?' - TRT Okul</a:t>
+            </a:r>
+          </a:p>
+          <a:p>
+            <a:pPr lvl="1">
+              <a:lnSpc>
+                <a:spcPct val="85000"/>
+              </a:lnSpc>
+              <a:spcBef>
+                <a:spcPts val="200"/>
+              </a:spcBef>
+              <a:spcAft>
+                <a:spcPts val="200"/>
+              </a:spcAft>
+              <a:defRPr sz="1800"/>
+            </a:pPr>
+            <a:r>
+              <a:rPr sz="1300"/>
+              <a:t>    • 'IP Adresi Nedir?' - Animasyonlu anlatım</a:t>
+            </a:r>
+          </a:p>
+          <a:p>
+            <a:pPr lvl="1">
+              <a:lnSpc>
+                <a:spcPct val="85000"/>
+              </a:lnSpc>
+              <a:spcBef>
+                <a:spcPts val="200"/>
+              </a:spcBef>
+              <a:spcAft>
+                <a:spcPts val="200"/>
+              </a:spcAft>
+              <a:defRPr sz="1800"/>
+            </a:pPr>
+            <a:r>
+              <a:rPr sz="1300"/>
+              <a:t>    • 'Güvenli İnternet Kullanımı' - MEB videoları</a:t>
+            </a:r>
+          </a:p>
+          <a:p>
+            <a:pPr lvl="1">
+              <a:lnSpc>
+                <a:spcPct val="85000"/>
+              </a:lnSpc>
+              <a:spcBef>
+                <a:spcPts val="200"/>
+              </a:spcBef>
+              <a:spcAft>
+                <a:spcPts val="200"/>
+              </a:spcAft>
+              <a:defRPr sz="1800"/>
+            </a:pPr>
+            <a:r>
+              <a:rPr sz="1300"/>
+              <a:t>    • 'Siber Zorbalığa Hayır' - Kısa film</a:t>
             </a:r>
           </a:p>
           <a:p>
@@ -10000,6 +10743,60 @@
           <a:p>
             <a:pPr>
               <a:lnSpc>
+                <a:spcPct val="85000"/>
+              </a:lnSpc>
+              <a:spcBef>
+                <a:spcPts val="200"/>
+              </a:spcBef>
+              <a:spcAft>
+                <a:spcPts val="200"/>
+              </a:spcAft>
+              <a:defRPr sz="2000"/>
+            </a:pPr>
+            <a:r>
+              <a:rPr sz="1300"/>
+              <a:t>🌐 Keşfedilecek Siteler:</a:t>
+            </a:r>
+          </a:p>
+          <a:p>
+            <a:pPr lvl="1">
+              <a:lnSpc>
+                <a:spcPct val="85000"/>
+              </a:lnSpc>
+              <a:spcBef>
+                <a:spcPts val="200"/>
+              </a:spcBef>
+              <a:spcAft>
+                <a:spcPts val="200"/>
+              </a:spcAft>
+              <a:defRPr sz="1800"/>
+            </a:pPr>
+            <a:r>
+              <a:rPr sz="1300"/>
+              <a:t>    • https://guvenliweb.org.tr</a:t>
+            </a:r>
+          </a:p>
+          <a:p>
+            <a:pPr lvl="1">
+              <a:lnSpc>
+                <a:spcPct val="85000"/>
+              </a:lnSpc>
+              <a:spcBef>
+                <a:spcPts val="200"/>
+              </a:spcBef>
+              <a:spcAft>
+                <a:spcPts val="200"/>
+              </a:spcAft>
+              <a:defRPr sz="1800"/>
+            </a:pPr>
+            <a:r>
+              <a:rPr sz="1300"/>
+              <a:t>    • https://internetguvenlik.org</a:t>
+            </a:r>
+          </a:p>
+          <a:p>
+            <a:pPr>
+              <a:lnSpc>
                 <a:spcPct val="90000"/>
               </a:lnSpc>
               <a:spcAft>
@@ -10007,257 +10804,147 @@
               </a:spcAft>
               <a:defRPr sz="2000"/>
             </a:pPr>
-            <a:r>
-              <a:rPr sz="1300"/>
-              <a:t>🎥 İzlenecek Videolar:</a:t>
-            </a:r>
-          </a:p>
-          <a:p>
-            <a:pPr lvl="1">
+          </a:p>
+          <a:p>
+            <a:pPr>
+              <a:lnSpc>
+                <a:spcPct val="85000"/>
+              </a:lnSpc>
+              <a:spcBef>
+                <a:spcPts val="200"/>
+              </a:spcBef>
+              <a:spcAft>
+                <a:spcPts val="200"/>
+              </a:spcAft>
+              <a:defRPr sz="2000"/>
+            </a:pPr>
+            <a:r>
+              <a:rPr sz="1300"/>
+              <a:t>🎮 Eğitici Oyunlar:</a:t>
+            </a:r>
+          </a:p>
+          <a:p>
+            <a:pPr lvl="1">
+              <a:lnSpc>
+                <a:spcPct val="85000"/>
+              </a:lnSpc>
+              <a:spcBef>
+                <a:spcPts val="200"/>
+              </a:spcBef>
+              <a:spcAft>
+                <a:spcPts val="200"/>
+              </a:spcAft>
+              <a:defRPr sz="1800"/>
+            </a:pPr>
+            <a:r>
+              <a:rPr sz="1300"/>
+              <a:t>    • 'İnternet Güvenliği Kahramanları' oyunu</a:t>
+            </a:r>
+          </a:p>
+          <a:p>
+            <a:pPr>
               <a:lnSpc>
                 <a:spcPct val="90000"/>
               </a:lnSpc>
               <a:spcAft>
                 <a:spcPts val="300"/>
               </a:spcAft>
-              <a:defRPr sz="1800"/>
-            </a:pPr>
-            <a:r>
-              <a:rPr sz="1300"/>
-              <a:t>    • 'İnternet Nasıl Çalışır?' - TRT Okul</a:t>
-            </a:r>
-          </a:p>
-          <a:p>
-            <a:pPr lvl="1">
+              <a:defRPr sz="2000"/>
+            </a:pPr>
+          </a:p>
+          <a:p>
+            <a:pPr>
+              <a:lnSpc>
+                <a:spcPct val="85000"/>
+              </a:lnSpc>
+              <a:spcBef>
+                <a:spcPts val="200"/>
+              </a:spcBef>
+              <a:spcAft>
+                <a:spcPts val="200"/>
+              </a:spcAft>
+              <a:defRPr sz="2000"/>
+            </a:pPr>
+            <a:r>
+              <a:rPr sz="1300"/>
+              <a:t>📖 Yapılacak Aktiviteler:</a:t>
+            </a:r>
+          </a:p>
+          <a:p>
+            <a:pPr lvl="1">
+              <a:lnSpc>
+                <a:spcPct val="85000"/>
+              </a:lnSpc>
+              <a:spcBef>
+                <a:spcPts val="200"/>
+              </a:spcBef>
+              <a:spcAft>
+                <a:spcPts val="200"/>
+              </a:spcAft>
+              <a:defRPr sz="1800"/>
+            </a:pPr>
+            <a:r>
+              <a:rPr sz="1300"/>
+              <a:t>    • Güçlü şifre oluşturma yarışması</a:t>
+            </a:r>
+          </a:p>
+          <a:p>
+            <a:pPr lvl="1">
+              <a:lnSpc>
+                <a:spcPct val="85000"/>
+              </a:lnSpc>
+              <a:spcBef>
+                <a:spcPts val="200"/>
+              </a:spcBef>
+              <a:spcAft>
+                <a:spcPts val="200"/>
+              </a:spcAft>
+              <a:defRPr sz="1800"/>
+            </a:pPr>
+            <a:r>
+              <a:rPr sz="1300"/>
+              <a:t>    • Arama motoru kullanım yarışması</a:t>
+            </a:r>
+          </a:p>
+          <a:p>
+            <a:pPr lvl="1">
+              <a:lnSpc>
+                <a:spcPct val="85000"/>
+              </a:lnSpc>
+              <a:spcBef>
+                <a:spcPts val="200"/>
+              </a:spcBef>
+              <a:spcAft>
+                <a:spcPts val="200"/>
+              </a:spcAft>
+              <a:defRPr sz="1800"/>
+            </a:pPr>
+            <a:r>
+              <a:rPr sz="1300"/>
+              <a:t>    • E-posta yazma pratiği</a:t>
+            </a:r>
+          </a:p>
+          <a:p>
+            <a:pPr>
               <a:lnSpc>
                 <a:spcPct val="90000"/>
               </a:lnSpc>
               <a:spcAft>
                 <a:spcPts val="300"/>
               </a:spcAft>
-              <a:defRPr sz="1800"/>
-            </a:pPr>
-            <a:r>
-              <a:rPr sz="1300"/>
-              <a:t>    • 'IP Adresi Nedir?' - Animasyonlu anlatım</a:t>
-            </a:r>
-          </a:p>
-          <a:p>
-            <a:pPr lvl="1">
-              <a:lnSpc>
-                <a:spcPct val="90000"/>
-              </a:lnSpc>
-              <a:spcAft>
-                <a:spcPts val="300"/>
-              </a:spcAft>
-              <a:defRPr sz="1800"/>
-            </a:pPr>
-            <a:r>
-              <a:rPr sz="1300"/>
-              <a:t>    • 'Güvenli İnternet Kullanımı' - MEB videoları</a:t>
-            </a:r>
-          </a:p>
-          <a:p>
-            <a:pPr lvl="1">
-              <a:lnSpc>
-                <a:spcPct val="90000"/>
-              </a:lnSpc>
-              <a:spcAft>
-                <a:spcPts val="300"/>
-              </a:spcAft>
-              <a:defRPr sz="1800"/>
-            </a:pPr>
-            <a:r>
-              <a:rPr sz="1300"/>
-              <a:t>    • 'Siber Zorbalığa Hayır' - Kısa film</a:t>
-            </a:r>
-          </a:p>
-          <a:p>
-            <a:pPr>
-              <a:lnSpc>
-                <a:spcPct val="90000"/>
-              </a:lnSpc>
-              <a:spcAft>
-                <a:spcPts val="300"/>
-              </a:spcAft>
-              <a:defRPr sz="2000"/>
-            </a:pPr>
-          </a:p>
-          <a:p>
-            <a:pPr>
-              <a:lnSpc>
-                <a:spcPct val="90000"/>
-              </a:lnSpc>
-              <a:spcAft>
-                <a:spcPts val="300"/>
-              </a:spcAft>
-              <a:defRPr sz="2000"/>
-            </a:pPr>
-            <a:r>
-              <a:rPr sz="1300"/>
-              <a:t>🌐 Keşfedilecek Siteler:</a:t>
-            </a:r>
-          </a:p>
-          <a:p>
-            <a:pPr lvl="1">
-              <a:lnSpc>
-                <a:spcPct val="90000"/>
-              </a:lnSpc>
-              <a:spcAft>
-                <a:spcPts val="300"/>
-              </a:spcAft>
-              <a:defRPr sz="1800"/>
-            </a:pPr>
-            <a:r>
-              <a:rPr sz="1300"/>
-              <a:t>    • https://guvenliweb.org.tr</a:t>
-            </a:r>
-          </a:p>
-          <a:p>
-            <a:pPr lvl="1">
-              <a:lnSpc>
-                <a:spcPct val="90000"/>
-              </a:lnSpc>
-              <a:spcAft>
-                <a:spcPts val="300"/>
-              </a:spcAft>
-              <a:defRPr sz="1800"/>
-            </a:pPr>
-            <a:r>
-              <a:rPr sz="1300"/>
-              <a:t>    • https://internetguvenlik.org</a:t>
-            </a:r>
-          </a:p>
-          <a:p>
-            <a:pPr>
-              <a:lnSpc>
-                <a:spcPct val="90000"/>
-              </a:lnSpc>
-              <a:spcAft>
-                <a:spcPts val="300"/>
-              </a:spcAft>
-              <a:defRPr sz="2000"/>
-            </a:pPr>
-          </a:p>
-          <a:p>
-            <a:pPr>
-              <a:lnSpc>
-                <a:spcPct val="90000"/>
-              </a:lnSpc>
-              <a:spcAft>
-                <a:spcPts val="300"/>
-              </a:spcAft>
-              <a:defRPr sz="2000"/>
-            </a:pPr>
-            <a:r>
-              <a:rPr sz="1300"/>
-              <a:t>🎮 Eğitici Oyunlar:</a:t>
-            </a:r>
-          </a:p>
-          <a:p>
-            <a:pPr lvl="1">
-              <a:lnSpc>
-                <a:spcPct val="90000"/>
-              </a:lnSpc>
-              <a:spcAft>
-                <a:spcPts val="300"/>
-              </a:spcAft>
-              <a:defRPr sz="1800"/>
-            </a:pPr>
-            <a:r>
-              <a:rPr sz="1300"/>
-              <a:t>    • 'İnternet Güvenliği Kahramanları' oyunu</a:t>
-            </a:r>
-          </a:p>
-          <a:p>
-            <a:pPr>
-              <a:lnSpc>
-                <a:spcPct val="90000"/>
-              </a:lnSpc>
-              <a:spcAft>
-                <a:spcPts val="300"/>
-              </a:spcAft>
-              <a:defRPr sz="2000"/>
-            </a:pPr>
-          </a:p>
-          <a:p>
-            <a:pPr>
-              <a:lnSpc>
-                <a:spcPct val="90000"/>
-              </a:lnSpc>
-              <a:spcAft>
-                <a:spcPts val="300"/>
-              </a:spcAft>
-              <a:defRPr sz="2000"/>
-            </a:pPr>
-            <a:r>
-              <a:rPr sz="1300"/>
-              <a:t>📖 Yapılacak Aktiviteler:</a:t>
-            </a:r>
-          </a:p>
-          <a:p>
-            <a:pPr lvl="1">
-              <a:lnSpc>
-                <a:spcPct val="90000"/>
-              </a:lnSpc>
-              <a:spcAft>
-                <a:spcPts val="300"/>
-              </a:spcAft>
-              <a:defRPr sz="1800"/>
-            </a:pPr>
-            <a:r>
-              <a:rPr sz="1300"/>
-              <a:t>    • Güçlü şifre oluşturma yarışması</a:t>
-            </a:r>
-          </a:p>
-          <a:p>
-            <a:pPr lvl="1">
-              <a:lnSpc>
-                <a:spcPct val="90000"/>
-              </a:lnSpc>
-              <a:spcAft>
-                <a:spcPts val="300"/>
-              </a:spcAft>
-              <a:defRPr sz="1800"/>
-            </a:pPr>
-            <a:r>
-              <a:rPr sz="1300"/>
-              <a:t>    • Arama motoru kullanım yarışması</a:t>
-            </a:r>
-          </a:p>
-          <a:p>
-            <a:pPr lvl="1">
-              <a:lnSpc>
-                <a:spcPct val="90000"/>
-              </a:lnSpc>
-              <a:spcAft>
-                <a:spcPts val="300"/>
-              </a:spcAft>
-              <a:defRPr sz="1800"/>
-            </a:pPr>
-            <a:r>
-              <a:rPr sz="1300"/>
-              <a:t>    • E-posta yazma pratiği</a:t>
-            </a:r>
-          </a:p>
-          <a:p>
-            <a:pPr>
-              <a:lnSpc>
-                <a:spcPct val="90000"/>
-              </a:lnSpc>
-              <a:spcAft>
-                <a:spcPts val="300"/>
-              </a:spcAft>
-              <a:defRPr sz="2000"/>
-            </a:pPr>
-          </a:p>
-          <a:p>
-            <a:pPr>
-              <a:lnSpc>
-                <a:spcPct val="90000"/>
-              </a:lnSpc>
-              <a:spcAft>
-                <a:spcPts val="300"/>
+              <a:defRPr sz="2000"/>
+            </a:pPr>
+          </a:p>
+          <a:p>
+            <a:pPr>
+              <a:lnSpc>
+                <a:spcPct val="85000"/>
+              </a:lnSpc>
+              <a:spcBef>
+                <a:spcPts val="200"/>
+              </a:spcBef>
+              <a:spcAft>
+                <a:spcPts val="200"/>
               </a:spcAft>
               <a:defRPr sz="2000" b="1"/>
             </a:pPr>
@@ -10298,10 +10985,19 @@
         </p:nvSpPr>
         <p:spPr/>
         <p:txBody>
-          <a:bodyPr wrap="square"/>
+          <a:bodyPr wrap="square" tIns="25400" bIns="25400" lIns="63500" rIns="63500"/>
           <a:lstStyle/>
           <a:p>
             <a:pPr>
+              <a:lnSpc>
+                <a:spcPct val="85000"/>
+              </a:lnSpc>
+              <a:spcBef>
+                <a:spcPts val="200"/>
+              </a:spcBef>
+              <a:spcAft>
+                <a:spcPts val="200"/>
+              </a:spcAft>
               <a:defRPr sz="4000" b="1">
                 <a:solidFill>
                   <a:srgbClr val="667EEA"/>
@@ -10309,6 +11005,7 @@
               </a:defRPr>
             </a:pPr>
             <a:r>
+              <a:rPr/>
               <a:t>📚 Ünitenin Konuları</a:t>
             </a:r>
           </a:p>
@@ -10348,7 +11045,7 @@
           <a:noFill/>
         </p:spPr>
         <p:txBody>
-          <a:bodyPr wrap="square">
+          <a:bodyPr wrap="square" tIns="25400" bIns="25400" lIns="63500" rIns="63500">
             <a:spAutoFit/>
           </a:bodyPr>
           <a:lstStyle/>
@@ -10365,10 +11062,13 @@
           <a:p>
             <a:pPr>
               <a:lnSpc>
-                <a:spcPct val="90000"/>
-              </a:lnSpc>
-              <a:spcAft>
-                <a:spcPts val="300"/>
+                <a:spcPct val="85000"/>
+              </a:lnSpc>
+              <a:spcBef>
+                <a:spcPts val="200"/>
+              </a:spcBef>
+              <a:spcAft>
+                <a:spcPts val="200"/>
               </a:spcAft>
               <a:defRPr sz="2000"/>
             </a:pPr>
@@ -10391,10 +11091,13 @@
           <a:p>
             <a:pPr>
               <a:lnSpc>
-                <a:spcPct val="90000"/>
-              </a:lnSpc>
-              <a:spcAft>
-                <a:spcPts val="300"/>
+                <a:spcPct val="85000"/>
+              </a:lnSpc>
+              <a:spcBef>
+                <a:spcPts val="200"/>
+              </a:spcBef>
+              <a:spcAft>
+                <a:spcPts val="200"/>
               </a:spcAft>
               <a:defRPr sz="2000" b="1"/>
             </a:pPr>
@@ -10406,10 +11109,13 @@
           <a:p>
             <a:pPr>
               <a:lnSpc>
-                <a:spcPct val="90000"/>
-              </a:lnSpc>
-              <a:spcAft>
-                <a:spcPts val="300"/>
+                <a:spcPct val="85000"/>
+              </a:lnSpc>
+              <a:spcBef>
+                <a:spcPts val="200"/>
+              </a:spcBef>
+              <a:spcAft>
+                <a:spcPts val="200"/>
               </a:spcAft>
               <a:defRPr sz="2000" b="1"/>
             </a:pPr>
@@ -10421,10 +11127,13 @@
           <a:p>
             <a:pPr>
               <a:lnSpc>
-                <a:spcPct val="90000"/>
-              </a:lnSpc>
-              <a:spcAft>
-                <a:spcPts val="300"/>
+                <a:spcPct val="85000"/>
+              </a:lnSpc>
+              <a:spcBef>
+                <a:spcPts val="200"/>
+              </a:spcBef>
+              <a:spcAft>
+                <a:spcPts val="200"/>
               </a:spcAft>
               <a:defRPr sz="2000" b="1"/>
             </a:pPr>
@@ -10436,10 +11145,13 @@
           <a:p>
             <a:pPr>
               <a:lnSpc>
-                <a:spcPct val="90000"/>
-              </a:lnSpc>
-              <a:spcAft>
-                <a:spcPts val="300"/>
+                <a:spcPct val="85000"/>
+              </a:lnSpc>
+              <a:spcBef>
+                <a:spcPts val="200"/>
+              </a:spcBef>
+              <a:spcAft>
+                <a:spcPts val="200"/>
               </a:spcAft>
               <a:defRPr sz="2000" b="1"/>
             </a:pPr>
@@ -10451,10 +11163,13 @@
           <a:p>
             <a:pPr>
               <a:lnSpc>
-                <a:spcPct val="90000"/>
-              </a:lnSpc>
-              <a:spcAft>
-                <a:spcPts val="300"/>
+                <a:spcPct val="85000"/>
+              </a:lnSpc>
+              <a:spcBef>
+                <a:spcPts val="200"/>
+              </a:spcBef>
+              <a:spcAft>
+                <a:spcPts val="200"/>
               </a:spcAft>
               <a:defRPr sz="2000" b="1"/>
             </a:pPr>
@@ -10466,10 +11181,13 @@
           <a:p>
             <a:pPr>
               <a:lnSpc>
-                <a:spcPct val="90000"/>
-              </a:lnSpc>
-              <a:spcAft>
-                <a:spcPts val="300"/>
+                <a:spcPct val="85000"/>
+              </a:lnSpc>
+              <a:spcBef>
+                <a:spcPts val="200"/>
+              </a:spcBef>
+              <a:spcAft>
+                <a:spcPts val="200"/>
               </a:spcAft>
               <a:defRPr sz="2000" b="1"/>
             </a:pPr>
@@ -10481,10 +11199,13 @@
           <a:p>
             <a:pPr>
               <a:lnSpc>
-                <a:spcPct val="90000"/>
-              </a:lnSpc>
-              <a:spcAft>
-                <a:spcPts val="300"/>
+                <a:spcPct val="85000"/>
+              </a:lnSpc>
+              <a:spcBef>
+                <a:spcPts val="200"/>
+              </a:spcBef>
+              <a:spcAft>
+                <a:spcPts val="200"/>
               </a:spcAft>
               <a:defRPr sz="2000" b="1"/>
             </a:pPr>
@@ -10496,10 +11217,13 @@
           <a:p>
             <a:pPr>
               <a:lnSpc>
-                <a:spcPct val="90000"/>
-              </a:lnSpc>
-              <a:spcAft>
-                <a:spcPts val="300"/>
+                <a:spcPct val="85000"/>
+              </a:lnSpc>
+              <a:spcBef>
+                <a:spcPts val="200"/>
+              </a:spcBef>
+              <a:spcAft>
+                <a:spcPts val="200"/>
               </a:spcAft>
               <a:defRPr sz="2000" b="1"/>
             </a:pPr>
@@ -10511,10 +11235,13 @@
           <a:p>
             <a:pPr>
               <a:lnSpc>
-                <a:spcPct val="90000"/>
-              </a:lnSpc>
-              <a:spcAft>
-                <a:spcPts val="300"/>
+                <a:spcPct val="85000"/>
+              </a:lnSpc>
+              <a:spcBef>
+                <a:spcPts val="200"/>
+              </a:spcBef>
+              <a:spcAft>
+                <a:spcPts val="200"/>
               </a:spcAft>
               <a:defRPr sz="2000" b="1"/>
             </a:pPr>
@@ -10537,10 +11264,13 @@
           <a:p>
             <a:pPr>
               <a:lnSpc>
-                <a:spcPct val="90000"/>
-              </a:lnSpc>
-              <a:spcAft>
-                <a:spcPts val="300"/>
+                <a:spcPct val="85000"/>
+              </a:lnSpc>
+              <a:spcBef>
+                <a:spcPts val="200"/>
+              </a:spcBef>
+              <a:spcAft>
+                <a:spcPts val="200"/>
               </a:spcAft>
               <a:defRPr sz="2000"/>
             </a:pPr>
@@ -10552,10 +11282,13 @@
           <a:p>
             <a:pPr>
               <a:lnSpc>
-                <a:spcPct val="90000"/>
-              </a:lnSpc>
-              <a:spcAft>
-                <a:spcPts val="300"/>
+                <a:spcPct val="85000"/>
+              </a:lnSpc>
+              <a:spcBef>
+                <a:spcPts val="200"/>
+              </a:spcBef>
+              <a:spcAft>
+                <a:spcPts val="200"/>
               </a:spcAft>
               <a:defRPr sz="2000" b="1"/>
             </a:pPr>
@@ -10609,12 +11342,21 @@
           <a:noFill/>
         </p:spPr>
         <p:txBody>
-          <a:bodyPr wrap="square">
+          <a:bodyPr wrap="square" tIns="25400" bIns="25400" lIns="63500" rIns="63500">
             <a:spAutoFit/>
           </a:bodyPr>
           <a:lstStyle/>
           <a:p>
             <a:pPr algn="ctr">
+              <a:lnSpc>
+                <a:spcPct val="85000"/>
+              </a:lnSpc>
+              <a:spcBef>
+                <a:spcPts val="200"/>
+              </a:spcBef>
+              <a:spcAft>
+                <a:spcPts val="200"/>
+              </a:spcAft>
               <a:defRPr sz="5400" b="1">
                 <a:solidFill>
                   <a:srgbClr val="FFFFFF"/>
@@ -10622,6 +11364,7 @@
               </a:defRPr>
             </a:pPr>
             <a:r>
+              <a:rPr/>
               <a:t>Tebrikler! 🎉</a:t>
             </a:r>
           </a:p>
@@ -10644,12 +11387,21 @@
           <a:noFill/>
         </p:spPr>
         <p:txBody>
-          <a:bodyPr wrap="square">
+          <a:bodyPr wrap="square" tIns="25400" bIns="25400" lIns="63500" rIns="63500">
             <a:spAutoFit/>
           </a:bodyPr>
           <a:lstStyle/>
           <a:p>
             <a:pPr algn="ctr">
+              <a:lnSpc>
+                <a:spcPct val="85000"/>
+              </a:lnSpc>
+              <a:spcBef>
+                <a:spcPts val="200"/>
+              </a:spcBef>
+              <a:spcAft>
+                <a:spcPts val="200"/>
+              </a:spcAft>
               <a:defRPr sz="2800">
                 <a:solidFill>
                   <a:srgbClr val="FFFFFF"/>
@@ -10657,6 +11409,7 @@
               </a:defRPr>
             </a:pPr>
             <a:r>
+              <a:rPr/>
               <a:t>Ünite 3'ü Tamamladınız - Artık İnternet Uzmanısınız!</a:t>
             </a:r>
           </a:p>
@@ -10692,10 +11445,19 @@
         </p:nvSpPr>
         <p:spPr/>
         <p:txBody>
-          <a:bodyPr wrap="square"/>
+          <a:bodyPr wrap="square" tIns="25400" bIns="25400" lIns="63500" rIns="63500"/>
           <a:lstStyle/>
           <a:p>
             <a:pPr>
+              <a:lnSpc>
+                <a:spcPct val="85000"/>
+              </a:lnSpc>
+              <a:spcBef>
+                <a:spcPts val="200"/>
+              </a:spcBef>
+              <a:spcAft>
+                <a:spcPts val="200"/>
+              </a:spcAft>
               <a:defRPr sz="4000" b="1">
                 <a:solidFill>
                   <a:srgbClr val="667EEA"/>
@@ -10703,6 +11465,7 @@
               </a:defRPr>
             </a:pPr>
             <a:r>
+              <a:rPr/>
               <a:t>🌐 Bilgisayar Ağı Nedir?</a:t>
             </a:r>
           </a:p>
@@ -10742,7 +11505,7 @@
           <a:noFill/>
         </p:spPr>
         <p:txBody>
-          <a:bodyPr wrap="square">
+          <a:bodyPr wrap="square" tIns="25400" bIns="25400" lIns="63500" rIns="63500">
             <a:spAutoFit/>
           </a:bodyPr>
           <a:lstStyle/>
@@ -10759,10 +11522,13 @@
           <a:p>
             <a:pPr>
               <a:lnSpc>
-                <a:spcPct val="90000"/>
-              </a:lnSpc>
-              <a:spcAft>
-                <a:spcPts val="300"/>
+                <a:spcPct val="85000"/>
+              </a:lnSpc>
+              <a:spcBef>
+                <a:spcPts val="200"/>
+              </a:spcBef>
+              <a:spcAft>
+                <a:spcPts val="200"/>
               </a:spcAft>
               <a:defRPr sz="2000" b="1"/>
             </a:pPr>
@@ -10774,10 +11540,13 @@
           <a:p>
             <a:pPr>
               <a:lnSpc>
-                <a:spcPct val="90000"/>
-              </a:lnSpc>
-              <a:spcAft>
-                <a:spcPts val="300"/>
+                <a:spcPct val="85000"/>
+              </a:lnSpc>
+              <a:spcBef>
+                <a:spcPts val="200"/>
+              </a:spcBef>
+              <a:spcAft>
+                <a:spcPts val="200"/>
               </a:spcAft>
               <a:defRPr sz="2000"/>
             </a:pPr>
@@ -10800,10 +11569,13 @@
           <a:p>
             <a:pPr>
               <a:lnSpc>
-                <a:spcPct val="90000"/>
-              </a:lnSpc>
-              <a:spcAft>
-                <a:spcPts val="300"/>
+                <a:spcPct val="85000"/>
+              </a:lnSpc>
+              <a:spcBef>
+                <a:spcPts val="200"/>
+              </a:spcBef>
+              <a:spcAft>
+                <a:spcPts val="200"/>
               </a:spcAft>
               <a:defRPr sz="2000" b="1"/>
             </a:pPr>
@@ -10815,10 +11587,13 @@
           <a:p>
             <a:pPr lvl="1">
               <a:lnSpc>
-                <a:spcPct val="90000"/>
-              </a:lnSpc>
-              <a:spcAft>
-                <a:spcPts val="300"/>
+                <a:spcPct val="85000"/>
+              </a:lnSpc>
+              <a:spcBef>
+                <a:spcPts val="200"/>
+              </a:spcBef>
+              <a:spcAft>
+                <a:spcPts val="200"/>
               </a:spcAft>
               <a:defRPr sz="1800"/>
             </a:pPr>
@@ -10830,10 +11605,13 @@
           <a:p>
             <a:pPr lvl="1">
               <a:lnSpc>
-                <a:spcPct val="90000"/>
-              </a:lnSpc>
-              <a:spcAft>
-                <a:spcPts val="300"/>
+                <a:spcPct val="85000"/>
+              </a:lnSpc>
+              <a:spcBef>
+                <a:spcPts val="200"/>
+              </a:spcBef>
+              <a:spcAft>
+                <a:spcPts val="200"/>
               </a:spcAft>
               <a:defRPr sz="1800"/>
             </a:pPr>
@@ -10845,10 +11623,13 @@
           <a:p>
             <a:pPr lvl="1">
               <a:lnSpc>
-                <a:spcPct val="90000"/>
-              </a:lnSpc>
-              <a:spcAft>
-                <a:spcPts val="300"/>
+                <a:spcPct val="85000"/>
+              </a:lnSpc>
+              <a:spcBef>
+                <a:spcPts val="200"/>
+              </a:spcBef>
+              <a:spcAft>
+                <a:spcPts val="200"/>
               </a:spcAft>
               <a:defRPr sz="1800"/>
             </a:pPr>
@@ -10860,10 +11641,13 @@
           <a:p>
             <a:pPr lvl="1">
               <a:lnSpc>
-                <a:spcPct val="90000"/>
-              </a:lnSpc>
-              <a:spcAft>
-                <a:spcPts val="300"/>
+                <a:spcPct val="85000"/>
+              </a:lnSpc>
+              <a:spcBef>
+                <a:spcPts val="200"/>
+              </a:spcBef>
+              <a:spcAft>
+                <a:spcPts val="200"/>
               </a:spcAft>
               <a:defRPr sz="1800"/>
             </a:pPr>
@@ -10886,10 +11670,13 @@
           <a:p>
             <a:pPr>
               <a:lnSpc>
-                <a:spcPct val="90000"/>
-              </a:lnSpc>
-              <a:spcAft>
-                <a:spcPts val="300"/>
+                <a:spcPct val="85000"/>
+              </a:lnSpc>
+              <a:spcBef>
+                <a:spcPts val="200"/>
+              </a:spcBef>
+              <a:spcAft>
+                <a:spcPts val="200"/>
               </a:spcAft>
               <a:defRPr sz="2000" b="1"/>
             </a:pPr>
@@ -10901,10 +11688,13 @@
           <a:p>
             <a:pPr lvl="1">
               <a:lnSpc>
-                <a:spcPct val="90000"/>
-              </a:lnSpc>
-              <a:spcAft>
-                <a:spcPts val="300"/>
+                <a:spcPct val="85000"/>
+              </a:lnSpc>
+              <a:spcBef>
+                <a:spcPts val="200"/>
+              </a:spcBef>
+              <a:spcAft>
+                <a:spcPts val="200"/>
               </a:spcAft>
               <a:defRPr sz="1800"/>
             </a:pPr>
@@ -10916,10 +11706,13 @@
           <a:p>
             <a:pPr lvl="1">
               <a:lnSpc>
-                <a:spcPct val="90000"/>
-              </a:lnSpc>
-              <a:spcAft>
-                <a:spcPts val="300"/>
+                <a:spcPct val="85000"/>
+              </a:lnSpc>
+              <a:spcBef>
+                <a:spcPts val="200"/>
+              </a:spcBef>
+              <a:spcAft>
+                <a:spcPts val="200"/>
               </a:spcAft>
               <a:defRPr sz="1800"/>
             </a:pPr>
@@ -10931,10 +11724,13 @@
           <a:p>
             <a:pPr lvl="1">
               <a:lnSpc>
-                <a:spcPct val="90000"/>
-              </a:lnSpc>
-              <a:spcAft>
-                <a:spcPts val="300"/>
+                <a:spcPct val="85000"/>
+              </a:lnSpc>
+              <a:spcBef>
+                <a:spcPts val="200"/>
+              </a:spcBef>
+              <a:spcAft>
+                <a:spcPts val="200"/>
               </a:spcAft>
               <a:defRPr sz="1800"/>
             </a:pPr>
@@ -10946,10 +11742,13 @@
           <a:p>
             <a:pPr lvl="1">
               <a:lnSpc>
-                <a:spcPct val="90000"/>
-              </a:lnSpc>
-              <a:spcAft>
-                <a:spcPts val="300"/>
+                <a:spcPct val="85000"/>
+              </a:lnSpc>
+              <a:spcBef>
+                <a:spcPts val="200"/>
+              </a:spcBef>
+              <a:spcAft>
+                <a:spcPts val="200"/>
               </a:spcAft>
               <a:defRPr sz="1800"/>
             </a:pPr>
@@ -10972,10 +11771,13 @@
           <a:p>
             <a:pPr>
               <a:lnSpc>
-                <a:spcPct val="90000"/>
-              </a:lnSpc>
-              <a:spcAft>
-                <a:spcPts val="300"/>
+                <a:spcPct val="85000"/>
+              </a:lnSpc>
+              <a:spcBef>
+                <a:spcPts val="200"/>
+              </a:spcBef>
+              <a:spcAft>
+                <a:spcPts val="200"/>
               </a:spcAft>
               <a:defRPr sz="2000" b="1"/>
             </a:pPr>
@@ -10987,10 +11789,13 @@
           <a:p>
             <a:pPr lvl="1">
               <a:lnSpc>
-                <a:spcPct val="90000"/>
-              </a:lnSpc>
-              <a:spcAft>
-                <a:spcPts val="300"/>
+                <a:spcPct val="85000"/>
+              </a:lnSpc>
+              <a:spcBef>
+                <a:spcPts val="200"/>
+              </a:spcBef>
+              <a:spcAft>
+                <a:spcPts val="200"/>
               </a:spcAft>
               <a:defRPr sz="1800"/>
             </a:pPr>
@@ -11002,10 +11807,13 @@
           <a:p>
             <a:pPr lvl="1">
               <a:lnSpc>
-                <a:spcPct val="90000"/>
-              </a:lnSpc>
-              <a:spcAft>
-                <a:spcPts val="300"/>
+                <a:spcPct val="85000"/>
+              </a:lnSpc>
+              <a:spcBef>
+                <a:spcPts val="200"/>
+              </a:spcBef>
+              <a:spcAft>
+                <a:spcPts val="200"/>
               </a:spcAft>
               <a:defRPr sz="1800"/>
             </a:pPr>
@@ -11017,10 +11825,13 @@
           <a:p>
             <a:pPr lvl="1">
               <a:lnSpc>
-                <a:spcPct val="90000"/>
-              </a:lnSpc>
-              <a:spcAft>
-                <a:spcPts val="300"/>
+                <a:spcPct val="85000"/>
+              </a:lnSpc>
+              <a:spcBef>
+                <a:spcPts val="200"/>
+              </a:spcBef>
+              <a:spcAft>
+                <a:spcPts val="200"/>
               </a:spcAft>
               <a:defRPr sz="1800"/>
             </a:pPr>
@@ -11032,10 +11843,13 @@
           <a:p>
             <a:pPr lvl="1">
               <a:lnSpc>
-                <a:spcPct val="90000"/>
-              </a:lnSpc>
-              <a:spcAft>
-                <a:spcPts val="300"/>
+                <a:spcPct val="85000"/>
+              </a:lnSpc>
+              <a:spcBef>
+                <a:spcPts val="200"/>
+              </a:spcBef>
+              <a:spcAft>
+                <a:spcPts val="200"/>
               </a:spcAft>
               <a:defRPr sz="1800"/>
             </a:pPr>
@@ -11058,10 +11872,13 @@
           <a:p>
             <a:pPr>
               <a:lnSpc>
-                <a:spcPct val="90000"/>
-              </a:lnSpc>
-              <a:spcAft>
-                <a:spcPts val="300"/>
+                <a:spcPct val="85000"/>
+              </a:lnSpc>
+              <a:spcBef>
+                <a:spcPts val="200"/>
+              </a:spcBef>
+              <a:spcAft>
+                <a:spcPts val="200"/>
               </a:spcAft>
               <a:defRPr sz="2000" b="1"/>
             </a:pPr>
@@ -11102,10 +11919,19 @@
         </p:nvSpPr>
         <p:spPr/>
         <p:txBody>
-          <a:bodyPr wrap="square"/>
+          <a:bodyPr wrap="square" tIns="25400" bIns="25400" lIns="63500" rIns="63500"/>
           <a:lstStyle/>
           <a:p>
             <a:pPr>
+              <a:lnSpc>
+                <a:spcPct val="85000"/>
+              </a:lnSpc>
+              <a:spcBef>
+                <a:spcPts val="200"/>
+              </a:spcBef>
+              <a:spcAft>
+                <a:spcPts val="200"/>
+              </a:spcAft>
               <a:defRPr sz="4000" b="1">
                 <a:solidFill>
                   <a:srgbClr val="667EEA"/>
@@ -11113,6 +11939,7 @@
               </a:defRPr>
             </a:pPr>
             <a:r>
+              <a:rPr/>
               <a:t>🏠 LAN - Yerel Alan Ağı</a:t>
             </a:r>
           </a:p>
@@ -11152,7 +11979,7 @@
           <a:noFill/>
         </p:spPr>
         <p:txBody>
-          <a:bodyPr wrap="square">
+          <a:bodyPr wrap="square" tIns="25400" bIns="25400" lIns="63500" rIns="63500">
             <a:spAutoFit/>
           </a:bodyPr>
           <a:lstStyle/>
@@ -11169,10 +11996,13 @@
           <a:p>
             <a:pPr>
               <a:lnSpc>
-                <a:spcPct val="90000"/>
-              </a:lnSpc>
-              <a:spcAft>
-                <a:spcPts val="300"/>
+                <a:spcPct val="85000"/>
+              </a:lnSpc>
+              <a:spcBef>
+                <a:spcPts val="200"/>
+              </a:spcBef>
+              <a:spcAft>
+                <a:spcPts val="200"/>
               </a:spcAft>
               <a:defRPr sz="2000"/>
             </a:pPr>
@@ -11195,10 +12025,13 @@
           <a:p>
             <a:pPr>
               <a:lnSpc>
-                <a:spcPct val="90000"/>
-              </a:lnSpc>
-              <a:spcAft>
-                <a:spcPts val="300"/>
+                <a:spcPct val="85000"/>
+              </a:lnSpc>
+              <a:spcBef>
+                <a:spcPts val="200"/>
+              </a:spcBef>
+              <a:spcAft>
+                <a:spcPts val="200"/>
               </a:spcAft>
               <a:defRPr sz="2000" b="1"/>
             </a:pPr>
@@ -11210,10 +12043,13 @@
           <a:p>
             <a:pPr lvl="1">
               <a:lnSpc>
-                <a:spcPct val="90000"/>
-              </a:lnSpc>
-              <a:spcAft>
-                <a:spcPts val="300"/>
+                <a:spcPct val="85000"/>
+              </a:lnSpc>
+              <a:spcBef>
+                <a:spcPts val="200"/>
+              </a:spcBef>
+              <a:spcAft>
+                <a:spcPts val="200"/>
               </a:spcAft>
               <a:defRPr sz="1800"/>
             </a:pPr>
@@ -11225,10 +12061,13 @@
           <a:p>
             <a:pPr lvl="1">
               <a:lnSpc>
-                <a:spcPct val="90000"/>
-              </a:lnSpc>
-              <a:spcAft>
-                <a:spcPts val="300"/>
+                <a:spcPct val="85000"/>
+              </a:lnSpc>
+              <a:spcBef>
+                <a:spcPts val="200"/>
+              </a:spcBef>
+              <a:spcAft>
+                <a:spcPts val="200"/>
               </a:spcAft>
               <a:defRPr sz="1800"/>
             </a:pPr>
@@ -11240,10 +12079,13 @@
           <a:p>
             <a:pPr lvl="1">
               <a:lnSpc>
-                <a:spcPct val="90000"/>
-              </a:lnSpc>
-              <a:spcAft>
-                <a:spcPts val="300"/>
+                <a:spcPct val="85000"/>
+              </a:lnSpc>
+              <a:spcBef>
+                <a:spcPts val="200"/>
+              </a:spcBef>
+              <a:spcAft>
+                <a:spcPts val="200"/>
               </a:spcAft>
               <a:defRPr sz="1800"/>
             </a:pPr>
@@ -11266,10 +12108,13 @@
           <a:p>
             <a:pPr>
               <a:lnSpc>
-                <a:spcPct val="90000"/>
-              </a:lnSpc>
-              <a:spcAft>
-                <a:spcPts val="300"/>
+                <a:spcPct val="85000"/>
+              </a:lnSpc>
+              <a:spcBef>
+                <a:spcPts val="200"/>
+              </a:spcBef>
+              <a:spcAft>
+                <a:spcPts val="200"/>
               </a:spcAft>
               <a:defRPr sz="2000" b="1"/>
             </a:pPr>
@@ -11292,10 +12137,13 @@
           <a:p>
             <a:pPr>
               <a:lnSpc>
-                <a:spcPct val="90000"/>
-              </a:lnSpc>
-              <a:spcAft>
-                <a:spcPts val="300"/>
+                <a:spcPct val="85000"/>
+              </a:lnSpc>
+              <a:spcBef>
+                <a:spcPts val="200"/>
+              </a:spcBef>
+              <a:spcAft>
+                <a:spcPts val="200"/>
               </a:spcAft>
               <a:defRPr sz="2000"/>
             </a:pPr>
@@ -11307,10 +12155,13 @@
           <a:p>
             <a:pPr lvl="1">
               <a:lnSpc>
-                <a:spcPct val="90000"/>
-              </a:lnSpc>
-              <a:spcAft>
-                <a:spcPts val="300"/>
+                <a:spcPct val="85000"/>
+              </a:lnSpc>
+              <a:spcBef>
+                <a:spcPts val="200"/>
+              </a:spcBef>
+              <a:spcAft>
+                <a:spcPts val="200"/>
               </a:spcAft>
               <a:defRPr sz="1800"/>
             </a:pPr>
@@ -11322,10 +12173,13 @@
           <a:p>
             <a:pPr lvl="1">
               <a:lnSpc>
-                <a:spcPct val="90000"/>
-              </a:lnSpc>
-              <a:spcAft>
-                <a:spcPts val="300"/>
+                <a:spcPct val="85000"/>
+              </a:lnSpc>
+              <a:spcBef>
+                <a:spcPts val="200"/>
+              </a:spcBef>
+              <a:spcAft>
+                <a:spcPts val="200"/>
               </a:spcAft>
               <a:defRPr sz="1800"/>
             </a:pPr>
@@ -11337,10 +12191,13 @@
           <a:p>
             <a:pPr lvl="1">
               <a:lnSpc>
-                <a:spcPct val="90000"/>
-              </a:lnSpc>
-              <a:spcAft>
-                <a:spcPts val="300"/>
+                <a:spcPct val="85000"/>
+              </a:lnSpc>
+              <a:spcBef>
+                <a:spcPts val="200"/>
+              </a:spcBef>
+              <a:spcAft>
+                <a:spcPts val="200"/>
               </a:spcAft>
               <a:defRPr sz="1800"/>
             </a:pPr>
@@ -11363,10 +12220,13 @@
           <a:p>
             <a:pPr>
               <a:lnSpc>
-                <a:spcPct val="90000"/>
-              </a:lnSpc>
-              <a:spcAft>
-                <a:spcPts val="300"/>
+                <a:spcPct val="85000"/>
+              </a:lnSpc>
+              <a:spcBef>
+                <a:spcPts val="200"/>
+              </a:spcBef>
+              <a:spcAft>
+                <a:spcPts val="200"/>
               </a:spcAft>
               <a:defRPr sz="2000"/>
             </a:pPr>
@@ -11378,10 +12238,13 @@
           <a:p>
             <a:pPr lvl="1">
               <a:lnSpc>
-                <a:spcPct val="90000"/>
-              </a:lnSpc>
-              <a:spcAft>
-                <a:spcPts val="300"/>
+                <a:spcPct val="85000"/>
+              </a:lnSpc>
+              <a:spcBef>
+                <a:spcPts val="200"/>
+              </a:spcBef>
+              <a:spcAft>
+                <a:spcPts val="200"/>
               </a:spcAft>
               <a:defRPr sz="1800"/>
             </a:pPr>
@@ -11393,10 +12256,13 @@
           <a:p>
             <a:pPr lvl="1">
               <a:lnSpc>
-                <a:spcPct val="90000"/>
-              </a:lnSpc>
-              <a:spcAft>
-                <a:spcPts val="300"/>
+                <a:spcPct val="85000"/>
+              </a:lnSpc>
+              <a:spcBef>
+                <a:spcPts val="200"/>
+              </a:spcBef>
+              <a:spcAft>
+                <a:spcPts val="200"/>
               </a:spcAft>
               <a:defRPr sz="1800"/>
             </a:pPr>
@@ -11408,10 +12274,13 @@
           <a:p>
             <a:pPr lvl="1">
               <a:lnSpc>
-                <a:spcPct val="90000"/>
-              </a:lnSpc>
-              <a:spcAft>
-                <a:spcPts val="300"/>
+                <a:spcPct val="85000"/>
+              </a:lnSpc>
+              <a:spcBef>
+                <a:spcPts val="200"/>
+              </a:spcBef>
+              <a:spcAft>
+                <a:spcPts val="200"/>
               </a:spcAft>
               <a:defRPr sz="1800"/>
             </a:pPr>
@@ -11434,10 +12303,13 @@
           <a:p>
             <a:pPr>
               <a:lnSpc>
-                <a:spcPct val="90000"/>
-              </a:lnSpc>
-              <a:spcAft>
-                <a:spcPts val="300"/>
+                <a:spcPct val="85000"/>
+              </a:lnSpc>
+              <a:spcBef>
+                <a:spcPts val="200"/>
+              </a:spcBef>
+              <a:spcAft>
+                <a:spcPts val="200"/>
               </a:spcAft>
               <a:defRPr sz="2000"/>
             </a:pPr>
@@ -11449,10 +12321,13 @@
           <a:p>
             <a:pPr lvl="1">
               <a:lnSpc>
-                <a:spcPct val="90000"/>
-              </a:lnSpc>
-              <a:spcAft>
-                <a:spcPts val="300"/>
+                <a:spcPct val="85000"/>
+              </a:lnSpc>
+              <a:spcBef>
+                <a:spcPts val="200"/>
+              </a:spcBef>
+              <a:spcAft>
+                <a:spcPts val="200"/>
               </a:spcAft>
               <a:defRPr sz="1800"/>
             </a:pPr>
@@ -11464,10 +12339,13 @@
           <a:p>
             <a:pPr lvl="1">
               <a:lnSpc>
-                <a:spcPct val="90000"/>
-              </a:lnSpc>
-              <a:spcAft>
-                <a:spcPts val="300"/>
+                <a:spcPct val="85000"/>
+              </a:lnSpc>
+              <a:spcBef>
+                <a:spcPts val="200"/>
+              </a:spcBef>
+              <a:spcAft>
+                <a:spcPts val="200"/>
               </a:spcAft>
               <a:defRPr sz="1800"/>
             </a:pPr>
@@ -11490,10 +12368,13 @@
           <a:p>
             <a:pPr>
               <a:lnSpc>
-                <a:spcPct val="90000"/>
-              </a:lnSpc>
-              <a:spcAft>
-                <a:spcPts val="300"/>
+                <a:spcPct val="85000"/>
+              </a:lnSpc>
+              <a:spcBef>
+                <a:spcPts val="200"/>
+              </a:spcBef>
+              <a:spcAft>
+                <a:spcPts val="200"/>
               </a:spcAft>
               <a:defRPr sz="2000" b="1"/>
             </a:pPr>
@@ -11534,10 +12415,19 @@
         </p:nvSpPr>
         <p:spPr/>
         <p:txBody>
-          <a:bodyPr wrap="square"/>
+          <a:bodyPr wrap="square" tIns="25400" bIns="25400" lIns="63500" rIns="63500"/>
           <a:lstStyle/>
           <a:p>
             <a:pPr>
+              <a:lnSpc>
+                <a:spcPct val="85000"/>
+              </a:lnSpc>
+              <a:spcBef>
+                <a:spcPts val="200"/>
+              </a:spcBef>
+              <a:spcAft>
+                <a:spcPts val="200"/>
+              </a:spcAft>
               <a:defRPr sz="4000" b="1">
                 <a:solidFill>
                   <a:srgbClr val="667EEA"/>
@@ -11545,6 +12435,7 @@
               </a:defRPr>
             </a:pPr>
             <a:r>
+              <a:rPr/>
               <a:t>🌍 WAN ve İnternet</a:t>
             </a:r>
           </a:p>
@@ -11584,7 +12475,7 @@
           <a:noFill/>
         </p:spPr>
         <p:txBody>
-          <a:bodyPr wrap="square">
+          <a:bodyPr wrap="square" tIns="25400" bIns="25400" lIns="63500" rIns="63500">
             <a:spAutoFit/>
           </a:bodyPr>
           <a:lstStyle/>
@@ -11601,6 +12492,24 @@
           <a:p>
             <a:pPr>
               <a:lnSpc>
+                <a:spcPct val="85000"/>
+              </a:lnSpc>
+              <a:spcBef>
+                <a:spcPts val="200"/>
+              </a:spcBef>
+              <a:spcAft>
+                <a:spcPts val="200"/>
+              </a:spcAft>
+              <a:defRPr sz="2000"/>
+            </a:pPr>
+            <a:r>
+              <a:rPr sz="1300"/>
+              <a:t>WAN = Wide Area Network (Geniş Alan Ağı)</a:t>
+            </a:r>
+          </a:p>
+          <a:p>
+            <a:pPr>
+              <a:lnSpc>
                 <a:spcPct val="90000"/>
               </a:lnSpc>
               <a:spcAft>
@@ -11608,9 +12517,77 @@
               </a:spcAft>
               <a:defRPr sz="2000"/>
             </a:pPr>
-            <a:r>
-              <a:rPr sz="1300"/>
-              <a:t>WAN = Wide Area Network (Geniş Alan Ağı)</a:t>
+          </a:p>
+          <a:p>
+            <a:pPr>
+              <a:lnSpc>
+                <a:spcPct val="85000"/>
+              </a:lnSpc>
+              <a:spcBef>
+                <a:spcPts val="200"/>
+              </a:spcBef>
+              <a:spcAft>
+                <a:spcPts val="200"/>
+              </a:spcAft>
+              <a:defRPr sz="2000" b="1"/>
+            </a:pPr>
+            <a:r>
+              <a:rPr sz="1300"/>
+              <a:t>✅ WAN Özellikleri:</a:t>
+            </a:r>
+          </a:p>
+          <a:p>
+            <a:pPr lvl="1">
+              <a:lnSpc>
+                <a:spcPct val="85000"/>
+              </a:lnSpc>
+              <a:spcBef>
+                <a:spcPts val="200"/>
+              </a:spcBef>
+              <a:spcAft>
+                <a:spcPts val="200"/>
+              </a:spcAft>
+              <a:defRPr sz="1800"/>
+            </a:pPr>
+            <a:r>
+              <a:rPr sz="1300"/>
+              <a:t>    • Çok geniş alanda çalışır (şehirler, ülkeler)</a:t>
+            </a:r>
+          </a:p>
+          <a:p>
+            <a:pPr lvl="1">
+              <a:lnSpc>
+                <a:spcPct val="85000"/>
+              </a:lnSpc>
+              <a:spcBef>
+                <a:spcPts val="200"/>
+              </a:spcBef>
+              <a:spcAft>
+                <a:spcPts val="200"/>
+              </a:spcAft>
+              <a:defRPr sz="1800"/>
+            </a:pPr>
+            <a:r>
+              <a:rPr sz="1300"/>
+              <a:t>    • LAN'ları birbirine bağlar</a:t>
+            </a:r>
+          </a:p>
+          <a:p>
+            <a:pPr lvl="1">
+              <a:lnSpc>
+                <a:spcPct val="85000"/>
+              </a:lnSpc>
+              <a:spcBef>
+                <a:spcPts val="200"/>
+              </a:spcBef>
+              <a:spcAft>
+                <a:spcPts val="200"/>
+              </a:spcAft>
+              <a:defRPr sz="1800"/>
+            </a:pPr>
+            <a:r>
+              <a:rPr sz="1300"/>
+              <a:t>    • İnternet en büyük WAN'dır!</a:t>
             </a:r>
           </a:p>
           <a:p>
@@ -11627,279 +12604,244 @@
           <a:p>
             <a:pPr>
               <a:lnSpc>
+                <a:spcPct val="85000"/>
+              </a:lnSpc>
+              <a:spcBef>
+                <a:spcPts val="200"/>
+              </a:spcBef>
+              <a:spcAft>
+                <a:spcPts val="200"/>
+              </a:spcAft>
+              <a:defRPr sz="2000"/>
+            </a:pPr>
+            <a:r>
+              <a:rPr sz="1300"/>
+              <a:t>🌐 İnternet:</a:t>
+            </a:r>
+          </a:p>
+          <a:p>
+            <a:pPr>
+              <a:lnSpc>
+                <a:spcPct val="85000"/>
+              </a:lnSpc>
+              <a:spcBef>
+                <a:spcPts val="200"/>
+              </a:spcBef>
+              <a:spcAft>
+                <a:spcPts val="200"/>
+              </a:spcAft>
+              <a:defRPr sz="2000"/>
+            </a:pPr>
+            <a:r>
+              <a:rPr sz="1300"/>
+              <a:t>Dünyadaki tüm ağların birbirine bağlanması!</a:t>
+            </a:r>
+          </a:p>
+          <a:p>
+            <a:pPr>
+              <a:lnSpc>
                 <a:spcPct val="90000"/>
               </a:lnSpc>
               <a:spcAft>
                 <a:spcPts val="300"/>
               </a:spcAft>
+              <a:defRPr sz="2000"/>
+            </a:pPr>
+          </a:p>
+          <a:p>
+            <a:pPr>
+              <a:lnSpc>
+                <a:spcPct val="85000"/>
+              </a:lnSpc>
+              <a:spcBef>
+                <a:spcPts val="200"/>
+              </a:spcBef>
+              <a:spcAft>
+                <a:spcPts val="200"/>
+              </a:spcAft>
               <a:defRPr sz="2000" b="1"/>
             </a:pPr>
             <a:r>
               <a:rPr sz="1300"/>
-              <a:t>✅ WAN Özellikleri:</a:t>
-            </a:r>
-          </a:p>
-          <a:p>
-            <a:pPr lvl="1">
+              <a:t>📌 İnternet Sayesinde:</a:t>
+            </a:r>
+          </a:p>
+          <a:p>
+            <a:pPr lvl="1">
+              <a:lnSpc>
+                <a:spcPct val="85000"/>
+              </a:lnSpc>
+              <a:spcBef>
+                <a:spcPts val="200"/>
+              </a:spcBef>
+              <a:spcAft>
+                <a:spcPts val="200"/>
+              </a:spcAft>
+              <a:defRPr sz="1800"/>
+            </a:pPr>
+            <a:r>
+              <a:rPr sz="1300"/>
+              <a:t>    • Türkiye'den Amerika'ya mesaj göndeririz</a:t>
+            </a:r>
+          </a:p>
+          <a:p>
+            <a:pPr lvl="1">
+              <a:lnSpc>
+                <a:spcPct val="85000"/>
+              </a:lnSpc>
+              <a:spcBef>
+                <a:spcPts val="200"/>
+              </a:spcBef>
+              <a:spcAft>
+                <a:spcPts val="200"/>
+              </a:spcAft>
+              <a:defRPr sz="1800"/>
+            </a:pPr>
+            <a:r>
+              <a:rPr sz="1300"/>
+              <a:t>    • Dünyanın her yerinden video izleriz</a:t>
+            </a:r>
+          </a:p>
+          <a:p>
+            <a:pPr lvl="1">
+              <a:lnSpc>
+                <a:spcPct val="85000"/>
+              </a:lnSpc>
+              <a:spcBef>
+                <a:spcPts val="200"/>
+              </a:spcBef>
+              <a:spcAft>
+                <a:spcPts val="200"/>
+              </a:spcAft>
+              <a:defRPr sz="1800"/>
+            </a:pPr>
+            <a:r>
+              <a:rPr sz="1300"/>
+              <a:t>    • Online oyun oynarız</a:t>
+            </a:r>
+          </a:p>
+          <a:p>
+            <a:pPr lvl="1">
+              <a:lnSpc>
+                <a:spcPct val="85000"/>
+              </a:lnSpc>
+              <a:spcBef>
+                <a:spcPts val="200"/>
+              </a:spcBef>
+              <a:spcAft>
+                <a:spcPts val="200"/>
+              </a:spcAft>
+              <a:defRPr sz="1800"/>
+            </a:pPr>
+            <a:r>
+              <a:rPr sz="1300"/>
+              <a:t>    • Alışveriş yaparız</a:t>
+            </a:r>
+          </a:p>
+          <a:p>
+            <a:pPr>
               <a:lnSpc>
                 <a:spcPct val="90000"/>
               </a:lnSpc>
               <a:spcAft>
                 <a:spcPts val="300"/>
               </a:spcAft>
-              <a:defRPr sz="1800"/>
-            </a:pPr>
-            <a:r>
-              <a:rPr sz="1300"/>
-              <a:t>    • Çok geniş alanda çalışır (şehirler, ülkeler)</a:t>
-            </a:r>
-          </a:p>
-          <a:p>
-            <a:pPr lvl="1">
+              <a:defRPr sz="2000"/>
+            </a:pPr>
+          </a:p>
+          <a:p>
+            <a:pPr>
+              <a:lnSpc>
+                <a:spcPct val="85000"/>
+              </a:lnSpc>
+              <a:spcBef>
+                <a:spcPts val="200"/>
+              </a:spcBef>
+              <a:spcAft>
+                <a:spcPts val="200"/>
+              </a:spcAft>
+              <a:defRPr sz="2000" b="1"/>
+            </a:pPr>
+            <a:r>
+              <a:rPr sz="1300"/>
+              <a:t>💡 Fark:</a:t>
+            </a:r>
+          </a:p>
+          <a:p>
+            <a:pPr lvl="1">
+              <a:lnSpc>
+                <a:spcPct val="85000"/>
+              </a:lnSpc>
+              <a:spcBef>
+                <a:spcPts val="200"/>
+              </a:spcBef>
+              <a:spcAft>
+                <a:spcPts val="200"/>
+              </a:spcAft>
+              <a:defRPr sz="1800"/>
+            </a:pPr>
+            <a:r>
+              <a:rPr sz="1300"/>
+              <a:t>    • LAN = Evin içindeki ağ (WiFi)</a:t>
+            </a:r>
+          </a:p>
+          <a:p>
+            <a:pPr lvl="1">
+              <a:lnSpc>
+                <a:spcPct val="85000"/>
+              </a:lnSpc>
+              <a:spcBef>
+                <a:spcPts val="200"/>
+              </a:spcBef>
+              <a:spcAft>
+                <a:spcPts val="200"/>
+              </a:spcAft>
+              <a:defRPr sz="1800"/>
+            </a:pPr>
+            <a:r>
+              <a:rPr sz="1300"/>
+              <a:t>    • WAN = Tüm dünya (İnternet)</a:t>
+            </a:r>
+          </a:p>
+          <a:p>
+            <a:pPr>
               <a:lnSpc>
                 <a:spcPct val="90000"/>
               </a:lnSpc>
               <a:spcAft>
                 <a:spcPts val="300"/>
               </a:spcAft>
-              <a:defRPr sz="1800"/>
-            </a:pPr>
-            <a:r>
-              <a:rPr sz="1300"/>
-              <a:t>    • LAN'ları birbirine bağlar</a:t>
-            </a:r>
-          </a:p>
-          <a:p>
-            <a:pPr lvl="1">
-              <a:lnSpc>
-                <a:spcPct val="90000"/>
-              </a:lnSpc>
-              <a:spcAft>
-                <a:spcPts val="300"/>
-              </a:spcAft>
-              <a:defRPr sz="1800"/>
-            </a:pPr>
-            <a:r>
-              <a:rPr sz="1300"/>
-              <a:t>    • İnternet en büyük WAN'dır!</a:t>
-            </a:r>
-          </a:p>
-          <a:p>
-            <a:pPr>
-              <a:lnSpc>
-                <a:spcPct val="90000"/>
-              </a:lnSpc>
-              <a:spcAft>
-                <a:spcPts val="300"/>
-              </a:spcAft>
-              <a:defRPr sz="2000"/>
-            </a:pPr>
-          </a:p>
-          <a:p>
-            <a:pPr>
-              <a:lnSpc>
-                <a:spcPct val="90000"/>
-              </a:lnSpc>
-              <a:spcAft>
-                <a:spcPts val="300"/>
-              </a:spcAft>
-              <a:defRPr sz="2000"/>
-            </a:pPr>
-            <a:r>
-              <a:rPr sz="1300"/>
-              <a:t>🌐 İnternet:</a:t>
-            </a:r>
-          </a:p>
-          <a:p>
-            <a:pPr>
-              <a:lnSpc>
-                <a:spcPct val="90000"/>
-              </a:lnSpc>
-              <a:spcAft>
-                <a:spcPts val="300"/>
-              </a:spcAft>
-              <a:defRPr sz="2000"/>
-            </a:pPr>
-            <a:r>
-              <a:rPr sz="1300"/>
-              <a:t>Dünyadaki tüm ağların birbirine bağlanması!</a:t>
-            </a:r>
-          </a:p>
-          <a:p>
-            <a:pPr>
-              <a:lnSpc>
-                <a:spcPct val="90000"/>
-              </a:lnSpc>
-              <a:spcAft>
-                <a:spcPts val="300"/>
-              </a:spcAft>
-              <a:defRPr sz="2000"/>
-            </a:pPr>
-          </a:p>
-          <a:p>
-            <a:pPr>
-              <a:lnSpc>
-                <a:spcPct val="90000"/>
-              </a:lnSpc>
-              <a:spcAft>
-                <a:spcPts val="300"/>
+              <a:defRPr sz="2000"/>
+            </a:pPr>
+          </a:p>
+          <a:p>
+            <a:pPr>
+              <a:lnSpc>
+                <a:spcPct val="85000"/>
+              </a:lnSpc>
+              <a:spcBef>
+                <a:spcPts val="200"/>
+              </a:spcBef>
+              <a:spcAft>
+                <a:spcPts val="200"/>
               </a:spcAft>
               <a:defRPr sz="2000" b="1"/>
             </a:pPr>
             <a:r>
               <a:rPr sz="1300"/>
-              <a:t>📌 İnternet Sayesinde:</a:t>
-            </a:r>
-          </a:p>
-          <a:p>
-            <a:pPr lvl="1">
-              <a:lnSpc>
-                <a:spcPct val="90000"/>
-              </a:lnSpc>
-              <a:spcAft>
-                <a:spcPts val="300"/>
-              </a:spcAft>
-              <a:defRPr sz="1800"/>
-            </a:pPr>
-            <a:r>
-              <a:rPr sz="1300"/>
-              <a:t>    • Türkiye'den Amerika'ya mesaj göndeririz</a:t>
-            </a:r>
-          </a:p>
-          <a:p>
-            <a:pPr lvl="1">
-              <a:lnSpc>
-                <a:spcPct val="90000"/>
-              </a:lnSpc>
-              <a:spcAft>
-                <a:spcPts val="300"/>
-              </a:spcAft>
-              <a:defRPr sz="1800"/>
-            </a:pPr>
-            <a:r>
-              <a:rPr sz="1300"/>
-              <a:t>    • Dünyanın her yerinden video izleriz</a:t>
-            </a:r>
-          </a:p>
-          <a:p>
-            <a:pPr lvl="1">
-              <a:lnSpc>
-                <a:spcPct val="90000"/>
-              </a:lnSpc>
-              <a:spcAft>
-                <a:spcPts val="300"/>
-              </a:spcAft>
-              <a:defRPr sz="1800"/>
-            </a:pPr>
-            <a:r>
-              <a:rPr sz="1300"/>
-              <a:t>    • Online oyun oynarız</a:t>
-            </a:r>
-          </a:p>
-          <a:p>
-            <a:pPr lvl="1">
-              <a:lnSpc>
-                <a:spcPct val="90000"/>
-              </a:lnSpc>
-              <a:spcAft>
-                <a:spcPts val="300"/>
-              </a:spcAft>
-              <a:defRPr sz="1800"/>
-            </a:pPr>
-            <a:r>
-              <a:rPr sz="1300"/>
-              <a:t>    • Alışveriş yaparız</a:t>
-            </a:r>
-          </a:p>
-          <a:p>
-            <a:pPr>
-              <a:lnSpc>
-                <a:spcPct val="90000"/>
-              </a:lnSpc>
-              <a:spcAft>
-                <a:spcPts val="300"/>
-              </a:spcAft>
-              <a:defRPr sz="2000"/>
-            </a:pPr>
-          </a:p>
-          <a:p>
-            <a:pPr>
-              <a:lnSpc>
-                <a:spcPct val="90000"/>
-              </a:lnSpc>
-              <a:spcAft>
-                <a:spcPts val="300"/>
-              </a:spcAft>
-              <a:defRPr sz="2000" b="1"/>
-            </a:pPr>
-            <a:r>
-              <a:rPr sz="1300"/>
-              <a:t>💡 Fark:</a:t>
-            </a:r>
-          </a:p>
-          <a:p>
-            <a:pPr lvl="1">
-              <a:lnSpc>
-                <a:spcPct val="90000"/>
-              </a:lnSpc>
-              <a:spcAft>
-                <a:spcPts val="300"/>
-              </a:spcAft>
-              <a:defRPr sz="1800"/>
-            </a:pPr>
-            <a:r>
-              <a:rPr sz="1300"/>
-              <a:t>    • LAN = Evin içindeki ağ (WiFi)</a:t>
-            </a:r>
-          </a:p>
-          <a:p>
-            <a:pPr lvl="1">
-              <a:lnSpc>
-                <a:spcPct val="90000"/>
-              </a:lnSpc>
-              <a:spcAft>
-                <a:spcPts val="300"/>
-              </a:spcAft>
-              <a:defRPr sz="1800"/>
-            </a:pPr>
-            <a:r>
-              <a:rPr sz="1300"/>
-              <a:t>    • WAN = Tüm dünya (İnternet)</a:t>
-            </a:r>
-          </a:p>
-          <a:p>
-            <a:pPr>
-              <a:lnSpc>
-                <a:spcPct val="90000"/>
-              </a:lnSpc>
-              <a:spcAft>
-                <a:spcPts val="300"/>
-              </a:spcAft>
-              <a:defRPr sz="2000"/>
-            </a:pPr>
-          </a:p>
-          <a:p>
-            <a:pPr>
-              <a:lnSpc>
-                <a:spcPct val="90000"/>
-              </a:lnSpc>
-              <a:spcAft>
-                <a:spcPts val="300"/>
-              </a:spcAft>
-              <a:defRPr sz="2000" b="1"/>
-            </a:pPr>
-            <a:r>
-              <a:rPr sz="1300"/>
               <a:t>⚡ İnternet = Ağların ağı!</a:t>
             </a:r>
           </a:p>
           <a:p>
             <a:pPr>
               <a:lnSpc>
-                <a:spcPct val="90000"/>
-              </a:lnSpc>
-              <a:spcAft>
-                <a:spcPts val="300"/>
+                <a:spcPct val="85000"/>
+              </a:lnSpc>
+              <a:spcBef>
+                <a:spcPts val="200"/>
+              </a:spcBef>
+              <a:spcAft>
+                <a:spcPts val="200"/>
               </a:spcAft>
               <a:defRPr sz="2000"/>
             </a:pPr>
@@ -11940,10 +12882,19 @@
         </p:nvSpPr>
         <p:spPr/>
         <p:txBody>
-          <a:bodyPr wrap="square"/>
+          <a:bodyPr wrap="square" tIns="25400" bIns="25400" lIns="63500" rIns="63500"/>
           <a:lstStyle/>
           <a:p>
             <a:pPr>
+              <a:lnSpc>
+                <a:spcPct val="85000"/>
+              </a:lnSpc>
+              <a:spcBef>
+                <a:spcPts val="200"/>
+              </a:spcBef>
+              <a:spcAft>
+                <a:spcPts val="200"/>
+              </a:spcAft>
               <a:defRPr sz="4000" b="1">
                 <a:solidFill>
                   <a:srgbClr val="667EEA"/>
@@ -11951,6 +12902,7 @@
               </a:defRPr>
             </a:pPr>
             <a:r>
+              <a:rPr/>
               <a:t>⚙️ İnternet Nasıl Çalışır?</a:t>
             </a:r>
           </a:p>
@@ -11990,7 +12942,7 @@
           <a:noFill/>
         </p:spPr>
         <p:txBody>
-          <a:bodyPr wrap="square">
+          <a:bodyPr wrap="square" tIns="25400" bIns="25400" lIns="63500" rIns="63500">
             <a:spAutoFit/>
           </a:bodyPr>
           <a:lstStyle/>
@@ -12007,6 +12959,24 @@
           <a:p>
             <a:pPr>
               <a:lnSpc>
+                <a:spcPct val="85000"/>
+              </a:lnSpc>
+              <a:spcBef>
+                <a:spcPts val="200"/>
+              </a:spcBef>
+              <a:spcAft>
+                <a:spcPts val="200"/>
+              </a:spcAft>
+              <a:defRPr sz="2000"/>
+            </a:pPr>
+            <a:r>
+              <a:rPr sz="1300"/>
+              <a:t>İnternet'e bağlanmak için neler gerekir?</a:t>
+            </a:r>
+          </a:p>
+          <a:p>
+            <a:pPr>
+              <a:lnSpc>
                 <a:spcPct val="90000"/>
               </a:lnSpc>
               <a:spcAft>
@@ -12014,9 +12984,23 @@
               </a:spcAft>
               <a:defRPr sz="2000"/>
             </a:pPr>
-            <a:r>
-              <a:rPr sz="1300"/>
-              <a:t>İnternet'e bağlanmak için neler gerekir?</a:t>
+          </a:p>
+          <a:p>
+            <a:pPr>
+              <a:lnSpc>
+                <a:spcPct val="85000"/>
+              </a:lnSpc>
+              <a:spcBef>
+                <a:spcPts val="200"/>
+              </a:spcBef>
+              <a:spcAft>
+                <a:spcPts val="200"/>
+              </a:spcAft>
+              <a:defRPr sz="2000" b="1"/>
+            </a:pPr>
+            <a:r>
+              <a:rPr sz="1300"/>
+              <a:t>✅ İnternet Bağlantısı İçin Gerekenler:</a:t>
             </a:r>
           </a:p>
           <a:p>
@@ -12033,16 +13017,250 @@
           <a:p>
             <a:pPr>
               <a:lnSpc>
+                <a:spcPct val="85000"/>
+              </a:lnSpc>
+              <a:spcBef>
+                <a:spcPts val="200"/>
+              </a:spcBef>
+              <a:spcAft>
+                <a:spcPts val="200"/>
+              </a:spcAft>
+              <a:defRPr sz="2000"/>
+            </a:pPr>
+            <a:r>
+              <a:rPr sz="1300"/>
+              <a:t>1️⃣ İnternet Servis Sağlayıcı (ISP):</a:t>
+            </a:r>
+          </a:p>
+          <a:p>
+            <a:pPr lvl="1">
+              <a:lnSpc>
+                <a:spcPct val="85000"/>
+              </a:lnSpc>
+              <a:spcBef>
+                <a:spcPts val="200"/>
+              </a:spcBef>
+              <a:spcAft>
+                <a:spcPts val="200"/>
+              </a:spcAft>
+              <a:defRPr sz="1800"/>
+            </a:pPr>
+            <a:r>
+              <a:rPr sz="1300"/>
+              <a:t>    • Türk Telekom, Superonline, Vodafone</a:t>
+            </a:r>
+          </a:p>
+          <a:p>
+            <a:pPr lvl="1">
+              <a:lnSpc>
+                <a:spcPct val="85000"/>
+              </a:lnSpc>
+              <a:spcBef>
+                <a:spcPts val="200"/>
+              </a:spcBef>
+              <a:spcAft>
+                <a:spcPts val="200"/>
+              </a:spcAft>
+              <a:defRPr sz="1800"/>
+            </a:pPr>
+            <a:r>
+              <a:rPr sz="1300"/>
+              <a:t>    • İnterneti eve getirir</a:t>
+            </a:r>
+          </a:p>
+          <a:p>
+            <a:pPr>
+              <a:lnSpc>
                 <a:spcPct val="90000"/>
               </a:lnSpc>
               <a:spcAft>
                 <a:spcPts val="300"/>
               </a:spcAft>
+              <a:defRPr sz="2000"/>
+            </a:pPr>
+          </a:p>
+          <a:p>
+            <a:pPr>
+              <a:lnSpc>
+                <a:spcPct val="85000"/>
+              </a:lnSpc>
+              <a:spcBef>
+                <a:spcPts val="200"/>
+              </a:spcBef>
+              <a:spcAft>
+                <a:spcPts val="200"/>
+              </a:spcAft>
+              <a:defRPr sz="2000"/>
+            </a:pPr>
+            <a:r>
+              <a:rPr sz="1300"/>
+              <a:t>2️⃣ Modem/Router:</a:t>
+            </a:r>
+          </a:p>
+          <a:p>
+            <a:pPr lvl="1">
+              <a:lnSpc>
+                <a:spcPct val="85000"/>
+              </a:lnSpc>
+              <a:spcBef>
+                <a:spcPts val="200"/>
+              </a:spcBef>
+              <a:spcAft>
+                <a:spcPts val="200"/>
+              </a:spcAft>
+              <a:defRPr sz="1800"/>
+            </a:pPr>
+            <a:r>
+              <a:rPr sz="1300"/>
+              <a:t>    • İnternet sinyalini dağıtır</a:t>
+            </a:r>
+          </a:p>
+          <a:p>
+            <a:pPr lvl="1">
+              <a:lnSpc>
+                <a:spcPct val="85000"/>
+              </a:lnSpc>
+              <a:spcBef>
+                <a:spcPts val="200"/>
+              </a:spcBef>
+              <a:spcAft>
+                <a:spcPts val="200"/>
+              </a:spcAft>
+              <a:defRPr sz="1800"/>
+            </a:pPr>
+            <a:r>
+              <a:rPr sz="1300"/>
+              <a:t>    • Wi-Fi oluşturur</a:t>
+            </a:r>
+          </a:p>
+          <a:p>
+            <a:pPr>
+              <a:lnSpc>
+                <a:spcPct val="90000"/>
+              </a:lnSpc>
+              <a:spcAft>
+                <a:spcPts val="300"/>
+              </a:spcAft>
+              <a:defRPr sz="2000"/>
+            </a:pPr>
+          </a:p>
+          <a:p>
+            <a:pPr>
+              <a:lnSpc>
+                <a:spcPct val="85000"/>
+              </a:lnSpc>
+              <a:spcBef>
+                <a:spcPts val="200"/>
+              </a:spcBef>
+              <a:spcAft>
+                <a:spcPts val="200"/>
+              </a:spcAft>
+              <a:defRPr sz="2000"/>
+            </a:pPr>
+            <a:r>
+              <a:rPr sz="1300"/>
+              <a:t>3️⃣ Cihazınız:</a:t>
+            </a:r>
+          </a:p>
+          <a:p>
+            <a:pPr lvl="1">
+              <a:lnSpc>
+                <a:spcPct val="85000"/>
+              </a:lnSpc>
+              <a:spcBef>
+                <a:spcPts val="200"/>
+              </a:spcBef>
+              <a:spcAft>
+                <a:spcPts val="200"/>
+              </a:spcAft>
+              <a:defRPr sz="1800"/>
+            </a:pPr>
+            <a:r>
+              <a:rPr sz="1300"/>
+              <a:t>    • Bilgisayar, telefon, tablet</a:t>
+            </a:r>
+          </a:p>
+          <a:p>
+            <a:pPr>
+              <a:lnSpc>
+                <a:spcPct val="90000"/>
+              </a:lnSpc>
+              <a:spcAft>
+                <a:spcPts val="300"/>
+              </a:spcAft>
+              <a:defRPr sz="2000"/>
+            </a:pPr>
+          </a:p>
+          <a:p>
+            <a:pPr>
+              <a:lnSpc>
+                <a:spcPct val="85000"/>
+              </a:lnSpc>
+              <a:spcBef>
+                <a:spcPts val="200"/>
+              </a:spcBef>
+              <a:spcAft>
+                <a:spcPts val="200"/>
+              </a:spcAft>
               <a:defRPr sz="2000" b="1"/>
             </a:pPr>
             <a:r>
               <a:rPr sz="1300"/>
-              <a:t>✅ İnternet Bağlantısı İçin Gerekenler:</a:t>
+              <a:t>📌 Bağlantı Şekilleri:</a:t>
+            </a:r>
+          </a:p>
+          <a:p>
+            <a:pPr lvl="1">
+              <a:lnSpc>
+                <a:spcPct val="85000"/>
+              </a:lnSpc>
+              <a:spcBef>
+                <a:spcPts val="200"/>
+              </a:spcBef>
+              <a:spcAft>
+                <a:spcPts val="200"/>
+              </a:spcAft>
+              <a:defRPr sz="1800"/>
+            </a:pPr>
+            <a:r>
+              <a:rPr sz="1300"/>
+              <a:t>    • Kablo (Ethernet)</a:t>
+            </a:r>
+          </a:p>
+          <a:p>
+            <a:pPr lvl="1">
+              <a:lnSpc>
+                <a:spcPct val="85000"/>
+              </a:lnSpc>
+              <a:spcBef>
+                <a:spcPts val="200"/>
+              </a:spcBef>
+              <a:spcAft>
+                <a:spcPts val="200"/>
+              </a:spcAft>
+              <a:defRPr sz="1800"/>
+            </a:pPr>
+            <a:r>
+              <a:rPr sz="1300"/>
+              <a:t>    • Wi-Fi (Kablosuz)</a:t>
+            </a:r>
+          </a:p>
+          <a:p>
+            <a:pPr lvl="1">
+              <a:lnSpc>
+                <a:spcPct val="85000"/>
+              </a:lnSpc>
+              <a:spcBef>
+                <a:spcPts val="200"/>
+              </a:spcBef>
+              <a:spcAft>
+                <a:spcPts val="200"/>
+              </a:spcAft>
+              <a:defRPr sz="1800"/>
+            </a:pPr>
+            <a:r>
+              <a:rPr sz="1300"/>
+              <a:t>    • Mobil veri (4.5G, 5G)</a:t>
             </a:r>
           </a:p>
           <a:p>
@@ -12059,6 +13277,42 @@
           <a:p>
             <a:pPr>
               <a:lnSpc>
+                <a:spcPct val="85000"/>
+              </a:lnSpc>
+              <a:spcBef>
+                <a:spcPts val="200"/>
+              </a:spcBef>
+              <a:spcAft>
+                <a:spcPts val="200"/>
+              </a:spcAft>
+              <a:defRPr sz="2000" b="1"/>
+            </a:pPr>
+            <a:r>
+              <a:rPr sz="1300"/>
+              <a:t>💡 Veri Paketi Yolculuğu:</a:t>
+            </a:r>
+          </a:p>
+          <a:p>
+            <a:pPr>
+              <a:lnSpc>
+                <a:spcPct val="85000"/>
+              </a:lnSpc>
+              <a:spcBef>
+                <a:spcPts val="200"/>
+              </a:spcBef>
+              <a:spcAft>
+                <a:spcPts val="200"/>
+              </a:spcAft>
+              <a:defRPr sz="2000"/>
+            </a:pPr>
+            <a:r>
+              <a:rPr sz="1300"/>
+              <a:t>Bilgisayarınız → Modem → ISP → İnternet → Sunucu → Geri Dönüş</a:t>
+            </a:r>
+          </a:p>
+          <a:p>
+            <a:pPr>
+              <a:lnSpc>
                 <a:spcPct val="90000"/>
               </a:lnSpc>
               <a:spcAft>
@@ -12066,268 +13320,17 @@
               </a:spcAft>
               <a:defRPr sz="2000"/>
             </a:pPr>
-            <a:r>
-              <a:rPr sz="1300"/>
-              <a:t>1️⃣ İnternet Servis Sağlayıcı (ISP):</a:t>
-            </a:r>
-          </a:p>
-          <a:p>
-            <a:pPr lvl="1">
-              <a:lnSpc>
-                <a:spcPct val="90000"/>
-              </a:lnSpc>
-              <a:spcAft>
-                <a:spcPts val="300"/>
-              </a:spcAft>
-              <a:defRPr sz="1800"/>
-            </a:pPr>
-            <a:r>
-              <a:rPr sz="1300"/>
-              <a:t>    • Türk Telekom, Superonline, Vodafone</a:t>
-            </a:r>
-          </a:p>
-          <a:p>
-            <a:pPr lvl="1">
-              <a:lnSpc>
-                <a:spcPct val="90000"/>
-              </a:lnSpc>
-              <a:spcAft>
-                <a:spcPts val="300"/>
-              </a:spcAft>
-              <a:defRPr sz="1800"/>
-            </a:pPr>
-            <a:r>
-              <a:rPr sz="1300"/>
-              <a:t>    • İnterneti eve getirir</a:t>
-            </a:r>
-          </a:p>
-          <a:p>
-            <a:pPr>
-              <a:lnSpc>
-                <a:spcPct val="90000"/>
-              </a:lnSpc>
-              <a:spcAft>
-                <a:spcPts val="300"/>
-              </a:spcAft>
-              <a:defRPr sz="2000"/>
-            </a:pPr>
-          </a:p>
-          <a:p>
-            <a:pPr>
-              <a:lnSpc>
-                <a:spcPct val="90000"/>
-              </a:lnSpc>
-              <a:spcAft>
-                <a:spcPts val="300"/>
-              </a:spcAft>
-              <a:defRPr sz="2000"/>
-            </a:pPr>
-            <a:r>
-              <a:rPr sz="1300"/>
-              <a:t>2️⃣ Modem/Router:</a:t>
-            </a:r>
-          </a:p>
-          <a:p>
-            <a:pPr lvl="1">
-              <a:lnSpc>
-                <a:spcPct val="90000"/>
-              </a:lnSpc>
-              <a:spcAft>
-                <a:spcPts val="300"/>
-              </a:spcAft>
-              <a:defRPr sz="1800"/>
-            </a:pPr>
-            <a:r>
-              <a:rPr sz="1300"/>
-              <a:t>    • İnternet sinyalini dağıtır</a:t>
-            </a:r>
-          </a:p>
-          <a:p>
-            <a:pPr lvl="1">
-              <a:lnSpc>
-                <a:spcPct val="90000"/>
-              </a:lnSpc>
-              <a:spcAft>
-                <a:spcPts val="300"/>
-              </a:spcAft>
-              <a:defRPr sz="1800"/>
-            </a:pPr>
-            <a:r>
-              <a:rPr sz="1300"/>
-              <a:t>    • Wi-Fi oluşturur</a:t>
-            </a:r>
-          </a:p>
-          <a:p>
-            <a:pPr>
-              <a:lnSpc>
-                <a:spcPct val="90000"/>
-              </a:lnSpc>
-              <a:spcAft>
-                <a:spcPts val="300"/>
-              </a:spcAft>
-              <a:defRPr sz="2000"/>
-            </a:pPr>
-          </a:p>
-          <a:p>
-            <a:pPr>
-              <a:lnSpc>
-                <a:spcPct val="90000"/>
-              </a:lnSpc>
-              <a:spcAft>
-                <a:spcPts val="300"/>
-              </a:spcAft>
-              <a:defRPr sz="2000"/>
-            </a:pPr>
-            <a:r>
-              <a:rPr sz="1300"/>
-              <a:t>3️⃣ Cihazınız:</a:t>
-            </a:r>
-          </a:p>
-          <a:p>
-            <a:pPr lvl="1">
-              <a:lnSpc>
-                <a:spcPct val="90000"/>
-              </a:lnSpc>
-              <a:spcAft>
-                <a:spcPts val="300"/>
-              </a:spcAft>
-              <a:defRPr sz="1800"/>
-            </a:pPr>
-            <a:r>
-              <a:rPr sz="1300"/>
-              <a:t>    • Bilgisayar, telefon, tablet</a:t>
-            </a:r>
-          </a:p>
-          <a:p>
-            <a:pPr>
-              <a:lnSpc>
-                <a:spcPct val="90000"/>
-              </a:lnSpc>
-              <a:spcAft>
-                <a:spcPts val="300"/>
-              </a:spcAft>
-              <a:defRPr sz="2000"/>
-            </a:pPr>
-          </a:p>
-          <a:p>
-            <a:pPr>
-              <a:lnSpc>
-                <a:spcPct val="90000"/>
-              </a:lnSpc>
-              <a:spcAft>
-                <a:spcPts val="300"/>
-              </a:spcAft>
-              <a:defRPr sz="2000" b="1"/>
-            </a:pPr>
-            <a:r>
-              <a:rPr sz="1300"/>
-              <a:t>📌 Bağlantı Şekilleri:</a:t>
-            </a:r>
-          </a:p>
-          <a:p>
-            <a:pPr lvl="1">
-              <a:lnSpc>
-                <a:spcPct val="90000"/>
-              </a:lnSpc>
-              <a:spcAft>
-                <a:spcPts val="300"/>
-              </a:spcAft>
-              <a:defRPr sz="1800"/>
-            </a:pPr>
-            <a:r>
-              <a:rPr sz="1300"/>
-              <a:t>    • Kablo (Ethernet)</a:t>
-            </a:r>
-          </a:p>
-          <a:p>
-            <a:pPr lvl="1">
-              <a:lnSpc>
-                <a:spcPct val="90000"/>
-              </a:lnSpc>
-              <a:spcAft>
-                <a:spcPts val="300"/>
-              </a:spcAft>
-              <a:defRPr sz="1800"/>
-            </a:pPr>
-            <a:r>
-              <a:rPr sz="1300"/>
-              <a:t>    • Wi-Fi (Kablosuz)</a:t>
-            </a:r>
-          </a:p>
-          <a:p>
-            <a:pPr lvl="1">
-              <a:lnSpc>
-                <a:spcPct val="90000"/>
-              </a:lnSpc>
-              <a:spcAft>
-                <a:spcPts val="300"/>
-              </a:spcAft>
-              <a:defRPr sz="1800"/>
-            </a:pPr>
-            <a:r>
-              <a:rPr sz="1300"/>
-              <a:t>    • Mobil veri (4.5G, 5G)</a:t>
-            </a:r>
-          </a:p>
-          <a:p>
-            <a:pPr>
-              <a:lnSpc>
-                <a:spcPct val="90000"/>
-              </a:lnSpc>
-              <a:spcAft>
-                <a:spcPts val="300"/>
-              </a:spcAft>
-              <a:defRPr sz="2000"/>
-            </a:pPr>
-          </a:p>
-          <a:p>
-            <a:pPr>
-              <a:lnSpc>
-                <a:spcPct val="90000"/>
-              </a:lnSpc>
-              <a:spcAft>
-                <a:spcPts val="300"/>
-              </a:spcAft>
-              <a:defRPr sz="2000" b="1"/>
-            </a:pPr>
-            <a:r>
-              <a:rPr sz="1300"/>
-              <a:t>💡 Veri Paketi Yolculuğu:</a:t>
-            </a:r>
-          </a:p>
-          <a:p>
-            <a:pPr>
-              <a:lnSpc>
-                <a:spcPct val="90000"/>
-              </a:lnSpc>
-              <a:spcAft>
-                <a:spcPts val="300"/>
-              </a:spcAft>
-              <a:defRPr sz="2000"/>
-            </a:pPr>
-            <a:r>
-              <a:rPr sz="1300"/>
-              <a:t>Bilgisayarınız → Modem → ISP → İnternet → Sunucu → Geri Dönüş</a:t>
-            </a:r>
-          </a:p>
-          <a:p>
-            <a:pPr>
-              <a:lnSpc>
-                <a:spcPct val="90000"/>
-              </a:lnSpc>
-              <a:spcAft>
-                <a:spcPts val="300"/>
-              </a:spcAft>
-              <a:defRPr sz="2000"/>
-            </a:pPr>
-          </a:p>
-          <a:p>
-            <a:pPr>
-              <a:lnSpc>
-                <a:spcPct val="90000"/>
-              </a:lnSpc>
-              <a:spcAft>
-                <a:spcPts val="300"/>
+          </a:p>
+          <a:p>
+            <a:pPr>
+              <a:lnSpc>
+                <a:spcPct val="85000"/>
+              </a:lnSpc>
+              <a:spcBef>
+                <a:spcPts val="200"/>
+              </a:spcBef>
+              <a:spcAft>
+                <a:spcPts val="200"/>
               </a:spcAft>
               <a:defRPr sz="2000" b="1"/>
             </a:pPr>
@@ -12368,10 +13371,19 @@
         </p:nvSpPr>
         <p:spPr/>
         <p:txBody>
-          <a:bodyPr wrap="square"/>
+          <a:bodyPr wrap="square" tIns="25400" bIns="25400" lIns="63500" rIns="63500"/>
           <a:lstStyle/>
           <a:p>
             <a:pPr>
+              <a:lnSpc>
+                <a:spcPct val="85000"/>
+              </a:lnSpc>
+              <a:spcBef>
+                <a:spcPts val="200"/>
+              </a:spcBef>
+              <a:spcAft>
+                <a:spcPts val="200"/>
+              </a:spcAft>
               <a:defRPr sz="4000" b="1">
                 <a:solidFill>
                   <a:srgbClr val="667EEA"/>
@@ -12379,6 +13391,7 @@
               </a:defRPr>
             </a:pPr>
             <a:r>
+              <a:rPr/>
               <a:t>🔢 IP Adresi Nedir?</a:t>
             </a:r>
           </a:p>
@@ -12418,7 +13431,7 @@
           <a:noFill/>
         </p:spPr>
         <p:txBody>
-          <a:bodyPr wrap="square">
+          <a:bodyPr wrap="square" tIns="25400" bIns="25400" lIns="63500" rIns="63500">
             <a:spAutoFit/>
           </a:bodyPr>
           <a:lstStyle/>
@@ -12435,6 +13448,24 @@
           <a:p>
             <a:pPr>
               <a:lnSpc>
+                <a:spcPct val="85000"/>
+              </a:lnSpc>
+              <a:spcBef>
+                <a:spcPts val="200"/>
+              </a:spcBef>
+              <a:spcAft>
+                <a:spcPts val="200"/>
+              </a:spcAft>
+              <a:defRPr sz="2000"/>
+            </a:pPr>
+            <a:r>
+              <a:rPr sz="1300"/>
+              <a:t>IP = Internet Protocol (İnternet Protokolü)</a:t>
+            </a:r>
+          </a:p>
+          <a:p>
+            <a:pPr>
+              <a:lnSpc>
                 <a:spcPct val="90000"/>
               </a:lnSpc>
               <a:spcAft>
@@ -12442,9 +13473,41 @@
               </a:spcAft>
               <a:defRPr sz="2000"/>
             </a:pPr>
-            <a:r>
-              <a:rPr sz="1300"/>
-              <a:t>IP = Internet Protocol (İnternet Protokolü)</a:t>
+          </a:p>
+          <a:p>
+            <a:pPr>
+              <a:lnSpc>
+                <a:spcPct val="85000"/>
+              </a:lnSpc>
+              <a:spcBef>
+                <a:spcPts val="200"/>
+              </a:spcBef>
+              <a:spcAft>
+                <a:spcPts val="200"/>
+              </a:spcAft>
+              <a:defRPr sz="2000" b="1"/>
+            </a:pPr>
+            <a:r>
+              <a:rPr sz="1300"/>
+              <a:t>🎯 IP Adresi:</a:t>
+            </a:r>
+          </a:p>
+          <a:p>
+            <a:pPr>
+              <a:lnSpc>
+                <a:spcPct val="85000"/>
+              </a:lnSpc>
+              <a:spcBef>
+                <a:spcPts val="200"/>
+              </a:spcBef>
+              <a:spcAft>
+                <a:spcPts val="200"/>
+              </a:spcAft>
+              <a:defRPr sz="2000"/>
+            </a:pPr>
+            <a:r>
+              <a:rPr sz="1300"/>
+              <a:t>İnternetteki her cihazın benzersiz kimlik numarası</a:t>
             </a:r>
           </a:p>
           <a:p>
@@ -12461,16 +13524,138 @@
           <a:p>
             <a:pPr>
               <a:lnSpc>
+                <a:spcPct val="85000"/>
+              </a:lnSpc>
+              <a:spcBef>
+                <a:spcPts val="200"/>
+              </a:spcBef>
+              <a:spcAft>
+                <a:spcPts val="200"/>
+              </a:spcAft>
+              <a:defRPr sz="2000" b="1"/>
+            </a:pPr>
+            <a:r>
+              <a:rPr sz="1300"/>
+              <a:t>✅ Özellikler:</a:t>
+            </a:r>
+          </a:p>
+          <a:p>
+            <a:pPr lvl="1">
+              <a:lnSpc>
+                <a:spcPct val="85000"/>
+              </a:lnSpc>
+              <a:spcBef>
+                <a:spcPts val="200"/>
+              </a:spcBef>
+              <a:spcAft>
+                <a:spcPts val="200"/>
+              </a:spcAft>
+              <a:defRPr sz="1800"/>
+            </a:pPr>
+            <a:r>
+              <a:rPr sz="1300"/>
+              <a:t>    • 4 sayı grubundan oluşur</a:t>
+            </a:r>
+          </a:p>
+          <a:p>
+            <a:pPr lvl="1">
+              <a:lnSpc>
+                <a:spcPct val="85000"/>
+              </a:lnSpc>
+              <a:spcBef>
+                <a:spcPts val="200"/>
+              </a:spcBef>
+              <a:spcAft>
+                <a:spcPts val="200"/>
+              </a:spcAft>
+              <a:defRPr sz="1800"/>
+            </a:pPr>
+            <a:r>
+              <a:rPr sz="1300"/>
+              <a:t>    • Örnek: 192.168.1.1 veya 172.16.254.1</a:t>
+            </a:r>
+          </a:p>
+          <a:p>
+            <a:pPr lvl="1">
+              <a:lnSpc>
+                <a:spcPct val="85000"/>
+              </a:lnSpc>
+              <a:spcBef>
+                <a:spcPts val="200"/>
+              </a:spcBef>
+              <a:spcAft>
+                <a:spcPts val="200"/>
+              </a:spcAft>
+              <a:defRPr sz="1800"/>
+            </a:pPr>
+            <a:r>
+              <a:rPr sz="1300"/>
+              <a:t>    • Her cihazın IP'si farklıdır</a:t>
+            </a:r>
+          </a:p>
+          <a:p>
+            <a:pPr>
+              <a:lnSpc>
                 <a:spcPct val="90000"/>
               </a:lnSpc>
               <a:spcAft>
                 <a:spcPts val="300"/>
               </a:spcAft>
+              <a:defRPr sz="2000"/>
+            </a:pPr>
+          </a:p>
+          <a:p>
+            <a:pPr>
+              <a:lnSpc>
+                <a:spcPct val="85000"/>
+              </a:lnSpc>
+              <a:spcBef>
+                <a:spcPts val="200"/>
+              </a:spcBef>
+              <a:spcAft>
+                <a:spcPts val="200"/>
+              </a:spcAft>
               <a:defRPr sz="2000" b="1"/>
             </a:pPr>
             <a:r>
               <a:rPr sz="1300"/>
-              <a:t>🎯 IP Adresi:</a:t>
+              <a:t>📌 IP Adresi Neden Önemli?</a:t>
+            </a:r>
+          </a:p>
+          <a:p>
+            <a:pPr lvl="1">
+              <a:lnSpc>
+                <a:spcPct val="85000"/>
+              </a:lnSpc>
+              <a:spcBef>
+                <a:spcPts val="200"/>
+              </a:spcBef>
+              <a:spcAft>
+                <a:spcPts val="200"/>
+              </a:spcAft>
+              <a:defRPr sz="1800"/>
+            </a:pPr>
+            <a:r>
+              <a:rPr sz="1300"/>
+              <a:t>    • Veri doğru cihaza ulaşır</a:t>
+            </a:r>
+          </a:p>
+          <a:p>
+            <a:pPr lvl="1">
+              <a:lnSpc>
+                <a:spcPct val="85000"/>
+              </a:lnSpc>
+              <a:spcBef>
+                <a:spcPts val="200"/>
+              </a:spcBef>
+              <a:spcAft>
+                <a:spcPts val="200"/>
+              </a:spcAft>
+              <a:defRPr sz="1800"/>
+            </a:pPr>
+            <a:r>
+              <a:rPr sz="1300"/>
+              <a:t>    • Adres sistemi gibi çalışır</a:t>
             </a:r>
           </a:p>
           <a:p>
@@ -12483,9 +13668,77 @@
               </a:spcAft>
               <a:defRPr sz="2000"/>
             </a:pPr>
-            <a:r>
-              <a:rPr sz="1300"/>
-              <a:t>İnternetteki her cihazın benzersiz kimlik numarası</a:t>
+          </a:p>
+          <a:p>
+            <a:pPr>
+              <a:lnSpc>
+                <a:spcPct val="85000"/>
+              </a:lnSpc>
+              <a:spcBef>
+                <a:spcPts val="200"/>
+              </a:spcBef>
+              <a:spcAft>
+                <a:spcPts val="200"/>
+              </a:spcAft>
+              <a:defRPr sz="2000" b="1"/>
+            </a:pPr>
+            <a:r>
+              <a:rPr sz="1300"/>
+              <a:t>💡 Analoji:</a:t>
+            </a:r>
+          </a:p>
+          <a:p>
+            <a:pPr>
+              <a:lnSpc>
+                <a:spcPct val="85000"/>
+              </a:lnSpc>
+              <a:spcBef>
+                <a:spcPts val="200"/>
+              </a:spcBef>
+              <a:spcAft>
+                <a:spcPts val="200"/>
+              </a:spcAft>
+              <a:defRPr sz="2000"/>
+            </a:pPr>
+            <a:r>
+              <a:rPr sz="1300"/>
+              <a:t>IP Adresi = Ev adresiniz</a:t>
+            </a:r>
+          </a:p>
+          <a:p>
+            <a:pPr lvl="1">
+              <a:lnSpc>
+                <a:spcPct val="85000"/>
+              </a:lnSpc>
+              <a:spcBef>
+                <a:spcPts val="200"/>
+              </a:spcBef>
+              <a:spcAft>
+                <a:spcPts val="200"/>
+              </a:spcAft>
+              <a:defRPr sz="1800"/>
+            </a:pPr>
+            <a:r>
+              <a:rPr sz="1300"/>
+              <a:t>    • Posta göndermek için adres gerekir</a:t>
+            </a:r>
+          </a:p>
+          <a:p>
+            <a:pPr lvl="1">
+              <a:lnSpc>
+                <a:spcPct val="85000"/>
+              </a:lnSpc>
+              <a:spcBef>
+                <a:spcPts val="200"/>
+              </a:spcBef>
+              <a:spcAft>
+                <a:spcPts val="200"/>
+              </a:spcAft>
+              <a:defRPr sz="1800"/>
+            </a:pPr>
+            <a:r>
+              <a:rPr sz="1300"/>
+              <a:t>    • İnternet'te veri göndermek için IP gerekir</a:t>
             </a:r>
           </a:p>
           <a:p>
@@ -12502,264 +13755,78 @@
           <a:p>
             <a:pPr>
               <a:lnSpc>
+                <a:spcPct val="85000"/>
+              </a:lnSpc>
+              <a:spcBef>
+                <a:spcPts val="200"/>
+              </a:spcBef>
+              <a:spcAft>
+                <a:spcPts val="200"/>
+              </a:spcAft>
+              <a:defRPr sz="2000"/>
+            </a:pPr>
+            <a:r>
+              <a:rPr sz="1300"/>
+              <a:t>🔍 Kendi IP'nizi Öğrenme:</a:t>
+            </a:r>
+          </a:p>
+          <a:p>
+            <a:pPr lvl="1">
+              <a:lnSpc>
+                <a:spcPct val="85000"/>
+              </a:lnSpc>
+              <a:spcBef>
+                <a:spcPts val="200"/>
+              </a:spcBef>
+              <a:spcAft>
+                <a:spcPts val="200"/>
+              </a:spcAft>
+              <a:defRPr sz="1800"/>
+            </a:pPr>
+            <a:r>
+              <a:rPr sz="1300"/>
+              <a:t>    • Google'da 'IP adresim nedir?' yazın</a:t>
+            </a:r>
+          </a:p>
+          <a:p>
+            <a:pPr lvl="1">
+              <a:lnSpc>
+                <a:spcPct val="85000"/>
+              </a:lnSpc>
+              <a:spcBef>
+                <a:spcPts val="200"/>
+              </a:spcBef>
+              <a:spcAft>
+                <a:spcPts val="200"/>
+              </a:spcAft>
+              <a:defRPr sz="1800"/>
+            </a:pPr>
+            <a:r>
+              <a:rPr sz="1300"/>
+              <a:t>    • Komut İstemi: 'ipconfig' komutu</a:t>
+            </a:r>
+          </a:p>
+          <a:p>
+            <a:pPr>
+              <a:lnSpc>
                 <a:spcPct val="90000"/>
               </a:lnSpc>
               <a:spcAft>
                 <a:spcPts val="300"/>
               </a:spcAft>
-              <a:defRPr sz="2000" b="1"/>
-            </a:pPr>
-            <a:r>
-              <a:rPr sz="1300"/>
-              <a:t>✅ Özellikler:</a:t>
-            </a:r>
-          </a:p>
-          <a:p>
-            <a:pPr lvl="1">
-              <a:lnSpc>
-                <a:spcPct val="90000"/>
-              </a:lnSpc>
-              <a:spcAft>
-                <a:spcPts val="300"/>
-              </a:spcAft>
-              <a:defRPr sz="1800"/>
-            </a:pPr>
-            <a:r>
-              <a:rPr sz="1300"/>
-              <a:t>    • 4 sayı grubundan oluşur</a:t>
-            </a:r>
-          </a:p>
-          <a:p>
-            <a:pPr lvl="1">
-              <a:lnSpc>
-                <a:spcPct val="90000"/>
-              </a:lnSpc>
-              <a:spcAft>
-                <a:spcPts val="300"/>
-              </a:spcAft>
-              <a:defRPr sz="1800"/>
-            </a:pPr>
-            <a:r>
-              <a:rPr sz="1300"/>
-              <a:t>    • Örnek: 192.168.1.1 veya 172.16.254.1</a:t>
-            </a:r>
-          </a:p>
-          <a:p>
-            <a:pPr lvl="1">
-              <a:lnSpc>
-                <a:spcPct val="90000"/>
-              </a:lnSpc>
-              <a:spcAft>
-                <a:spcPts val="300"/>
-              </a:spcAft>
-              <a:defRPr sz="1800"/>
-            </a:pPr>
-            <a:r>
-              <a:rPr sz="1300"/>
-              <a:t>    • Her cihazın IP'si farklıdır</a:t>
-            </a:r>
-          </a:p>
-          <a:p>
-            <a:pPr>
-              <a:lnSpc>
-                <a:spcPct val="90000"/>
-              </a:lnSpc>
-              <a:spcAft>
-                <a:spcPts val="300"/>
-              </a:spcAft>
-              <a:defRPr sz="2000"/>
-            </a:pPr>
-          </a:p>
-          <a:p>
-            <a:pPr>
-              <a:lnSpc>
-                <a:spcPct val="90000"/>
-              </a:lnSpc>
-              <a:spcAft>
-                <a:spcPts val="300"/>
-              </a:spcAft>
-              <a:defRPr sz="2000" b="1"/>
-            </a:pPr>
-            <a:r>
-              <a:rPr sz="1300"/>
-              <a:t>📌 IP Adresi Neden Önemli?</a:t>
-            </a:r>
-          </a:p>
-          <a:p>
-            <a:pPr lvl="1">
-              <a:lnSpc>
-                <a:spcPct val="90000"/>
-              </a:lnSpc>
-              <a:spcAft>
-                <a:spcPts val="300"/>
-              </a:spcAft>
-              <a:defRPr sz="1800"/>
-            </a:pPr>
-            <a:r>
-              <a:rPr sz="1300"/>
-              <a:t>    • Veri doğru cihaza ulaşır</a:t>
-            </a:r>
-          </a:p>
-          <a:p>
-            <a:pPr lvl="1">
-              <a:lnSpc>
-                <a:spcPct val="90000"/>
-              </a:lnSpc>
-              <a:spcAft>
-                <a:spcPts val="300"/>
-              </a:spcAft>
-              <a:defRPr sz="1800"/>
-            </a:pPr>
-            <a:r>
-              <a:rPr sz="1300"/>
-              <a:t>    • Adres sistemi gibi çalışır</a:t>
-            </a:r>
-          </a:p>
-          <a:p>
-            <a:pPr>
-              <a:lnSpc>
-                <a:spcPct val="90000"/>
-              </a:lnSpc>
-              <a:spcAft>
-                <a:spcPts val="300"/>
-              </a:spcAft>
-              <a:defRPr sz="2000"/>
-            </a:pPr>
-          </a:p>
-          <a:p>
-            <a:pPr>
-              <a:lnSpc>
-                <a:spcPct val="90000"/>
-              </a:lnSpc>
-              <a:spcAft>
-                <a:spcPts val="300"/>
-              </a:spcAft>
-              <a:defRPr sz="2000" b="1"/>
-            </a:pPr>
-            <a:r>
-              <a:rPr sz="1300"/>
-              <a:t>💡 Analoji:</a:t>
-            </a:r>
-          </a:p>
-          <a:p>
-            <a:pPr>
-              <a:lnSpc>
-                <a:spcPct val="90000"/>
-              </a:lnSpc>
-              <a:spcAft>
-                <a:spcPts val="300"/>
-              </a:spcAft>
-              <a:defRPr sz="2000"/>
-            </a:pPr>
-            <a:r>
-              <a:rPr sz="1300"/>
-              <a:t>IP Adresi = Ev adresiniz</a:t>
-            </a:r>
-          </a:p>
-          <a:p>
-            <a:pPr lvl="1">
-              <a:lnSpc>
-                <a:spcPct val="90000"/>
-              </a:lnSpc>
-              <a:spcAft>
-                <a:spcPts val="300"/>
-              </a:spcAft>
-              <a:defRPr sz="1800"/>
-            </a:pPr>
-            <a:r>
-              <a:rPr sz="1300"/>
-              <a:t>    • Posta göndermek için adres gerekir</a:t>
-            </a:r>
-          </a:p>
-          <a:p>
-            <a:pPr lvl="1">
-              <a:lnSpc>
-                <a:spcPct val="90000"/>
-              </a:lnSpc>
-              <a:spcAft>
-                <a:spcPts val="300"/>
-              </a:spcAft>
-              <a:defRPr sz="1800"/>
-            </a:pPr>
-            <a:r>
-              <a:rPr sz="1300"/>
-              <a:t>    • İnternet'te veri göndermek için IP gerekir</a:t>
-            </a:r>
-          </a:p>
-          <a:p>
-            <a:pPr>
-              <a:lnSpc>
-                <a:spcPct val="90000"/>
-              </a:lnSpc>
-              <a:spcAft>
-                <a:spcPts val="300"/>
-              </a:spcAft>
-              <a:defRPr sz="2000"/>
-            </a:pPr>
-          </a:p>
-          <a:p>
-            <a:pPr>
-              <a:lnSpc>
-                <a:spcPct val="90000"/>
-              </a:lnSpc>
-              <a:spcAft>
-                <a:spcPts val="300"/>
-              </a:spcAft>
-              <a:defRPr sz="2000"/>
-            </a:pPr>
-            <a:r>
-              <a:rPr sz="1300"/>
-              <a:t>🔍 Kendi IP'nizi Öğrenme:</a:t>
-            </a:r>
-          </a:p>
-          <a:p>
-            <a:pPr lvl="1">
-              <a:lnSpc>
-                <a:spcPct val="90000"/>
-              </a:lnSpc>
-              <a:spcAft>
-                <a:spcPts val="300"/>
-              </a:spcAft>
-              <a:defRPr sz="1800"/>
-            </a:pPr>
-            <a:r>
-              <a:rPr sz="1300"/>
-              <a:t>    • Google'da 'IP adresim nedir?' yazın</a:t>
-            </a:r>
-          </a:p>
-          <a:p>
-            <a:pPr lvl="1">
-              <a:lnSpc>
-                <a:spcPct val="90000"/>
-              </a:lnSpc>
-              <a:spcAft>
-                <a:spcPts val="300"/>
-              </a:spcAft>
-              <a:defRPr sz="1800"/>
-            </a:pPr>
-            <a:r>
-              <a:rPr sz="1300"/>
-              <a:t>    • Komut İstemi: 'ipconfig' komutu</a:t>
-            </a:r>
-          </a:p>
-          <a:p>
-            <a:pPr>
-              <a:lnSpc>
-                <a:spcPct val="90000"/>
-              </a:lnSpc>
-              <a:spcAft>
-                <a:spcPts val="300"/>
-              </a:spcAft>
-              <a:defRPr sz="2000"/>
-            </a:pPr>
-          </a:p>
-          <a:p>
-            <a:pPr>
-              <a:lnSpc>
-                <a:spcPct val="90000"/>
-              </a:lnSpc>
-              <a:spcAft>
-                <a:spcPts val="300"/>
+              <a:defRPr sz="2000"/>
+            </a:pPr>
+          </a:p>
+          <a:p>
+            <a:pPr>
+              <a:lnSpc>
+                <a:spcPct val="85000"/>
+              </a:lnSpc>
+              <a:spcBef>
+                <a:spcPts val="200"/>
+              </a:spcBef>
+              <a:spcAft>
+                <a:spcPts val="200"/>
               </a:spcAft>
               <a:defRPr sz="2000" b="1"/>
             </a:pPr>
@@ -12800,10 +13867,19 @@
         </p:nvSpPr>
         <p:spPr/>
         <p:txBody>
-          <a:bodyPr wrap="square"/>
+          <a:bodyPr wrap="square" tIns="25400" bIns="25400" lIns="63500" rIns="63500"/>
           <a:lstStyle/>
           <a:p>
             <a:pPr>
+              <a:lnSpc>
+                <a:spcPct val="85000"/>
+              </a:lnSpc>
+              <a:spcBef>
+                <a:spcPts val="200"/>
+              </a:spcBef>
+              <a:spcAft>
+                <a:spcPts val="200"/>
+              </a:spcAft>
               <a:defRPr sz="4000" b="1">
                 <a:solidFill>
                   <a:srgbClr val="667EEA"/>
@@ -12811,6 +13887,7 @@
               </a:defRPr>
             </a:pPr>
             <a:r>
+              <a:rPr/>
               <a:t>🌐 Domain (Alan Adı) Nedir?</a:t>
             </a:r>
           </a:p>
@@ -12850,7 +13927,7 @@
           <a:noFill/>
         </p:spPr>
         <p:txBody>
-          <a:bodyPr wrap="square">
+          <a:bodyPr wrap="square" tIns="25400" bIns="25400" lIns="63500" rIns="63500">
             <a:spAutoFit/>
           </a:bodyPr>
           <a:lstStyle/>
@@ -12867,6 +13944,24 @@
           <a:p>
             <a:pPr>
               <a:lnSpc>
+                <a:spcPct val="85000"/>
+              </a:lnSpc>
+              <a:spcBef>
+                <a:spcPts val="200"/>
+              </a:spcBef>
+              <a:spcAft>
+                <a:spcPts val="200"/>
+              </a:spcAft>
+              <a:defRPr sz="2000"/>
+            </a:pPr>
+            <a:r>
+              <a:rPr sz="1300"/>
+              <a:t>Domain = Web sitesinin kolay hatırlanan ismi</a:t>
+            </a:r>
+          </a:p>
+          <a:p>
+            <a:pPr>
+              <a:lnSpc>
                 <a:spcPct val="90000"/>
               </a:lnSpc>
               <a:spcAft>
@@ -12874,9 +13969,77 @@
               </a:spcAft>
               <a:defRPr sz="2000"/>
             </a:pPr>
-            <a:r>
-              <a:rPr sz="1300"/>
-              <a:t>Domain = Web sitesinin kolay hatırlanan ismi</a:t>
+          </a:p>
+          <a:p>
+            <a:pPr>
+              <a:lnSpc>
+                <a:spcPct val="85000"/>
+              </a:lnSpc>
+              <a:spcBef>
+                <a:spcPts val="200"/>
+              </a:spcBef>
+              <a:spcAft>
+                <a:spcPts val="200"/>
+              </a:spcAft>
+              <a:defRPr sz="2000" b="1"/>
+            </a:pPr>
+            <a:r>
+              <a:rPr sz="1300"/>
+              <a:t>✅ Örnekler:</a:t>
+            </a:r>
+          </a:p>
+          <a:p>
+            <a:pPr lvl="1">
+              <a:lnSpc>
+                <a:spcPct val="85000"/>
+              </a:lnSpc>
+              <a:spcBef>
+                <a:spcPts val="200"/>
+              </a:spcBef>
+              <a:spcAft>
+                <a:spcPts val="200"/>
+              </a:spcAft>
+              <a:defRPr sz="1800"/>
+            </a:pPr>
+            <a:r>
+              <a:rPr sz="1300"/>
+              <a:t>    • www.google.com</a:t>
+            </a:r>
+          </a:p>
+          <a:p>
+            <a:pPr lvl="1">
+              <a:lnSpc>
+                <a:spcPct val="85000"/>
+              </a:lnSpc>
+              <a:spcBef>
+                <a:spcPts val="200"/>
+              </a:spcBef>
+              <a:spcAft>
+                <a:spcPts val="200"/>
+              </a:spcAft>
+              <a:defRPr sz="1800"/>
+            </a:pPr>
+            <a:r>
+              <a:rPr sz="1300"/>
+              <a:t>    • www.youtube.com</a:t>
+            </a:r>
+          </a:p>
+          <a:p>
+            <a:pPr lvl="1">
+              <a:lnSpc>
+                <a:spcPct val="85000"/>
+              </a:lnSpc>
+              <a:spcBef>
+                <a:spcPts val="200"/>
+              </a:spcBef>
+              <a:spcAft>
+                <a:spcPts val="200"/>
+              </a:spcAft>
+              <a:defRPr sz="1800"/>
+            </a:pPr>
+            <a:r>
+              <a:rPr sz="1300"/>
+              <a:t>    • www.meb.gov.tr</a:t>
             </a:r>
           </a:p>
           <a:p>
@@ -12893,309 +14056,280 @@
           <a:p>
             <a:pPr>
               <a:lnSpc>
+                <a:spcPct val="85000"/>
+              </a:lnSpc>
+              <a:spcBef>
+                <a:spcPts val="200"/>
+              </a:spcBef>
+              <a:spcAft>
+                <a:spcPts val="200"/>
+              </a:spcAft>
+              <a:defRPr sz="2000" b="1"/>
+            </a:pPr>
+            <a:r>
+              <a:rPr sz="1300"/>
+              <a:t>📌 Domain vs IP:</a:t>
+            </a:r>
+          </a:p>
+          <a:p>
+            <a:pPr lvl="1">
+              <a:lnSpc>
+                <a:spcPct val="85000"/>
+              </a:lnSpc>
+              <a:spcBef>
+                <a:spcPts val="200"/>
+              </a:spcBef>
+              <a:spcAft>
+                <a:spcPts val="200"/>
+              </a:spcAft>
+              <a:defRPr sz="1800"/>
+            </a:pPr>
+            <a:r>
+              <a:rPr sz="1300"/>
+              <a:t>    • IP: 172.217.16.142 (zor hatırlanır)</a:t>
+            </a:r>
+          </a:p>
+          <a:p>
+            <a:pPr lvl="1">
+              <a:lnSpc>
+                <a:spcPct val="85000"/>
+              </a:lnSpc>
+              <a:spcBef>
+                <a:spcPts val="200"/>
+              </a:spcBef>
+              <a:spcAft>
+                <a:spcPts val="200"/>
+              </a:spcAft>
+              <a:defRPr sz="1800"/>
+            </a:pPr>
+            <a:r>
+              <a:rPr sz="1300"/>
+              <a:t>    • Domain: google.com (kolay hatırlanır)</a:t>
+            </a:r>
+          </a:p>
+          <a:p>
+            <a:pPr>
+              <a:lnSpc>
                 <a:spcPct val="90000"/>
               </a:lnSpc>
               <a:spcAft>
                 <a:spcPts val="300"/>
               </a:spcAft>
+              <a:defRPr sz="2000"/>
+            </a:pPr>
+          </a:p>
+          <a:p>
+            <a:pPr>
+              <a:lnSpc>
+                <a:spcPct val="85000"/>
+              </a:lnSpc>
+              <a:spcBef>
+                <a:spcPts val="200"/>
+              </a:spcBef>
+              <a:spcAft>
+                <a:spcPts val="200"/>
+              </a:spcAft>
               <a:defRPr sz="2000" b="1"/>
             </a:pPr>
             <a:r>
               <a:rPr sz="1300"/>
-              <a:t>✅ Örnekler:</a:t>
-            </a:r>
-          </a:p>
-          <a:p>
-            <a:pPr lvl="1">
+              <a:t>💡 Analoji:</a:t>
+            </a:r>
+          </a:p>
+          <a:p>
+            <a:pPr lvl="1">
+              <a:lnSpc>
+                <a:spcPct val="85000"/>
+              </a:lnSpc>
+              <a:spcBef>
+                <a:spcPts val="200"/>
+              </a:spcBef>
+              <a:spcAft>
+                <a:spcPts val="200"/>
+              </a:spcAft>
+              <a:defRPr sz="1800"/>
+            </a:pPr>
+            <a:r>
+              <a:rPr sz="1300"/>
+              <a:t>    • IP Adresi = Telefon numarası (555-123-4567)</a:t>
+            </a:r>
+          </a:p>
+          <a:p>
+            <a:pPr lvl="1">
+              <a:lnSpc>
+                <a:spcPct val="85000"/>
+              </a:lnSpc>
+              <a:spcBef>
+                <a:spcPts val="200"/>
+              </a:spcBef>
+              <a:spcAft>
+                <a:spcPts val="200"/>
+              </a:spcAft>
+              <a:defRPr sz="1800"/>
+            </a:pPr>
+            <a:r>
+              <a:rPr sz="1300"/>
+              <a:t>    • Domain = Kişi adı (Ahmet)</a:t>
+            </a:r>
+          </a:p>
+          <a:p>
+            <a:pPr>
+              <a:lnSpc>
+                <a:spcPct val="85000"/>
+              </a:lnSpc>
+              <a:spcBef>
+                <a:spcPts val="200"/>
+              </a:spcBef>
+              <a:spcAft>
+                <a:spcPts val="200"/>
+              </a:spcAft>
+              <a:defRPr sz="2000"/>
+            </a:pPr>
+            <a:r>
+              <a:rPr sz="1300"/>
+              <a:t>Hangi kolayca hatırlarsın?</a:t>
+            </a:r>
+          </a:p>
+          <a:p>
+            <a:pPr>
               <a:lnSpc>
                 <a:spcPct val="90000"/>
               </a:lnSpc>
               <a:spcAft>
                 <a:spcPts val="300"/>
               </a:spcAft>
-              <a:defRPr sz="1800"/>
-            </a:pPr>
-            <a:r>
-              <a:rPr sz="1300"/>
-              <a:t>    • www.google.com</a:t>
-            </a:r>
-          </a:p>
-          <a:p>
-            <a:pPr lvl="1">
+              <a:defRPr sz="2000"/>
+            </a:pPr>
+          </a:p>
+          <a:p>
+            <a:pPr>
+              <a:lnSpc>
+                <a:spcPct val="85000"/>
+              </a:lnSpc>
+              <a:spcBef>
+                <a:spcPts val="200"/>
+              </a:spcBef>
+              <a:spcAft>
+                <a:spcPts val="200"/>
+              </a:spcAft>
+              <a:defRPr sz="2000"/>
+            </a:pPr>
+            <a:r>
+              <a:rPr sz="1300"/>
+              <a:t>🔍 Domain Yapısı:</a:t>
+            </a:r>
+          </a:p>
+          <a:p>
+            <a:pPr>
+              <a:lnSpc>
+                <a:spcPct val="85000"/>
+              </a:lnSpc>
+              <a:spcBef>
+                <a:spcPts val="200"/>
+              </a:spcBef>
+              <a:spcAft>
+                <a:spcPts val="200"/>
+              </a:spcAft>
+              <a:defRPr sz="2000"/>
+            </a:pPr>
+            <a:r>
+              <a:rPr sz="1300"/>
+              <a:t>www.meb.gov.tr</a:t>
+            </a:r>
+          </a:p>
+          <a:p>
+            <a:pPr lvl="1">
+              <a:lnSpc>
+                <a:spcPct val="85000"/>
+              </a:lnSpc>
+              <a:spcBef>
+                <a:spcPts val="200"/>
+              </a:spcBef>
+              <a:spcAft>
+                <a:spcPts val="200"/>
+              </a:spcAft>
+              <a:defRPr sz="1800"/>
+            </a:pPr>
+            <a:r>
+              <a:rPr sz="1300"/>
+              <a:t>    • meb = site adı</a:t>
+            </a:r>
+          </a:p>
+          <a:p>
+            <a:pPr lvl="1">
+              <a:lnSpc>
+                <a:spcPct val="85000"/>
+              </a:lnSpc>
+              <a:spcBef>
+                <a:spcPts val="200"/>
+              </a:spcBef>
+              <a:spcAft>
+                <a:spcPts val="200"/>
+              </a:spcAft>
+              <a:defRPr sz="1800"/>
+            </a:pPr>
+            <a:r>
+              <a:rPr sz="1300"/>
+              <a:t>    • gov = hükümet sitesi</a:t>
+            </a:r>
+          </a:p>
+          <a:p>
+            <a:pPr lvl="1">
+              <a:lnSpc>
+                <a:spcPct val="85000"/>
+              </a:lnSpc>
+              <a:spcBef>
+                <a:spcPts val="200"/>
+              </a:spcBef>
+              <a:spcAft>
+                <a:spcPts val="200"/>
+              </a:spcAft>
+              <a:defRPr sz="1800"/>
+            </a:pPr>
+            <a:r>
+              <a:rPr sz="1300"/>
+              <a:t>    • tr = Türkiye</a:t>
+            </a:r>
+          </a:p>
+          <a:p>
+            <a:pPr>
               <a:lnSpc>
                 <a:spcPct val="90000"/>
               </a:lnSpc>
               <a:spcAft>
                 <a:spcPts val="300"/>
               </a:spcAft>
-              <a:defRPr sz="1800"/>
-            </a:pPr>
-            <a:r>
-              <a:rPr sz="1300"/>
-              <a:t>    • www.youtube.com</a:t>
-            </a:r>
-          </a:p>
-          <a:p>
-            <a:pPr lvl="1">
-              <a:lnSpc>
-                <a:spcPct val="90000"/>
-              </a:lnSpc>
-              <a:spcAft>
-                <a:spcPts val="300"/>
-              </a:spcAft>
-              <a:defRPr sz="1800"/>
-            </a:pPr>
-            <a:r>
-              <a:rPr sz="1300"/>
-              <a:t>    • www.meb.gov.tr</a:t>
-            </a:r>
-          </a:p>
-          <a:p>
-            <a:pPr>
-              <a:lnSpc>
-                <a:spcPct val="90000"/>
-              </a:lnSpc>
-              <a:spcAft>
-                <a:spcPts val="300"/>
-              </a:spcAft>
-              <a:defRPr sz="2000"/>
-            </a:pPr>
-          </a:p>
-          <a:p>
-            <a:pPr>
-              <a:lnSpc>
-                <a:spcPct val="90000"/>
-              </a:lnSpc>
-              <a:spcAft>
-                <a:spcPts val="300"/>
+              <a:defRPr sz="2000"/>
+            </a:pPr>
+          </a:p>
+          <a:p>
+            <a:pPr>
+              <a:lnSpc>
+                <a:spcPct val="85000"/>
+              </a:lnSpc>
+              <a:spcBef>
+                <a:spcPts val="200"/>
+              </a:spcBef>
+              <a:spcAft>
+                <a:spcPts val="200"/>
               </a:spcAft>
               <a:defRPr sz="2000" b="1"/>
             </a:pPr>
             <a:r>
               <a:rPr sz="1300"/>
-              <a:t>📌 Domain vs IP:</a:t>
-            </a:r>
-          </a:p>
-          <a:p>
-            <a:pPr lvl="1">
-              <a:lnSpc>
-                <a:spcPct val="90000"/>
-              </a:lnSpc>
-              <a:spcAft>
-                <a:spcPts val="300"/>
-              </a:spcAft>
-              <a:defRPr sz="1800"/>
-            </a:pPr>
-            <a:r>
-              <a:rPr sz="1300"/>
-              <a:t>    • IP: 172.217.16.142 (zor hatırlanır)</a:t>
-            </a:r>
-          </a:p>
-          <a:p>
-            <a:pPr lvl="1">
-              <a:lnSpc>
-                <a:spcPct val="90000"/>
-              </a:lnSpc>
-              <a:spcAft>
-                <a:spcPts val="300"/>
-              </a:spcAft>
-              <a:defRPr sz="1800"/>
-            </a:pPr>
-            <a:r>
-              <a:rPr sz="1300"/>
-              <a:t>    • Domain: google.com (kolay hatırlanır)</a:t>
-            </a:r>
-          </a:p>
-          <a:p>
-            <a:pPr>
-              <a:lnSpc>
-                <a:spcPct val="90000"/>
-              </a:lnSpc>
-              <a:spcAft>
-                <a:spcPts val="300"/>
-              </a:spcAft>
-              <a:defRPr sz="2000"/>
-            </a:pPr>
-          </a:p>
-          <a:p>
-            <a:pPr>
-              <a:lnSpc>
-                <a:spcPct val="90000"/>
-              </a:lnSpc>
-              <a:spcAft>
-                <a:spcPts val="300"/>
-              </a:spcAft>
-              <a:defRPr sz="2000" b="1"/>
-            </a:pPr>
-            <a:r>
-              <a:rPr sz="1300"/>
-              <a:t>💡 Analoji:</a:t>
-            </a:r>
-          </a:p>
-          <a:p>
-            <a:pPr lvl="1">
-              <a:lnSpc>
-                <a:spcPct val="90000"/>
-              </a:lnSpc>
-              <a:spcAft>
-                <a:spcPts val="300"/>
-              </a:spcAft>
-              <a:defRPr sz="1800"/>
-            </a:pPr>
-            <a:r>
-              <a:rPr sz="1300"/>
-              <a:t>    • IP Adresi = Telefon numarası (555-123-4567)</a:t>
-            </a:r>
-          </a:p>
-          <a:p>
-            <a:pPr lvl="1">
-              <a:lnSpc>
-                <a:spcPct val="90000"/>
-              </a:lnSpc>
-              <a:spcAft>
-                <a:spcPts val="300"/>
-              </a:spcAft>
-              <a:defRPr sz="1800"/>
-            </a:pPr>
-            <a:r>
-              <a:rPr sz="1300"/>
-              <a:t>    • Domain = Kişi adı (Ahmet)</a:t>
-            </a:r>
-          </a:p>
-          <a:p>
-            <a:pPr>
-              <a:lnSpc>
-                <a:spcPct val="90000"/>
-              </a:lnSpc>
-              <a:spcAft>
-                <a:spcPts val="300"/>
-              </a:spcAft>
-              <a:defRPr sz="2000"/>
-            </a:pPr>
-            <a:r>
-              <a:rPr sz="1300"/>
-              <a:t>Hangi kolayca hatırlarsın?</a:t>
-            </a:r>
-          </a:p>
-          <a:p>
-            <a:pPr>
-              <a:lnSpc>
-                <a:spcPct val="90000"/>
-              </a:lnSpc>
-              <a:spcAft>
-                <a:spcPts val="300"/>
-              </a:spcAft>
-              <a:defRPr sz="2000"/>
-            </a:pPr>
-          </a:p>
-          <a:p>
-            <a:pPr>
-              <a:lnSpc>
-                <a:spcPct val="90000"/>
-              </a:lnSpc>
-              <a:spcAft>
-                <a:spcPts val="300"/>
-              </a:spcAft>
-              <a:defRPr sz="2000"/>
-            </a:pPr>
-            <a:r>
-              <a:rPr sz="1300"/>
-              <a:t>🔍 Domain Yapısı:</a:t>
-            </a:r>
-          </a:p>
-          <a:p>
-            <a:pPr>
-              <a:lnSpc>
-                <a:spcPct val="90000"/>
-              </a:lnSpc>
-              <a:spcAft>
-                <a:spcPts val="300"/>
-              </a:spcAft>
-              <a:defRPr sz="2000"/>
-            </a:pPr>
-            <a:r>
-              <a:rPr sz="1300"/>
-              <a:t>www.meb.gov.tr</a:t>
-            </a:r>
-          </a:p>
-          <a:p>
-            <a:pPr lvl="1">
-              <a:lnSpc>
-                <a:spcPct val="90000"/>
-              </a:lnSpc>
-              <a:spcAft>
-                <a:spcPts val="300"/>
-              </a:spcAft>
-              <a:defRPr sz="1800"/>
-            </a:pPr>
-            <a:r>
-              <a:rPr sz="1300"/>
-              <a:t>    • meb = site adı</a:t>
-            </a:r>
-          </a:p>
-          <a:p>
-            <a:pPr lvl="1">
-              <a:lnSpc>
-                <a:spcPct val="90000"/>
-              </a:lnSpc>
-              <a:spcAft>
-                <a:spcPts val="300"/>
-              </a:spcAft>
-              <a:defRPr sz="1800"/>
-            </a:pPr>
-            <a:r>
-              <a:rPr sz="1300"/>
-              <a:t>    • gov = hükümet sitesi</a:t>
-            </a:r>
-          </a:p>
-          <a:p>
-            <a:pPr lvl="1">
-              <a:lnSpc>
-                <a:spcPct val="90000"/>
-              </a:lnSpc>
-              <a:spcAft>
-                <a:spcPts val="300"/>
-              </a:spcAft>
-              <a:defRPr sz="1800"/>
-            </a:pPr>
-            <a:r>
-              <a:rPr sz="1300"/>
-              <a:t>    • tr = Türkiye</a:t>
-            </a:r>
-          </a:p>
-          <a:p>
-            <a:pPr>
-              <a:lnSpc>
-                <a:spcPct val="90000"/>
-              </a:lnSpc>
-              <a:spcAft>
-                <a:spcPts val="300"/>
-              </a:spcAft>
-              <a:defRPr sz="2000"/>
-            </a:pPr>
-          </a:p>
-          <a:p>
-            <a:pPr>
-              <a:lnSpc>
-                <a:spcPct val="90000"/>
-              </a:lnSpc>
-              <a:spcAft>
-                <a:spcPts val="300"/>
-              </a:spcAft>
-              <a:defRPr sz="2000" b="1"/>
-            </a:pPr>
-            <a:r>
-              <a:rPr sz="1300"/>
               <a:t>📌 Domain Uzantıları:</a:t>
             </a:r>
           </a:p>
           <a:p>
             <a:pPr lvl="1">
               <a:lnSpc>
-                <a:spcPct val="90000"/>
-              </a:lnSpc>
-              <a:spcAft>
-                <a:spcPts val="300"/>
+                <a:spcPct val="85000"/>
+              </a:lnSpc>
+              <a:spcBef>
+                <a:spcPts val="200"/>
+              </a:spcBef>
+              <a:spcAft>
+                <a:spcPts val="200"/>
               </a:spcAft>
               <a:defRPr sz="1800"/>
             </a:pPr>
@@ -13207,10 +14341,13 @@
           <a:p>
             <a:pPr lvl="1">
               <a:lnSpc>
-                <a:spcPct val="90000"/>
-              </a:lnSpc>
-              <a:spcAft>
-                <a:spcPts val="300"/>
+                <a:spcPct val="85000"/>
+              </a:lnSpc>
+              <a:spcBef>
+                <a:spcPts val="200"/>
+              </a:spcBef>
+              <a:spcAft>
+                <a:spcPts val="200"/>
               </a:spcAft>
               <a:defRPr sz="1800"/>
             </a:pPr>
@@ -13222,10 +14359,13 @@
           <a:p>
             <a:pPr lvl="1">
               <a:lnSpc>
-                <a:spcPct val="90000"/>
-              </a:lnSpc>
-              <a:spcAft>
-                <a:spcPts val="300"/>
+                <a:spcPct val="85000"/>
+              </a:lnSpc>
+              <a:spcBef>
+                <a:spcPts val="200"/>
+              </a:spcBef>
+              <a:spcAft>
+                <a:spcPts val="200"/>
               </a:spcAft>
               <a:defRPr sz="1800"/>
             </a:pPr>
@@ -13237,10 +14377,13 @@
           <a:p>
             <a:pPr lvl="1">
               <a:lnSpc>
-                <a:spcPct val="90000"/>
-              </a:lnSpc>
-              <a:spcAft>
-                <a:spcPts val="300"/>
+                <a:spcPct val="85000"/>
+              </a:lnSpc>
+              <a:spcBef>
+                <a:spcPts val="200"/>
+              </a:spcBef>
+              <a:spcAft>
+                <a:spcPts val="200"/>
               </a:spcAft>
               <a:defRPr sz="1800"/>
             </a:pPr>
@@ -13281,10 +14424,19 @@
         </p:nvSpPr>
         <p:spPr/>
         <p:txBody>
-          <a:bodyPr wrap="square"/>
+          <a:bodyPr wrap="square" tIns="25400" bIns="25400" lIns="63500" rIns="63500"/>
           <a:lstStyle/>
           <a:p>
             <a:pPr>
+              <a:lnSpc>
+                <a:spcPct val="85000"/>
+              </a:lnSpc>
+              <a:spcBef>
+                <a:spcPts val="200"/>
+              </a:spcBef>
+              <a:spcAft>
+                <a:spcPts val="200"/>
+              </a:spcAft>
               <a:defRPr sz="4000" b="1">
                 <a:solidFill>
                   <a:srgbClr val="667EEA"/>
@@ -13292,6 +14444,7 @@
               </a:defRPr>
             </a:pPr>
             <a:r>
+              <a:rPr/>
               <a:t>🌐 İnternet Tarayıcıları</a:t>
             </a:r>
           </a:p>
@@ -13331,7 +14484,7 @@
           <a:noFill/>
         </p:spPr>
         <p:txBody>
-          <a:bodyPr wrap="square">
+          <a:bodyPr wrap="square" tIns="25400" bIns="25400" lIns="63500" rIns="63500">
             <a:spAutoFit/>
           </a:bodyPr>
           <a:lstStyle/>
@@ -13348,6 +14501,24 @@
           <a:p>
             <a:pPr>
               <a:lnSpc>
+                <a:spcPct val="85000"/>
+              </a:lnSpc>
+              <a:spcBef>
+                <a:spcPts val="200"/>
+              </a:spcBef>
+              <a:spcAft>
+                <a:spcPts val="200"/>
+              </a:spcAft>
+              <a:defRPr sz="2000"/>
+            </a:pPr>
+            <a:r>
+              <a:rPr sz="1300"/>
+              <a:t>Tarayıcı = İnternet'te gezinmek için kullanılan program</a:t>
+            </a:r>
+          </a:p>
+          <a:p>
+            <a:pPr>
+              <a:lnSpc>
                 <a:spcPct val="90000"/>
               </a:lnSpc>
               <a:spcAft>
@@ -13355,9 +14526,113 @@
               </a:spcAft>
               <a:defRPr sz="2000"/>
             </a:pPr>
-            <a:r>
-              <a:rPr sz="1300"/>
-              <a:t>Tarayıcı = İnternet'te gezinmek için kullanılan program</a:t>
+          </a:p>
+          <a:p>
+            <a:pPr>
+              <a:lnSpc>
+                <a:spcPct val="85000"/>
+              </a:lnSpc>
+              <a:spcBef>
+                <a:spcPts val="200"/>
+              </a:spcBef>
+              <a:spcAft>
+                <a:spcPts val="200"/>
+              </a:spcAft>
+              <a:defRPr sz="2000" b="1"/>
+            </a:pPr>
+            <a:r>
+              <a:rPr sz="1300"/>
+              <a:t>✅ Popüler Tarayıcılar:</a:t>
+            </a:r>
+          </a:p>
+          <a:p>
+            <a:pPr lvl="1">
+              <a:lnSpc>
+                <a:spcPct val="85000"/>
+              </a:lnSpc>
+              <a:spcBef>
+                <a:spcPts val="200"/>
+              </a:spcBef>
+              <a:spcAft>
+                <a:spcPts val="200"/>
+              </a:spcAft>
+              <a:defRPr sz="1800"/>
+            </a:pPr>
+            <a:r>
+              <a:rPr sz="1300"/>
+              <a:t>    • Google Chrome 🔵</a:t>
+            </a:r>
+          </a:p>
+          <a:p>
+            <a:pPr lvl="1">
+              <a:lnSpc>
+                <a:spcPct val="85000"/>
+              </a:lnSpc>
+              <a:spcBef>
+                <a:spcPts val="200"/>
+              </a:spcBef>
+              <a:spcAft>
+                <a:spcPts val="200"/>
+              </a:spcAft>
+              <a:defRPr sz="1800"/>
+            </a:pPr>
+            <a:r>
+              <a:rPr sz="1300"/>
+              <a:t>    • Microsoft Edge 🔷</a:t>
+            </a:r>
+          </a:p>
+          <a:p>
+            <a:pPr lvl="1">
+              <a:lnSpc>
+                <a:spcPct val="85000"/>
+              </a:lnSpc>
+              <a:spcBef>
+                <a:spcPts val="200"/>
+              </a:spcBef>
+              <a:spcAft>
+                <a:spcPts val="200"/>
+              </a:spcAft>
+              <a:defRPr sz="1800"/>
+            </a:pPr>
+            <a:r>
+              <a:rPr sz="1300"/>
+              <a:t>    • Mozilla Firefox 🦊</a:t>
+            </a:r>
+          </a:p>
+          <a:p>
+            <a:pPr lvl="1">
+              <a:lnSpc>
+                <a:spcPct val="85000"/>
+              </a:lnSpc>
+              <a:spcBef>
+                <a:spcPts val="200"/>
+              </a:spcBef>
+              <a:spcAft>
+                <a:spcPts val="200"/>
+              </a:spcAft>
+              <a:defRPr sz="1800"/>
+            </a:pPr>
+            <a:r>
+              <a:rPr sz="1300"/>
+              <a:t>    • Safari 🧭 (Apple cihazlar)</a:t>
+            </a:r>
+          </a:p>
+          <a:p>
+            <a:pPr lvl="1">
+              <a:lnSpc>
+                <a:spcPct val="85000"/>
+              </a:lnSpc>
+              <a:spcBef>
+                <a:spcPts val="200"/>
+              </a:spcBef>
+              <a:spcAft>
+                <a:spcPts val="200"/>
+              </a:spcAft>
+              <a:defRPr sz="1800"/>
+            </a:pPr>
+            <a:r>
+              <a:rPr sz="1300"/>
+              <a:t>    • Opera</a:t>
             </a:r>
           </a:p>
           <a:p>
@@ -13374,313 +14649,251 @@
           <a:p>
             <a:pPr>
               <a:lnSpc>
+                <a:spcPct val="85000"/>
+              </a:lnSpc>
+              <a:spcBef>
+                <a:spcPts val="200"/>
+              </a:spcBef>
+              <a:spcAft>
+                <a:spcPts val="200"/>
+              </a:spcAft>
+              <a:defRPr sz="2000" b="1"/>
+            </a:pPr>
+            <a:r>
+              <a:rPr sz="1300"/>
+              <a:t>📌 Tarayıcılar Ne İşe Yarar?</a:t>
+            </a:r>
+          </a:p>
+          <a:p>
+            <a:pPr lvl="1">
+              <a:lnSpc>
+                <a:spcPct val="85000"/>
+              </a:lnSpc>
+              <a:spcBef>
+                <a:spcPts val="200"/>
+              </a:spcBef>
+              <a:spcAft>
+                <a:spcPts val="200"/>
+              </a:spcAft>
+              <a:defRPr sz="1800"/>
+            </a:pPr>
+            <a:r>
+              <a:rPr sz="1300"/>
+              <a:t>    • Web sitelerini açar</a:t>
+            </a:r>
+          </a:p>
+          <a:p>
+            <a:pPr lvl="1">
+              <a:lnSpc>
+                <a:spcPct val="85000"/>
+              </a:lnSpc>
+              <a:spcBef>
+                <a:spcPts val="200"/>
+              </a:spcBef>
+              <a:spcAft>
+                <a:spcPts val="200"/>
+              </a:spcAft>
+              <a:defRPr sz="1800"/>
+            </a:pPr>
+            <a:r>
+              <a:rPr sz="1300"/>
+              <a:t>    • Videoları oynatır</a:t>
+            </a:r>
+          </a:p>
+          <a:p>
+            <a:pPr lvl="1">
+              <a:lnSpc>
+                <a:spcPct val="85000"/>
+              </a:lnSpc>
+              <a:spcBef>
+                <a:spcPts val="200"/>
+              </a:spcBef>
+              <a:spcAft>
+                <a:spcPts val="200"/>
+              </a:spcAft>
+              <a:defRPr sz="1800"/>
+            </a:pPr>
+            <a:r>
+              <a:rPr sz="1300"/>
+              <a:t>    • Dosya indirir</a:t>
+            </a:r>
+          </a:p>
+          <a:p>
+            <a:pPr lvl="1">
+              <a:lnSpc>
+                <a:spcPct val="85000"/>
+              </a:lnSpc>
+              <a:spcBef>
+                <a:spcPts val="200"/>
+              </a:spcBef>
+              <a:spcAft>
+                <a:spcPts val="200"/>
+              </a:spcAft>
+              <a:defRPr sz="1800"/>
+            </a:pPr>
+            <a:r>
+              <a:rPr sz="1300"/>
+              <a:t>    • Favorilere site ekler</a:t>
+            </a:r>
+          </a:p>
+          <a:p>
+            <a:pPr lvl="1">
+              <a:lnSpc>
+                <a:spcPct val="85000"/>
+              </a:lnSpc>
+              <a:spcBef>
+                <a:spcPts val="200"/>
+              </a:spcBef>
+              <a:spcAft>
+                <a:spcPts val="200"/>
+              </a:spcAft>
+              <a:defRPr sz="1800"/>
+            </a:pPr>
+            <a:r>
+              <a:rPr sz="1300"/>
+              <a:t>    • Gezinme geçmişini saklar</a:t>
+            </a:r>
+          </a:p>
+          <a:p>
+            <a:pPr>
+              <a:lnSpc>
                 <a:spcPct val="90000"/>
               </a:lnSpc>
               <a:spcAft>
                 <a:spcPts val="300"/>
               </a:spcAft>
+              <a:defRPr sz="2000"/>
+            </a:pPr>
+          </a:p>
+          <a:p>
+            <a:pPr>
+              <a:lnSpc>
+                <a:spcPct val="85000"/>
+              </a:lnSpc>
+              <a:spcBef>
+                <a:spcPts val="200"/>
+              </a:spcBef>
+              <a:spcAft>
+                <a:spcPts val="200"/>
+              </a:spcAft>
               <a:defRPr sz="2000" b="1"/>
             </a:pPr>
             <a:r>
               <a:rPr sz="1300"/>
-              <a:t>✅ Popüler Tarayıcılar:</a:t>
-            </a:r>
-          </a:p>
-          <a:p>
-            <a:pPr lvl="1">
+              <a:t>💡 Tarayıcı Bölümleri:</a:t>
+            </a:r>
+          </a:p>
+          <a:p>
+            <a:pPr lvl="1">
+              <a:lnSpc>
+                <a:spcPct val="85000"/>
+              </a:lnSpc>
+              <a:spcBef>
+                <a:spcPts val="200"/>
+              </a:spcBef>
+              <a:spcAft>
+                <a:spcPts val="200"/>
+              </a:spcAft>
+              <a:defRPr sz="1800"/>
+            </a:pPr>
+            <a:r>
+              <a:rPr sz="1300"/>
+              <a:t>    • Adres çubuğu (URL yazılır)</a:t>
+            </a:r>
+          </a:p>
+          <a:p>
+            <a:pPr lvl="1">
+              <a:lnSpc>
+                <a:spcPct val="85000"/>
+              </a:lnSpc>
+              <a:spcBef>
+                <a:spcPts val="200"/>
+              </a:spcBef>
+              <a:spcAft>
+                <a:spcPts val="200"/>
+              </a:spcAft>
+              <a:defRPr sz="1800"/>
+            </a:pPr>
+            <a:r>
+              <a:rPr sz="1300"/>
+              <a:t>    • Geri/İleri butonları</a:t>
+            </a:r>
+          </a:p>
+          <a:p>
+            <a:pPr lvl="1">
+              <a:lnSpc>
+                <a:spcPct val="85000"/>
+              </a:lnSpc>
+              <a:spcBef>
+                <a:spcPts val="200"/>
+              </a:spcBef>
+              <a:spcAft>
+                <a:spcPts val="200"/>
+              </a:spcAft>
+              <a:defRPr sz="1800"/>
+            </a:pPr>
+            <a:r>
+              <a:rPr sz="1300"/>
+              <a:t>    • Yenile butonu</a:t>
+            </a:r>
+          </a:p>
+          <a:p>
+            <a:pPr lvl="1">
+              <a:lnSpc>
+                <a:spcPct val="85000"/>
+              </a:lnSpc>
+              <a:spcBef>
+                <a:spcPts val="200"/>
+              </a:spcBef>
+              <a:spcAft>
+                <a:spcPts val="200"/>
+              </a:spcAft>
+              <a:defRPr sz="1800"/>
+            </a:pPr>
+            <a:r>
+              <a:rPr sz="1300"/>
+              <a:t>    • Sekmeler (Tab)</a:t>
+            </a:r>
+          </a:p>
+          <a:p>
+            <a:pPr lvl="1">
+              <a:lnSpc>
+                <a:spcPct val="85000"/>
+              </a:lnSpc>
+              <a:spcBef>
+                <a:spcPts val="200"/>
+              </a:spcBef>
+              <a:spcAft>
+                <a:spcPts val="200"/>
+              </a:spcAft>
+              <a:defRPr sz="1800"/>
+            </a:pPr>
+            <a:r>
+              <a:rPr sz="1300"/>
+              <a:t>    • Favoriler/Yer imleri</a:t>
+            </a:r>
+          </a:p>
+          <a:p>
+            <a:pPr>
               <a:lnSpc>
                 <a:spcPct val="90000"/>
               </a:lnSpc>
               <a:spcAft>
                 <a:spcPts val="300"/>
               </a:spcAft>
-              <a:defRPr sz="1800"/>
-            </a:pPr>
-            <a:r>
-              <a:rPr sz="1300"/>
-              <a:t>    • Google Chrome 🔵</a:t>
-            </a:r>
-          </a:p>
-          <a:p>
-            <a:pPr lvl="1">
-              <a:lnSpc>
-                <a:spcPct val="90000"/>
-              </a:lnSpc>
-              <a:spcAft>
-                <a:spcPts val="300"/>
-              </a:spcAft>
-              <a:defRPr sz="1800"/>
-            </a:pPr>
-            <a:r>
-              <a:rPr sz="1300"/>
-              <a:t>    • Microsoft Edge 🔷</a:t>
-            </a:r>
-          </a:p>
-          <a:p>
-            <a:pPr lvl="1">
-              <a:lnSpc>
-                <a:spcPct val="90000"/>
-              </a:lnSpc>
-              <a:spcAft>
-                <a:spcPts val="300"/>
-              </a:spcAft>
-              <a:defRPr sz="1800"/>
-            </a:pPr>
-            <a:r>
-              <a:rPr sz="1300"/>
-              <a:t>    • Mozilla Firefox 🦊</a:t>
-            </a:r>
-          </a:p>
-          <a:p>
-            <a:pPr lvl="1">
-              <a:lnSpc>
-                <a:spcPct val="90000"/>
-              </a:lnSpc>
-              <a:spcAft>
-                <a:spcPts val="300"/>
-              </a:spcAft>
-              <a:defRPr sz="1800"/>
-            </a:pPr>
-            <a:r>
-              <a:rPr sz="1300"/>
-              <a:t>    • Safari 🧭 (Apple cihazlar)</a:t>
-            </a:r>
-          </a:p>
-          <a:p>
-            <a:pPr lvl="1">
-              <a:lnSpc>
-                <a:spcPct val="90000"/>
-              </a:lnSpc>
-              <a:spcAft>
-                <a:spcPts val="300"/>
-              </a:spcAft>
-              <a:defRPr sz="1800"/>
-            </a:pPr>
-            <a:r>
-              <a:rPr sz="1300"/>
-              <a:t>    • Opera</a:t>
-            </a:r>
-          </a:p>
-          <a:p>
-            <a:pPr>
-              <a:lnSpc>
-                <a:spcPct val="90000"/>
-              </a:lnSpc>
-              <a:spcAft>
-                <a:spcPts val="300"/>
-              </a:spcAft>
-              <a:defRPr sz="2000"/>
-            </a:pPr>
-          </a:p>
-          <a:p>
-            <a:pPr>
-              <a:lnSpc>
-                <a:spcPct val="90000"/>
-              </a:lnSpc>
-              <a:spcAft>
-                <a:spcPts val="300"/>
-              </a:spcAft>
-              <a:defRPr sz="2000" b="1"/>
-            </a:pPr>
-            <a:r>
-              <a:rPr sz="1300"/>
-              <a:t>📌 Tarayıcılar Ne İşe Yarar?</a:t>
-            </a:r>
-          </a:p>
-          <a:p>
-            <a:pPr lvl="1">
-              <a:lnSpc>
-                <a:spcPct val="90000"/>
-              </a:lnSpc>
-              <a:spcAft>
-                <a:spcPts val="300"/>
-              </a:spcAft>
-              <a:defRPr sz="1800"/>
-            </a:pPr>
-            <a:r>
-              <a:rPr sz="1300"/>
-              <a:t>    • Web sitelerini açar</a:t>
-            </a:r>
-          </a:p>
-          <a:p>
-            <a:pPr lvl="1">
-              <a:lnSpc>
-                <a:spcPct val="90000"/>
-              </a:lnSpc>
-              <a:spcAft>
-                <a:spcPts val="300"/>
-              </a:spcAft>
-              <a:defRPr sz="1800"/>
-            </a:pPr>
-            <a:r>
-              <a:rPr sz="1300"/>
-              <a:t>    • Videoları oynatır</a:t>
-            </a:r>
-          </a:p>
-          <a:p>
-            <a:pPr lvl="1">
-              <a:lnSpc>
-                <a:spcPct val="90000"/>
-              </a:lnSpc>
-              <a:spcAft>
-                <a:spcPts val="300"/>
-              </a:spcAft>
-              <a:defRPr sz="1800"/>
-            </a:pPr>
-            <a:r>
-              <a:rPr sz="1300"/>
-              <a:t>    • Dosya indirir</a:t>
-            </a:r>
-          </a:p>
-          <a:p>
-            <a:pPr lvl="1">
-              <a:lnSpc>
-                <a:spcPct val="90000"/>
-              </a:lnSpc>
-              <a:spcAft>
-                <a:spcPts val="300"/>
-              </a:spcAft>
-              <a:defRPr sz="1800"/>
-            </a:pPr>
-            <a:r>
-              <a:rPr sz="1300"/>
-              <a:t>    • Favorilere site ekler</a:t>
-            </a:r>
-          </a:p>
-          <a:p>
-            <a:pPr lvl="1">
-              <a:lnSpc>
-                <a:spcPct val="90000"/>
-              </a:lnSpc>
-              <a:spcAft>
-                <a:spcPts val="300"/>
-              </a:spcAft>
-              <a:defRPr sz="1800"/>
-            </a:pPr>
-            <a:r>
-              <a:rPr sz="1300"/>
-              <a:t>    • Gezinme geçmişini saklar</a:t>
-            </a:r>
-          </a:p>
-          <a:p>
-            <a:pPr>
-              <a:lnSpc>
-                <a:spcPct val="90000"/>
-              </a:lnSpc>
-              <a:spcAft>
-                <a:spcPts val="300"/>
-              </a:spcAft>
-              <a:defRPr sz="2000"/>
-            </a:pPr>
-          </a:p>
-          <a:p>
-            <a:pPr>
-              <a:lnSpc>
-                <a:spcPct val="90000"/>
-              </a:lnSpc>
-              <a:spcAft>
-                <a:spcPts val="300"/>
-              </a:spcAft>
-              <a:defRPr sz="2000" b="1"/>
-            </a:pPr>
-            <a:r>
-              <a:rPr sz="1300"/>
-              <a:t>💡 Tarayıcı Bölümleri:</a:t>
-            </a:r>
-          </a:p>
-          <a:p>
-            <a:pPr lvl="1">
-              <a:lnSpc>
-                <a:spcPct val="90000"/>
-              </a:lnSpc>
-              <a:spcAft>
-                <a:spcPts val="300"/>
-              </a:spcAft>
-              <a:defRPr sz="1800"/>
-            </a:pPr>
-            <a:r>
-              <a:rPr sz="1300"/>
-              <a:t>    • Adres çubuğu (URL yazılır)</a:t>
-            </a:r>
-          </a:p>
-          <a:p>
-            <a:pPr lvl="1">
-              <a:lnSpc>
-                <a:spcPct val="90000"/>
-              </a:lnSpc>
-              <a:spcAft>
-                <a:spcPts val="300"/>
-              </a:spcAft>
-              <a:defRPr sz="1800"/>
-            </a:pPr>
-            <a:r>
-              <a:rPr sz="1300"/>
-              <a:t>    • Geri/İleri butonları</a:t>
-            </a:r>
-          </a:p>
-          <a:p>
-            <a:pPr lvl="1">
-              <a:lnSpc>
-                <a:spcPct val="90000"/>
-              </a:lnSpc>
-              <a:spcAft>
-                <a:spcPts val="300"/>
-              </a:spcAft>
-              <a:defRPr sz="1800"/>
-            </a:pPr>
-            <a:r>
-              <a:rPr sz="1300"/>
-              <a:t>    • Yenile butonu</a:t>
-            </a:r>
-          </a:p>
-          <a:p>
-            <a:pPr lvl="1">
-              <a:lnSpc>
-                <a:spcPct val="90000"/>
-              </a:lnSpc>
-              <a:spcAft>
-                <a:spcPts val="300"/>
-              </a:spcAft>
-              <a:defRPr sz="1800"/>
-            </a:pPr>
-            <a:r>
-              <a:rPr sz="1300"/>
-              <a:t>    • Sekmeler (Tab)</a:t>
-            </a:r>
-          </a:p>
-          <a:p>
-            <a:pPr lvl="1">
-              <a:lnSpc>
-                <a:spcPct val="90000"/>
-              </a:lnSpc>
-              <a:spcAft>
-                <a:spcPts val="300"/>
-              </a:spcAft>
-              <a:defRPr sz="1800"/>
-            </a:pPr>
-            <a:r>
-              <a:rPr sz="1300"/>
-              <a:t>    • Favoriler/Yer imleri</a:t>
-            </a:r>
-          </a:p>
-          <a:p>
-            <a:pPr>
-              <a:lnSpc>
-                <a:spcPct val="90000"/>
-              </a:lnSpc>
-              <a:spcAft>
-                <a:spcPts val="300"/>
-              </a:spcAft>
-              <a:defRPr sz="2000"/>
-            </a:pPr>
-          </a:p>
-          <a:p>
-            <a:pPr>
-              <a:lnSpc>
-                <a:spcPct val="90000"/>
-              </a:lnSpc>
-              <a:spcAft>
-                <a:spcPts val="300"/>
+              <a:defRPr sz="2000"/>
+            </a:pPr>
+          </a:p>
+          <a:p>
+            <a:pPr>
+              <a:lnSpc>
+                <a:spcPct val="85000"/>
+              </a:lnSpc>
+              <a:spcBef>
+                <a:spcPts val="200"/>
+              </a:spcBef>
+              <a:spcAft>
+                <a:spcPts val="200"/>
               </a:spcAft>
               <a:defRPr sz="2000" b="1"/>
             </a:pPr>
